--- a/decks/tokopedia-analytics.pptx
+++ b/decks/tokopedia-analytics.pptx
@@ -12,9 +12,16 @@
     <p:sldId id="260" r:id="rId6"/>
     <p:sldId id="261" r:id="rId7"/>
     <p:sldId id="262" r:id="rId8"/>
+    <p:sldId id="263" r:id="rId9"/>
+    <p:sldId id="264" r:id="rId10"/>
+    <p:sldId id="265" r:id="rId11"/>
+    <p:sldId id="266" r:id="rId12"/>
+    <p:sldId id="267" r:id="rId13"/>
+    <p:sldId id="268" r:id="rId14"/>
+    <p:sldId id="269" r:id="rId15"/>
   </p:sldIdLst>
   <p:notesMasterIdLst>
-    <p:notesMasterId r:id="rId9"/>
+    <p:notesMasterId r:id="rId16"/>
   </p:notesMasterIdLst>
   <p:sldSz cx="12191695" cy="6858000"/>
   <p:notesSz cx="6858000" cy="12191695"/>
@@ -111,6 +118,1094 @@
     </a:lvl9pPr>
   </p:defaultTextStyle>
 </p:presentation>
+</file>
+
+<file path=ppt/charts/chart25.xml><?xml version="1.0" encoding="utf-8"?>
+<c:chartSpace xmlns:c="http://schemas.openxmlformats.org/drawingml/2006/chart" xmlns:a="http://schemas.openxmlformats.org/drawingml/2006/main" xmlns:r="http://schemas.openxmlformats.org/officeDocument/2006/relationships">
+  <c:date1904 val="0"/>
+  <c:roundedCorners val="1"/>
+  <c:chart>
+    <c:autoTitleDeleted val="1"/>
+    <c:plotArea>
+      <c:layout/>
+      <c:barChart>
+        <c:barDir val="col"/>
+        <c:grouping val="clustered"/>
+        <c:varyColors val="0"/>
+        <c:ser>
+          <c:idx val="0"/>
+          <c:order val="0"/>
+          <c:tx>
+            <c:strRef>
+              <c:f>Sheet1!$B$1</c:f>
+              <c:strCache>
+                <c:ptCount val="1"/>
+                <c:pt idx="0">
+                  <c:v>Share of customers (%)</c:v>
+                </c:pt>
+              </c:strCache>
+            </c:strRef>
+          </c:tx>
+          <c:spPr>
+            <a:solidFill>
+              <a:srgbClr val="3B82F6"/>
+            </a:solidFill>
+            <a:effectLst/>
+          </c:spPr>
+          <c:invertIfNegative val="0"/>
+          <c:dLbls>
+            <c:numFmt formatCode="#,##0" sourceLinked="0"/>
+            <c:txPr>
+              <a:bodyPr/>
+              <a:lstStyle/>
+              <a:p>
+                <a:pPr>
+                  <a:defRPr b="0" i="0" strike="noStrike" sz="1200" u="none">
+                    <a:solidFill>
+                      <a:srgbClr val="000000"/>
+                    </a:solidFill>
+                    <a:latin typeface="Arial"/>
+                  </a:defRPr>
+                </a:pPr>
+              </a:p>
+            </c:txPr>
+            <c:showLegendKey val="0"/>
+            <c:showVal val="0"/>
+            <c:showCatName val="0"/>
+            <c:showSerName val="0"/>
+            <c:showPercent val="0"/>
+            <c:showBubbleSize val="0"/>
+            <c:showLeaderLines val="0"/>
+          </c:dLbls>
+          <c:cat>
+            <c:multiLvlStrRef>
+              <c:f>Sheet1!$A$2:$A$5</c:f>
+              <c:multiLvlStrCache>
+                <c:ptCount val="4"/>
+                <c:lvl>
+                  <c:pt idx="0">
+                    <c:v>Loyal regulars</c:v>
+                  </c:pt>
+                  <c:pt idx="1">
+                    <c:v>Deal hunters</c:v>
+                  </c:pt>
+                  <c:pt idx="2">
+                    <c:v>New explorers</c:v>
+                  </c:pt>
+                  <c:pt idx="3">
+                    <c:v>Dormant drifters</c:v>
+                  </c:pt>
+                </c:lvl>
+              </c:multiLvlStrCache>
+            </c:multiLvlStrRef>
+          </c:cat>
+          <c:val>
+            <c:numRef>
+              <c:f>Sheet1!$B$2:$B$5</c:f>
+              <c:numCache>
+                <c:formatCode>General</c:formatCode>
+                <c:ptCount val="4"/>
+                <c:pt idx="0">
+                  <c:v>22</c:v>
+                </c:pt>
+                <c:pt idx="1">
+                  <c:v>31</c:v>
+                </c:pt>
+                <c:pt idx="2">
+                  <c:v>34</c:v>
+                </c:pt>
+                <c:pt idx="3">
+                  <c:v>13</c:v>
+                </c:pt>
+              </c:numCache>
+            </c:numRef>
+          </c:val>
+        </c:ser>
+        <c:ser>
+          <c:idx val="1"/>
+          <c:order val="1"/>
+          <c:tx>
+            <c:strRef>
+              <c:f>Sheet1!$C$1</c:f>
+              <c:strCache>
+                <c:ptCount val="1"/>
+                <c:pt idx="0">
+                  <c:v>Share of revenue (%)</c:v>
+                </c:pt>
+              </c:strCache>
+            </c:strRef>
+          </c:tx>
+          <c:spPr>
+            <a:solidFill>
+              <a:srgbClr val="06B6D4"/>
+            </a:solidFill>
+            <a:effectLst/>
+          </c:spPr>
+          <c:invertIfNegative val="0"/>
+          <c:dLbls>
+            <c:numFmt formatCode="#,##0" sourceLinked="0"/>
+            <c:txPr>
+              <a:bodyPr/>
+              <a:lstStyle/>
+              <a:p>
+                <a:pPr>
+                  <a:defRPr b="0" i="0" strike="noStrike" sz="1200" u="none">
+                    <a:solidFill>
+                      <a:srgbClr val="000000"/>
+                    </a:solidFill>
+                    <a:latin typeface="Arial"/>
+                  </a:defRPr>
+                </a:pPr>
+              </a:p>
+            </c:txPr>
+            <c:showLegendKey val="0"/>
+            <c:showVal val="0"/>
+            <c:showCatName val="0"/>
+            <c:showSerName val="0"/>
+            <c:showPercent val="0"/>
+            <c:showBubbleSize val="0"/>
+            <c:showLeaderLines val="0"/>
+          </c:dLbls>
+          <c:cat>
+            <c:multiLvlStrRef>
+              <c:f>Sheet1!$A$2:$A$5</c:f>
+              <c:multiLvlStrCache>
+                <c:ptCount val="4"/>
+                <c:lvl>
+                  <c:pt idx="0">
+                    <c:v>Loyal regulars</c:v>
+                  </c:pt>
+                  <c:pt idx="1">
+                    <c:v>Deal hunters</c:v>
+                  </c:pt>
+                  <c:pt idx="2">
+                    <c:v>New explorers</c:v>
+                  </c:pt>
+                  <c:pt idx="3">
+                    <c:v>Dormant drifters</c:v>
+                  </c:pt>
+                </c:lvl>
+              </c:multiLvlStrCache>
+            </c:multiLvlStrRef>
+          </c:cat>
+          <c:val>
+            <c:numRef>
+              <c:f>Sheet1!$C$2:$C$5</c:f>
+              <c:numCache>
+                <c:formatCode>General</c:formatCode>
+                <c:ptCount val="4"/>
+                <c:pt idx="0">
+                  <c:v>48</c:v>
+                </c:pt>
+                <c:pt idx="1">
+                  <c:v>27</c:v>
+                </c:pt>
+                <c:pt idx="2">
+                  <c:v>21</c:v>
+                </c:pt>
+                <c:pt idx="3">
+                  <c:v>4</c:v>
+                </c:pt>
+              </c:numCache>
+            </c:numRef>
+          </c:val>
+        </c:ser>
+        <c:dLbls>
+          <c:numFmt formatCode="#,##0" sourceLinked="0"/>
+          <c:txPr>
+            <a:bodyPr/>
+            <a:lstStyle/>
+            <a:p>
+              <a:pPr>
+                <a:defRPr b="0" i="0" strike="noStrike" sz="1200" u="none">
+                  <a:solidFill>
+                    <a:srgbClr val="000000"/>
+                  </a:solidFill>
+                  <a:latin typeface="Arial"/>
+                </a:defRPr>
+              </a:pPr>
+            </a:p>
+          </c:txPr>
+          <c:showLegendKey val="0"/>
+          <c:showVal val="0"/>
+          <c:showCatName val="0"/>
+          <c:showSerName val="0"/>
+          <c:showPercent val="0"/>
+          <c:showBubbleSize val="0"/>
+          <c:showLeaderLines val="0"/>
+        </c:dLbls>
+        <c:gapWidth val="55"/>
+        <c:overlap val="0"/>
+        <c:axId val="2094734554"/>
+        <c:axId val="2094734552"/>
+        <c:axId val="2094734556"/>
+      </c:barChart>
+      <c:catAx>
+        <c:axId val="2094734554"/>
+        <c:scaling>
+          <c:orientation val="minMax"/>
+        </c:scaling>
+        <c:delete val="0"/>
+        <c:axPos val="b"/>
+        <c:numFmt formatCode="General" sourceLinked="1"/>
+        <c:majorTickMark val="out"/>
+        <c:minorTickMark val="none"/>
+        <c:tickLblPos val="low"/>
+        <c:spPr>
+          <a:ln w="12700" cap="flat">
+            <a:solidFill>
+              <a:srgbClr val="24365A"/>
+            </a:solidFill>
+            <a:prstDash val="solid"/>
+            <a:round/>
+          </a:ln>
+        </c:spPr>
+        <c:txPr>
+          <a:bodyPr/>
+          <a:lstStyle/>
+          <a:p>
+            <a:pPr>
+              <a:defRPr sz="1100" b="0" i="0" u="none" strike="noStrike">
+                <a:solidFill>
+                  <a:srgbClr val="94A3B8"/>
+                </a:solidFill>
+                <a:latin typeface="Segoe UI"/>
+              </a:defRPr>
+            </a:pPr>
+            <a:endParaRPr lang="en-US"/>
+          </a:p>
+        </c:txPr>
+        <c:crossAx val="2094734552"/>
+        <c:crosses val="autoZero"/>
+        <c:auto val="1"/>
+        <c:lblAlgn val="ctr"/>
+        <c:noMultiLvlLbl val="1"/>
+      </c:catAx>
+      <c:valAx>
+        <c:axId val="2094734552"/>
+        <c:scaling>
+          <c:orientation val="minMax"/>
+        </c:scaling>
+        <c:delete val="0"/>
+        <c:axPos val="l"/>
+        <c:majorGridlines>
+          <c:spPr>
+            <a:ln w="12700" cap="flat">
+              <a:solidFill>
+                <a:srgbClr val="18243D"/>
+              </a:solidFill>
+              <a:prstDash val="solid"/>
+              <a:round/>
+            </a:ln>
+          </c:spPr>
+        </c:majorGridlines>
+        <c:numFmt formatCode="General" sourceLinked="0"/>
+        <c:majorTickMark val="out"/>
+        <c:minorTickMark val="none"/>
+        <c:tickLblPos val="nextTo"/>
+        <c:spPr>
+          <a:ln w="12700" cap="flat">
+            <a:solidFill>
+              <a:srgbClr val="24365A"/>
+            </a:solidFill>
+            <a:prstDash val="solid"/>
+            <a:round/>
+          </a:ln>
+        </c:spPr>
+        <c:txPr>
+          <a:bodyPr/>
+          <a:lstStyle/>
+          <a:p>
+            <a:pPr>
+              <a:defRPr sz="1000" b="0" i="0" u="none" strike="noStrike">
+                <a:solidFill>
+                  <a:srgbClr val="94A3B8"/>
+                </a:solidFill>
+                <a:latin typeface="Segoe UI"/>
+              </a:defRPr>
+            </a:pPr>
+            <a:endParaRPr lang="en-US"/>
+          </a:p>
+        </c:txPr>
+        <c:crossAx val="2094734554"/>
+        <c:crosses val="autoZero"/>
+        <c:crossBetween val="between"/>
+      </c:valAx>
+      <c:spPr>
+        <a:solidFill>
+          <a:srgbClr val="0D1420"/>
+        </a:solidFill>
+        <a:ln>
+          <a:noFill/>
+        </a:ln>
+        <a:effectLst/>
+      </c:spPr>
+    </c:plotArea>
+    <c:legend>
+      <c:legendPos val="b"/>
+      <c:overlay val="0"/>
+      <c:txPr>
+        <a:bodyPr/>
+        <a:lstStyle/>
+        <a:p>
+          <a:pPr>
+            <a:defRPr sz="1100">
+              <a:solidFill>
+                <a:srgbClr val="CBD5E1"/>
+              </a:solidFill>
+              <a:latin typeface="Segoe UI"/>
+              <a:cs typeface="Segoe UI"/>
+            </a:defRPr>
+          </a:pPr>
+          <a:endParaRPr lang="en-US"/>
+        </a:p>
+      </c:txPr>
+    </c:legend>
+    <c:plotVisOnly val="1"/>
+    <c:dispBlanksAs val="span"/>
+  </c:chart>
+  <c:spPr>
+    <a:solidFill>
+      <a:srgbClr val="0D1420"/>
+    </a:solidFill>
+    <a:ln w="12700" cap="flat">
+      <a:solidFill>
+        <a:srgbClr val="24365A"/>
+      </a:solidFill>
+    </a:ln>
+    <a:effectLst/>
+  </c:spPr>
+  <c:externalData r:id="rId1">
+    <c:autoUpdate val="0"/>
+  </c:externalData>
+</c:chartSpace>
+</file>
+
+<file path=ppt/charts/chart26.xml><?xml version="1.0" encoding="utf-8"?>
+<c:chartSpace xmlns:c="http://schemas.openxmlformats.org/drawingml/2006/chart" xmlns:a="http://schemas.openxmlformats.org/drawingml/2006/main" xmlns:r="http://schemas.openxmlformats.org/officeDocument/2006/relationships">
+  <c:date1904 val="0"/>
+  <c:roundedCorners val="1"/>
+  <c:chart>
+    <c:autoTitleDeleted val="1"/>
+    <c:plotArea>
+      <c:layout/>
+      <c:lineChart>
+        <c:varyColors val="0"/>
+        <c:ser>
+          <c:idx val="0"/>
+          <c:order val="0"/>
+          <c:tx>
+            <c:strRef>
+              <c:f>Sheet1!$B$1</c:f>
+              <c:strCache>
+                <c:ptCount val="1"/>
+                <c:pt idx="0">
+                  <c:v>Order frequency (indexed)</c:v>
+                </c:pt>
+              </c:strCache>
+            </c:strRef>
+          </c:tx>
+          <c:spPr>
+            <a:solidFill>
+              <a:srgbClr val="3B82F6"/>
+            </a:solidFill>
+            <a:ln w="31750" cap="flat">
+              <a:solidFill>
+                <a:srgbClr val="3B82F6"/>
+              </a:solidFill>
+              <a:prstDash val="solid"/>
+              <a:round/>
+            </a:ln>
+            <a:effectLst/>
+          </c:spPr>
+          <c:invertIfNegative val="0"/>
+          <c:dLbls>
+            <c:numFmt formatCode="#,##0" sourceLinked="0"/>
+            <c:txPr>
+              <a:bodyPr/>
+              <a:lstStyle/>
+              <a:p>
+                <a:pPr>
+                  <a:defRPr b="0" i="0" strike="noStrike" sz="1200" u="none">
+                    <a:solidFill>
+                      <a:srgbClr val="000000"/>
+                    </a:solidFill>
+                    <a:latin typeface="Arial"/>
+                  </a:defRPr>
+                </a:pPr>
+              </a:p>
+            </c:txPr>
+            <c:showLegendKey val="0"/>
+            <c:showVal val="0"/>
+            <c:showCatName val="0"/>
+            <c:showSerName val="0"/>
+            <c:showPercent val="0"/>
+            <c:showBubbleSize val="0"/>
+            <c:showLeaderLines val="0"/>
+          </c:dLbls>
+          <c:marker>
+            <c:symbol val="circle"/>
+            <c:size val="6"/>
+            <c:spPr>
+              <a:solidFill>
+                <a:srgbClr val="3B82F6"/>
+              </a:solidFill>
+              <a:ln w="9525" cap="flat">
+                <a:solidFill>
+                  <a:srgbClr val="3B82F6"/>
+                </a:solidFill>
+                <a:prstDash val="solid"/>
+                <a:round/>
+              </a:ln>
+              <a:effectLst/>
+            </c:spPr>
+          </c:marker>
+          <c:cat>
+            <c:multiLvlStrRef>
+              <c:f>Sheet1!$A$2:$A$7</c:f>
+              <c:multiLvlStrCache>
+                <c:ptCount val="6"/>
+                <c:lvl>
+                  <c:pt idx="0">
+                    <c:v>W-8</c:v>
+                  </c:pt>
+                  <c:pt idx="1">
+                    <c:v>W-6</c:v>
+                  </c:pt>
+                  <c:pt idx="2">
+                    <c:v>W-4</c:v>
+                  </c:pt>
+                  <c:pt idx="3">
+                    <c:v>W-2</c:v>
+                  </c:pt>
+                  <c:pt idx="4">
+                    <c:v>W0</c:v>
+                  </c:pt>
+                  <c:pt idx="5">
+                    <c:v>W+2</c:v>
+                  </c:pt>
+                </c:lvl>
+              </c:multiLvlStrCache>
+            </c:multiLvlStrRef>
+          </c:cat>
+          <c:val>
+            <c:numRef>
+              <c:f>Sheet1!$B$2:$B$7</c:f>
+              <c:numCache>
+                <c:formatCode>General</c:formatCode>
+                <c:ptCount val="6"/>
+                <c:pt idx="0">
+                  <c:v>100</c:v>
+                </c:pt>
+                <c:pt idx="1">
+                  <c:v>88</c:v>
+                </c:pt>
+                <c:pt idx="2">
+                  <c:v>72</c:v>
+                </c:pt>
+                <c:pt idx="3">
+                  <c:v>55</c:v>
+                </c:pt>
+                <c:pt idx="4">
+                  <c:v>40</c:v>
+                </c:pt>
+                <c:pt idx="5">
+                  <c:v>35</c:v>
+                </c:pt>
+              </c:numCache>
+            </c:numRef>
+          </c:val>
+          <c:smooth val="0"/>
+        </c:ser>
+        <c:ser>
+          <c:idx val="1"/>
+          <c:order val="1"/>
+          <c:tx>
+            <c:strRef>
+              <c:f>Sheet1!$C$1</c:f>
+              <c:strCache>
+                <c:ptCount val="1"/>
+                <c:pt idx="0">
+                  <c:v>Category breadth (indexed)</c:v>
+                </c:pt>
+              </c:strCache>
+            </c:strRef>
+          </c:tx>
+          <c:spPr>
+            <a:solidFill>
+              <a:srgbClr val="06B6D4"/>
+            </a:solidFill>
+            <a:ln w="31750" cap="flat">
+              <a:solidFill>
+                <a:srgbClr val="06B6D4"/>
+              </a:solidFill>
+              <a:prstDash val="solid"/>
+              <a:round/>
+            </a:ln>
+            <a:effectLst/>
+          </c:spPr>
+          <c:invertIfNegative val="0"/>
+          <c:dLbls>
+            <c:numFmt formatCode="#,##0" sourceLinked="0"/>
+            <c:txPr>
+              <a:bodyPr/>
+              <a:lstStyle/>
+              <a:p>
+                <a:pPr>
+                  <a:defRPr b="0" i="0" strike="noStrike" sz="1200" u="none">
+                    <a:solidFill>
+                      <a:srgbClr val="000000"/>
+                    </a:solidFill>
+                    <a:latin typeface="Arial"/>
+                  </a:defRPr>
+                </a:pPr>
+              </a:p>
+            </c:txPr>
+            <c:showLegendKey val="0"/>
+            <c:showVal val="0"/>
+            <c:showCatName val="0"/>
+            <c:showSerName val="0"/>
+            <c:showPercent val="0"/>
+            <c:showBubbleSize val="0"/>
+            <c:showLeaderLines val="0"/>
+          </c:dLbls>
+          <c:marker>
+            <c:symbol val="circle"/>
+            <c:size val="6"/>
+            <c:spPr>
+              <a:solidFill>
+                <a:srgbClr val="06B6D4"/>
+              </a:solidFill>
+              <a:ln w="9525" cap="flat">
+                <a:solidFill>
+                  <a:srgbClr val="06B6D4"/>
+                </a:solidFill>
+                <a:prstDash val="solid"/>
+                <a:round/>
+              </a:ln>
+              <a:effectLst/>
+            </c:spPr>
+          </c:marker>
+          <c:cat>
+            <c:multiLvlStrRef>
+              <c:f>Sheet1!$A$2:$A$7</c:f>
+              <c:multiLvlStrCache>
+                <c:ptCount val="6"/>
+                <c:lvl>
+                  <c:pt idx="0">
+                    <c:v>W-8</c:v>
+                  </c:pt>
+                  <c:pt idx="1">
+                    <c:v>W-6</c:v>
+                  </c:pt>
+                  <c:pt idx="2">
+                    <c:v>W-4</c:v>
+                  </c:pt>
+                  <c:pt idx="3">
+                    <c:v>W-2</c:v>
+                  </c:pt>
+                  <c:pt idx="4">
+                    <c:v>W0</c:v>
+                  </c:pt>
+                  <c:pt idx="5">
+                    <c:v>W+2</c:v>
+                  </c:pt>
+                </c:lvl>
+              </c:multiLvlStrCache>
+            </c:multiLvlStrRef>
+          </c:cat>
+          <c:val>
+            <c:numRef>
+              <c:f>Sheet1!$C$2:$C$7</c:f>
+              <c:numCache>
+                <c:formatCode>General</c:formatCode>
+                <c:ptCount val="6"/>
+                <c:pt idx="0">
+                  <c:v>100</c:v>
+                </c:pt>
+                <c:pt idx="1">
+                  <c:v>95</c:v>
+                </c:pt>
+                <c:pt idx="2">
+                  <c:v>85</c:v>
+                </c:pt>
+                <c:pt idx="3">
+                  <c:v>70</c:v>
+                </c:pt>
+                <c:pt idx="4">
+                  <c:v>60</c:v>
+                </c:pt>
+                <c:pt idx="5">
+                  <c:v>55</c:v>
+                </c:pt>
+              </c:numCache>
+            </c:numRef>
+          </c:val>
+          <c:smooth val="0"/>
+        </c:ser>
+        <c:dLbls>
+          <c:numFmt formatCode="#,##0" sourceLinked="0"/>
+          <c:txPr>
+            <a:bodyPr/>
+            <a:lstStyle/>
+            <a:p>
+              <a:pPr>
+                <a:defRPr b="0" i="0" strike="noStrike" sz="1200" u="none">
+                  <a:solidFill>
+                    <a:srgbClr val="000000"/>
+                  </a:solidFill>
+                  <a:latin typeface="Arial"/>
+                </a:defRPr>
+              </a:pPr>
+            </a:p>
+          </c:txPr>
+          <c:showLegendKey val="0"/>
+          <c:showVal val="0"/>
+          <c:showCatName val="0"/>
+          <c:showSerName val="0"/>
+          <c:showPercent val="0"/>
+          <c:showBubbleSize val="0"/>
+          <c:showLeaderLines val="0"/>
+        </c:dLbls>
+        <c:marker val="1"/>
+        <c:axId val="2094734554"/>
+        <c:axId val="2094734552"/>
+        <c:axId val="2094734556"/>
+      </c:lineChart>
+      <c:catAx>
+        <c:axId val="2094734554"/>
+        <c:scaling>
+          <c:orientation val="minMax"/>
+        </c:scaling>
+        <c:delete val="0"/>
+        <c:axPos val="b"/>
+        <c:numFmt formatCode="General" sourceLinked="1"/>
+        <c:majorTickMark val="out"/>
+        <c:minorTickMark val="none"/>
+        <c:tickLblPos val="low"/>
+        <c:spPr>
+          <a:ln w="12700" cap="flat">
+            <a:solidFill>
+              <a:srgbClr val="24365A"/>
+            </a:solidFill>
+            <a:prstDash val="solid"/>
+            <a:round/>
+          </a:ln>
+        </c:spPr>
+        <c:txPr>
+          <a:bodyPr/>
+          <a:lstStyle/>
+          <a:p>
+            <a:pPr>
+              <a:defRPr sz="1100" b="0" i="0" u="none" strike="noStrike">
+                <a:solidFill>
+                  <a:srgbClr val="94A3B8"/>
+                </a:solidFill>
+                <a:latin typeface="Segoe UI"/>
+              </a:defRPr>
+            </a:pPr>
+            <a:endParaRPr lang="en-US"/>
+          </a:p>
+        </c:txPr>
+        <c:crossAx val="2094734552"/>
+        <c:crosses val="autoZero"/>
+        <c:auto val="1"/>
+        <c:lblAlgn val="ctr"/>
+        <c:noMultiLvlLbl val="1"/>
+      </c:catAx>
+      <c:valAx>
+        <c:axId val="2094734552"/>
+        <c:scaling>
+          <c:orientation val="minMax"/>
+        </c:scaling>
+        <c:delete val="0"/>
+        <c:axPos val="l"/>
+        <c:majorGridlines>
+          <c:spPr>
+            <a:ln w="12700" cap="flat">
+              <a:solidFill>
+                <a:srgbClr val="18243D"/>
+              </a:solidFill>
+              <a:prstDash val="solid"/>
+              <a:round/>
+            </a:ln>
+          </c:spPr>
+        </c:majorGridlines>
+        <c:numFmt formatCode="General" sourceLinked="0"/>
+        <c:majorTickMark val="out"/>
+        <c:minorTickMark val="none"/>
+        <c:tickLblPos val="nextTo"/>
+        <c:spPr>
+          <a:ln w="12700" cap="flat">
+            <a:solidFill>
+              <a:srgbClr val="24365A"/>
+            </a:solidFill>
+            <a:prstDash val="solid"/>
+            <a:round/>
+          </a:ln>
+        </c:spPr>
+        <c:txPr>
+          <a:bodyPr/>
+          <a:lstStyle/>
+          <a:p>
+            <a:pPr>
+              <a:defRPr sz="1000" b="0" i="0" u="none" strike="noStrike">
+                <a:solidFill>
+                  <a:srgbClr val="94A3B8"/>
+                </a:solidFill>
+                <a:latin typeface="Segoe UI"/>
+              </a:defRPr>
+            </a:pPr>
+            <a:endParaRPr lang="en-US"/>
+          </a:p>
+        </c:txPr>
+        <c:crossAx val="2094734554"/>
+        <c:crosses val="autoZero"/>
+        <c:crossBetween val="between"/>
+      </c:valAx>
+      <c:spPr>
+        <a:solidFill>
+          <a:srgbClr val="0D1420"/>
+        </a:solidFill>
+        <a:ln>
+          <a:noFill/>
+        </a:ln>
+        <a:effectLst/>
+      </c:spPr>
+    </c:plotArea>
+    <c:legend>
+      <c:legendPos val="b"/>
+      <c:overlay val="0"/>
+      <c:txPr>
+        <a:bodyPr/>
+        <a:lstStyle/>
+        <a:p>
+          <a:pPr>
+            <a:defRPr sz="1100">
+              <a:solidFill>
+                <a:srgbClr val="CBD5E1"/>
+              </a:solidFill>
+              <a:latin typeface="Segoe UI"/>
+              <a:cs typeface="Segoe UI"/>
+            </a:defRPr>
+          </a:pPr>
+          <a:endParaRPr lang="en-US"/>
+        </a:p>
+      </c:txPr>
+    </c:legend>
+    <c:plotVisOnly val="1"/>
+    <c:dispBlanksAs val="span"/>
+  </c:chart>
+  <c:spPr>
+    <a:solidFill>
+      <a:srgbClr val="0D1420"/>
+    </a:solidFill>
+    <a:ln w="12700" cap="flat">
+      <a:solidFill>
+        <a:srgbClr val="24365A"/>
+      </a:solidFill>
+    </a:ln>
+    <a:effectLst/>
+  </c:spPr>
+  <c:externalData r:id="rId1">
+    <c:autoUpdate val="0"/>
+  </c:externalData>
+</c:chartSpace>
+</file>
+
+<file path=ppt/charts/chart27.xml><?xml version="1.0" encoding="utf-8"?>
+<c:chartSpace xmlns:c="http://schemas.openxmlformats.org/drawingml/2006/chart" xmlns:a="http://schemas.openxmlformats.org/drawingml/2006/main" xmlns:r="http://schemas.openxmlformats.org/officeDocument/2006/relationships">
+  <c:date1904 val="0"/>
+  <c:roundedCorners val="1"/>
+  <c:chart>
+    <c:autoTitleDeleted val="1"/>
+    <c:plotArea>
+      <c:layout/>
+      <c:doughnutChart>
+        <c:varyColors val="1"/>
+        <c:ser>
+          <c:idx val="0"/>
+          <c:order val="0"/>
+          <c:tx>
+            <c:strRef>
+              <c:f>Sheet1!$B$1</c:f>
+              <c:strCache>
+                <c:ptCount val="1"/>
+                <c:pt idx="0">
+                  <c:v>Breakdown</c:v>
+                </c:pt>
+              </c:strCache>
+            </c:strRef>
+          </c:tx>
+          <c:spPr>
+            <a:solidFill>
+              <a:schemeClr val="accent1"/>
+            </a:solidFill>
+            <a:ln w="9525" cap="flat">
+              <a:solidFill>
+                <a:srgbClr val="F9F9F9"/>
+              </a:solidFill>
+              <a:prstDash val="solid"/>
+              <a:round/>
+            </a:ln>
+            <a:effectLst/>
+          </c:spPr>
+          <c:dPt>
+            <c:idx val="0"/>
+            <c:bubble3D val="0"/>
+            <c:spPr>
+              <a:solidFill>
+                <a:srgbClr val="3B82F6"/>
+              </a:solidFill>
+              <a:effectLst/>
+            </c:spPr>
+          </c:dPt>
+          <c:dPt>
+            <c:idx val="1"/>
+            <c:bubble3D val="0"/>
+            <c:spPr>
+              <a:solidFill>
+                <a:srgbClr val="06B6D4"/>
+              </a:solidFill>
+              <a:effectLst/>
+            </c:spPr>
+          </c:dPt>
+          <c:dPt>
+            <c:idx val="2"/>
+            <c:bubble3D val="0"/>
+            <c:spPr>
+              <a:solidFill>
+                <a:srgbClr val="22D3A0"/>
+              </a:solidFill>
+              <a:effectLst/>
+            </c:spPr>
+          </c:dPt>
+          <c:dPt>
+            <c:idx val="3"/>
+            <c:bubble3D val="0"/>
+            <c:spPr>
+              <a:solidFill>
+                <a:srgbClr val="F59E0B"/>
+              </a:solidFill>
+              <a:effectLst/>
+            </c:spPr>
+          </c:dPt>
+          <c:dLbls>
+            <c:dLbl>
+              <c:idx val="0"/>
+              <c:numFmt formatCode="0%" sourceLinked="0"/>
+              <c:spPr/>
+              <c:txPr>
+                <a:bodyPr/>
+                <a:lstStyle/>
+                <a:p>
+                  <a:pPr>
+                    <a:defRPr sz="1000" b="0" i="0" u="none" strike="noStrike">
+                      <a:solidFill>
+                        <a:srgbClr val="E2E8F0"/>
+                      </a:solidFill>
+                      <a:latin typeface="Segoe UI"/>
+                    </a:defRPr>
+                  </a:pPr>
+                </a:p>
+              </c:txPr>
+              <c:showLegendKey val="0"/>
+              <c:showVal val="0"/>
+              <c:showCatName val="0"/>
+              <c:showSerName val="0"/>
+              <c:showPercent val="1"/>
+              <c:showBubbleSize val="0"/>
+            </c:dLbl>
+            <c:dLbl>
+              <c:idx val="1"/>
+              <c:numFmt formatCode="0%" sourceLinked="0"/>
+              <c:spPr/>
+              <c:txPr>
+                <a:bodyPr/>
+                <a:lstStyle/>
+                <a:p>
+                  <a:pPr>
+                    <a:defRPr sz="1000" b="0" i="0" u="none" strike="noStrike">
+                      <a:solidFill>
+                        <a:srgbClr val="E2E8F0"/>
+                      </a:solidFill>
+                      <a:latin typeface="Segoe UI"/>
+                    </a:defRPr>
+                  </a:pPr>
+                </a:p>
+              </c:txPr>
+              <c:showLegendKey val="0"/>
+              <c:showVal val="0"/>
+              <c:showCatName val="0"/>
+              <c:showSerName val="0"/>
+              <c:showPercent val="1"/>
+              <c:showBubbleSize val="0"/>
+            </c:dLbl>
+            <c:dLbl>
+              <c:idx val="2"/>
+              <c:numFmt formatCode="0%" sourceLinked="0"/>
+              <c:spPr/>
+              <c:txPr>
+                <a:bodyPr/>
+                <a:lstStyle/>
+                <a:p>
+                  <a:pPr>
+                    <a:defRPr sz="1000" b="0" i="0" u="none" strike="noStrike">
+                      <a:solidFill>
+                        <a:srgbClr val="E2E8F0"/>
+                      </a:solidFill>
+                      <a:latin typeface="Segoe UI"/>
+                    </a:defRPr>
+                  </a:pPr>
+                </a:p>
+              </c:txPr>
+              <c:showLegendKey val="0"/>
+              <c:showVal val="0"/>
+              <c:showCatName val="0"/>
+              <c:showSerName val="0"/>
+              <c:showPercent val="1"/>
+              <c:showBubbleSize val="0"/>
+            </c:dLbl>
+            <c:dLbl>
+              <c:idx val="3"/>
+              <c:numFmt formatCode="0%" sourceLinked="0"/>
+              <c:spPr/>
+              <c:txPr>
+                <a:bodyPr/>
+                <a:lstStyle/>
+                <a:p>
+                  <a:pPr>
+                    <a:defRPr sz="1000" b="0" i="0" u="none" strike="noStrike">
+                      <a:solidFill>
+                        <a:srgbClr val="E2E8F0"/>
+                      </a:solidFill>
+                      <a:latin typeface="Segoe UI"/>
+                    </a:defRPr>
+                  </a:pPr>
+                </a:p>
+              </c:txPr>
+              <c:showLegendKey val="0"/>
+              <c:showVal val="0"/>
+              <c:showCatName val="0"/>
+              <c:showSerName val="0"/>
+              <c:showPercent val="1"/>
+              <c:showBubbleSize val="0"/>
+            </c:dLbl>
+            <c:numFmt formatCode="0%" sourceLinked="0"/>
+            <c:txPr>
+              <a:bodyPr/>
+              <a:lstStyle/>
+              <a:p>
+                <a:pPr>
+                  <a:defRPr sz="1800" b="0" i="0" u="none" strike="noStrike">
+                    <a:solidFill>
+                      <a:srgbClr val="000000"/>
+                    </a:solidFill>
+                    <a:latin typeface="Arial"/>
+                  </a:defRPr>
+                </a:pPr>
+              </a:p>
+            </c:txPr>
+            <c:showLegendKey val="0"/>
+            <c:showVal val="0"/>
+            <c:showCatName val="1"/>
+            <c:showSerName val="0"/>
+            <c:showPercent val="1"/>
+            <c:showBubbleSize val="0"/>
+            <c:showLeaderLines val="0"/>
+          </c:dLbls>
+          <c:cat>
+            <c:strRef>
+              <c:f>Sheet1!$A$2:$A$5</c:f>
+              <c:strCache>
+                <c:ptCount val="4"/>
+                <c:pt idx="0">
+                  <c:v>Adopted and retained</c:v>
+                </c:pt>
+                <c:pt idx="1">
+                  <c:v>Used once, lapsed</c:v>
+                </c:pt>
+                <c:pt idx="2">
+                  <c:v>Late adopters</c:v>
+                </c:pt>
+                <c:pt idx="3">
+                  <c:v>Never tried</c:v>
+                </c:pt>
+              </c:strCache>
+            </c:strRef>
+          </c:cat>
+          <c:val>
+            <c:numRef>
+              <c:f>Sheet1!$B$2:$B$5</c:f>
+              <c:numCache>
+                <c:ptCount val="4"/>
+                <c:pt idx="0">
+                  <c:v>30</c:v>
+                </c:pt>
+                <c:pt idx="1">
+                  <c:v>25</c:v>
+                </c:pt>
+                <c:pt idx="2">
+                  <c:v>20</c:v>
+                </c:pt>
+                <c:pt idx="3">
+                  <c:v>25</c:v>
+                </c:pt>
+              </c:numCache>
+            </c:numRef>
+          </c:val>
+        </c:ser>
+        <c:firstSliceAng val="0"/>
+        <c:holeSize val="62"/>
+      </c:doughnutChart>
+      <c:spPr>
+        <a:solidFill>
+          <a:srgbClr val="0D1420"/>
+        </a:solidFill>
+        <a:ln>
+          <a:noFill/>
+        </a:ln>
+        <a:effectLst/>
+      </c:spPr>
+    </c:plotArea>
+    <c:legend>
+      <c:legendPos val="r"/>
+      <c:overlay val="0"/>
+      <c:txPr>
+        <a:bodyPr/>
+        <a:lstStyle/>
+        <a:p>
+          <a:pPr>
+            <a:defRPr sz="1100">
+              <a:solidFill>
+                <a:srgbClr val="CBD5E1"/>
+              </a:solidFill>
+              <a:latin typeface="Segoe UI"/>
+              <a:cs typeface="Segoe UI"/>
+            </a:defRPr>
+          </a:pPr>
+          <a:endParaRPr lang="en-US"/>
+        </a:p>
+      </c:txPr>
+    </c:legend>
+    <c:plotVisOnly val="1"/>
+    <c:dispBlanksAs val="span"/>
+  </c:chart>
+  <c:spPr>
+    <a:solidFill>
+      <a:srgbClr val="0D1420"/>
+    </a:solidFill>
+    <a:ln w="12700" cap="flat">
+      <a:solidFill>
+        <a:srgbClr val="24365A"/>
+      </a:solidFill>
+    </a:ln>
+    <a:effectLst/>
+  </c:spPr>
+  <c:externalData r:id="rId1">
+    <c:autoUpdate val="0"/>
+  </c:externalData>
+</c:chartSpace>
 </file>
 
 <file path=ppt/notesMasters/notesMaster1.xml><?xml version="1.0" encoding="utf-8"?>
@@ -550,6 +1645,446 @@
 </p:notes>
 </file>
 
+<file path=ppt/notesSlides/notesSlide10.xml><?xml version="1.0" encoding="utf-8"?>
+<p:notes xmlns:a="http://schemas.openxmlformats.org/drawingml/2006/main" xmlns:r="http://schemas.openxmlformats.org/officeDocument/2006/relationships" xmlns:p="http://schemas.openxmlformats.org/presentationml/2006/main">
+  <p:cSld>
+    <p:spTree>
+      <p:nvGrpSpPr>
+        <p:cNvPr id="1" name=""/>
+        <p:cNvGrpSpPr/>
+        <p:nvPr/>
+      </p:nvGrpSpPr>
+      <p:grpSpPr>
+        <a:xfrm>
+          <a:off x="0" y="0"/>
+          <a:ext cx="0" cy="0"/>
+          <a:chOff x="0" y="0"/>
+          <a:chExt cx="0" cy="0"/>
+        </a:xfrm>
+      </p:grpSpPr>
+      <p:sp>
+        <p:nvSpPr>
+          <p:cNvPr id="2" name="Slide Image Placeholder 1"/>
+          <p:cNvSpPr>
+            <a:spLocks noGrp="1" noRot="1" noChangeAspect="1"/>
+          </p:cNvSpPr>
+          <p:nvPr>
+            <p:ph type="sldImg"/>
+          </p:nvPr>
+        </p:nvSpPr>
+        <p:spPr/>
+      </p:sp>
+      <p:sp>
+        <p:nvSpPr>
+          <p:cNvPr id="3" name="Notes Placeholder 2"/>
+          <p:cNvSpPr>
+            <a:spLocks noGrp="1"/>
+          </p:cNvSpPr>
+          <p:nvPr>
+            <p:ph type="body" idx="1"/>
+          </p:nvPr>
+        </p:nvSpPr>
+        <p:spPr/>
+        <p:txBody>
+          <a:bodyPr/>
+          <a:lstStyle/>
+          <a:p>
+            <a:r>
+              <a:rPr lang="en-US" dirty="0"/>
+              <a:t/>
+            </a:r>
+            <a:endParaRPr lang="en-US" dirty="0"/>
+          </a:p>
+        </p:txBody>
+      </p:sp>
+      <p:sp>
+        <p:nvSpPr>
+          <p:cNvPr id="4" name="Slide Number Placeholder 3"/>
+          <p:cNvSpPr>
+            <a:spLocks noGrp="1"/>
+          </p:cNvSpPr>
+          <p:nvPr>
+            <p:ph type="sldNum" sz="quarter" idx="10"/>
+          </p:nvPr>
+        </p:nvSpPr>
+        <p:spPr/>
+        <p:txBody>
+          <a:bodyPr/>
+          <a:lstStyle/>
+          <a:p>
+            <a:fld id="{F7021451-1387-4CA6-816F-3879F97B5CBC}" type="slidenum">
+              <a:rPr lang="en-US"/>
+              <a:t>10</a:t>
+            </a:fld>
+            <a:endParaRPr lang="en-US"/>
+          </a:p>
+        </p:txBody>
+      </p:sp>
+    </p:spTree>
+    <p:extLst>
+      <p:ext uri="{BB962C8B-B14F-4D97-AF65-F5344CB8AC3E}">
+        <p14:creationId xmlns:p14="http://schemas.microsoft.com/office/powerpoint/2010/main" val="1024086991"/>
+      </p:ext>
+    </p:extLst>
+  </p:cSld>
+  <p:clrMapOvr>
+    <a:masterClrMapping/>
+  </p:clrMapOvr>
+</p:notes>
+</file>
+
+<file path=ppt/notesSlides/notesSlide11.xml><?xml version="1.0" encoding="utf-8"?>
+<p:notes xmlns:a="http://schemas.openxmlformats.org/drawingml/2006/main" xmlns:r="http://schemas.openxmlformats.org/officeDocument/2006/relationships" xmlns:p="http://schemas.openxmlformats.org/presentationml/2006/main">
+  <p:cSld>
+    <p:spTree>
+      <p:nvGrpSpPr>
+        <p:cNvPr id="1" name=""/>
+        <p:cNvGrpSpPr/>
+        <p:nvPr/>
+      </p:nvGrpSpPr>
+      <p:grpSpPr>
+        <a:xfrm>
+          <a:off x="0" y="0"/>
+          <a:ext cx="0" cy="0"/>
+          <a:chOff x="0" y="0"/>
+          <a:chExt cx="0" cy="0"/>
+        </a:xfrm>
+      </p:grpSpPr>
+      <p:sp>
+        <p:nvSpPr>
+          <p:cNvPr id="2" name="Slide Image Placeholder 1"/>
+          <p:cNvSpPr>
+            <a:spLocks noGrp="1" noRot="1" noChangeAspect="1"/>
+          </p:cNvSpPr>
+          <p:nvPr>
+            <p:ph type="sldImg"/>
+          </p:nvPr>
+        </p:nvSpPr>
+        <p:spPr/>
+      </p:sp>
+      <p:sp>
+        <p:nvSpPr>
+          <p:cNvPr id="3" name="Notes Placeholder 2"/>
+          <p:cNvSpPr>
+            <a:spLocks noGrp="1"/>
+          </p:cNvSpPr>
+          <p:nvPr>
+            <p:ph type="body" idx="1"/>
+          </p:nvPr>
+        </p:nvSpPr>
+        <p:spPr/>
+        <p:txBody>
+          <a:bodyPr/>
+          <a:lstStyle/>
+          <a:p>
+            <a:r>
+              <a:rPr lang="en-US" dirty="0"/>
+              <a:t/>
+            </a:r>
+            <a:endParaRPr lang="en-US" dirty="0"/>
+          </a:p>
+        </p:txBody>
+      </p:sp>
+      <p:sp>
+        <p:nvSpPr>
+          <p:cNvPr id="4" name="Slide Number Placeholder 3"/>
+          <p:cNvSpPr>
+            <a:spLocks noGrp="1"/>
+          </p:cNvSpPr>
+          <p:nvPr>
+            <p:ph type="sldNum" sz="quarter" idx="10"/>
+          </p:nvPr>
+        </p:nvSpPr>
+        <p:spPr/>
+        <p:txBody>
+          <a:bodyPr/>
+          <a:lstStyle/>
+          <a:p>
+            <a:fld id="{F7021451-1387-4CA6-816F-3879F97B5CBC}" type="slidenum">
+              <a:rPr lang="en-US"/>
+              <a:t>11</a:t>
+            </a:fld>
+            <a:endParaRPr lang="en-US"/>
+          </a:p>
+        </p:txBody>
+      </p:sp>
+    </p:spTree>
+    <p:extLst>
+      <p:ext uri="{BB962C8B-B14F-4D97-AF65-F5344CB8AC3E}">
+        <p14:creationId xmlns:p14="http://schemas.microsoft.com/office/powerpoint/2010/main" val="1024086991"/>
+      </p:ext>
+    </p:extLst>
+  </p:cSld>
+  <p:clrMapOvr>
+    <a:masterClrMapping/>
+  </p:clrMapOvr>
+</p:notes>
+</file>
+
+<file path=ppt/notesSlides/notesSlide12.xml><?xml version="1.0" encoding="utf-8"?>
+<p:notes xmlns:a="http://schemas.openxmlformats.org/drawingml/2006/main" xmlns:r="http://schemas.openxmlformats.org/officeDocument/2006/relationships" xmlns:p="http://schemas.openxmlformats.org/presentationml/2006/main">
+  <p:cSld>
+    <p:spTree>
+      <p:nvGrpSpPr>
+        <p:cNvPr id="1" name=""/>
+        <p:cNvGrpSpPr/>
+        <p:nvPr/>
+      </p:nvGrpSpPr>
+      <p:grpSpPr>
+        <a:xfrm>
+          <a:off x="0" y="0"/>
+          <a:ext cx="0" cy="0"/>
+          <a:chOff x="0" y="0"/>
+          <a:chExt cx="0" cy="0"/>
+        </a:xfrm>
+      </p:grpSpPr>
+      <p:sp>
+        <p:nvSpPr>
+          <p:cNvPr id="2" name="Slide Image Placeholder 1"/>
+          <p:cNvSpPr>
+            <a:spLocks noGrp="1" noRot="1" noChangeAspect="1"/>
+          </p:cNvSpPr>
+          <p:nvPr>
+            <p:ph type="sldImg"/>
+          </p:nvPr>
+        </p:nvSpPr>
+        <p:spPr/>
+      </p:sp>
+      <p:sp>
+        <p:nvSpPr>
+          <p:cNvPr id="3" name="Notes Placeholder 2"/>
+          <p:cNvSpPr>
+            <a:spLocks noGrp="1"/>
+          </p:cNvSpPr>
+          <p:nvPr>
+            <p:ph type="body" idx="1"/>
+          </p:nvPr>
+        </p:nvSpPr>
+        <p:spPr/>
+        <p:txBody>
+          <a:bodyPr/>
+          <a:lstStyle/>
+          <a:p>
+            <a:r>
+              <a:rPr lang="en-US" dirty="0"/>
+              <a:t/>
+            </a:r>
+            <a:endParaRPr lang="en-US" dirty="0"/>
+          </a:p>
+        </p:txBody>
+      </p:sp>
+      <p:sp>
+        <p:nvSpPr>
+          <p:cNvPr id="4" name="Slide Number Placeholder 3"/>
+          <p:cNvSpPr>
+            <a:spLocks noGrp="1"/>
+          </p:cNvSpPr>
+          <p:nvPr>
+            <p:ph type="sldNum" sz="quarter" idx="10"/>
+          </p:nvPr>
+        </p:nvSpPr>
+        <p:spPr/>
+        <p:txBody>
+          <a:bodyPr/>
+          <a:lstStyle/>
+          <a:p>
+            <a:fld id="{F7021451-1387-4CA6-816F-3879F97B5CBC}" type="slidenum">
+              <a:rPr lang="en-US"/>
+              <a:t>12</a:t>
+            </a:fld>
+            <a:endParaRPr lang="en-US"/>
+          </a:p>
+        </p:txBody>
+      </p:sp>
+    </p:spTree>
+    <p:extLst>
+      <p:ext uri="{BB962C8B-B14F-4D97-AF65-F5344CB8AC3E}">
+        <p14:creationId xmlns:p14="http://schemas.microsoft.com/office/powerpoint/2010/main" val="1024086991"/>
+      </p:ext>
+    </p:extLst>
+  </p:cSld>
+  <p:clrMapOvr>
+    <a:masterClrMapping/>
+  </p:clrMapOvr>
+</p:notes>
+</file>
+
+<file path=ppt/notesSlides/notesSlide13.xml><?xml version="1.0" encoding="utf-8"?>
+<p:notes xmlns:a="http://schemas.openxmlformats.org/drawingml/2006/main" xmlns:r="http://schemas.openxmlformats.org/officeDocument/2006/relationships" xmlns:p="http://schemas.openxmlformats.org/presentationml/2006/main">
+  <p:cSld>
+    <p:spTree>
+      <p:nvGrpSpPr>
+        <p:cNvPr id="1" name=""/>
+        <p:cNvGrpSpPr/>
+        <p:nvPr/>
+      </p:nvGrpSpPr>
+      <p:grpSpPr>
+        <a:xfrm>
+          <a:off x="0" y="0"/>
+          <a:ext cx="0" cy="0"/>
+          <a:chOff x="0" y="0"/>
+          <a:chExt cx="0" cy="0"/>
+        </a:xfrm>
+      </p:grpSpPr>
+      <p:sp>
+        <p:nvSpPr>
+          <p:cNvPr id="2" name="Slide Image Placeholder 1"/>
+          <p:cNvSpPr>
+            <a:spLocks noGrp="1" noRot="1" noChangeAspect="1"/>
+          </p:cNvSpPr>
+          <p:nvPr>
+            <p:ph type="sldImg"/>
+          </p:nvPr>
+        </p:nvSpPr>
+        <p:spPr/>
+      </p:sp>
+      <p:sp>
+        <p:nvSpPr>
+          <p:cNvPr id="3" name="Notes Placeholder 2"/>
+          <p:cNvSpPr>
+            <a:spLocks noGrp="1"/>
+          </p:cNvSpPr>
+          <p:nvPr>
+            <p:ph type="body" idx="1"/>
+          </p:nvPr>
+        </p:nvSpPr>
+        <p:spPr/>
+        <p:txBody>
+          <a:bodyPr/>
+          <a:lstStyle/>
+          <a:p>
+            <a:r>
+              <a:rPr lang="en-US" dirty="0"/>
+              <a:t/>
+            </a:r>
+            <a:endParaRPr lang="en-US" dirty="0"/>
+          </a:p>
+        </p:txBody>
+      </p:sp>
+      <p:sp>
+        <p:nvSpPr>
+          <p:cNvPr id="4" name="Slide Number Placeholder 3"/>
+          <p:cNvSpPr>
+            <a:spLocks noGrp="1"/>
+          </p:cNvSpPr>
+          <p:nvPr>
+            <p:ph type="sldNum" sz="quarter" idx="10"/>
+          </p:nvPr>
+        </p:nvSpPr>
+        <p:spPr/>
+        <p:txBody>
+          <a:bodyPr/>
+          <a:lstStyle/>
+          <a:p>
+            <a:fld id="{F7021451-1387-4CA6-816F-3879F97B5CBC}" type="slidenum">
+              <a:rPr lang="en-US"/>
+              <a:t>13</a:t>
+            </a:fld>
+            <a:endParaRPr lang="en-US"/>
+          </a:p>
+        </p:txBody>
+      </p:sp>
+    </p:spTree>
+    <p:extLst>
+      <p:ext uri="{BB962C8B-B14F-4D97-AF65-F5344CB8AC3E}">
+        <p14:creationId xmlns:p14="http://schemas.microsoft.com/office/powerpoint/2010/main" val="1024086991"/>
+      </p:ext>
+    </p:extLst>
+  </p:cSld>
+  <p:clrMapOvr>
+    <a:masterClrMapping/>
+  </p:clrMapOvr>
+</p:notes>
+</file>
+
+<file path=ppt/notesSlides/notesSlide14.xml><?xml version="1.0" encoding="utf-8"?>
+<p:notes xmlns:a="http://schemas.openxmlformats.org/drawingml/2006/main" xmlns:r="http://schemas.openxmlformats.org/officeDocument/2006/relationships" xmlns:p="http://schemas.openxmlformats.org/presentationml/2006/main">
+  <p:cSld>
+    <p:spTree>
+      <p:nvGrpSpPr>
+        <p:cNvPr id="1" name=""/>
+        <p:cNvGrpSpPr/>
+        <p:nvPr/>
+      </p:nvGrpSpPr>
+      <p:grpSpPr>
+        <a:xfrm>
+          <a:off x="0" y="0"/>
+          <a:ext cx="0" cy="0"/>
+          <a:chOff x="0" y="0"/>
+          <a:chExt cx="0" cy="0"/>
+        </a:xfrm>
+      </p:grpSpPr>
+      <p:sp>
+        <p:nvSpPr>
+          <p:cNvPr id="2" name="Slide Image Placeholder 1"/>
+          <p:cNvSpPr>
+            <a:spLocks noGrp="1" noRot="1" noChangeAspect="1"/>
+          </p:cNvSpPr>
+          <p:nvPr>
+            <p:ph type="sldImg"/>
+          </p:nvPr>
+        </p:nvSpPr>
+        <p:spPr/>
+      </p:sp>
+      <p:sp>
+        <p:nvSpPr>
+          <p:cNvPr id="3" name="Notes Placeholder 2"/>
+          <p:cNvSpPr>
+            <a:spLocks noGrp="1"/>
+          </p:cNvSpPr>
+          <p:nvPr>
+            <p:ph type="body" idx="1"/>
+          </p:nvPr>
+        </p:nvSpPr>
+        <p:spPr/>
+        <p:txBody>
+          <a:bodyPr/>
+          <a:lstStyle/>
+          <a:p>
+            <a:r>
+              <a:rPr lang="en-US" dirty="0"/>
+              <a:t/>
+            </a:r>
+            <a:endParaRPr lang="en-US" dirty="0"/>
+          </a:p>
+        </p:txBody>
+      </p:sp>
+      <p:sp>
+        <p:nvSpPr>
+          <p:cNvPr id="4" name="Slide Number Placeholder 3"/>
+          <p:cNvSpPr>
+            <a:spLocks noGrp="1"/>
+          </p:cNvSpPr>
+          <p:nvPr>
+            <p:ph type="sldNum" sz="quarter" idx="10"/>
+          </p:nvPr>
+        </p:nvSpPr>
+        <p:spPr/>
+        <p:txBody>
+          <a:bodyPr/>
+          <a:lstStyle/>
+          <a:p>
+            <a:fld id="{F7021451-1387-4CA6-816F-3879F97B5CBC}" type="slidenum">
+              <a:rPr lang="en-US"/>
+              <a:t>14</a:t>
+            </a:fld>
+            <a:endParaRPr lang="en-US"/>
+          </a:p>
+        </p:txBody>
+      </p:sp>
+    </p:spTree>
+    <p:extLst>
+      <p:ext uri="{BB962C8B-B14F-4D97-AF65-F5344CB8AC3E}">
+        <p14:creationId xmlns:p14="http://schemas.microsoft.com/office/powerpoint/2010/main" val="1024086991"/>
+      </p:ext>
+    </p:extLst>
+  </p:cSld>
+  <p:clrMapOvr>
+    <a:masterClrMapping/>
+  </p:clrMapOvr>
+</p:notes>
+</file>
+
 <file path=ppt/notesSlides/notesSlide2.xml><?xml version="1.0" encoding="utf-8"?>
 <p:notes xmlns:a="http://schemas.openxmlformats.org/drawingml/2006/main" xmlns:r="http://schemas.openxmlformats.org/officeDocument/2006/relationships" xmlns:p="http://schemas.openxmlformats.org/presentationml/2006/main">
   <p:cSld>
@@ -1060,6 +2595,182 @@
             <a:fld id="{F7021451-1387-4CA6-816F-3879F97B5CBC}" type="slidenum">
               <a:rPr lang="en-US"/>
               <a:t>7</a:t>
+            </a:fld>
+            <a:endParaRPr lang="en-US"/>
+          </a:p>
+        </p:txBody>
+      </p:sp>
+    </p:spTree>
+    <p:extLst>
+      <p:ext uri="{BB962C8B-B14F-4D97-AF65-F5344CB8AC3E}">
+        <p14:creationId xmlns:p14="http://schemas.microsoft.com/office/powerpoint/2010/main" val="1024086991"/>
+      </p:ext>
+    </p:extLst>
+  </p:cSld>
+  <p:clrMapOvr>
+    <a:masterClrMapping/>
+  </p:clrMapOvr>
+</p:notes>
+</file>
+
+<file path=ppt/notesSlides/notesSlide8.xml><?xml version="1.0" encoding="utf-8"?>
+<p:notes xmlns:a="http://schemas.openxmlformats.org/drawingml/2006/main" xmlns:r="http://schemas.openxmlformats.org/officeDocument/2006/relationships" xmlns:p="http://schemas.openxmlformats.org/presentationml/2006/main">
+  <p:cSld>
+    <p:spTree>
+      <p:nvGrpSpPr>
+        <p:cNvPr id="1" name=""/>
+        <p:cNvGrpSpPr/>
+        <p:nvPr/>
+      </p:nvGrpSpPr>
+      <p:grpSpPr>
+        <a:xfrm>
+          <a:off x="0" y="0"/>
+          <a:ext cx="0" cy="0"/>
+          <a:chOff x="0" y="0"/>
+          <a:chExt cx="0" cy="0"/>
+        </a:xfrm>
+      </p:grpSpPr>
+      <p:sp>
+        <p:nvSpPr>
+          <p:cNvPr id="2" name="Slide Image Placeholder 1"/>
+          <p:cNvSpPr>
+            <a:spLocks noGrp="1" noRot="1" noChangeAspect="1"/>
+          </p:cNvSpPr>
+          <p:nvPr>
+            <p:ph type="sldImg"/>
+          </p:nvPr>
+        </p:nvSpPr>
+        <p:spPr/>
+      </p:sp>
+      <p:sp>
+        <p:nvSpPr>
+          <p:cNvPr id="3" name="Notes Placeholder 2"/>
+          <p:cNvSpPr>
+            <a:spLocks noGrp="1"/>
+          </p:cNvSpPr>
+          <p:nvPr>
+            <p:ph type="body" idx="1"/>
+          </p:nvPr>
+        </p:nvSpPr>
+        <p:spPr/>
+        <p:txBody>
+          <a:bodyPr/>
+          <a:lstStyle/>
+          <a:p>
+            <a:r>
+              <a:rPr lang="en-US" dirty="0"/>
+              <a:t/>
+            </a:r>
+            <a:endParaRPr lang="en-US" dirty="0"/>
+          </a:p>
+        </p:txBody>
+      </p:sp>
+      <p:sp>
+        <p:nvSpPr>
+          <p:cNvPr id="4" name="Slide Number Placeholder 3"/>
+          <p:cNvSpPr>
+            <a:spLocks noGrp="1"/>
+          </p:cNvSpPr>
+          <p:nvPr>
+            <p:ph type="sldNum" sz="quarter" idx="10"/>
+          </p:nvPr>
+        </p:nvSpPr>
+        <p:spPr/>
+        <p:txBody>
+          <a:bodyPr/>
+          <a:lstStyle/>
+          <a:p>
+            <a:fld id="{F7021451-1387-4CA6-816F-3879F97B5CBC}" type="slidenum">
+              <a:rPr lang="en-US"/>
+              <a:t>8</a:t>
+            </a:fld>
+            <a:endParaRPr lang="en-US"/>
+          </a:p>
+        </p:txBody>
+      </p:sp>
+    </p:spTree>
+    <p:extLst>
+      <p:ext uri="{BB962C8B-B14F-4D97-AF65-F5344CB8AC3E}">
+        <p14:creationId xmlns:p14="http://schemas.microsoft.com/office/powerpoint/2010/main" val="1024086991"/>
+      </p:ext>
+    </p:extLst>
+  </p:cSld>
+  <p:clrMapOvr>
+    <a:masterClrMapping/>
+  </p:clrMapOvr>
+</p:notes>
+</file>
+
+<file path=ppt/notesSlides/notesSlide9.xml><?xml version="1.0" encoding="utf-8"?>
+<p:notes xmlns:a="http://schemas.openxmlformats.org/drawingml/2006/main" xmlns:r="http://schemas.openxmlformats.org/officeDocument/2006/relationships" xmlns:p="http://schemas.openxmlformats.org/presentationml/2006/main">
+  <p:cSld>
+    <p:spTree>
+      <p:nvGrpSpPr>
+        <p:cNvPr id="1" name=""/>
+        <p:cNvGrpSpPr/>
+        <p:nvPr/>
+      </p:nvGrpSpPr>
+      <p:grpSpPr>
+        <a:xfrm>
+          <a:off x="0" y="0"/>
+          <a:ext cx="0" cy="0"/>
+          <a:chOff x="0" y="0"/>
+          <a:chExt cx="0" cy="0"/>
+        </a:xfrm>
+      </p:grpSpPr>
+      <p:sp>
+        <p:nvSpPr>
+          <p:cNvPr id="2" name="Slide Image Placeholder 1"/>
+          <p:cNvSpPr>
+            <a:spLocks noGrp="1" noRot="1" noChangeAspect="1"/>
+          </p:cNvSpPr>
+          <p:nvPr>
+            <p:ph type="sldImg"/>
+          </p:nvPr>
+        </p:nvSpPr>
+        <p:spPr/>
+      </p:sp>
+      <p:sp>
+        <p:nvSpPr>
+          <p:cNvPr id="3" name="Notes Placeholder 2"/>
+          <p:cNvSpPr>
+            <a:spLocks noGrp="1"/>
+          </p:cNvSpPr>
+          <p:nvPr>
+            <p:ph type="body" idx="1"/>
+          </p:nvPr>
+        </p:nvSpPr>
+        <p:spPr/>
+        <p:txBody>
+          <a:bodyPr/>
+          <a:lstStyle/>
+          <a:p>
+            <a:r>
+              <a:rPr lang="en-US" dirty="0"/>
+              <a:t/>
+            </a:r>
+            <a:endParaRPr lang="en-US" dirty="0"/>
+          </a:p>
+        </p:txBody>
+      </p:sp>
+      <p:sp>
+        <p:nvSpPr>
+          <p:cNvPr id="4" name="Slide Number Placeholder 3"/>
+          <p:cNvSpPr>
+            <a:spLocks noGrp="1"/>
+          </p:cNvSpPr>
+          <p:nvPr>
+            <p:ph type="sldNum" sz="quarter" idx="10"/>
+          </p:nvPr>
+        </p:nvSpPr>
+        <p:spPr/>
+        <p:txBody>
+          <a:bodyPr/>
+          <a:lstStyle/>
+          <a:p>
+            <a:fld id="{F7021451-1387-4CA6-816F-3879F97B5CBC}" type="slidenum">
+              <a:rPr lang="en-US"/>
+              <a:t>9</a:t>
             </a:fld>
             <a:endParaRPr lang="en-US"/>
           </a:p>
@@ -1457,7 +3168,7 @@
         </p:nvSpPr>
         <p:spPr>
           <a:xfrm>
-            <a:off x="822960" y="1554480"/>
+            <a:off x="822960" y="1783080"/>
             <a:ext cx="10515600" cy="457200"/>
           </a:xfrm>
           <a:prstGeom prst="rect">
@@ -1497,7 +3208,7 @@
         <p:spPr>
           <a:xfrm>
             <a:off x="822960" y="2286000"/>
-            <a:ext cx="10515600" cy="1737360"/>
+            <a:ext cx="10607040" cy="1691640"/>
           </a:xfrm>
           <a:prstGeom prst="rect">
             <a:avLst/>
@@ -1513,7 +3224,7 @@
               <a:buNone/>
             </a:pPr>
             <a:r>
-              <a:rPr lang="en-US" sz="4400" b="1" dirty="0">
+              <a:rPr lang="en-US" sz="4100" b="1" dirty="0">
                 <a:solidFill>
                   <a:srgbClr val="FFFFFF"/>
                 </a:solidFill>
@@ -1521,9 +3232,9 @@
                 <a:ea typeface="Segoe UI" pitchFamily="34" charset="-122"/>
                 <a:cs typeface="Segoe UI" pitchFamily="34" charset="-120"/>
               </a:rPr>
-              <a:t>Segmentation, churn, and dashboards</a:t>
-            </a:r>
-            <a:endParaRPr lang="en-US" sz="4400" dirty="0"/>
+              <a:t>Customer Analytics: Segmentation and Churn</a:t>
+            </a:r>
+            <a:endParaRPr lang="en-US" sz="4100" dirty="0"/>
           </a:p>
         </p:txBody>
       </p:sp>
@@ -1535,8 +3246,8 @@
         </p:nvSpPr>
         <p:spPr>
           <a:xfrm>
-            <a:off x="822960" y="4206240"/>
-            <a:ext cx="10515600" cy="914400"/>
+            <a:off x="822960" y="4023360"/>
+            <a:ext cx="10058400" cy="777240"/>
           </a:xfrm>
           <a:prstGeom prst="rect">
             <a:avLst/>
@@ -1552,7 +3263,7 @@
               <a:buNone/>
             </a:pPr>
             <a:r>
-              <a:rPr lang="en-US" sz="1600" dirty="0">
+              <a:rPr lang="en-US" sz="1700" dirty="0">
                 <a:solidFill>
                   <a:srgbClr val="94A3B8"/>
                 </a:solidFill>
@@ -1560,21 +3271,83 @@
                 <a:ea typeface="Segoe UI" pitchFamily="34" charset="-122"/>
                 <a:cs typeface="Segoe UI" pitchFamily="34" charset="-120"/>
               </a:rPr>
-              <a:t>RevoU × Tokopedia freelance data analytics project · positive evaluation from Tokopedia Analytics reviewers · Rezalian Vatiady</a:t>
-            </a:r>
-            <a:endParaRPr lang="en-US" sz="1600" dirty="0"/>
-          </a:p>
-        </p:txBody>
-      </p:sp>
-      <p:sp>
-        <p:nvSpPr>
-          <p:cNvPr id="7" name="Text 5"/>
-          <p:cNvSpPr/>
-          <p:nvPr/>
-        </p:nvSpPr>
-        <p:spPr>
-          <a:xfrm>
-            <a:off x="10698480" y="6355080"/>
+              <a:t>Real e-commerce data, real reviewers, decisions instead of dashboards</a:t>
+            </a:r>
+            <a:endParaRPr lang="en-US" sz="1700" dirty="0"/>
+          </a:p>
+        </p:txBody>
+      </p:sp>
+      <p:sp>
+        <p:nvSpPr>
+          <p:cNvPr id="7" name="Shape 5"/>
+          <p:cNvSpPr/>
+          <p:nvPr/>
+        </p:nvSpPr>
+        <p:spPr>
+          <a:xfrm>
+            <a:off x="822960" y="5440680"/>
+            <a:ext cx="4114800" cy="0"/>
+          </a:xfrm>
+          <a:prstGeom prst="line">
+            <a:avLst/>
+          </a:prstGeom>
+          <a:noFill/>
+          <a:ln w="31750">
+            <a:solidFill>
+              <a:srgbClr val="3B82F6"/>
+            </a:solidFill>
+            <a:prstDash val="solid"/>
+          </a:ln>
+        </p:spPr>
+      </p:sp>
+      <p:sp>
+        <p:nvSpPr>
+          <p:cNvPr id="8" name="Text 6"/>
+          <p:cNvSpPr/>
+          <p:nvPr/>
+        </p:nvSpPr>
+        <p:spPr>
+          <a:xfrm>
+            <a:off x="822960" y="5596128"/>
+            <a:ext cx="10058400" cy="457200"/>
+          </a:xfrm>
+          <a:prstGeom prst="rect">
+            <a:avLst/>
+          </a:prstGeom>
+          <a:noFill/>
+          <a:ln/>
+        </p:spPr>
+        <p:txBody>
+          <a:bodyPr wrap="square" rtlCol="0" anchor="ctr"/>
+          <a:lstStyle/>
+          <a:p>
+            <a:pPr indent="0" marL="0">
+              <a:buNone/>
+            </a:pPr>
+            <a:r>
+              <a:rPr lang="en-US" sz="1250" dirty="0">
+                <a:solidFill>
+                  <a:srgbClr val="64748B"/>
+                </a:solidFill>
+                <a:latin typeface="Segoe UI" pitchFamily="34" charset="0"/>
+                <a:ea typeface="Segoe UI" pitchFamily="34" charset="-122"/>
+                <a:cs typeface="Segoe UI" pitchFamily="34" charset="-120"/>
+              </a:rPr>
+              <a:t>Rezalian Vatiady · Zalin Labs · 2026</a:t>
+            </a:r>
+            <a:endParaRPr lang="en-US" sz="1250" dirty="0"/>
+          </a:p>
+        </p:txBody>
+      </p:sp>
+      <p:sp>
+        <p:nvSpPr>
+          <p:cNvPr id="9" name="Text 7"/>
+          <p:cNvSpPr/>
+          <p:nvPr/>
+        </p:nvSpPr>
+        <p:spPr>
+          <a:xfrm>
+            <a:off x="10698480" y="6382512"/>
             <a:ext cx="1188720" cy="365760"/>
           </a:xfrm>
           <a:prstGeom prst="rect">
@@ -1599,7 +3372,1870 @@
                 <a:ea typeface="Consolas" pitchFamily="34" charset="-122"/>
                 <a:cs typeface="Consolas" pitchFamily="34" charset="-120"/>
               </a:rPr>
-              <a:t>1 / 7</a:t>
+              <a:t>1 / 14</a:t>
+            </a:r>
+            <a:endParaRPr lang="en-US" sz="1000" dirty="0"/>
+          </a:p>
+        </p:txBody>
+      </p:sp>
+    </p:spTree>
+  </p:cSld>
+  <p:clrMapOvr>
+    <a:masterClrMapping/>
+  </p:clrMapOvr>
+</p:sld>
+</file>
+
+<file path=ppt/slides/slide10.xml><?xml version="1.0" encoding="utf-8"?>
+<p:sld xmlns:a="http://schemas.openxmlformats.org/drawingml/2006/main" xmlns:r="http://schemas.openxmlformats.org/officeDocument/2006/relationships" xmlns:p="http://schemas.openxmlformats.org/presentationml/2006/main">
+  <p:cSld name="Slide 10">
+    <p:bg>
+      <p:bgPr>
+        <a:solidFill>
+          <a:srgbClr val="0A0C12"/>
+        </a:solidFill>
+      </p:bgPr>
+    </p:bg>
+    <p:spTree>
+      <p:nvGrpSpPr>
+        <p:cNvPr id="1" name=""/>
+        <p:cNvGrpSpPr/>
+        <p:nvPr/>
+      </p:nvGrpSpPr>
+      <p:grpSpPr>
+        <a:xfrm>
+          <a:off x="0" y="0"/>
+          <a:ext cx="0" cy="0"/>
+          <a:chOff x="0" y="0"/>
+          <a:chExt cx="0" cy="0"/>
+        </a:xfrm>
+      </p:grpSpPr>
+      <p:sp>
+        <p:nvSpPr>
+          <p:cNvPr id="2" name="Shape 0"/>
+          <p:cNvSpPr/>
+          <p:nvPr/>
+        </p:nvSpPr>
+        <p:spPr>
+          <a:xfrm>
+            <a:off x="0" y="0"/>
+            <a:ext cx="7680960" cy="64008"/>
+          </a:xfrm>
+          <a:prstGeom prst="rect">
+            <a:avLst/>
+          </a:prstGeom>
+          <a:solidFill>
+            <a:srgbClr val="3B82F6"/>
+          </a:solidFill>
+          <a:ln/>
+        </p:spPr>
+      </p:sp>
+      <p:sp>
+        <p:nvSpPr>
+          <p:cNvPr id="3" name="Shape 1"/>
+          <p:cNvSpPr/>
+          <p:nvPr/>
+        </p:nvSpPr>
+        <p:spPr>
+          <a:xfrm>
+            <a:off x="7680960" y="0"/>
+            <a:ext cx="4510735" cy="64008"/>
+          </a:xfrm>
+          <a:prstGeom prst="rect">
+            <a:avLst/>
+          </a:prstGeom>
+          <a:solidFill>
+            <a:srgbClr val="06B6D4"/>
+          </a:solidFill>
+          <a:ln/>
+        </p:spPr>
+      </p:sp>
+      <p:sp>
+        <p:nvSpPr>
+          <p:cNvPr id="4" name="Text 2"/>
+          <p:cNvSpPr/>
+          <p:nvPr/>
+        </p:nvSpPr>
+        <p:spPr>
+          <a:xfrm>
+            <a:off x="822960" y="502920"/>
+            <a:ext cx="10515600" cy="365760"/>
+          </a:xfrm>
+          <a:prstGeom prst="rect">
+            <a:avLst/>
+          </a:prstGeom>
+          <a:noFill/>
+          <a:ln/>
+        </p:spPr>
+        <p:txBody>
+          <a:bodyPr wrap="square" rtlCol="0" anchor="ctr"/>
+          <a:lstStyle/>
+          <a:p>
+            <a:pPr indent="0" marL="0">
+              <a:buNone/>
+            </a:pPr>
+            <a:r>
+              <a:rPr lang="en-US" sz="1200" spc="300" kern="0" dirty="0">
+                <a:solidFill>
+                  <a:srgbClr val="06B6D4"/>
+                </a:solidFill>
+                <a:latin typeface="Consolas" pitchFamily="34" charset="0"/>
+                <a:ea typeface="Consolas" pitchFamily="34" charset="-122"/>
+                <a:cs typeface="Consolas" pitchFamily="34" charset="-120"/>
+              </a:rPr>
+              <a:t>BEHAVIORAL DRIFT</a:t>
+            </a:r>
+            <a:endParaRPr lang="en-US" sz="1200" dirty="0"/>
+          </a:p>
+        </p:txBody>
+      </p:sp>
+      <p:sp>
+        <p:nvSpPr>
+          <p:cNvPr id="5" name="Text 3"/>
+          <p:cNvSpPr/>
+          <p:nvPr/>
+        </p:nvSpPr>
+        <p:spPr>
+          <a:xfrm>
+            <a:off x="822960" y="914400"/>
+            <a:ext cx="10561320" cy="868680"/>
+          </a:xfrm>
+          <a:prstGeom prst="rect">
+            <a:avLst/>
+          </a:prstGeom>
+          <a:noFill/>
+          <a:ln/>
+        </p:spPr>
+        <p:txBody>
+          <a:bodyPr wrap="square" rtlCol="0" anchor="ctr"/>
+          <a:lstStyle/>
+          <a:p>
+            <a:pPr indent="0" marL="0">
+              <a:buNone/>
+            </a:pPr>
+            <a:r>
+              <a:rPr lang="en-US" sz="2700" b="1" dirty="0">
+                <a:solidFill>
+                  <a:srgbClr val="FFFFFF"/>
+                </a:solidFill>
+                <a:latin typeface="Segoe UI" pitchFamily="34" charset="0"/>
+                <a:ea typeface="Segoe UI" pitchFamily="34" charset="-122"/>
+                <a:cs typeface="Segoe UI" pitchFamily="34" charset="-120"/>
+              </a:rPr>
+              <a:t>The churn story starts weeks before the churn label</a:t>
+            </a:r>
+            <a:endParaRPr lang="en-US" sz="2700" dirty="0"/>
+          </a:p>
+        </p:txBody>
+      </p:sp>
+      <p:graphicFrame>
+        <p:nvGraphicFramePr>
+          <p:cNvPr id="6" name="Chart 0" descr=""/>
+          <p:cNvGraphicFramePr/>
+          <p:nvPr/>
+        </p:nvGraphicFramePr>
+        <p:xfrm>
+          <a:off x="822960" y="1874520"/>
+          <a:ext cx="10515600" cy="3337560"/>
+        </p:xfrm>
+        <a:graphic xmlns:a="http://schemas.openxmlformats.org/drawingml/2006/main">
+          <a:graphicData uri="http://schemas.openxmlformats.org/drawingml/2006/chart">
+            <c:chart xmlns:c="http://schemas.openxmlformats.org/drawingml/2006/chart" r:id="rId1"/>
+          </a:graphicData>
+        </a:graphic>
+      </p:graphicFrame>
+      <p:sp>
+        <p:nvSpPr>
+          <p:cNvPr id="7" name="Shape 4"/>
+          <p:cNvSpPr/>
+          <p:nvPr/>
+        </p:nvSpPr>
+        <p:spPr>
+          <a:xfrm>
+            <a:off x="822960" y="5413248"/>
+            <a:ext cx="10515600" cy="0"/>
+          </a:xfrm>
+          <a:prstGeom prst="line">
+            <a:avLst/>
+          </a:prstGeom>
+          <a:noFill/>
+          <a:ln w="12700">
+            <a:solidFill>
+              <a:srgbClr val="1E2D45"/>
+            </a:solidFill>
+            <a:prstDash val="solid"/>
+          </a:ln>
+        </p:spPr>
+      </p:sp>
+      <p:sp>
+        <p:nvSpPr>
+          <p:cNvPr id="8" name="Text 5"/>
+          <p:cNvSpPr/>
+          <p:nvPr/>
+        </p:nvSpPr>
+        <p:spPr>
+          <a:xfrm>
+            <a:off x="822960" y="5504688"/>
+            <a:ext cx="10424160" cy="411480"/>
+          </a:xfrm>
+          <a:prstGeom prst="rect">
+            <a:avLst/>
+          </a:prstGeom>
+          <a:noFill/>
+          <a:ln/>
+        </p:spPr>
+        <p:txBody>
+          <a:bodyPr wrap="square" rtlCol="0" anchor="ctr"/>
+          <a:lstStyle/>
+          <a:p>
+            <a:pPr indent="0" marL="0">
+              <a:buNone/>
+            </a:pPr>
+            <a:r>
+              <a:rPr lang="en-US" sz="1300" i="1" dirty="0">
+                <a:solidFill>
+                  <a:srgbClr val="06B6D4"/>
+                </a:solidFill>
+                <a:latin typeface="Segoe UI" pitchFamily="34" charset="0"/>
+                <a:ea typeface="Segoe UI" pitchFamily="34" charset="-122"/>
+                <a:cs typeface="Segoe UI" pitchFamily="34" charset="-120"/>
+              </a:rPr>
+              <a:t>→  Order frequency and category usage declined visibly eight weeks before formal churn - drift is the early warning.</a:t>
+            </a:r>
+            <a:endParaRPr lang="en-US" sz="1300" dirty="0"/>
+          </a:p>
+        </p:txBody>
+      </p:sp>
+      <p:sp>
+        <p:nvSpPr>
+          <p:cNvPr id="9" name="Shape 6"/>
+          <p:cNvSpPr/>
+          <p:nvPr/>
+        </p:nvSpPr>
+        <p:spPr>
+          <a:xfrm>
+            <a:off x="822960" y="5961888"/>
+            <a:ext cx="10515600" cy="0"/>
+          </a:xfrm>
+          <a:prstGeom prst="line">
+            <a:avLst/>
+          </a:prstGeom>
+          <a:noFill/>
+          <a:ln w="12700">
+            <a:solidFill>
+              <a:srgbClr val="1E2D45"/>
+            </a:solidFill>
+            <a:prstDash val="solid"/>
+          </a:ln>
+        </p:spPr>
+      </p:sp>
+      <p:sp>
+        <p:nvSpPr>
+          <p:cNvPr id="10" name="Text 7"/>
+          <p:cNvSpPr/>
+          <p:nvPr/>
+        </p:nvSpPr>
+        <p:spPr>
+          <a:xfrm>
+            <a:off x="822960" y="6053328"/>
+            <a:ext cx="9692640" cy="457200"/>
+          </a:xfrm>
+          <a:prstGeom prst="rect">
+            <a:avLst/>
+          </a:prstGeom>
+          <a:noFill/>
+          <a:ln/>
+        </p:spPr>
+        <p:txBody>
+          <a:bodyPr wrap="square" rtlCol="0" anchor="ctr"/>
+          <a:lstStyle/>
+          <a:p>
+            <a:pPr indent="0" marL="0">
+              <a:buNone/>
+            </a:pPr>
+            <a:r>
+              <a:rPr lang="en-US" sz="1150" dirty="0">
+                <a:solidFill>
+                  <a:srgbClr val="64748B"/>
+                </a:solidFill>
+                <a:latin typeface="Segoe UI" pitchFamily="34" charset="0"/>
+                <a:ea typeface="Segoe UI" pitchFamily="34" charset="-122"/>
+                <a:cs typeface="Segoe UI" pitchFamily="34" charset="-120"/>
+              </a:rPr>
+              <a:t>Illustrative indexed trajectory of a churning user cohort.</a:t>
+            </a:r>
+            <a:endParaRPr lang="en-US" sz="1150" dirty="0"/>
+          </a:p>
+        </p:txBody>
+      </p:sp>
+      <p:sp>
+        <p:nvSpPr>
+          <p:cNvPr id="11" name="Text 8"/>
+          <p:cNvSpPr/>
+          <p:nvPr/>
+        </p:nvSpPr>
+        <p:spPr>
+          <a:xfrm>
+            <a:off x="10698480" y="6382512"/>
+            <a:ext cx="1188720" cy="365760"/>
+          </a:xfrm>
+          <a:prstGeom prst="rect">
+            <a:avLst/>
+          </a:prstGeom>
+          <a:noFill/>
+          <a:ln/>
+        </p:spPr>
+        <p:txBody>
+          <a:bodyPr wrap="square" rtlCol="0" anchor="ctr"/>
+          <a:lstStyle/>
+          <a:p>
+            <a:pPr algn="r" indent="0" marL="0">
+              <a:buNone/>
+            </a:pPr>
+            <a:r>
+              <a:rPr lang="en-US" sz="1000" dirty="0">
+                <a:solidFill>
+                  <a:srgbClr val="64748B"/>
+                </a:solidFill>
+                <a:latin typeface="Consolas" pitchFamily="34" charset="0"/>
+                <a:ea typeface="Consolas" pitchFamily="34" charset="-122"/>
+                <a:cs typeface="Consolas" pitchFamily="34" charset="-120"/>
+              </a:rPr>
+              <a:t>10 / 14</a:t>
+            </a:r>
+            <a:endParaRPr lang="en-US" sz="1000" dirty="0"/>
+          </a:p>
+        </p:txBody>
+      </p:sp>
+    </p:spTree>
+  </p:cSld>
+  <p:clrMapOvr>
+    <a:masterClrMapping/>
+  </p:clrMapOvr>
+</p:sld>
+</file>
+
+<file path=ppt/slides/slide11.xml><?xml version="1.0" encoding="utf-8"?>
+<p:sld xmlns:a="http://schemas.openxmlformats.org/drawingml/2006/main" xmlns:r="http://schemas.openxmlformats.org/officeDocument/2006/relationships" xmlns:p="http://schemas.openxmlformats.org/presentationml/2006/main">
+  <p:cSld name="Slide 11">
+    <p:bg>
+      <p:bgPr>
+        <a:solidFill>
+          <a:srgbClr val="0A0C12"/>
+        </a:solidFill>
+      </p:bgPr>
+    </p:bg>
+    <p:spTree>
+      <p:nvGrpSpPr>
+        <p:cNvPr id="1" name=""/>
+        <p:cNvGrpSpPr/>
+        <p:nvPr/>
+      </p:nvGrpSpPr>
+      <p:grpSpPr>
+        <a:xfrm>
+          <a:off x="0" y="0"/>
+          <a:ext cx="0" cy="0"/>
+          <a:chOff x="0" y="0"/>
+          <a:chExt cx="0" cy="0"/>
+        </a:xfrm>
+      </p:grpSpPr>
+      <p:sp>
+        <p:nvSpPr>
+          <p:cNvPr id="2" name="Shape 0"/>
+          <p:cNvSpPr/>
+          <p:nvPr/>
+        </p:nvSpPr>
+        <p:spPr>
+          <a:xfrm>
+            <a:off x="0" y="0"/>
+            <a:ext cx="7680960" cy="64008"/>
+          </a:xfrm>
+          <a:prstGeom prst="rect">
+            <a:avLst/>
+          </a:prstGeom>
+          <a:solidFill>
+            <a:srgbClr val="3B82F6"/>
+          </a:solidFill>
+          <a:ln/>
+        </p:spPr>
+      </p:sp>
+      <p:sp>
+        <p:nvSpPr>
+          <p:cNvPr id="3" name="Shape 1"/>
+          <p:cNvSpPr/>
+          <p:nvPr/>
+        </p:nvSpPr>
+        <p:spPr>
+          <a:xfrm>
+            <a:off x="7680960" y="0"/>
+            <a:ext cx="4510735" cy="64008"/>
+          </a:xfrm>
+          <a:prstGeom prst="rect">
+            <a:avLst/>
+          </a:prstGeom>
+          <a:solidFill>
+            <a:srgbClr val="06B6D4"/>
+          </a:solidFill>
+          <a:ln/>
+        </p:spPr>
+      </p:sp>
+      <p:sp>
+        <p:nvSpPr>
+          <p:cNvPr id="4" name="Text 2"/>
+          <p:cNvSpPr/>
+          <p:nvPr/>
+        </p:nvSpPr>
+        <p:spPr>
+          <a:xfrm>
+            <a:off x="822960" y="502920"/>
+            <a:ext cx="10515600" cy="365760"/>
+          </a:xfrm>
+          <a:prstGeom prst="rect">
+            <a:avLst/>
+          </a:prstGeom>
+          <a:noFill/>
+          <a:ln/>
+        </p:spPr>
+        <p:txBody>
+          <a:bodyPr wrap="square" rtlCol="0" anchor="ctr"/>
+          <a:lstStyle/>
+          <a:p>
+            <a:pPr indent="0" marL="0">
+              <a:buNone/>
+            </a:pPr>
+            <a:r>
+              <a:rPr lang="en-US" sz="1200" spc="300" kern="0" dirty="0">
+                <a:solidFill>
+                  <a:srgbClr val="06B6D4"/>
+                </a:solidFill>
+                <a:latin typeface="Consolas" pitchFamily="34" charset="0"/>
+                <a:ea typeface="Consolas" pitchFamily="34" charset="-122"/>
+                <a:cs typeface="Consolas" pitchFamily="34" charset="-120"/>
+              </a:rPr>
+              <a:t>FEATURE ADOPTION</a:t>
+            </a:r>
+            <a:endParaRPr lang="en-US" sz="1200" dirty="0"/>
+          </a:p>
+        </p:txBody>
+      </p:sp>
+      <p:sp>
+        <p:nvSpPr>
+          <p:cNvPr id="5" name="Text 3"/>
+          <p:cNvSpPr/>
+          <p:nvPr/>
+        </p:nvSpPr>
+        <p:spPr>
+          <a:xfrm>
+            <a:off x="822960" y="914400"/>
+            <a:ext cx="10561320" cy="868680"/>
+          </a:xfrm>
+          <a:prstGeom prst="rect">
+            <a:avLst/>
+          </a:prstGeom>
+          <a:noFill/>
+          <a:ln/>
+        </p:spPr>
+        <p:txBody>
+          <a:bodyPr wrap="square" rtlCol="0" anchor="ctr"/>
+          <a:lstStyle/>
+          <a:p>
+            <a:pPr indent="0" marL="0">
+              <a:buNone/>
+            </a:pPr>
+            <a:r>
+              <a:rPr lang="en-US" sz="2700" b="1" dirty="0">
+                <a:solidFill>
+                  <a:srgbClr val="FFFFFF"/>
+                </a:solidFill>
+                <a:latin typeface="Segoe UI" pitchFamily="34" charset="0"/>
+                <a:ea typeface="Segoe UI" pitchFamily="34" charset="-122"/>
+                <a:cs typeface="Segoe UI" pitchFamily="34" charset="-120"/>
+              </a:rPr>
+              <a:t>Launch is not adoption - curves told them apart</a:t>
+            </a:r>
+            <a:endParaRPr lang="en-US" sz="2700" dirty="0"/>
+          </a:p>
+        </p:txBody>
+      </p:sp>
+      <p:graphicFrame>
+        <p:nvGraphicFramePr>
+          <p:cNvPr id="6" name="Chart 0" descr=""/>
+          <p:cNvGraphicFramePr/>
+          <p:nvPr/>
+        </p:nvGraphicFramePr>
+        <p:xfrm>
+          <a:off x="822960" y="1874520"/>
+          <a:ext cx="10515600" cy="3337560"/>
+        </p:xfrm>
+        <a:graphic xmlns:a="http://schemas.openxmlformats.org/drawingml/2006/main">
+          <a:graphicData uri="http://schemas.openxmlformats.org/drawingml/2006/chart">
+            <c:chart xmlns:c="http://schemas.openxmlformats.org/drawingml/2006/chart" r:id="rId1"/>
+          </a:graphicData>
+        </a:graphic>
+      </p:graphicFrame>
+      <p:sp>
+        <p:nvSpPr>
+          <p:cNvPr id="7" name="Shape 4"/>
+          <p:cNvSpPr/>
+          <p:nvPr/>
+        </p:nvSpPr>
+        <p:spPr>
+          <a:xfrm>
+            <a:off x="822960" y="5413248"/>
+            <a:ext cx="10515600" cy="0"/>
+          </a:xfrm>
+          <a:prstGeom prst="line">
+            <a:avLst/>
+          </a:prstGeom>
+          <a:noFill/>
+          <a:ln w="12700">
+            <a:solidFill>
+              <a:srgbClr val="1E2D45"/>
+            </a:solidFill>
+            <a:prstDash val="solid"/>
+          </a:ln>
+        </p:spPr>
+      </p:sp>
+      <p:sp>
+        <p:nvSpPr>
+          <p:cNvPr id="8" name="Text 5"/>
+          <p:cNvSpPr/>
+          <p:nvPr/>
+        </p:nvSpPr>
+        <p:spPr>
+          <a:xfrm>
+            <a:off x="822960" y="5504688"/>
+            <a:ext cx="10424160" cy="411480"/>
+          </a:xfrm>
+          <a:prstGeom prst="rect">
+            <a:avLst/>
+          </a:prstGeom>
+          <a:noFill/>
+          <a:ln/>
+        </p:spPr>
+        <p:txBody>
+          <a:bodyPr wrap="square" rtlCol="0" anchor="ctr"/>
+          <a:lstStyle/>
+          <a:p>
+            <a:pPr indent="0" marL="0">
+              <a:buNone/>
+            </a:pPr>
+            <a:r>
+              <a:rPr lang="en-US" sz="1300" i="1" dirty="0">
+                <a:solidFill>
+                  <a:srgbClr val="06B6D4"/>
+                </a:solidFill>
+                <a:latin typeface="Segoe UI" pitchFamily="34" charset="0"/>
+                <a:ea typeface="Segoe UI" pitchFamily="34" charset="-122"/>
+                <a:cs typeface="Segoe UI" pitchFamily="34" charset="-120"/>
+              </a:rPr>
+              <a:t>→  Only the first bucket justified the launch - adoption curves per segment showed which features actually retained users.</a:t>
+            </a:r>
+            <a:endParaRPr lang="en-US" sz="1300" dirty="0"/>
+          </a:p>
+        </p:txBody>
+      </p:sp>
+      <p:sp>
+        <p:nvSpPr>
+          <p:cNvPr id="9" name="Shape 6"/>
+          <p:cNvSpPr/>
+          <p:nvPr/>
+        </p:nvSpPr>
+        <p:spPr>
+          <a:xfrm>
+            <a:off x="822960" y="5961888"/>
+            <a:ext cx="10515600" cy="0"/>
+          </a:xfrm>
+          <a:prstGeom prst="line">
+            <a:avLst/>
+          </a:prstGeom>
+          <a:noFill/>
+          <a:ln w="12700">
+            <a:solidFill>
+              <a:srgbClr val="1E2D45"/>
+            </a:solidFill>
+            <a:prstDash val="solid"/>
+          </a:ln>
+        </p:spPr>
+      </p:sp>
+      <p:sp>
+        <p:nvSpPr>
+          <p:cNvPr id="10" name="Text 7"/>
+          <p:cNvSpPr/>
+          <p:nvPr/>
+        </p:nvSpPr>
+        <p:spPr>
+          <a:xfrm>
+            <a:off x="822960" y="6053328"/>
+            <a:ext cx="9692640" cy="457200"/>
+          </a:xfrm>
+          <a:prstGeom prst="rect">
+            <a:avLst/>
+          </a:prstGeom>
+          <a:noFill/>
+          <a:ln/>
+        </p:spPr>
+        <p:txBody>
+          <a:bodyPr wrap="square" rtlCol="0" anchor="ctr"/>
+          <a:lstStyle/>
+          <a:p>
+            <a:pPr indent="0" marL="0">
+              <a:buNone/>
+            </a:pPr>
+            <a:r>
+              <a:rPr lang="en-US" sz="1150" dirty="0">
+                <a:solidFill>
+                  <a:srgbClr val="64748B"/>
+                </a:solidFill>
+                <a:latin typeface="Segoe UI" pitchFamily="34" charset="0"/>
+                <a:ea typeface="Segoe UI" pitchFamily="34" charset="-122"/>
+                <a:cs typeface="Segoe UI" pitchFamily="34" charset="-120"/>
+              </a:rPr>
+              <a:t>Illustrative outcome mix across launched features.</a:t>
+            </a:r>
+            <a:endParaRPr lang="en-US" sz="1150" dirty="0"/>
+          </a:p>
+        </p:txBody>
+      </p:sp>
+      <p:sp>
+        <p:nvSpPr>
+          <p:cNvPr id="11" name="Text 8"/>
+          <p:cNvSpPr/>
+          <p:nvPr/>
+        </p:nvSpPr>
+        <p:spPr>
+          <a:xfrm>
+            <a:off x="10698480" y="6382512"/>
+            <a:ext cx="1188720" cy="365760"/>
+          </a:xfrm>
+          <a:prstGeom prst="rect">
+            <a:avLst/>
+          </a:prstGeom>
+          <a:noFill/>
+          <a:ln/>
+        </p:spPr>
+        <p:txBody>
+          <a:bodyPr wrap="square" rtlCol="0" anchor="ctr"/>
+          <a:lstStyle/>
+          <a:p>
+            <a:pPr algn="r" indent="0" marL="0">
+              <a:buNone/>
+            </a:pPr>
+            <a:r>
+              <a:rPr lang="en-US" sz="1000" dirty="0">
+                <a:solidFill>
+                  <a:srgbClr val="64748B"/>
+                </a:solidFill>
+                <a:latin typeface="Consolas" pitchFamily="34" charset="0"/>
+                <a:ea typeface="Consolas" pitchFamily="34" charset="-122"/>
+                <a:cs typeface="Consolas" pitchFamily="34" charset="-120"/>
+              </a:rPr>
+              <a:t>11 / 14</a:t>
+            </a:r>
+            <a:endParaRPr lang="en-US" sz="1000" dirty="0"/>
+          </a:p>
+        </p:txBody>
+      </p:sp>
+    </p:spTree>
+  </p:cSld>
+  <p:clrMapOvr>
+    <a:masterClrMapping/>
+  </p:clrMapOvr>
+</p:sld>
+</file>
+
+<file path=ppt/slides/slide12.xml><?xml version="1.0" encoding="utf-8"?>
+<p:sld xmlns:a="http://schemas.openxmlformats.org/drawingml/2006/main" xmlns:r="http://schemas.openxmlformats.org/officeDocument/2006/relationships" xmlns:p="http://schemas.openxmlformats.org/presentationml/2006/main">
+  <p:cSld name="Slide 12">
+    <p:bg>
+      <p:bgPr>
+        <a:solidFill>
+          <a:srgbClr val="0A0C12"/>
+        </a:solidFill>
+      </p:bgPr>
+    </p:bg>
+    <p:spTree>
+      <p:nvGrpSpPr>
+        <p:cNvPr id="1" name=""/>
+        <p:cNvGrpSpPr/>
+        <p:nvPr/>
+      </p:nvGrpSpPr>
+      <p:grpSpPr>
+        <a:xfrm>
+          <a:off x="0" y="0"/>
+          <a:ext cx="0" cy="0"/>
+          <a:chOff x="0" y="0"/>
+          <a:chExt cx="0" cy="0"/>
+        </a:xfrm>
+      </p:grpSpPr>
+      <p:sp>
+        <p:nvSpPr>
+          <p:cNvPr id="2" name="Shape 0"/>
+          <p:cNvSpPr/>
+          <p:nvPr/>
+        </p:nvSpPr>
+        <p:spPr>
+          <a:xfrm>
+            <a:off x="0" y="0"/>
+            <a:ext cx="7680960" cy="64008"/>
+          </a:xfrm>
+          <a:prstGeom prst="rect">
+            <a:avLst/>
+          </a:prstGeom>
+          <a:solidFill>
+            <a:srgbClr val="3B82F6"/>
+          </a:solidFill>
+          <a:ln/>
+        </p:spPr>
+      </p:sp>
+      <p:sp>
+        <p:nvSpPr>
+          <p:cNvPr id="3" name="Shape 1"/>
+          <p:cNvSpPr/>
+          <p:nvPr/>
+        </p:nvSpPr>
+        <p:spPr>
+          <a:xfrm>
+            <a:off x="7680960" y="0"/>
+            <a:ext cx="4510735" cy="64008"/>
+          </a:xfrm>
+          <a:prstGeom prst="rect">
+            <a:avLst/>
+          </a:prstGeom>
+          <a:solidFill>
+            <a:srgbClr val="06B6D4"/>
+          </a:solidFill>
+          <a:ln/>
+        </p:spPr>
+      </p:sp>
+      <p:sp>
+        <p:nvSpPr>
+          <p:cNvPr id="4" name="Text 2"/>
+          <p:cNvSpPr/>
+          <p:nvPr/>
+        </p:nvSpPr>
+        <p:spPr>
+          <a:xfrm>
+            <a:off x="822960" y="502920"/>
+            <a:ext cx="10515600" cy="365760"/>
+          </a:xfrm>
+          <a:prstGeom prst="rect">
+            <a:avLst/>
+          </a:prstGeom>
+          <a:noFill/>
+          <a:ln/>
+        </p:spPr>
+        <p:txBody>
+          <a:bodyPr wrap="square" rtlCol="0" anchor="ctr"/>
+          <a:lstStyle/>
+          <a:p>
+            <a:pPr indent="0" marL="0">
+              <a:buNone/>
+            </a:pPr>
+            <a:r>
+              <a:rPr lang="en-US" sz="1200" spc="300" kern="0" dirty="0">
+                <a:solidFill>
+                  <a:srgbClr val="06B6D4"/>
+                </a:solidFill>
+                <a:latin typeface="Consolas" pitchFamily="34" charset="0"/>
+                <a:ea typeface="Consolas" pitchFamily="34" charset="-122"/>
+                <a:cs typeface="Consolas" pitchFamily="34" charset="-120"/>
+              </a:rPr>
+              <a:t>SEGMENT VS SEGMENT</a:t>
+            </a:r>
+            <a:endParaRPr lang="en-US" sz="1200" dirty="0"/>
+          </a:p>
+        </p:txBody>
+      </p:sp>
+      <p:sp>
+        <p:nvSpPr>
+          <p:cNvPr id="5" name="Text 3"/>
+          <p:cNvSpPr/>
+          <p:nvPr/>
+        </p:nvSpPr>
+        <p:spPr>
+          <a:xfrm>
+            <a:off x="822960" y="914400"/>
+            <a:ext cx="10561320" cy="868680"/>
+          </a:xfrm>
+          <a:prstGeom prst="rect">
+            <a:avLst/>
+          </a:prstGeom>
+          <a:noFill/>
+          <a:ln/>
+        </p:spPr>
+        <p:txBody>
+          <a:bodyPr wrap="square" rtlCol="0" anchor="ctr"/>
+          <a:lstStyle/>
+          <a:p>
+            <a:pPr indent="0" marL="0">
+              <a:buNone/>
+            </a:pPr>
+            <a:r>
+              <a:rPr lang="en-US" sz="2700" b="1" dirty="0">
+                <a:solidFill>
+                  <a:srgbClr val="FFFFFF"/>
+                </a:solidFill>
+                <a:latin typeface="Segoe UI" pitchFamily="34" charset="0"/>
+                <a:ea typeface="Segoe UI" pitchFamily="34" charset="-122"/>
+                <a:cs typeface="Segoe UI" pitchFamily="34" charset="-120"/>
+              </a:rPr>
+              <a:t>If two segments get the same treatment, one is decoration</a:t>
+            </a:r>
+            <a:endParaRPr lang="en-US" sz="2700" dirty="0"/>
+          </a:p>
+        </p:txBody>
+      </p:sp>
+      <p:sp>
+        <p:nvSpPr>
+          <p:cNvPr id="6" name="Shape 4"/>
+          <p:cNvSpPr/>
+          <p:nvPr/>
+        </p:nvSpPr>
+        <p:spPr>
+          <a:xfrm>
+            <a:off x="822960" y="2011680"/>
+            <a:ext cx="5074920" cy="3611880"/>
+          </a:xfrm>
+          <a:prstGeom prst="roundRect">
+            <a:avLst>
+              <a:gd name="adj" fmla="val 2025"/>
+            </a:avLst>
+          </a:prstGeom>
+          <a:solidFill>
+            <a:srgbClr val="111A2E"/>
+          </a:solidFill>
+          <a:ln w="12700">
+            <a:solidFill>
+              <a:srgbClr val="1E2D45"/>
+            </a:solidFill>
+            <a:prstDash val="solid"/>
+          </a:ln>
+        </p:spPr>
+      </p:sp>
+      <p:sp>
+        <p:nvSpPr>
+          <p:cNvPr id="7" name="Text 5"/>
+          <p:cNvSpPr/>
+          <p:nvPr/>
+        </p:nvSpPr>
+        <p:spPr>
+          <a:xfrm>
+            <a:off x="1097280" y="2240280"/>
+            <a:ext cx="4526280" cy="502920"/>
+          </a:xfrm>
+          <a:prstGeom prst="rect">
+            <a:avLst/>
+          </a:prstGeom>
+          <a:noFill/>
+          <a:ln/>
+        </p:spPr>
+        <p:txBody>
+          <a:bodyPr wrap="square" rtlCol="0" anchor="ctr"/>
+          <a:lstStyle/>
+          <a:p>
+            <a:pPr indent="0" marL="0">
+              <a:buNone/>
+            </a:pPr>
+            <a:r>
+              <a:rPr lang="en-US" sz="1650" b="1" dirty="0">
+                <a:solidFill>
+                  <a:srgbClr val="06B6D4"/>
+                </a:solidFill>
+                <a:latin typeface="Segoe UI" pitchFamily="34" charset="0"/>
+                <a:ea typeface="Segoe UI" pitchFamily="34" charset="-122"/>
+                <a:cs typeface="Segoe UI" pitchFamily="34" charset="-120"/>
+              </a:rPr>
+              <a:t>Cluster labels only</a:t>
+            </a:r>
+            <a:endParaRPr lang="en-US" sz="1650" dirty="0"/>
+          </a:p>
+        </p:txBody>
+      </p:sp>
+      <p:sp>
+        <p:nvSpPr>
+          <p:cNvPr id="8" name="Text 6"/>
+          <p:cNvSpPr/>
+          <p:nvPr/>
+        </p:nvSpPr>
+        <p:spPr>
+          <a:xfrm>
+            <a:off x="1097280" y="2834640"/>
+            <a:ext cx="4553712" cy="2651760"/>
+          </a:xfrm>
+          <a:prstGeom prst="rect">
+            <a:avLst/>
+          </a:prstGeom>
+          <a:noFill/>
+          <a:ln/>
+        </p:spPr>
+        <p:txBody>
+          <a:bodyPr wrap="square" rtlCol="0" anchor="t"/>
+          <a:lstStyle/>
+          <a:p>
+            <a:pPr marL="342900" indent="-342900">
+              <a:lnSpc>
+                <a:spcPct val="112000"/>
+              </a:lnSpc>
+              <a:spcAft>
+                <a:spcPts val="900"/>
+              </a:spcAft>
+              <a:buSzPct val="100000"/>
+              <a:buChar char="▸"/>
+            </a:pPr>
+            <a:r>
+              <a:rPr lang="en-US" sz="1280" dirty="0">
+                <a:solidFill>
+                  <a:srgbClr val="CBD5E1"/>
+                </a:solidFill>
+                <a:latin typeface="Segoe UI" pitchFamily="34" charset="0"/>
+                <a:ea typeface="Segoe UI" pitchFamily="34" charset="-122"/>
+                <a:cs typeface="Segoe UI" pitchFamily="34" charset="-120"/>
+              </a:rPr>
+              <a:t>k-means returns five groups and stops there</a:t>
+            </a:r>
+            <a:endParaRPr lang="en-US" sz="1280" dirty="0"/>
+          </a:p>
+          <a:p>
+            <a:pPr marL="342900" indent="-342900">
+              <a:lnSpc>
+                <a:spcPct val="112000"/>
+              </a:lnSpc>
+              <a:spcAft>
+                <a:spcPts val="900"/>
+              </a:spcAft>
+              <a:buSzPct val="100000"/>
+              <a:buChar char="▸"/>
+            </a:pPr>
+            <a:r>
+              <a:rPr lang="en-US" sz="1280" dirty="0">
+                <a:solidFill>
+                  <a:srgbClr val="CBD5E1"/>
+                </a:solidFill>
+                <a:latin typeface="Segoe UI" pitchFamily="34" charset="0"/>
+                <a:ea typeface="Segoe UI" pitchFamily="34" charset="-122"/>
+                <a:cs typeface="Segoe UI" pitchFamily="34" charset="-120"/>
+              </a:rPr>
+              <a:t>Demographic labels describe who users are, not what they will do next</a:t>
+            </a:r>
+            <a:endParaRPr lang="en-US" sz="1280" dirty="0"/>
+          </a:p>
+          <a:p>
+            <a:pPr marL="342900" indent="-342900">
+              <a:lnSpc>
+                <a:spcPct val="112000"/>
+              </a:lnSpc>
+              <a:spcAft>
+                <a:spcPts val="900"/>
+              </a:spcAft>
+              <a:buSzPct val="100000"/>
+              <a:buChar char="▸"/>
+            </a:pPr>
+            <a:r>
+              <a:rPr lang="en-US" sz="1280" dirty="0">
+                <a:solidFill>
+                  <a:srgbClr val="CBD5E1"/>
+                </a:solidFill>
+                <a:latin typeface="Segoe UI" pitchFamily="34" charset="0"/>
+                <a:ea typeface="Segoe UI" pitchFamily="34" charset="-122"/>
+                <a:cs typeface="Segoe UI" pitchFamily="34" charset="-120"/>
+              </a:rPr>
+              <a:t>Every segment receives the same campaign and nothing moves</a:t>
+            </a:r>
+            <a:endParaRPr lang="en-US" sz="1280" dirty="0"/>
+          </a:p>
+        </p:txBody>
+      </p:sp>
+      <p:sp>
+        <p:nvSpPr>
+          <p:cNvPr id="9" name="Shape 7"/>
+          <p:cNvSpPr/>
+          <p:nvPr/>
+        </p:nvSpPr>
+        <p:spPr>
+          <a:xfrm>
+            <a:off x="6291072" y="2011680"/>
+            <a:ext cx="5074920" cy="3611880"/>
+          </a:xfrm>
+          <a:prstGeom prst="roundRect">
+            <a:avLst>
+              <a:gd name="adj" fmla="val 2025"/>
+            </a:avLst>
+          </a:prstGeom>
+          <a:solidFill>
+            <a:srgbClr val="111A2E"/>
+          </a:solidFill>
+          <a:ln w="12700">
+            <a:solidFill>
+              <a:srgbClr val="1E2D45"/>
+            </a:solidFill>
+            <a:prstDash val="solid"/>
+          </a:ln>
+        </p:spPr>
+      </p:sp>
+      <p:sp>
+        <p:nvSpPr>
+          <p:cNvPr id="10" name="Text 8"/>
+          <p:cNvSpPr/>
+          <p:nvPr/>
+        </p:nvSpPr>
+        <p:spPr>
+          <a:xfrm>
+            <a:off x="6565392" y="2240280"/>
+            <a:ext cx="4526280" cy="502920"/>
+          </a:xfrm>
+          <a:prstGeom prst="rect">
+            <a:avLst/>
+          </a:prstGeom>
+          <a:noFill/>
+          <a:ln/>
+        </p:spPr>
+        <p:txBody>
+          <a:bodyPr wrap="square" rtlCol="0" anchor="ctr"/>
+          <a:lstStyle/>
+          <a:p>
+            <a:pPr indent="0" marL="0">
+              <a:buNone/>
+            </a:pPr>
+            <a:r>
+              <a:rPr lang="en-US" sz="1650" b="1" dirty="0">
+                <a:solidFill>
+                  <a:srgbClr val="93C5FD"/>
+                </a:solidFill>
+                <a:latin typeface="Segoe UI" pitchFamily="34" charset="0"/>
+                <a:ea typeface="Segoe UI" pitchFamily="34" charset="-122"/>
+                <a:cs typeface="Segoe UI" pitchFamily="34" charset="-120"/>
+              </a:rPr>
+              <a:t>Behavior stories</a:t>
+            </a:r>
+            <a:endParaRPr lang="en-US" sz="1650" dirty="0"/>
+          </a:p>
+        </p:txBody>
+      </p:sp>
+      <p:sp>
+        <p:nvSpPr>
+          <p:cNvPr id="11" name="Text 9"/>
+          <p:cNvSpPr/>
+          <p:nvPr/>
+        </p:nvSpPr>
+        <p:spPr>
+          <a:xfrm>
+            <a:off x="6565392" y="2834640"/>
+            <a:ext cx="4553712" cy="2651760"/>
+          </a:xfrm>
+          <a:prstGeom prst="rect">
+            <a:avLst/>
+          </a:prstGeom>
+          <a:noFill/>
+          <a:ln/>
+        </p:spPr>
+        <p:txBody>
+          <a:bodyPr wrap="square" rtlCol="0" anchor="t"/>
+          <a:lstStyle/>
+          <a:p>
+            <a:pPr marL="342900" indent="-342900">
+              <a:lnSpc>
+                <a:spcPct val="112000"/>
+              </a:lnSpc>
+              <a:spcAft>
+                <a:spcPts val="900"/>
+              </a:spcAft>
+              <a:buSzPct val="100000"/>
+              <a:buChar char="▸"/>
+            </a:pPr>
+            <a:r>
+              <a:rPr lang="en-US" sz="1280" dirty="0">
+                <a:solidFill>
+                  <a:srgbClr val="CBD5E1"/>
+                </a:solidFill>
+                <a:latin typeface="Segoe UI" pitchFamily="34" charset="0"/>
+                <a:ea typeface="Segoe UI" pitchFamily="34" charset="-122"/>
+                <a:cs typeface="Segoe UI" pitchFamily="34" charset="-120"/>
+              </a:rPr>
+              <a:t>Each cluster explains why users behave this way and what would change it</a:t>
+            </a:r>
+            <a:endParaRPr lang="en-US" sz="1280" dirty="0"/>
+          </a:p>
+          <a:p>
+            <a:pPr marL="342900" indent="-342900">
+              <a:lnSpc>
+                <a:spcPct val="112000"/>
+              </a:lnSpc>
+              <a:spcAft>
+                <a:spcPts val="900"/>
+              </a:spcAft>
+              <a:buSzPct val="100000"/>
+              <a:buChar char="▸"/>
+            </a:pPr>
+            <a:r>
+              <a:rPr lang="en-US" sz="1280" dirty="0">
+                <a:solidFill>
+                  <a:srgbClr val="CBD5E1"/>
+                </a:solidFill>
+                <a:latin typeface="Segoe UI" pitchFamily="34" charset="0"/>
+                <a:ea typeface="Segoe UI" pitchFamily="34" charset="-122"/>
+                <a:cs typeface="Segoe UI" pitchFamily="34" charset="-120"/>
+              </a:rPr>
+              <a:t>Signals track drift across orders, categories, and sessions</a:t>
+            </a:r>
+            <a:endParaRPr lang="en-US" sz="1280" dirty="0"/>
+          </a:p>
+          <a:p>
+            <a:pPr marL="342900" indent="-342900">
+              <a:lnSpc>
+                <a:spcPct val="112000"/>
+              </a:lnSpc>
+              <a:spcAft>
+                <a:spcPts val="900"/>
+              </a:spcAft>
+              <a:buSzPct val="100000"/>
+              <a:buChar char="▸"/>
+            </a:pPr>
+            <a:r>
+              <a:rPr lang="en-US" sz="1280" dirty="0">
+                <a:solidFill>
+                  <a:srgbClr val="CBD5E1"/>
+                </a:solidFill>
+                <a:latin typeface="Segoe UI" pitchFamily="34" charset="0"/>
+                <a:ea typeface="Segoe UI" pitchFamily="34" charset="-122"/>
+                <a:cs typeface="Segoe UI" pitchFamily="34" charset="-120"/>
+              </a:rPr>
+              <a:t>Each segment carries its own play, KPI, and owner</a:t>
+            </a:r>
+            <a:endParaRPr lang="en-US" sz="1280" dirty="0"/>
+          </a:p>
+        </p:txBody>
+      </p:sp>
+      <p:sp>
+        <p:nvSpPr>
+          <p:cNvPr id="12" name="Shape 10"/>
+          <p:cNvSpPr/>
+          <p:nvPr/>
+        </p:nvSpPr>
+        <p:spPr>
+          <a:xfrm>
+            <a:off x="822960" y="5961888"/>
+            <a:ext cx="10515600" cy="0"/>
+          </a:xfrm>
+          <a:prstGeom prst="line">
+            <a:avLst/>
+          </a:prstGeom>
+          <a:noFill/>
+          <a:ln w="12700">
+            <a:solidFill>
+              <a:srgbClr val="1E2D45"/>
+            </a:solidFill>
+            <a:prstDash val="solid"/>
+          </a:ln>
+        </p:spPr>
+      </p:sp>
+      <p:sp>
+        <p:nvSpPr>
+          <p:cNvPr id="13" name="Text 11"/>
+          <p:cNvSpPr/>
+          <p:nvPr/>
+        </p:nvSpPr>
+        <p:spPr>
+          <a:xfrm>
+            <a:off x="822960" y="6053328"/>
+            <a:ext cx="9692640" cy="457200"/>
+          </a:xfrm>
+          <a:prstGeom prst="rect">
+            <a:avLst/>
+          </a:prstGeom>
+          <a:noFill/>
+          <a:ln/>
+        </p:spPr>
+        <p:txBody>
+          <a:bodyPr wrap="square" rtlCol="0" anchor="ctr"/>
+          <a:lstStyle/>
+          <a:p>
+            <a:pPr indent="0" marL="0">
+              <a:buNone/>
+            </a:pPr>
+            <a:r>
+              <a:rPr lang="en-US" sz="1150" dirty="0">
+                <a:solidFill>
+                  <a:srgbClr val="64748B"/>
+                </a:solidFill>
+                <a:latin typeface="Segoe UI" pitchFamily="34" charset="0"/>
+                <a:ea typeface="Segoe UI" pitchFamily="34" charset="-122"/>
+                <a:cs typeface="Segoe UI" pitchFamily="34" charset="-120"/>
+              </a:rPr>
+              <a:t>The algorithm proposed; the narrative disposed.</a:t>
+            </a:r>
+            <a:endParaRPr lang="en-US" sz="1150" dirty="0"/>
+          </a:p>
+        </p:txBody>
+      </p:sp>
+      <p:sp>
+        <p:nvSpPr>
+          <p:cNvPr id="14" name="Text 12"/>
+          <p:cNvSpPr/>
+          <p:nvPr/>
+        </p:nvSpPr>
+        <p:spPr>
+          <a:xfrm>
+            <a:off x="10698480" y="6382512"/>
+            <a:ext cx="1188720" cy="365760"/>
+          </a:xfrm>
+          <a:prstGeom prst="rect">
+            <a:avLst/>
+          </a:prstGeom>
+          <a:noFill/>
+          <a:ln/>
+        </p:spPr>
+        <p:txBody>
+          <a:bodyPr wrap="square" rtlCol="0" anchor="ctr"/>
+          <a:lstStyle/>
+          <a:p>
+            <a:pPr algn="r" indent="0" marL="0">
+              <a:buNone/>
+            </a:pPr>
+            <a:r>
+              <a:rPr lang="en-US" sz="1000" dirty="0">
+                <a:solidFill>
+                  <a:srgbClr val="64748B"/>
+                </a:solidFill>
+                <a:latin typeface="Consolas" pitchFamily="34" charset="0"/>
+                <a:ea typeface="Consolas" pitchFamily="34" charset="-122"/>
+                <a:cs typeface="Consolas" pitchFamily="34" charset="-120"/>
+              </a:rPr>
+              <a:t>12 / 14</a:t>
+            </a:r>
+            <a:endParaRPr lang="en-US" sz="1000" dirty="0"/>
+          </a:p>
+        </p:txBody>
+      </p:sp>
+    </p:spTree>
+  </p:cSld>
+  <p:clrMapOvr>
+    <a:masterClrMapping/>
+  </p:clrMapOvr>
+</p:sld>
+</file>
+
+<file path=ppt/slides/slide13.xml><?xml version="1.0" encoding="utf-8"?>
+<p:sld xmlns:a="http://schemas.openxmlformats.org/drawingml/2006/main" xmlns:r="http://schemas.openxmlformats.org/officeDocument/2006/relationships" xmlns:p="http://schemas.openxmlformats.org/presentationml/2006/main">
+  <p:cSld name="Slide 13">
+    <p:bg>
+      <p:bgPr>
+        <a:solidFill>
+          <a:srgbClr val="0A0C12"/>
+        </a:solidFill>
+      </p:bgPr>
+    </p:bg>
+    <p:spTree>
+      <p:nvGrpSpPr>
+        <p:cNvPr id="1" name=""/>
+        <p:cNvGrpSpPr/>
+        <p:nvPr/>
+      </p:nvGrpSpPr>
+      <p:grpSpPr>
+        <a:xfrm>
+          <a:off x="0" y="0"/>
+          <a:ext cx="0" cy="0"/>
+          <a:chOff x="0" y="0"/>
+          <a:chExt cx="0" cy="0"/>
+        </a:xfrm>
+      </p:grpSpPr>
+      <p:sp>
+        <p:nvSpPr>
+          <p:cNvPr id="2" name="Shape 0"/>
+          <p:cNvSpPr/>
+          <p:nvPr/>
+        </p:nvSpPr>
+        <p:spPr>
+          <a:xfrm>
+            <a:off x="0" y="0"/>
+            <a:ext cx="7680960" cy="64008"/>
+          </a:xfrm>
+          <a:prstGeom prst="rect">
+            <a:avLst/>
+          </a:prstGeom>
+          <a:solidFill>
+            <a:srgbClr val="3B82F6"/>
+          </a:solidFill>
+          <a:ln/>
+        </p:spPr>
+      </p:sp>
+      <p:sp>
+        <p:nvSpPr>
+          <p:cNvPr id="3" name="Shape 1"/>
+          <p:cNvSpPr/>
+          <p:nvPr/>
+        </p:nvSpPr>
+        <p:spPr>
+          <a:xfrm>
+            <a:off x="7680960" y="0"/>
+            <a:ext cx="4510735" cy="64008"/>
+          </a:xfrm>
+          <a:prstGeom prst="rect">
+            <a:avLst/>
+          </a:prstGeom>
+          <a:solidFill>
+            <a:srgbClr val="06B6D4"/>
+          </a:solidFill>
+          <a:ln/>
+        </p:spPr>
+      </p:sp>
+      <p:sp>
+        <p:nvSpPr>
+          <p:cNvPr id="4" name="Text 2"/>
+          <p:cNvSpPr/>
+          <p:nvPr/>
+        </p:nvSpPr>
+        <p:spPr>
+          <a:xfrm>
+            <a:off x="822960" y="502920"/>
+            <a:ext cx="10515600" cy="365760"/>
+          </a:xfrm>
+          <a:prstGeom prst="rect">
+            <a:avLst/>
+          </a:prstGeom>
+          <a:noFill/>
+          <a:ln/>
+        </p:spPr>
+        <p:txBody>
+          <a:bodyPr wrap="square" rtlCol="0" anchor="ctr"/>
+          <a:lstStyle/>
+          <a:p>
+            <a:pPr indent="0" marL="0">
+              <a:buNone/>
+            </a:pPr>
+            <a:r>
+              <a:rPr lang="en-US" sz="1200" spc="300" kern="0" dirty="0">
+                <a:solidFill>
+                  <a:srgbClr val="06B6D4"/>
+                </a:solidFill>
+                <a:latin typeface="Consolas" pitchFamily="34" charset="0"/>
+                <a:ea typeface="Consolas" pitchFamily="34" charset="-122"/>
+                <a:cs typeface="Consolas" pitchFamily="34" charset="-120"/>
+              </a:rPr>
+              <a:t>LESSONS</a:t>
+            </a:r>
+            <a:endParaRPr lang="en-US" sz="1200" dirty="0"/>
+          </a:p>
+        </p:txBody>
+      </p:sp>
+      <p:sp>
+        <p:nvSpPr>
+          <p:cNvPr id="5" name="Text 3"/>
+          <p:cNvSpPr/>
+          <p:nvPr/>
+        </p:nvSpPr>
+        <p:spPr>
+          <a:xfrm>
+            <a:off x="822960" y="914400"/>
+            <a:ext cx="10561320" cy="868680"/>
+          </a:xfrm>
+          <a:prstGeom prst="rect">
+            <a:avLst/>
+          </a:prstGeom>
+          <a:noFill/>
+          <a:ln/>
+        </p:spPr>
+        <p:txBody>
+          <a:bodyPr wrap="square" rtlCol="0" anchor="ctr"/>
+          <a:lstStyle/>
+          <a:p>
+            <a:pPr indent="0" marL="0">
+              <a:buNone/>
+            </a:pPr>
+            <a:r>
+              <a:rPr lang="en-US" sz="2700" b="1" dirty="0">
+                <a:solidFill>
+                  <a:srgbClr val="FFFFFF"/>
+                </a:solidFill>
+                <a:latin typeface="Segoe UI" pitchFamily="34" charset="0"/>
+                <a:ea typeface="Segoe UI" pitchFamily="34" charset="-122"/>
+                <a:cs typeface="Segoe UI" pitchFamily="34" charset="-120"/>
+              </a:rPr>
+              <a:t>What real reviewers taught me</a:t>
+            </a:r>
+            <a:endParaRPr lang="en-US" sz="2700" dirty="0"/>
+          </a:p>
+        </p:txBody>
+      </p:sp>
+      <p:sp>
+        <p:nvSpPr>
+          <p:cNvPr id="6" name="Text 4"/>
+          <p:cNvSpPr/>
+          <p:nvPr/>
+        </p:nvSpPr>
+        <p:spPr>
+          <a:xfrm>
+            <a:off x="868680" y="2011680"/>
+            <a:ext cx="10424160" cy="3566160"/>
+          </a:xfrm>
+          <a:prstGeom prst="rect">
+            <a:avLst/>
+          </a:prstGeom>
+          <a:noFill/>
+          <a:ln/>
+        </p:spPr>
+        <p:txBody>
+          <a:bodyPr wrap="square" rtlCol="0" anchor="t"/>
+          <a:lstStyle/>
+          <a:p>
+            <a:pPr marL="342900" indent="-342900">
+              <a:lnSpc>
+                <a:spcPct val="112000"/>
+              </a:lnSpc>
+              <a:spcAft>
+                <a:spcPts val="900"/>
+              </a:spcAft>
+              <a:buSzPct val="100000"/>
+              <a:buChar char="▸"/>
+            </a:pPr>
+            <a:r>
+              <a:rPr lang="en-US" sz="1600" dirty="0">
+                <a:solidFill>
+                  <a:srgbClr val="CBD5E1"/>
+                </a:solidFill>
+                <a:latin typeface="Segoe UI" pitchFamily="34" charset="0"/>
+                <a:ea typeface="Segoe UI" pitchFamily="34" charset="-122"/>
+                <a:cs typeface="Segoe UI" pitchFamily="34" charset="-120"/>
+              </a:rPr>
+              <a:t>Feature launch is not feature adoption - track the curves, not the roadmap</a:t>
+            </a:r>
+            <a:endParaRPr lang="en-US" sz="1600" dirty="0"/>
+          </a:p>
+          <a:p>
+            <a:pPr marL="342900" indent="-342900">
+              <a:lnSpc>
+                <a:spcPct val="112000"/>
+              </a:lnSpc>
+              <a:spcAft>
+                <a:spcPts val="900"/>
+              </a:spcAft>
+              <a:buSzPct val="100000"/>
+              <a:buChar char="▸"/>
+            </a:pPr>
+            <a:r>
+              <a:rPr lang="en-US" sz="1600" dirty="0">
+                <a:solidFill>
+                  <a:srgbClr val="CBD5E1"/>
+                </a:solidFill>
+                <a:latin typeface="Segoe UI" pitchFamily="34" charset="0"/>
+                <a:ea typeface="Segoe UI" pitchFamily="34" charset="-122"/>
+                <a:cs typeface="Segoe UI" pitchFamily="34" charset="-120"/>
+              </a:rPr>
+              <a:t>Analysis without a recommended action is trivia</a:t>
+            </a:r>
+            <a:endParaRPr lang="en-US" sz="1600" dirty="0"/>
+          </a:p>
+          <a:p>
+            <a:pPr marL="342900" indent="-342900">
+              <a:lnSpc>
+                <a:spcPct val="112000"/>
+              </a:lnSpc>
+              <a:spcAft>
+                <a:spcPts val="900"/>
+              </a:spcAft>
+              <a:buSzPct val="100000"/>
+              <a:buChar char="▸"/>
+            </a:pPr>
+            <a:r>
+              <a:rPr lang="en-US" sz="1600" dirty="0">
+                <a:solidFill>
+                  <a:srgbClr val="CBD5E1"/>
+                </a:solidFill>
+                <a:latin typeface="Segoe UI" pitchFamily="34" charset="0"/>
+                <a:ea typeface="Segoe UI" pitchFamily="34" charset="-122"/>
+                <a:cs typeface="Segoe UI" pitchFamily="34" charset="-120"/>
+              </a:rPr>
+              <a:t>Analytics is a product: the user is not the data, the user is a decision</a:t>
+            </a:r>
+            <a:endParaRPr lang="en-US" sz="1600" dirty="0"/>
+          </a:p>
+          <a:p>
+            <a:pPr marL="342900" indent="-342900">
+              <a:lnSpc>
+                <a:spcPct val="112000"/>
+              </a:lnSpc>
+              <a:spcAft>
+                <a:spcPts val="900"/>
+              </a:spcAft>
+              <a:buSzPct val="100000"/>
+              <a:buChar char="▸"/>
+            </a:pPr>
+            <a:r>
+              <a:rPr lang="en-US" sz="1600" dirty="0">
+                <a:solidFill>
+                  <a:srgbClr val="CBD5E1"/>
+                </a:solidFill>
+                <a:latin typeface="Segoe UI" pitchFamily="34" charset="0"/>
+                <a:ea typeface="Segoe UI" pitchFamily="34" charset="-122"/>
+                <a:cs typeface="Segoe UI" pitchFamily="34" charset="-120"/>
+              </a:rPr>
+              <a:t>Dashboards must mirror how the organization decides - in three speeds</a:t>
+            </a:r>
+            <a:endParaRPr lang="en-US" sz="1600" dirty="0"/>
+          </a:p>
+        </p:txBody>
+      </p:sp>
+      <p:sp>
+        <p:nvSpPr>
+          <p:cNvPr id="7" name="Text 5"/>
+          <p:cNvSpPr/>
+          <p:nvPr/>
+        </p:nvSpPr>
+        <p:spPr>
+          <a:xfrm>
+            <a:off x="10698480" y="6382512"/>
+            <a:ext cx="1188720" cy="365760"/>
+          </a:xfrm>
+          <a:prstGeom prst="rect">
+            <a:avLst/>
+          </a:prstGeom>
+          <a:noFill/>
+          <a:ln/>
+        </p:spPr>
+        <p:txBody>
+          <a:bodyPr wrap="square" rtlCol="0" anchor="ctr"/>
+          <a:lstStyle/>
+          <a:p>
+            <a:pPr algn="r" indent="0" marL="0">
+              <a:buNone/>
+            </a:pPr>
+            <a:r>
+              <a:rPr lang="en-US" sz="1000" dirty="0">
+                <a:solidFill>
+                  <a:srgbClr val="64748B"/>
+                </a:solidFill>
+                <a:latin typeface="Consolas" pitchFamily="34" charset="0"/>
+                <a:ea typeface="Consolas" pitchFamily="34" charset="-122"/>
+                <a:cs typeface="Consolas" pitchFamily="34" charset="-120"/>
+              </a:rPr>
+              <a:t>13 / 14</a:t>
+            </a:r>
+            <a:endParaRPr lang="en-US" sz="1000" dirty="0"/>
+          </a:p>
+        </p:txBody>
+      </p:sp>
+    </p:spTree>
+  </p:cSld>
+  <p:clrMapOvr>
+    <a:masterClrMapping/>
+  </p:clrMapOvr>
+</p:sld>
+</file>
+
+<file path=ppt/slides/slide14.xml><?xml version="1.0" encoding="utf-8"?>
+<p:sld xmlns:a="http://schemas.openxmlformats.org/drawingml/2006/main" xmlns:r="http://schemas.openxmlformats.org/officeDocument/2006/relationships" xmlns:p="http://schemas.openxmlformats.org/presentationml/2006/main">
+  <p:cSld name="Slide 14">
+    <p:bg>
+      <p:bgPr>
+        <a:solidFill>
+          <a:srgbClr val="0A0C12"/>
+        </a:solidFill>
+      </p:bgPr>
+    </p:bg>
+    <p:spTree>
+      <p:nvGrpSpPr>
+        <p:cNvPr id="1" name=""/>
+        <p:cNvGrpSpPr/>
+        <p:nvPr/>
+      </p:nvGrpSpPr>
+      <p:grpSpPr>
+        <a:xfrm>
+          <a:off x="0" y="0"/>
+          <a:ext cx="0" cy="0"/>
+          <a:chOff x="0" y="0"/>
+          <a:chExt cx="0" cy="0"/>
+        </a:xfrm>
+      </p:grpSpPr>
+      <p:sp>
+        <p:nvSpPr>
+          <p:cNvPr id="2" name="Shape 0"/>
+          <p:cNvSpPr/>
+          <p:nvPr/>
+        </p:nvSpPr>
+        <p:spPr>
+          <a:xfrm>
+            <a:off x="0" y="0"/>
+            <a:ext cx="7680960" cy="64008"/>
+          </a:xfrm>
+          <a:prstGeom prst="rect">
+            <a:avLst/>
+          </a:prstGeom>
+          <a:solidFill>
+            <a:srgbClr val="3B82F6"/>
+          </a:solidFill>
+          <a:ln/>
+        </p:spPr>
+      </p:sp>
+      <p:sp>
+        <p:nvSpPr>
+          <p:cNvPr id="3" name="Shape 1"/>
+          <p:cNvSpPr/>
+          <p:nvPr/>
+        </p:nvSpPr>
+        <p:spPr>
+          <a:xfrm>
+            <a:off x="7680960" y="0"/>
+            <a:ext cx="4510735" cy="64008"/>
+          </a:xfrm>
+          <a:prstGeom prst="rect">
+            <a:avLst/>
+          </a:prstGeom>
+          <a:solidFill>
+            <a:srgbClr val="06B6D4"/>
+          </a:solidFill>
+          <a:ln/>
+        </p:spPr>
+      </p:sp>
+      <p:sp>
+        <p:nvSpPr>
+          <p:cNvPr id="4" name="Text 2"/>
+          <p:cNvSpPr/>
+          <p:nvPr/>
+        </p:nvSpPr>
+        <p:spPr>
+          <a:xfrm>
+            <a:off x="822960" y="1417320"/>
+            <a:ext cx="10515600" cy="411480"/>
+          </a:xfrm>
+          <a:prstGeom prst="rect">
+            <a:avLst/>
+          </a:prstGeom>
+          <a:noFill/>
+          <a:ln/>
+        </p:spPr>
+        <p:txBody>
+          <a:bodyPr wrap="square" rtlCol="0" anchor="ctr"/>
+          <a:lstStyle/>
+          <a:p>
+            <a:pPr algn="ctr" indent="0" marL="0">
+              <a:buNone/>
+            </a:pPr>
+            <a:r>
+              <a:rPr lang="en-US" sz="1300" spc="400" kern="0" dirty="0">
+                <a:solidFill>
+                  <a:srgbClr val="06B6D4"/>
+                </a:solidFill>
+                <a:latin typeface="Consolas" pitchFamily="34" charset="0"/>
+                <a:ea typeface="Consolas" pitchFamily="34" charset="-122"/>
+                <a:cs typeface="Consolas" pitchFamily="34" charset="-120"/>
+              </a:rPr>
+              <a:t>WORK WITH ME</a:t>
+            </a:r>
+            <a:endParaRPr lang="en-US" sz="1300" dirty="0"/>
+          </a:p>
+        </p:txBody>
+      </p:sp>
+      <p:sp>
+        <p:nvSpPr>
+          <p:cNvPr id="5" name="Text 3"/>
+          <p:cNvSpPr/>
+          <p:nvPr/>
+        </p:nvSpPr>
+        <p:spPr>
+          <a:xfrm>
+            <a:off x="822960" y="1920240"/>
+            <a:ext cx="10515600" cy="1371600"/>
+          </a:xfrm>
+          <a:prstGeom prst="rect">
+            <a:avLst/>
+          </a:prstGeom>
+          <a:noFill/>
+          <a:ln/>
+        </p:spPr>
+        <p:txBody>
+          <a:bodyPr wrap="square" rtlCol="0" anchor="ctr"/>
+          <a:lstStyle/>
+          <a:p>
+            <a:pPr algn="ctr" indent="0" marL="0">
+              <a:buNone/>
+            </a:pPr>
+            <a:r>
+              <a:rPr lang="en-US" sz="3200" b="1" dirty="0">
+                <a:solidFill>
+                  <a:srgbClr val="FFFFFF"/>
+                </a:solidFill>
+                <a:latin typeface="Segoe UI" pitchFamily="34" charset="0"/>
+                <a:ea typeface="Segoe UI" pitchFamily="34" charset="-122"/>
+                <a:cs typeface="Segoe UI" pitchFamily="34" charset="-120"/>
+              </a:rPr>
+              <a:t>Need customer analytics that ends in decisions?</a:t>
+            </a:r>
+            <a:endParaRPr lang="en-US" sz="3200" dirty="0"/>
+          </a:p>
+        </p:txBody>
+      </p:sp>
+      <p:sp>
+        <p:nvSpPr>
+          <p:cNvPr id="6" name="Text 4"/>
+          <p:cNvSpPr/>
+          <p:nvPr/>
+        </p:nvSpPr>
+        <p:spPr>
+          <a:xfrm>
+            <a:off x="2011680" y="3429000"/>
+            <a:ext cx="8183880" cy="1554480"/>
+          </a:xfrm>
+          <a:prstGeom prst="rect">
+            <a:avLst/>
+          </a:prstGeom>
+          <a:noFill/>
+          <a:ln/>
+        </p:spPr>
+        <p:txBody>
+          <a:bodyPr wrap="square" rtlCol="0" anchor="t"/>
+          <a:lstStyle/>
+          <a:p>
+            <a:pPr algn="ctr" indent="0" marL="0">
+              <a:spcAft>
+                <a:spcPts val="800"/>
+              </a:spcAft>
+              <a:buNone/>
+            </a:pPr>
+            <a:r>
+              <a:rPr lang="en-US" sz="1500" dirty="0">
+                <a:solidFill>
+                  <a:srgbClr val="CBD5E1"/>
+                </a:solidFill>
+                <a:latin typeface="Segoe UI" pitchFamily="34" charset="0"/>
+                <a:ea typeface="Segoe UI" pitchFamily="34" charset="-122"/>
+                <a:cs typeface="Segoe UI" pitchFamily="34" charset="-120"/>
+              </a:rPr>
+              <a:t>Segmentation, churn, and adoption analysis anchored to actions, not just clusters</a:t>
+            </a:r>
+            <a:pPr algn="ctr" indent="0" marL="0">
+              <a:spcAft>
+                <a:spcPts val="800"/>
+              </a:spcAft>
+              <a:buNone/>
+            </a:pPr>
+            <a:r>
+              <a:rPr lang="en-US" sz="1500" dirty="0">
+                <a:solidFill>
+                  <a:srgbClr val="CBD5E1"/>
+                </a:solidFill>
+                <a:latin typeface="Segoe UI" pitchFamily="34" charset="0"/>
+                <a:ea typeface="Segoe UI" pitchFamily="34" charset="-122"/>
+                <a:cs typeface="Segoe UI" pitchFamily="34" charset="-120"/>
+              </a:rPr>
+              <a:t>Python, SQL, and Tableau, delivered the way executives and reviewers both accept</a:t>
+            </a:r>
+            <a:pPr algn="ctr" indent="0" marL="0">
+              <a:spcAft>
+                <a:spcPts val="800"/>
+              </a:spcAft>
+              <a:buNone/>
+            </a:pPr>
+            <a:r>
+              <a:rPr lang="en-US" sz="1500" dirty="0">
+                <a:solidFill>
+                  <a:srgbClr val="CBD5E1"/>
+                </a:solidFill>
+                <a:latin typeface="Segoe UI" pitchFamily="34" charset="0"/>
+                <a:ea typeface="Segoe UI" pitchFamily="34" charset="-122"/>
+                <a:cs typeface="Segoe UI" pitchFamily="34" charset="-120"/>
+              </a:rPr>
+              <a:t>Available for freelance and contract engagements worldwide</a:t>
+            </a:r>
+            <a:endParaRPr lang="en-US" sz="1500" dirty="0"/>
+          </a:p>
+        </p:txBody>
+      </p:sp>
+      <p:sp>
+        <p:nvSpPr>
+          <p:cNvPr id="7" name="Shape 5"/>
+          <p:cNvSpPr/>
+          <p:nvPr/>
+        </p:nvSpPr>
+        <p:spPr>
+          <a:xfrm>
+            <a:off x="3566160" y="5212080"/>
+            <a:ext cx="5074920" cy="0"/>
+          </a:xfrm>
+          <a:prstGeom prst="line">
+            <a:avLst/>
+          </a:prstGeom>
+          <a:noFill/>
+          <a:ln w="25400">
+            <a:solidFill>
+              <a:srgbClr val="3B82F6"/>
+            </a:solidFill>
+            <a:prstDash val="solid"/>
+          </a:ln>
+        </p:spPr>
+      </p:sp>
+      <p:sp>
+        <p:nvSpPr>
+          <p:cNvPr id="8" name="Text 6"/>
+          <p:cNvSpPr/>
+          <p:nvPr/>
+        </p:nvSpPr>
+        <p:spPr>
+          <a:xfrm>
+            <a:off x="822960" y="5376672"/>
+            <a:ext cx="10515600" cy="457200"/>
+          </a:xfrm>
+          <a:prstGeom prst="rect">
+            <a:avLst/>
+          </a:prstGeom>
+          <a:noFill/>
+          <a:ln/>
+        </p:spPr>
+        <p:txBody>
+          <a:bodyPr wrap="square" rtlCol="0" anchor="ctr"/>
+          <a:lstStyle/>
+          <a:p>
+            <a:pPr algn="ctr" indent="0" marL="0">
+              <a:buNone/>
+            </a:pPr>
+            <a:r>
+              <a:rPr lang="en-US" sz="1350" b="1" dirty="0">
+                <a:solidFill>
+                  <a:srgbClr val="06B6D4"/>
+                </a:solidFill>
+                <a:latin typeface="Consolas" pitchFamily="34" charset="0"/>
+                <a:ea typeface="Consolas" pitchFamily="34" charset="-122"/>
+                <a:cs typeface="Consolas" pitchFamily="34" charset="-120"/>
+              </a:rPr>
+              <a:t>rezalianvatiady.github.io · github.com/rezalianvatiady</a:t>
+            </a:r>
+            <a:endParaRPr lang="en-US" sz="1350" dirty="0"/>
+          </a:p>
+        </p:txBody>
+      </p:sp>
+      <p:sp>
+        <p:nvSpPr>
+          <p:cNvPr id="9" name="Text 7"/>
+          <p:cNvSpPr/>
+          <p:nvPr/>
+        </p:nvSpPr>
+        <p:spPr>
+          <a:xfrm>
+            <a:off x="10698480" y="6382512"/>
+            <a:ext cx="1188720" cy="365760"/>
+          </a:xfrm>
+          <a:prstGeom prst="rect">
+            <a:avLst/>
+          </a:prstGeom>
+          <a:noFill/>
+          <a:ln/>
+        </p:spPr>
+        <p:txBody>
+          <a:bodyPr wrap="square" rtlCol="0" anchor="ctr"/>
+          <a:lstStyle/>
+          <a:p>
+            <a:pPr algn="r" indent="0" marL="0">
+              <a:buNone/>
+            </a:pPr>
+            <a:r>
+              <a:rPr lang="en-US" sz="1000" dirty="0">
+                <a:solidFill>
+                  <a:srgbClr val="64748B"/>
+                </a:solidFill>
+                <a:latin typeface="Consolas" pitchFamily="34" charset="0"/>
+                <a:ea typeface="Consolas" pitchFamily="34" charset="-122"/>
+                <a:cs typeface="Consolas" pitchFamily="34" charset="-120"/>
+              </a:rPr>
+              <a:t>14 / 14</a:t>
             </a:r>
             <a:endParaRPr lang="en-US" sz="1000" dirty="0"/>
           </a:p>
@@ -1710,7 +5346,7 @@
                 <a:ea typeface="Consolas" pitchFamily="34" charset="-122"/>
                 <a:cs typeface="Consolas" pitchFamily="34" charset="-120"/>
               </a:rPr>
-              <a:t>CONTEXT</a:t>
+              <a:t>AGENDA</a:t>
             </a:r>
             <a:endParaRPr lang="en-US" sz="1200" dirty="0"/>
           </a:p>
@@ -1724,8 +5360,8 @@
         </p:nvSpPr>
         <p:spPr>
           <a:xfrm>
-            <a:off x="822960" y="960120"/>
-            <a:ext cx="10515600" cy="868680"/>
+            <a:off x="822960" y="914400"/>
+            <a:ext cx="10561320" cy="868680"/>
           </a:xfrm>
           <a:prstGeom prst="rect">
             <a:avLst/>
@@ -1741,7 +5377,7 @@
               <a:buNone/>
             </a:pPr>
             <a:r>
-              <a:rPr lang="en-US" sz="3000" b="1" dirty="0">
+              <a:rPr lang="en-US" sz="2700" b="1" dirty="0">
                 <a:solidFill>
                   <a:srgbClr val="FFFFFF"/>
                 </a:solidFill>
@@ -1749,45 +5385,102 @@
                 <a:ea typeface="Segoe UI" pitchFamily="34" charset="-122"/>
                 <a:cs typeface="Segoe UI" pitchFamily="34" charset="-120"/>
               </a:rPr>
-              <a:t>The project</a:t>
-            </a:r>
-            <a:endParaRPr lang="en-US" sz="3000" dirty="0"/>
-          </a:p>
-        </p:txBody>
-      </p:sp>
-      <p:sp>
-        <p:nvSpPr>
-          <p:cNvPr id="6" name="Text 4"/>
-          <p:cNvSpPr/>
-          <p:nvPr/>
-        </p:nvSpPr>
-        <p:spPr>
-          <a:xfrm>
-            <a:off x="868680" y="2057400"/>
-            <a:ext cx="10424160" cy="3566160"/>
-          </a:xfrm>
-          <a:prstGeom prst="rect">
-            <a:avLst/>
-          </a:prstGeom>
-          <a:noFill/>
-          <a:ln/>
-        </p:spPr>
-        <p:txBody>
-          <a:bodyPr wrap="square" rtlCol="0" anchor="t"/>
-          <a:lstStyle/>
-          <a:p>
-            <a:pPr marL="342900" indent="-342900">
-              <a:lnSpc>
-                <a:spcPct val="115000"/>
-              </a:lnSpc>
-              <a:spcAft>
-                <a:spcPts val="1000"/>
-              </a:spcAft>
-              <a:buSzPct val="100000"/>
-              <a:buChar char="▸"/>
-            </a:pPr>
-            <a:r>
-              <a:rPr lang="en-US" sz="1600" dirty="0">
+              <a:t>What this deck covers</a:t>
+            </a:r>
+            <a:endParaRPr lang="en-US" sz="2700" dirty="0"/>
+          </a:p>
+        </p:txBody>
+      </p:sp>
+      <p:sp>
+        <p:nvSpPr>
+          <p:cNvPr id="6" name="Shape 4"/>
+          <p:cNvSpPr/>
+          <p:nvPr/>
+        </p:nvSpPr>
+        <p:spPr>
+          <a:xfrm>
+            <a:off x="868680" y="2112264"/>
+            <a:ext cx="420624" cy="420624"/>
+          </a:xfrm>
+          <a:prstGeom prst="ellipse">
+            <a:avLst/>
+          </a:prstGeom>
+          <a:solidFill>
+            <a:srgbClr val="111A2E"/>
+          </a:solidFill>
+          <a:ln w="19050">
+            <a:solidFill>
+              <a:srgbClr val="3B82F6"/>
+            </a:solidFill>
+            <a:prstDash val="solid"/>
+          </a:ln>
+        </p:spPr>
+      </p:sp>
+      <p:sp>
+        <p:nvSpPr>
+          <p:cNvPr id="7" name="Text 5"/>
+          <p:cNvSpPr/>
+          <p:nvPr/>
+        </p:nvSpPr>
+        <p:spPr>
+          <a:xfrm>
+            <a:off x="868680" y="2112264"/>
+            <a:ext cx="420624" cy="420624"/>
+          </a:xfrm>
+          <a:prstGeom prst="rect">
+            <a:avLst/>
+          </a:prstGeom>
+          <a:noFill/>
+          <a:ln/>
+        </p:spPr>
+        <p:txBody>
+          <a:bodyPr wrap="square" rtlCol="0" anchor="ctr"/>
+          <a:lstStyle/>
+          <a:p>
+            <a:pPr algn="ctr" indent="0" marL="0">
+              <a:buNone/>
+            </a:pPr>
+            <a:r>
+              <a:rPr lang="en-US" sz="1300" b="1" dirty="0">
+                <a:solidFill>
+                  <a:srgbClr val="3B82F6"/>
+                </a:solidFill>
+                <a:latin typeface="Consolas" pitchFamily="34" charset="0"/>
+                <a:ea typeface="Consolas" pitchFamily="34" charset="-122"/>
+                <a:cs typeface="Consolas" pitchFamily="34" charset="-120"/>
+              </a:rPr>
+              <a:t>1</a:t>
+            </a:r>
+            <a:endParaRPr lang="en-US" sz="1300" dirty="0"/>
+          </a:p>
+        </p:txBody>
+      </p:sp>
+      <p:sp>
+        <p:nvSpPr>
+          <p:cNvPr id="8" name="Text 6"/>
+          <p:cNvSpPr/>
+          <p:nvPr/>
+        </p:nvSpPr>
+        <p:spPr>
+          <a:xfrm>
+            <a:off x="1435608" y="2057400"/>
+            <a:ext cx="4480560" cy="822960"/>
+          </a:xfrm>
+          <a:prstGeom prst="rect">
+            <a:avLst/>
+          </a:prstGeom>
+          <a:noFill/>
+          <a:ln/>
+        </p:spPr>
+        <p:txBody>
+          <a:bodyPr wrap="square" rtlCol="0" anchor="ctr"/>
+          <a:lstStyle/>
+          <a:p>
+            <a:pPr indent="0" marL="0">
+              <a:buNone/>
+            </a:pPr>
+            <a:r>
+              <a:rPr lang="en-US" sz="1450" dirty="0">
                 <a:solidFill>
                   <a:srgbClr val="CBD5E1"/>
                 </a:solidFill>
@@ -1795,23 +5488,102 @@
                 <a:ea typeface="Segoe UI" pitchFamily="34" charset="-122"/>
                 <a:cs typeface="Segoe UI" pitchFamily="34" charset="-120"/>
               </a:rPr>
-              <a:t>Freelance data analytics: Aug 2022 - Sep 2022</a:t>
-            </a:r>
-            <a:endParaRPr lang="en-US" sz="1600" dirty="0"/>
-          </a:p>
-          <a:p>
-            <a:pPr marL="342900" indent="-342900">
-              <a:lnSpc>
-                <a:spcPct val="115000"/>
-              </a:lnSpc>
-              <a:spcAft>
-                <a:spcPts val="1000"/>
-              </a:spcAft>
-              <a:buSzPct val="100000"/>
-              <a:buChar char="▸"/>
-            </a:pPr>
-            <a:r>
-              <a:rPr lang="en-US" sz="1600" dirty="0">
+              <a:t>The engagement: RevoU final project reviewed by the Tokopedia Analytics team</a:t>
+            </a:r>
+            <a:endParaRPr lang="en-US" sz="1450" dirty="0"/>
+          </a:p>
+        </p:txBody>
+      </p:sp>
+      <p:sp>
+        <p:nvSpPr>
+          <p:cNvPr id="9" name="Shape 7"/>
+          <p:cNvSpPr/>
+          <p:nvPr/>
+        </p:nvSpPr>
+        <p:spPr>
+          <a:xfrm>
+            <a:off x="868680" y="3044952"/>
+            <a:ext cx="420624" cy="420624"/>
+          </a:xfrm>
+          <a:prstGeom prst="ellipse">
+            <a:avLst/>
+          </a:prstGeom>
+          <a:solidFill>
+            <a:srgbClr val="111A2E"/>
+          </a:solidFill>
+          <a:ln w="19050">
+            <a:solidFill>
+              <a:srgbClr val="06B6D4"/>
+            </a:solidFill>
+            <a:prstDash val="solid"/>
+          </a:ln>
+        </p:spPr>
+      </p:sp>
+      <p:sp>
+        <p:nvSpPr>
+          <p:cNvPr id="10" name="Text 8"/>
+          <p:cNvSpPr/>
+          <p:nvPr/>
+        </p:nvSpPr>
+        <p:spPr>
+          <a:xfrm>
+            <a:off x="868680" y="3044952"/>
+            <a:ext cx="420624" cy="420624"/>
+          </a:xfrm>
+          <a:prstGeom prst="rect">
+            <a:avLst/>
+          </a:prstGeom>
+          <a:noFill/>
+          <a:ln/>
+        </p:spPr>
+        <p:txBody>
+          <a:bodyPr wrap="square" rtlCol="0" anchor="ctr"/>
+          <a:lstStyle/>
+          <a:p>
+            <a:pPr algn="ctr" indent="0" marL="0">
+              <a:buNone/>
+            </a:pPr>
+            <a:r>
+              <a:rPr lang="en-US" sz="1300" b="1" dirty="0">
+                <a:solidFill>
+                  <a:srgbClr val="06B6D4"/>
+                </a:solidFill>
+                <a:latin typeface="Consolas" pitchFamily="34" charset="0"/>
+                <a:ea typeface="Consolas" pitchFamily="34" charset="-122"/>
+                <a:cs typeface="Consolas" pitchFamily="34" charset="-120"/>
+              </a:rPr>
+              <a:t>2</a:t>
+            </a:r>
+            <a:endParaRPr lang="en-US" sz="1300" dirty="0"/>
+          </a:p>
+        </p:txBody>
+      </p:sp>
+      <p:sp>
+        <p:nvSpPr>
+          <p:cNvPr id="11" name="Text 9"/>
+          <p:cNvSpPr/>
+          <p:nvPr/>
+        </p:nvSpPr>
+        <p:spPr>
+          <a:xfrm>
+            <a:off x="1435608" y="2990088"/>
+            <a:ext cx="4480560" cy="822960"/>
+          </a:xfrm>
+          <a:prstGeom prst="rect">
+            <a:avLst/>
+          </a:prstGeom>
+          <a:noFill/>
+          <a:ln/>
+        </p:spPr>
+        <p:txBody>
+          <a:bodyPr wrap="square" rtlCol="0" anchor="ctr"/>
+          <a:lstStyle/>
+          <a:p>
+            <a:pPr indent="0" marL="0">
+              <a:buNone/>
+            </a:pPr>
+            <a:r>
+              <a:rPr lang="en-US" sz="1450" dirty="0">
                 <a:solidFill>
                   <a:srgbClr val="CBD5E1"/>
                 </a:solidFill>
@@ -1819,23 +5591,102 @@
                 <a:ea typeface="Segoe UI" pitchFamily="34" charset="-122"/>
                 <a:cs typeface="Segoe UI" pitchFamily="34" charset="-120"/>
               </a:rPr>
-              <a:t>Final project on real business data, reviewed by Tokopedia Analytics Team</a:t>
-            </a:r>
-            <a:endParaRPr lang="en-US" sz="1600" dirty="0"/>
-          </a:p>
-          <a:p>
-            <a:pPr marL="342900" indent="-342900">
-              <a:lnSpc>
-                <a:spcPct val="115000"/>
-              </a:lnSpc>
-              <a:spcAft>
-                <a:spcPts val="1000"/>
-              </a:spcAft>
-              <a:buSzPct val="100000"/>
-              <a:buChar char="▸"/>
-            </a:pPr>
-            <a:r>
-              <a:rPr lang="en-US" sz="1600" dirty="0">
+              <a:t>Segmentation as a hypothesis, not a clustering job</a:t>
+            </a:r>
+            <a:endParaRPr lang="en-US" sz="1450" dirty="0"/>
+          </a:p>
+        </p:txBody>
+      </p:sp>
+      <p:sp>
+        <p:nvSpPr>
+          <p:cNvPr id="12" name="Shape 10"/>
+          <p:cNvSpPr/>
+          <p:nvPr/>
+        </p:nvSpPr>
+        <p:spPr>
+          <a:xfrm>
+            <a:off x="868680" y="3977640"/>
+            <a:ext cx="420624" cy="420624"/>
+          </a:xfrm>
+          <a:prstGeom prst="ellipse">
+            <a:avLst/>
+          </a:prstGeom>
+          <a:solidFill>
+            <a:srgbClr val="111A2E"/>
+          </a:solidFill>
+          <a:ln w="19050">
+            <a:solidFill>
+              <a:srgbClr val="3B82F6"/>
+            </a:solidFill>
+            <a:prstDash val="solid"/>
+          </a:ln>
+        </p:spPr>
+      </p:sp>
+      <p:sp>
+        <p:nvSpPr>
+          <p:cNvPr id="13" name="Text 11"/>
+          <p:cNvSpPr/>
+          <p:nvPr/>
+        </p:nvSpPr>
+        <p:spPr>
+          <a:xfrm>
+            <a:off x="868680" y="3977640"/>
+            <a:ext cx="420624" cy="420624"/>
+          </a:xfrm>
+          <a:prstGeom prst="rect">
+            <a:avLst/>
+          </a:prstGeom>
+          <a:noFill/>
+          <a:ln/>
+        </p:spPr>
+        <p:txBody>
+          <a:bodyPr wrap="square" rtlCol="0" anchor="ctr"/>
+          <a:lstStyle/>
+          <a:p>
+            <a:pPr algn="ctr" indent="0" marL="0">
+              <a:buNone/>
+            </a:pPr>
+            <a:r>
+              <a:rPr lang="en-US" sz="1300" b="1" dirty="0">
+                <a:solidFill>
+                  <a:srgbClr val="3B82F6"/>
+                </a:solidFill>
+                <a:latin typeface="Consolas" pitchFamily="34" charset="0"/>
+                <a:ea typeface="Consolas" pitchFamily="34" charset="-122"/>
+                <a:cs typeface="Consolas" pitchFamily="34" charset="-120"/>
+              </a:rPr>
+              <a:t>3</a:t>
+            </a:r>
+            <a:endParaRPr lang="en-US" sz="1300" dirty="0"/>
+          </a:p>
+        </p:txBody>
+      </p:sp>
+      <p:sp>
+        <p:nvSpPr>
+          <p:cNvPr id="14" name="Text 12"/>
+          <p:cNvSpPr/>
+          <p:nvPr/>
+        </p:nvSpPr>
+        <p:spPr>
+          <a:xfrm>
+            <a:off x="1435608" y="3922776"/>
+            <a:ext cx="4480560" cy="822960"/>
+          </a:xfrm>
+          <a:prstGeom prst="rect">
+            <a:avLst/>
+          </a:prstGeom>
+          <a:noFill/>
+          <a:ln/>
+        </p:spPr>
+        <p:txBody>
+          <a:bodyPr wrap="square" rtlCol="0" anchor="ctr"/>
+          <a:lstStyle/>
+          <a:p>
+            <a:pPr indent="0" marL="0">
+              <a:buNone/>
+            </a:pPr>
+            <a:r>
+              <a:rPr lang="en-US" sz="1450" dirty="0">
                 <a:solidFill>
                   <a:srgbClr val="CBD5E1"/>
                 </a:solidFill>
@@ -1843,23 +5694,102 @@
                 <a:ea typeface="Segoe UI" pitchFamily="34" charset="-122"/>
                 <a:cs typeface="Segoe UI" pitchFamily="34" charset="-120"/>
               </a:rPr>
-              <a:t>Toolkit: Python, SQL, Tableau</a:t>
-            </a:r>
-            <a:endParaRPr lang="en-US" sz="1600" dirty="0"/>
-          </a:p>
-          <a:p>
-            <a:pPr marL="342900" indent="-342900">
-              <a:lnSpc>
-                <a:spcPct val="115000"/>
-              </a:lnSpc>
-              <a:spcAft>
-                <a:spcPts val="1000"/>
-              </a:spcAft>
-              <a:buSzPct val="100000"/>
-              <a:buChar char="▸"/>
-            </a:pPr>
-            <a:r>
-              <a:rPr lang="en-US" sz="1600" dirty="0">
+              <a:t>Churn as behavioral drift with a memory</a:t>
+            </a:r>
+            <a:endParaRPr lang="en-US" sz="1450" dirty="0"/>
+          </a:p>
+        </p:txBody>
+      </p:sp>
+      <p:sp>
+        <p:nvSpPr>
+          <p:cNvPr id="15" name="Shape 13"/>
+          <p:cNvSpPr/>
+          <p:nvPr/>
+        </p:nvSpPr>
+        <p:spPr>
+          <a:xfrm>
+            <a:off x="6355080" y="2112264"/>
+            <a:ext cx="420624" cy="420624"/>
+          </a:xfrm>
+          <a:prstGeom prst="ellipse">
+            <a:avLst/>
+          </a:prstGeom>
+          <a:solidFill>
+            <a:srgbClr val="111A2E"/>
+          </a:solidFill>
+          <a:ln w="19050">
+            <a:solidFill>
+              <a:srgbClr val="06B6D4"/>
+            </a:solidFill>
+            <a:prstDash val="solid"/>
+          </a:ln>
+        </p:spPr>
+      </p:sp>
+      <p:sp>
+        <p:nvSpPr>
+          <p:cNvPr id="16" name="Text 14"/>
+          <p:cNvSpPr/>
+          <p:nvPr/>
+        </p:nvSpPr>
+        <p:spPr>
+          <a:xfrm>
+            <a:off x="6355080" y="2112264"/>
+            <a:ext cx="420624" cy="420624"/>
+          </a:xfrm>
+          <a:prstGeom prst="rect">
+            <a:avLst/>
+          </a:prstGeom>
+          <a:noFill/>
+          <a:ln/>
+        </p:spPr>
+        <p:txBody>
+          <a:bodyPr wrap="square" rtlCol="0" anchor="ctr"/>
+          <a:lstStyle/>
+          <a:p>
+            <a:pPr algn="ctr" indent="0" marL="0">
+              <a:buNone/>
+            </a:pPr>
+            <a:r>
+              <a:rPr lang="en-US" sz="1300" b="1" dirty="0">
+                <a:solidFill>
+                  <a:srgbClr val="06B6D4"/>
+                </a:solidFill>
+                <a:latin typeface="Consolas" pitchFamily="34" charset="0"/>
+                <a:ea typeface="Consolas" pitchFamily="34" charset="-122"/>
+                <a:cs typeface="Consolas" pitchFamily="34" charset="-120"/>
+              </a:rPr>
+              <a:t>4</a:t>
+            </a:r>
+            <a:endParaRPr lang="en-US" sz="1300" dirty="0"/>
+          </a:p>
+        </p:txBody>
+      </p:sp>
+      <p:sp>
+        <p:nvSpPr>
+          <p:cNvPr id="17" name="Text 15"/>
+          <p:cNvSpPr/>
+          <p:nvPr/>
+        </p:nvSpPr>
+        <p:spPr>
+          <a:xfrm>
+            <a:off x="6922008" y="2057400"/>
+            <a:ext cx="4480560" cy="822960"/>
+          </a:xfrm>
+          <a:prstGeom prst="rect">
+            <a:avLst/>
+          </a:prstGeom>
+          <a:noFill/>
+          <a:ln/>
+        </p:spPr>
+        <p:txBody>
+          <a:bodyPr wrap="square" rtlCol="0" anchor="ctr"/>
+          <a:lstStyle/>
+          <a:p>
+            <a:pPr indent="0" marL="0">
+              <a:buNone/>
+            </a:pPr>
+            <a:r>
+              <a:rPr lang="en-US" sz="1450" dirty="0">
                 <a:solidFill>
                   <a:srgbClr val="CBD5E1"/>
                 </a:solidFill>
@@ -1867,22 +5797,47 @@
                 <a:ea typeface="Segoe UI" pitchFamily="34" charset="-122"/>
                 <a:cs typeface="Segoe UI" pitchFamily="34" charset="-120"/>
               </a:rPr>
-              <a:t>Focus: segmentation, churn, feature adoption, KPI dashboards</a:t>
-            </a:r>
-            <a:endParaRPr lang="en-US" sz="1600" dirty="0"/>
-          </a:p>
-        </p:txBody>
-      </p:sp>
-      <p:sp>
-        <p:nvSpPr>
-          <p:cNvPr id="7" name="Text 5"/>
-          <p:cNvSpPr/>
-          <p:nvPr/>
-        </p:nvSpPr>
-        <p:spPr>
-          <a:xfrm>
-            <a:off x="10698480" y="6355080"/>
-            <a:ext cx="1188720" cy="365760"/>
+              <a:t>Feature adoption: launch curves versus retention outcomes</a:t>
+            </a:r>
+            <a:endParaRPr lang="en-US" sz="1450" dirty="0"/>
+          </a:p>
+        </p:txBody>
+      </p:sp>
+      <p:sp>
+        <p:nvSpPr>
+          <p:cNvPr id="18" name="Shape 16"/>
+          <p:cNvSpPr/>
+          <p:nvPr/>
+        </p:nvSpPr>
+        <p:spPr>
+          <a:xfrm>
+            <a:off x="6355080" y="3044952"/>
+            <a:ext cx="420624" cy="420624"/>
+          </a:xfrm>
+          <a:prstGeom prst="ellipse">
+            <a:avLst/>
+          </a:prstGeom>
+          <a:solidFill>
+            <a:srgbClr val="111A2E"/>
+          </a:solidFill>
+          <a:ln w="19050">
+            <a:solidFill>
+              <a:srgbClr val="3B82F6"/>
+            </a:solidFill>
+            <a:prstDash val="solid"/>
+          </a:ln>
+        </p:spPr>
+      </p:sp>
+      <p:sp>
+        <p:nvSpPr>
+          <p:cNvPr id="19" name="Text 17"/>
+          <p:cNvSpPr/>
+          <p:nvPr/>
+        </p:nvSpPr>
+        <p:spPr>
+          <a:xfrm>
+            <a:off x="6355080" y="3044952"/>
+            <a:ext cx="420624" cy="420624"/>
           </a:xfrm>
           <a:prstGeom prst="rect">
             <a:avLst/>
@@ -1894,19 +5849,97 @@
           <a:bodyPr wrap="square" rtlCol="0" anchor="ctr"/>
           <a:lstStyle/>
           <a:p>
-            <a:pPr algn="r" indent="0" marL="0">
+            <a:pPr algn="ctr" indent="0" marL="0">
               <a:buNone/>
             </a:pPr>
             <a:r>
-              <a:rPr lang="en-US" sz="1000" dirty="0">
-                <a:solidFill>
-                  <a:srgbClr val="64748B"/>
+              <a:rPr lang="en-US" sz="1300" b="1" dirty="0">
+                <a:solidFill>
+                  <a:srgbClr val="3B82F6"/>
                 </a:solidFill>
                 <a:latin typeface="Consolas" pitchFamily="34" charset="0"/>
                 <a:ea typeface="Consolas" pitchFamily="34" charset="-122"/>
                 <a:cs typeface="Consolas" pitchFamily="34" charset="-120"/>
               </a:rPr>
-              <a:t>2 / 7</a:t>
+              <a:t>5</a:t>
+            </a:r>
+            <a:endParaRPr lang="en-US" sz="1300" dirty="0"/>
+          </a:p>
+        </p:txBody>
+      </p:sp>
+      <p:sp>
+        <p:nvSpPr>
+          <p:cNvPr id="20" name="Text 18"/>
+          <p:cNvSpPr/>
+          <p:nvPr/>
+        </p:nvSpPr>
+        <p:spPr>
+          <a:xfrm>
+            <a:off x="6922008" y="2990088"/>
+            <a:ext cx="4480560" cy="822960"/>
+          </a:xfrm>
+          <a:prstGeom prst="rect">
+            <a:avLst/>
+          </a:prstGeom>
+          <a:noFill/>
+          <a:ln/>
+        </p:spPr>
+        <p:txBody>
+          <a:bodyPr wrap="square" rtlCol="0" anchor="ctr"/>
+          <a:lstStyle/>
+          <a:p>
+            <a:pPr indent="0" marL="0">
+              <a:buNone/>
+            </a:pPr>
+            <a:r>
+              <a:rPr lang="en-US" sz="1450" dirty="0">
+                <a:solidFill>
+                  <a:srgbClr val="CBD5E1"/>
+                </a:solidFill>
+                <a:latin typeface="Segoe UI" pitchFamily="34" charset="0"/>
+                <a:ea typeface="Segoe UI" pitchFamily="34" charset="-122"/>
+                <a:cs typeface="Segoe UI" pitchFamily="34" charset="-120"/>
+              </a:rPr>
+              <a:t>Dashboards and recommendations that mirror the organization</a:t>
+            </a:r>
+            <a:endParaRPr lang="en-US" sz="1450" dirty="0"/>
+          </a:p>
+        </p:txBody>
+      </p:sp>
+      <p:sp>
+        <p:nvSpPr>
+          <p:cNvPr id="21" name="Text 19"/>
+          <p:cNvSpPr/>
+          <p:nvPr/>
+        </p:nvSpPr>
+        <p:spPr>
+          <a:xfrm>
+            <a:off x="10698480" y="6382512"/>
+            <a:ext cx="1188720" cy="365760"/>
+          </a:xfrm>
+          <a:prstGeom prst="rect">
+            <a:avLst/>
+          </a:prstGeom>
+          <a:noFill/>
+          <a:ln/>
+        </p:spPr>
+        <p:txBody>
+          <a:bodyPr wrap="square" rtlCol="0" anchor="ctr"/>
+          <a:lstStyle/>
+          <a:p>
+            <a:pPr algn="r" indent="0" marL="0">
+              <a:buNone/>
+            </a:pPr>
+            <a:r>
+              <a:rPr lang="en-US" sz="1000" dirty="0">
+                <a:solidFill>
+                  <a:srgbClr val="64748B"/>
+                </a:solidFill>
+                <a:latin typeface="Consolas" pitchFamily="34" charset="0"/>
+                <a:ea typeface="Consolas" pitchFamily="34" charset="-122"/>
+                <a:cs typeface="Consolas" pitchFamily="34" charset="-120"/>
+              </a:rPr>
+              <a:t>2 / 14</a:t>
             </a:r>
             <a:endParaRPr lang="en-US" sz="1000" dirty="0"/>
           </a:p>
@@ -2017,7 +6050,7 @@
                 <a:ea typeface="Consolas" pitchFamily="34" charset="-122"/>
                 <a:cs typeface="Consolas" pitchFamily="34" charset="-120"/>
               </a:rPr>
-              <a:t>SEGMENTATION</a:t>
+              <a:t>THE ENGAGEMENT</a:t>
             </a:r>
             <a:endParaRPr lang="en-US" sz="1200" dirty="0"/>
           </a:p>
@@ -2031,8 +6064,8 @@
         </p:nvSpPr>
         <p:spPr>
           <a:xfrm>
-            <a:off x="822960" y="960120"/>
-            <a:ext cx="10515600" cy="868680"/>
+            <a:off x="822960" y="914400"/>
+            <a:ext cx="10561320" cy="868680"/>
           </a:xfrm>
           <a:prstGeom prst="rect">
             <a:avLst/>
@@ -2048,7 +6081,7 @@
               <a:buNone/>
             </a:pPr>
             <a:r>
-              <a:rPr lang="en-US" sz="3000" b="1" dirty="0">
+              <a:rPr lang="en-US" sz="2700" b="1" dirty="0">
                 <a:solidFill>
                   <a:srgbClr val="FFFFFF"/>
                 </a:solidFill>
@@ -2056,9 +6089,9 @@
                 <a:ea typeface="Segoe UI" pitchFamily="34" charset="-122"/>
                 <a:cs typeface="Segoe UI" pitchFamily="34" charset="-120"/>
               </a:rPr>
-              <a:t>A hypothesis, not a clustering job</a:t>
-            </a:r>
-            <a:endParaRPr lang="en-US" sz="3000" dirty="0"/>
+              <a:t>Real data, external reviewers, positive evaluation</a:t>
+            </a:r>
+            <a:endParaRPr lang="en-US" sz="2700" dirty="0"/>
           </a:p>
         </p:txBody>
       </p:sp>
@@ -2070,7 +6103,7 @@
         </p:nvSpPr>
         <p:spPr>
           <a:xfrm>
-            <a:off x="868680" y="2057400"/>
+            <a:off x="868680" y="2011680"/>
             <a:ext cx="10424160" cy="3566160"/>
           </a:xfrm>
           <a:prstGeom prst="rect">
@@ -2085,10 +6118,10 @@
           <a:p>
             <a:pPr marL="342900" indent="-342900">
               <a:lnSpc>
-                <a:spcPct val="115000"/>
+                <a:spcPct val="112000"/>
               </a:lnSpc>
               <a:spcAft>
-                <a:spcPts val="1000"/>
+                <a:spcPts val="900"/>
               </a:spcAft>
               <a:buSzPct val="100000"/>
               <a:buChar char="▸"/>
@@ -2102,17 +6135,17 @@
                 <a:ea typeface="Segoe UI" pitchFamily="34" charset="-122"/>
                 <a:cs typeface="Segoe UI" pitchFamily="34" charset="-120"/>
               </a:rPr>
-              <a:t>Every segment must suggest a different action</a:t>
+              <a:t>Freelance data analytics engagement with RevoU, Aug 2022 - Sep 2022</a:t>
             </a:r>
             <a:endParaRPr lang="en-US" sz="1600" dirty="0"/>
           </a:p>
           <a:p>
             <a:pPr marL="342900" indent="-342900">
               <a:lnSpc>
-                <a:spcPct val="115000"/>
+                <a:spcPct val="112000"/>
               </a:lnSpc>
               <a:spcAft>
-                <a:spcPts val="1000"/>
+                <a:spcPts val="900"/>
               </a:spcAft>
               <a:buSzPct val="100000"/>
               <a:buChar char="▸"/>
@@ -2126,17 +6159,17 @@
                 <a:ea typeface="Segoe UI" pitchFamily="34" charset="-122"/>
                 <a:cs typeface="Segoe UI" pitchFamily="34" charset="-120"/>
               </a:rPr>
-              <a:t>k-means proposed; the narrative disposed</a:t>
+              <a:t>Final project on real e-commerce business data, evaluated by the Tokopedia Analytics team</a:t>
             </a:r>
             <a:endParaRPr lang="en-US" sz="1600" dirty="0"/>
           </a:p>
           <a:p>
             <a:pPr marL="342900" indent="-342900">
               <a:lnSpc>
-                <a:spcPct val="115000"/>
+                <a:spcPct val="112000"/>
               </a:lnSpc>
               <a:spcAft>
-                <a:spcPts val="1000"/>
+                <a:spcPts val="900"/>
               </a:spcAft>
               <a:buSzPct val="100000"/>
               <a:buChar char="▸"/>
@@ -2150,17 +6183,17 @@
                 <a:ea typeface="Segoe UI" pitchFamily="34" charset="-122"/>
                 <a:cs typeface="Segoe UI" pitchFamily="34" charset="-120"/>
               </a:rPr>
-              <a:t>Behavior stories beat demographic labels</a:t>
+              <a:t>Delivered with a positive evaluation from Tokopedia Analytics reviewers</a:t>
             </a:r>
             <a:endParaRPr lang="en-US" sz="1600" dirty="0"/>
           </a:p>
           <a:p>
             <a:pPr marL="342900" indent="-342900">
               <a:lnSpc>
-                <a:spcPct val="115000"/>
+                <a:spcPct val="112000"/>
               </a:lnSpc>
               <a:spcAft>
-                <a:spcPts val="1000"/>
+                <a:spcPts val="900"/>
               </a:spcAft>
               <a:buSzPct val="100000"/>
               <a:buChar char="▸"/>
@@ -2174,10 +6207,34 @@
                 <a:ea typeface="Segoe UI" pitchFamily="34" charset="-122"/>
                 <a:cs typeface="Segoe UI" pitchFamily="34" charset="-120"/>
               </a:rPr>
-              <a:t>If two segments get the same treatment, one is decoration</a:t>
+              <a:t>Toolkit: Python for analysis, SQL for extraction, Tableau for delivery</a:t>
             </a:r>
             <a:endParaRPr lang="en-US" sz="1600" dirty="0"/>
           </a:p>
+          <a:p>
+            <a:pPr marL="342900" indent="-342900">
+              <a:lnSpc>
+                <a:spcPct val="112000"/>
+              </a:lnSpc>
+              <a:spcAft>
+                <a:spcPts val="900"/>
+              </a:spcAft>
+              <a:buSzPct val="100000"/>
+              <a:buChar char="▸"/>
+            </a:pPr>
+            <a:r>
+              <a:rPr lang="en-US" sz="1600" dirty="0">
+                <a:solidFill>
+                  <a:srgbClr val="CBD5E1"/>
+                </a:solidFill>
+                <a:latin typeface="Segoe UI" pitchFamily="34" charset="0"/>
+                <a:ea typeface="Segoe UI" pitchFamily="34" charset="-122"/>
+                <a:cs typeface="Segoe UI" pitchFamily="34" charset="-120"/>
+              </a:rPr>
+              <a:t>Scope: segmentation, churn analysis, feature adoption, and KPI dashboards</a:t>
+            </a:r>
+            <a:endParaRPr lang="en-US" sz="1600" dirty="0"/>
+          </a:p>
         </p:txBody>
       </p:sp>
       <p:sp>
@@ -2188,7 +6245,7 @@
         </p:nvSpPr>
         <p:spPr>
           <a:xfrm>
-            <a:off x="10698480" y="6355080"/>
+            <a:off x="10698480" y="6382512"/>
             <a:ext cx="1188720" cy="365760"/>
           </a:xfrm>
           <a:prstGeom prst="rect">
@@ -2213,7 +6270,7 @@
                 <a:ea typeface="Consolas" pitchFamily="34" charset="-122"/>
                 <a:cs typeface="Consolas" pitchFamily="34" charset="-120"/>
               </a:rPr>
-              <a:t>3 / 7</a:t>
+              <a:t>3 / 14</a:t>
             </a:r>
             <a:endParaRPr lang="en-US" sz="1000" dirty="0"/>
           </a:p>
@@ -2324,7 +6381,7 @@
                 <a:ea typeface="Consolas" pitchFamily="34" charset="-122"/>
                 <a:cs typeface="Consolas" pitchFamily="34" charset="-120"/>
               </a:rPr>
-              <a:t>CHURN</a:t>
+              <a:t>THE BRIEF</a:t>
             </a:r>
             <a:endParaRPr lang="en-US" sz="1200" dirty="0"/>
           </a:p>
@@ -2338,8 +6395,8 @@
         </p:nvSpPr>
         <p:spPr>
           <a:xfrm>
-            <a:off x="822960" y="960120"/>
-            <a:ext cx="10515600" cy="868680"/>
+            <a:off x="822960" y="914400"/>
+            <a:ext cx="10561320" cy="868680"/>
           </a:xfrm>
           <a:prstGeom prst="rect">
             <a:avLst/>
@@ -2355,7 +6412,7 @@
               <a:buNone/>
             </a:pPr>
             <a:r>
-              <a:rPr lang="en-US" sz="3000" b="1" dirty="0">
+              <a:rPr lang="en-US" sz="2700" b="1" dirty="0">
                 <a:solidFill>
                   <a:srgbClr val="FFFFFF"/>
                 </a:solidFill>
@@ -2363,139 +6420,659 @@
                 <a:ea typeface="Segoe UI" pitchFamily="34" charset="-122"/>
                 <a:cs typeface="Segoe UI" pitchFamily="34" charset="-120"/>
               </a:rPr>
-              <a:t>Churn has a memory</a:t>
-            </a:r>
-            <a:endParaRPr lang="en-US" sz="3000" dirty="0"/>
-          </a:p>
-        </p:txBody>
-      </p:sp>
-      <p:sp>
-        <p:nvSpPr>
-          <p:cNvPr id="6" name="Text 4"/>
-          <p:cNvSpPr/>
-          <p:nvPr/>
-        </p:nvSpPr>
-        <p:spPr>
-          <a:xfrm>
-            <a:off x="868680" y="2057400"/>
-            <a:ext cx="10424160" cy="3566160"/>
-          </a:xfrm>
-          <a:prstGeom prst="rect">
-            <a:avLst/>
-          </a:prstGeom>
-          <a:noFill/>
-          <a:ln/>
-        </p:spPr>
-        <p:txBody>
-          <a:bodyPr wrap="square" rtlCol="0" anchor="t"/>
-          <a:lstStyle/>
-          <a:p>
-            <a:pPr marL="342900" indent="-342900">
-              <a:lnSpc>
-                <a:spcPct val="115000"/>
-              </a:lnSpc>
-              <a:spcAft>
-                <a:spcPts val="1000"/>
-              </a:spcAft>
-              <a:buSzPct val="100000"/>
-              <a:buChar char="▸"/>
-            </a:pPr>
-            <a:r>
-              <a:rPr lang="en-US" sz="1600" dirty="0">
-                <a:solidFill>
-                  <a:srgbClr val="CBD5E1"/>
+              <a:t>One dataset, four questions that mattered</a:t>
+            </a:r>
+            <a:endParaRPr lang="en-US" sz="2700" dirty="0"/>
+          </a:p>
+        </p:txBody>
+      </p:sp>
+      <p:sp>
+        <p:nvSpPr>
+          <p:cNvPr id="6" name="Shape 4"/>
+          <p:cNvSpPr/>
+          <p:nvPr/>
+        </p:nvSpPr>
+        <p:spPr>
+          <a:xfrm>
+            <a:off x="822960" y="2194560"/>
+            <a:ext cx="2423160" cy="2697480"/>
+          </a:xfrm>
+          <a:prstGeom prst="roundRect">
+            <a:avLst>
+              <a:gd name="adj" fmla="val 3019"/>
+            </a:avLst>
+          </a:prstGeom>
+          <a:solidFill>
+            <a:srgbClr val="111A2E"/>
+          </a:solidFill>
+          <a:ln w="12700">
+            <a:solidFill>
+              <a:srgbClr val="1E2D45"/>
+            </a:solidFill>
+            <a:prstDash val="solid"/>
+          </a:ln>
+        </p:spPr>
+      </p:sp>
+      <p:sp>
+        <p:nvSpPr>
+          <p:cNvPr id="7" name="Text 5"/>
+          <p:cNvSpPr/>
+          <p:nvPr/>
+        </p:nvSpPr>
+        <p:spPr>
+          <a:xfrm>
+            <a:off x="960120" y="2514600"/>
+            <a:ext cx="2148840" cy="914400"/>
+          </a:xfrm>
+          <a:prstGeom prst="rect">
+            <a:avLst/>
+          </a:prstGeom>
+          <a:noFill/>
+          <a:ln/>
+        </p:spPr>
+        <p:txBody>
+          <a:bodyPr wrap="square" rtlCol="0" anchor="ctr"/>
+          <a:lstStyle/>
+          <a:p>
+            <a:pPr algn="ctr" indent="0" marL="0">
+              <a:buNone/>
+            </a:pPr>
+            <a:r>
+              <a:rPr lang="en-US" sz="3800" b="1" dirty="0">
+                <a:solidFill>
+                  <a:srgbClr val="3B82F6"/>
                 </a:solidFill>
                 <a:latin typeface="Segoe UI" pitchFamily="34" charset="0"/>
                 <a:ea typeface="Segoe UI" pitchFamily="34" charset="-122"/>
                 <a:cs typeface="Segoe UI" pitchFamily="34" charset="-120"/>
               </a:rPr>
-              <a:t>Strongest signals were behavioral drift, not demographics</a:t>
-            </a:r>
-            <a:endParaRPr lang="en-US" sz="1600" dirty="0"/>
-          </a:p>
-          <a:p>
-            <a:pPr marL="342900" indent="-342900">
-              <a:lnSpc>
-                <a:spcPct val="115000"/>
-              </a:lnSpc>
-              <a:spcAft>
-                <a:spcPts val="1000"/>
-              </a:spcAft>
-              <a:buSzPct val="100000"/>
-              <a:buChar char="▸"/>
-            </a:pPr>
-            <a:r>
-              <a:rPr lang="en-US" sz="1600" dirty="0">
-                <a:solidFill>
-                  <a:srgbClr val="CBD5E1"/>
+              <a:t>4</a:t>
+            </a:r>
+            <a:endParaRPr lang="en-US" sz="3800" dirty="0"/>
+          </a:p>
+        </p:txBody>
+      </p:sp>
+      <p:sp>
+        <p:nvSpPr>
+          <p:cNvPr id="8" name="Text 6"/>
+          <p:cNvSpPr/>
+          <p:nvPr/>
+        </p:nvSpPr>
+        <p:spPr>
+          <a:xfrm>
+            <a:off x="960120" y="3520440"/>
+            <a:ext cx="2148840" cy="502920"/>
+          </a:xfrm>
+          <a:prstGeom prst="rect">
+            <a:avLst/>
+          </a:prstGeom>
+          <a:noFill/>
+          <a:ln/>
+        </p:spPr>
+        <p:txBody>
+          <a:bodyPr wrap="square" rtlCol="0" anchor="ctr"/>
+          <a:lstStyle/>
+          <a:p>
+            <a:pPr algn="ctr" indent="0" marL="0">
+              <a:buNone/>
+            </a:pPr>
+            <a:r>
+              <a:rPr lang="en-US" sz="1450" b="1" dirty="0">
+                <a:solidFill>
+                  <a:srgbClr val="FFFFFF"/>
                 </a:solidFill>
                 <a:latin typeface="Segoe UI" pitchFamily="34" charset="0"/>
                 <a:ea typeface="Segoe UI" pitchFamily="34" charset="-122"/>
                 <a:cs typeface="Segoe UI" pitchFamily="34" charset="-120"/>
               </a:rPr>
-              <a:t>Declining order frequency, narrowing category usage, longer session gaps</a:t>
-            </a:r>
-            <a:endParaRPr lang="en-US" sz="1600" dirty="0"/>
-          </a:p>
-          <a:p>
-            <a:pPr marL="342900" indent="-342900">
-              <a:lnSpc>
-                <a:spcPct val="115000"/>
-              </a:lnSpc>
-              <a:spcAft>
-                <a:spcPts val="1000"/>
-              </a:spcAft>
-              <a:buSzPct val="100000"/>
-              <a:buChar char="▸"/>
-            </a:pPr>
-            <a:r>
-              <a:rPr lang="en-US" sz="1600" dirty="0">
-                <a:solidFill>
-                  <a:srgbClr val="CBD5E1"/>
+              <a:t>Analytics workstreams</a:t>
+            </a:r>
+            <a:endParaRPr lang="en-US" sz="1450" dirty="0"/>
+          </a:p>
+        </p:txBody>
+      </p:sp>
+      <p:sp>
+        <p:nvSpPr>
+          <p:cNvPr id="9" name="Text 7"/>
+          <p:cNvSpPr/>
+          <p:nvPr/>
+        </p:nvSpPr>
+        <p:spPr>
+          <a:xfrm>
+            <a:off x="1005840" y="4069080"/>
+            <a:ext cx="2057400" cy="685800"/>
+          </a:xfrm>
+          <a:prstGeom prst="rect">
+            <a:avLst/>
+          </a:prstGeom>
+          <a:noFill/>
+          <a:ln/>
+        </p:spPr>
+        <p:txBody>
+          <a:bodyPr wrap="square" rtlCol="0" anchor="ctr"/>
+          <a:lstStyle/>
+          <a:p>
+            <a:pPr algn="ctr" indent="0" marL="0">
+              <a:buNone/>
+            </a:pPr>
+            <a:r>
+              <a:rPr lang="en-US" sz="1050" dirty="0">
+                <a:solidFill>
+                  <a:srgbClr val="94A3B8"/>
                 </a:solidFill>
                 <a:latin typeface="Segoe UI" pitchFamily="34" charset="0"/>
                 <a:ea typeface="Segoe UI" pitchFamily="34" charset="-122"/>
                 <a:cs typeface="Segoe UI" pitchFamily="34" charset="-120"/>
               </a:rPr>
-              <a:t>By formal churn, the story ended weeks earlier</a:t>
-            </a:r>
-            <a:endParaRPr lang="en-US" sz="1600" dirty="0"/>
-          </a:p>
-          <a:p>
-            <a:pPr marL="342900" indent="-342900">
-              <a:lnSpc>
-                <a:spcPct val="115000"/>
-              </a:lnSpc>
-              <a:spcAft>
-                <a:spcPts val="1000"/>
-              </a:spcAft>
-              <a:buSzPct val="100000"/>
-              <a:buChar char="▸"/>
-            </a:pPr>
-            <a:r>
-              <a:rPr lang="en-US" sz="1600" dirty="0">
-                <a:solidFill>
-                  <a:srgbClr val="CBD5E1"/>
+              <a:t>Segmentation, churn, feature adoption, and KPI dashboards on one dataset</a:t>
+            </a:r>
+            <a:endParaRPr lang="en-US" sz="1050" dirty="0"/>
+          </a:p>
+        </p:txBody>
+      </p:sp>
+      <p:sp>
+        <p:nvSpPr>
+          <p:cNvPr id="10" name="Shape 8"/>
+          <p:cNvSpPr/>
+          <p:nvPr/>
+        </p:nvSpPr>
+        <p:spPr>
+          <a:xfrm>
+            <a:off x="3520440" y="2194560"/>
+            <a:ext cx="2423160" cy="2697480"/>
+          </a:xfrm>
+          <a:prstGeom prst="roundRect">
+            <a:avLst>
+              <a:gd name="adj" fmla="val 3019"/>
+            </a:avLst>
+          </a:prstGeom>
+          <a:solidFill>
+            <a:srgbClr val="111A2E"/>
+          </a:solidFill>
+          <a:ln w="12700">
+            <a:solidFill>
+              <a:srgbClr val="1E2D45"/>
+            </a:solidFill>
+            <a:prstDash val="solid"/>
+          </a:ln>
+        </p:spPr>
+      </p:sp>
+      <p:sp>
+        <p:nvSpPr>
+          <p:cNvPr id="11" name="Text 9"/>
+          <p:cNvSpPr/>
+          <p:nvPr/>
+        </p:nvSpPr>
+        <p:spPr>
+          <a:xfrm>
+            <a:off x="3657600" y="2514600"/>
+            <a:ext cx="2148840" cy="914400"/>
+          </a:xfrm>
+          <a:prstGeom prst="rect">
+            <a:avLst/>
+          </a:prstGeom>
+          <a:noFill/>
+          <a:ln/>
+        </p:spPr>
+        <p:txBody>
+          <a:bodyPr wrap="square" rtlCol="0" anchor="ctr"/>
+          <a:lstStyle/>
+          <a:p>
+            <a:pPr algn="ctr" indent="0" marL="0">
+              <a:buNone/>
+            </a:pPr>
+            <a:r>
+              <a:rPr lang="en-US" sz="3800" b="1" dirty="0">
+                <a:solidFill>
+                  <a:srgbClr val="06B6D4"/>
                 </a:solidFill>
                 <a:latin typeface="Segoe UI" pitchFamily="34" charset="0"/>
                 <a:ea typeface="Segoe UI" pitchFamily="34" charset="-122"/>
                 <a:cs typeface="Segoe UI" pitchFamily="34" charset="-120"/>
               </a:rPr>
-              <a:t>Dashboards must show the drift, not the funeral</a:t>
-            </a:r>
-            <a:endParaRPr lang="en-US" sz="1600" dirty="0"/>
-          </a:p>
-        </p:txBody>
-      </p:sp>
-      <p:sp>
-        <p:nvSpPr>
-          <p:cNvPr id="7" name="Text 5"/>
-          <p:cNvSpPr/>
-          <p:nvPr/>
-        </p:nvSpPr>
-        <p:spPr>
-          <a:xfrm>
-            <a:off x="10698480" y="6355080"/>
+              <a:t>3</a:t>
+            </a:r>
+            <a:endParaRPr lang="en-US" sz="3800" dirty="0"/>
+          </a:p>
+        </p:txBody>
+      </p:sp>
+      <p:sp>
+        <p:nvSpPr>
+          <p:cNvPr id="12" name="Text 10"/>
+          <p:cNvSpPr/>
+          <p:nvPr/>
+        </p:nvSpPr>
+        <p:spPr>
+          <a:xfrm>
+            <a:off x="3657600" y="3520440"/>
+            <a:ext cx="2148840" cy="502920"/>
+          </a:xfrm>
+          <a:prstGeom prst="rect">
+            <a:avLst/>
+          </a:prstGeom>
+          <a:noFill/>
+          <a:ln/>
+        </p:spPr>
+        <p:txBody>
+          <a:bodyPr wrap="square" rtlCol="0" anchor="ctr"/>
+          <a:lstStyle/>
+          <a:p>
+            <a:pPr algn="ctr" indent="0" marL="0">
+              <a:buNone/>
+            </a:pPr>
+            <a:r>
+              <a:rPr lang="en-US" sz="1450" b="1" dirty="0">
+                <a:solidFill>
+                  <a:srgbClr val="FFFFFF"/>
+                </a:solidFill>
+                <a:latin typeface="Segoe UI" pitchFamily="34" charset="0"/>
+                <a:ea typeface="Segoe UI" pitchFamily="34" charset="-122"/>
+                <a:cs typeface="Segoe UI" pitchFamily="34" charset="-120"/>
+              </a:rPr>
+              <a:t>Core tools</a:t>
+            </a:r>
+            <a:endParaRPr lang="en-US" sz="1450" dirty="0"/>
+          </a:p>
+        </p:txBody>
+      </p:sp>
+      <p:sp>
+        <p:nvSpPr>
+          <p:cNvPr id="13" name="Text 11"/>
+          <p:cNvSpPr/>
+          <p:nvPr/>
+        </p:nvSpPr>
+        <p:spPr>
+          <a:xfrm>
+            <a:off x="3703320" y="4069080"/>
+            <a:ext cx="2057400" cy="685800"/>
+          </a:xfrm>
+          <a:prstGeom prst="rect">
+            <a:avLst/>
+          </a:prstGeom>
+          <a:noFill/>
+          <a:ln/>
+        </p:spPr>
+        <p:txBody>
+          <a:bodyPr wrap="square" rtlCol="0" anchor="ctr"/>
+          <a:lstStyle/>
+          <a:p>
+            <a:pPr algn="ctr" indent="0" marL="0">
+              <a:buNone/>
+            </a:pPr>
+            <a:r>
+              <a:rPr lang="en-US" sz="1050" dirty="0">
+                <a:solidFill>
+                  <a:srgbClr val="94A3B8"/>
+                </a:solidFill>
+                <a:latin typeface="Segoe UI" pitchFamily="34" charset="0"/>
+                <a:ea typeface="Segoe UI" pitchFamily="34" charset="-122"/>
+                <a:cs typeface="Segoe UI" pitchFamily="34" charset="-120"/>
+              </a:rPr>
+              <a:t>Python, SQL, and Tableau covered the path from extraction to executive views</a:t>
+            </a:r>
+            <a:endParaRPr lang="en-US" sz="1050" dirty="0"/>
+          </a:p>
+        </p:txBody>
+      </p:sp>
+      <p:sp>
+        <p:nvSpPr>
+          <p:cNvPr id="14" name="Shape 12"/>
+          <p:cNvSpPr/>
+          <p:nvPr/>
+        </p:nvSpPr>
+        <p:spPr>
+          <a:xfrm>
+            <a:off x="6217920" y="2194560"/>
+            <a:ext cx="2423160" cy="2697480"/>
+          </a:xfrm>
+          <a:prstGeom prst="roundRect">
+            <a:avLst>
+              <a:gd name="adj" fmla="val 3019"/>
+            </a:avLst>
+          </a:prstGeom>
+          <a:solidFill>
+            <a:srgbClr val="111A2E"/>
+          </a:solidFill>
+          <a:ln w="12700">
+            <a:solidFill>
+              <a:srgbClr val="1E2D45"/>
+            </a:solidFill>
+            <a:prstDash val="solid"/>
+          </a:ln>
+        </p:spPr>
+      </p:sp>
+      <p:sp>
+        <p:nvSpPr>
+          <p:cNvPr id="15" name="Text 13"/>
+          <p:cNvSpPr/>
+          <p:nvPr/>
+        </p:nvSpPr>
+        <p:spPr>
+          <a:xfrm>
+            <a:off x="6355080" y="2514600"/>
+            <a:ext cx="2148840" cy="914400"/>
+          </a:xfrm>
+          <a:prstGeom prst="rect">
+            <a:avLst/>
+          </a:prstGeom>
+          <a:noFill/>
+          <a:ln/>
+        </p:spPr>
+        <p:txBody>
+          <a:bodyPr wrap="square" rtlCol="0" anchor="ctr"/>
+          <a:lstStyle/>
+          <a:p>
+            <a:pPr algn="ctr" indent="0" marL="0">
+              <a:buNone/>
+            </a:pPr>
+            <a:r>
+              <a:rPr lang="en-US" sz="3800" b="1" dirty="0">
+                <a:solidFill>
+                  <a:srgbClr val="22D3A0"/>
+                </a:solidFill>
+                <a:latin typeface="Segoe UI" pitchFamily="34" charset="0"/>
+                <a:ea typeface="Segoe UI" pitchFamily="34" charset="-122"/>
+                <a:cs typeface="Segoe UI" pitchFamily="34" charset="-120"/>
+              </a:rPr>
+              <a:t>3</a:t>
+            </a:r>
+            <a:endParaRPr lang="en-US" sz="3800" dirty="0"/>
+          </a:p>
+        </p:txBody>
+      </p:sp>
+      <p:sp>
+        <p:nvSpPr>
+          <p:cNvPr id="16" name="Text 14"/>
+          <p:cNvSpPr/>
+          <p:nvPr/>
+        </p:nvSpPr>
+        <p:spPr>
+          <a:xfrm>
+            <a:off x="6355080" y="3520440"/>
+            <a:ext cx="2148840" cy="502920"/>
+          </a:xfrm>
+          <a:prstGeom prst="rect">
+            <a:avLst/>
+          </a:prstGeom>
+          <a:noFill/>
+          <a:ln/>
+        </p:spPr>
+        <p:txBody>
+          <a:bodyPr wrap="square" rtlCol="0" anchor="ctr"/>
+          <a:lstStyle/>
+          <a:p>
+            <a:pPr algn="ctr" indent="0" marL="0">
+              <a:buNone/>
+            </a:pPr>
+            <a:r>
+              <a:rPr lang="en-US" sz="1450" b="1" dirty="0">
+                <a:solidFill>
+                  <a:srgbClr val="FFFFFF"/>
+                </a:solidFill>
+                <a:latin typeface="Segoe UI" pitchFamily="34" charset="0"/>
+                <a:ea typeface="Segoe UI" pitchFamily="34" charset="-122"/>
+                <a:cs typeface="Segoe UI" pitchFamily="34" charset="-120"/>
+              </a:rPr>
+              <a:t>Dashboard layers</a:t>
+            </a:r>
+            <a:endParaRPr lang="en-US" sz="1450" dirty="0"/>
+          </a:p>
+        </p:txBody>
+      </p:sp>
+      <p:sp>
+        <p:nvSpPr>
+          <p:cNvPr id="17" name="Text 15"/>
+          <p:cNvSpPr/>
+          <p:nvPr/>
+        </p:nvSpPr>
+        <p:spPr>
+          <a:xfrm>
+            <a:off x="6400800" y="4069080"/>
+            <a:ext cx="2057400" cy="685800"/>
+          </a:xfrm>
+          <a:prstGeom prst="rect">
+            <a:avLst/>
+          </a:prstGeom>
+          <a:noFill/>
+          <a:ln/>
+        </p:spPr>
+        <p:txBody>
+          <a:bodyPr wrap="square" rtlCol="0" anchor="ctr"/>
+          <a:lstStyle/>
+          <a:p>
+            <a:pPr algn="ctr" indent="0" marL="0">
+              <a:buNone/>
+            </a:pPr>
+            <a:r>
+              <a:rPr lang="en-US" sz="1050" dirty="0">
+                <a:solidFill>
+                  <a:srgbClr val="94A3B8"/>
+                </a:solidFill>
+                <a:latin typeface="Segoe UI" pitchFamily="34" charset="0"/>
+                <a:ea typeface="Segoe UI" pitchFamily="34" charset="-122"/>
+                <a:cs typeface="Segoe UI" pitchFamily="34" charset="-120"/>
+              </a:rPr>
+              <a:t>Executive, middle, and operational views mirrored how the organization decides</a:t>
+            </a:r>
+            <a:endParaRPr lang="en-US" sz="1050" dirty="0"/>
+          </a:p>
+        </p:txBody>
+      </p:sp>
+      <p:sp>
+        <p:nvSpPr>
+          <p:cNvPr id="18" name="Shape 16"/>
+          <p:cNvSpPr/>
+          <p:nvPr/>
+        </p:nvSpPr>
+        <p:spPr>
+          <a:xfrm>
+            <a:off x="8915400" y="2194560"/>
+            <a:ext cx="2423160" cy="2697480"/>
+          </a:xfrm>
+          <a:prstGeom prst="roundRect">
+            <a:avLst>
+              <a:gd name="adj" fmla="val 3019"/>
+            </a:avLst>
+          </a:prstGeom>
+          <a:solidFill>
+            <a:srgbClr val="111A2E"/>
+          </a:solidFill>
+          <a:ln w="12700">
+            <a:solidFill>
+              <a:srgbClr val="1E2D45"/>
+            </a:solidFill>
+            <a:prstDash val="solid"/>
+          </a:ln>
+        </p:spPr>
+      </p:sp>
+      <p:sp>
+        <p:nvSpPr>
+          <p:cNvPr id="19" name="Text 17"/>
+          <p:cNvSpPr/>
+          <p:nvPr/>
+        </p:nvSpPr>
+        <p:spPr>
+          <a:xfrm>
+            <a:off x="9052560" y="2514600"/>
+            <a:ext cx="2148840" cy="914400"/>
+          </a:xfrm>
+          <a:prstGeom prst="rect">
+            <a:avLst/>
+          </a:prstGeom>
+          <a:noFill/>
+          <a:ln/>
+        </p:spPr>
+        <p:txBody>
+          <a:bodyPr wrap="square" rtlCol="0" anchor="ctr"/>
+          <a:lstStyle/>
+          <a:p>
+            <a:pPr algn="ctr" indent="0" marL="0">
+              <a:buNone/>
+            </a:pPr>
+            <a:r>
+              <a:rPr lang="en-US" sz="3800" b="1" dirty="0">
+                <a:solidFill>
+                  <a:srgbClr val="F59E0B"/>
+                </a:solidFill>
+                <a:latin typeface="Segoe UI" pitchFamily="34" charset="0"/>
+                <a:ea typeface="Segoe UI" pitchFamily="34" charset="-122"/>
+                <a:cs typeface="Segoe UI" pitchFamily="34" charset="-120"/>
+              </a:rPr>
+              <a:t>100%</a:t>
+            </a:r>
+            <a:endParaRPr lang="en-US" sz="3800" dirty="0"/>
+          </a:p>
+        </p:txBody>
+      </p:sp>
+      <p:sp>
+        <p:nvSpPr>
+          <p:cNvPr id="20" name="Text 18"/>
+          <p:cNvSpPr/>
+          <p:nvPr/>
+        </p:nvSpPr>
+        <p:spPr>
+          <a:xfrm>
+            <a:off x="9052560" y="3520440"/>
+            <a:ext cx="2148840" cy="502920"/>
+          </a:xfrm>
+          <a:prstGeom prst="rect">
+            <a:avLst/>
+          </a:prstGeom>
+          <a:noFill/>
+          <a:ln/>
+        </p:spPr>
+        <p:txBody>
+          <a:bodyPr wrap="square" rtlCol="0" anchor="ctr"/>
+          <a:lstStyle/>
+          <a:p>
+            <a:pPr algn="ctr" indent="0" marL="0">
+              <a:buNone/>
+            </a:pPr>
+            <a:r>
+              <a:rPr lang="en-US" sz="1450" b="1" dirty="0">
+                <a:solidFill>
+                  <a:srgbClr val="FFFFFF"/>
+                </a:solidFill>
+                <a:latin typeface="Segoe UI" pitchFamily="34" charset="0"/>
+                <a:ea typeface="Segoe UI" pitchFamily="34" charset="-122"/>
+                <a:cs typeface="Segoe UI" pitchFamily="34" charset="-120"/>
+              </a:rPr>
+              <a:t>Segments actionable</a:t>
+            </a:r>
+            <a:endParaRPr lang="en-US" sz="1450" dirty="0"/>
+          </a:p>
+        </p:txBody>
+      </p:sp>
+      <p:sp>
+        <p:nvSpPr>
+          <p:cNvPr id="21" name="Text 19"/>
+          <p:cNvSpPr/>
+          <p:nvPr/>
+        </p:nvSpPr>
+        <p:spPr>
+          <a:xfrm>
+            <a:off x="9098280" y="4069080"/>
+            <a:ext cx="2057400" cy="685800"/>
+          </a:xfrm>
+          <a:prstGeom prst="rect">
+            <a:avLst/>
+          </a:prstGeom>
+          <a:noFill/>
+          <a:ln/>
+        </p:spPr>
+        <p:txBody>
+          <a:bodyPr wrap="square" rtlCol="0" anchor="ctr"/>
+          <a:lstStyle/>
+          <a:p>
+            <a:pPr algn="ctr" indent="0" marL="0">
+              <a:buNone/>
+            </a:pPr>
+            <a:r>
+              <a:rPr lang="en-US" sz="1050" dirty="0">
+                <a:solidFill>
+                  <a:srgbClr val="94A3B8"/>
+                </a:solidFill>
+                <a:latin typeface="Segoe UI" pitchFamily="34" charset="0"/>
+                <a:ea typeface="Segoe UI" pitchFamily="34" charset="-122"/>
+                <a:cs typeface="Segoe UI" pitchFamily="34" charset="-120"/>
+              </a:rPr>
+              <a:t>Every segment carried a behavior story and a recommended action</a:t>
+            </a:r>
+            <a:endParaRPr lang="en-US" sz="1050" dirty="0"/>
+          </a:p>
+        </p:txBody>
+      </p:sp>
+      <p:sp>
+        <p:nvSpPr>
+          <p:cNvPr id="22" name="Shape 20"/>
+          <p:cNvSpPr/>
+          <p:nvPr/>
+        </p:nvSpPr>
+        <p:spPr>
+          <a:xfrm>
+            <a:off x="822960" y="5413248"/>
+            <a:ext cx="10515600" cy="0"/>
+          </a:xfrm>
+          <a:prstGeom prst="line">
+            <a:avLst/>
+          </a:prstGeom>
+          <a:noFill/>
+          <a:ln w="12700">
+            <a:solidFill>
+              <a:srgbClr val="1E2D45"/>
+            </a:solidFill>
+            <a:prstDash val="solid"/>
+          </a:ln>
+        </p:spPr>
+      </p:sp>
+      <p:sp>
+        <p:nvSpPr>
+          <p:cNvPr id="23" name="Text 21"/>
+          <p:cNvSpPr/>
+          <p:nvPr/>
+        </p:nvSpPr>
+        <p:spPr>
+          <a:xfrm>
+            <a:off x="822960" y="5504688"/>
+            <a:ext cx="10424160" cy="411480"/>
+          </a:xfrm>
+          <a:prstGeom prst="rect">
+            <a:avLst/>
+          </a:prstGeom>
+          <a:noFill/>
+          <a:ln/>
+        </p:spPr>
+        <p:txBody>
+          <a:bodyPr wrap="square" rtlCol="0" anchor="ctr"/>
+          <a:lstStyle/>
+          <a:p>
+            <a:pPr indent="0" marL="0">
+              <a:buNone/>
+            </a:pPr>
+            <a:r>
+              <a:rPr lang="en-US" sz="1300" i="1" dirty="0">
+                <a:solidFill>
+                  <a:srgbClr val="06B6D4"/>
+                </a:solidFill>
+                <a:latin typeface="Segoe UI" pitchFamily="34" charset="0"/>
+                <a:ea typeface="Segoe UI" pitchFamily="34" charset="-122"/>
+                <a:cs typeface="Segoe UI" pitchFamily="34" charset="-120"/>
+              </a:rPr>
+              <a:t>→  The bar every deliverable had to clear: it must change a decision.</a:t>
+            </a:r>
+            <a:endParaRPr lang="en-US" sz="1300" dirty="0"/>
+          </a:p>
+        </p:txBody>
+      </p:sp>
+      <p:sp>
+        <p:nvSpPr>
+          <p:cNvPr id="24" name="Text 22"/>
+          <p:cNvSpPr/>
+          <p:nvPr/>
+        </p:nvSpPr>
+        <p:spPr>
+          <a:xfrm>
+            <a:off x="10698480" y="6382512"/>
             <a:ext cx="1188720" cy="365760"/>
           </a:xfrm>
           <a:prstGeom prst="rect">
@@ -2520,7 +7097,7 @@
                 <a:ea typeface="Consolas" pitchFamily="34" charset="-122"/>
                 <a:cs typeface="Consolas" pitchFamily="34" charset="-120"/>
               </a:rPr>
-              <a:t>4 / 7</a:t>
+              <a:t>4 / 14</a:t>
             </a:r>
             <a:endParaRPr lang="en-US" sz="1000" dirty="0"/>
           </a:p>
@@ -2631,7 +7208,7 @@
                 <a:ea typeface="Consolas" pitchFamily="34" charset="-122"/>
                 <a:cs typeface="Consolas" pitchFamily="34" charset="-120"/>
               </a:rPr>
-              <a:t>DASHBOARDS</a:t>
+              <a:t>ANALYTICS PIPELINE</a:t>
             </a:r>
             <a:endParaRPr lang="en-US" sz="1200" dirty="0"/>
           </a:p>
@@ -2645,8 +7222,8 @@
         </p:nvSpPr>
         <p:spPr>
           <a:xfrm>
-            <a:off x="822960" y="960120"/>
-            <a:ext cx="10515600" cy="868680"/>
+            <a:off x="822960" y="914400"/>
+            <a:ext cx="10561320" cy="868680"/>
           </a:xfrm>
           <a:prstGeom prst="rect">
             <a:avLst/>
@@ -2662,7 +7239,7 @@
               <a:buNone/>
             </a:pPr>
             <a:r>
-              <a:rPr lang="en-US" sz="3000" b="1" dirty="0">
+              <a:rPr lang="en-US" sz="2700" b="1" dirty="0">
                 <a:solidFill>
                   <a:srgbClr val="FFFFFF"/>
                 </a:solidFill>
@@ -2670,69 +7247,143 @@
                 <a:ea typeface="Segoe UI" pitchFamily="34" charset="-122"/>
                 <a:cs typeface="Segoe UI" pitchFamily="34" charset="-120"/>
               </a:rPr>
-              <a:t>Views that mirror the org</a:t>
-            </a:r>
-            <a:endParaRPr lang="en-US" sz="3000" dirty="0"/>
-          </a:p>
-        </p:txBody>
-      </p:sp>
-      <p:sp>
-        <p:nvSpPr>
-          <p:cNvPr id="6" name="Text 4"/>
-          <p:cNvSpPr/>
-          <p:nvPr/>
-        </p:nvSpPr>
-        <p:spPr>
-          <a:xfrm>
-            <a:off x="868680" y="2057400"/>
-            <a:ext cx="10424160" cy="3566160"/>
-          </a:xfrm>
-          <a:prstGeom prst="rect">
-            <a:avLst/>
-          </a:prstGeom>
-          <a:noFill/>
-          <a:ln/>
-        </p:spPr>
-        <p:txBody>
-          <a:bodyPr wrap="square" rtlCol="0" anchor="t"/>
-          <a:lstStyle/>
-          <a:p>
-            <a:pPr marL="342900" indent="-342900">
-              <a:lnSpc>
-                <a:spcPct val="115000"/>
-              </a:lnSpc>
-              <a:spcAft>
-                <a:spcPts val="1000"/>
-              </a:spcAft>
-              <a:buSzPct val="100000"/>
-              <a:buChar char="▸"/>
-            </a:pPr>
-            <a:r>
-              <a:rPr lang="en-US" sz="1600" dirty="0">
-                <a:solidFill>
-                  <a:srgbClr val="CBD5E1"/>
+              <a:t>From raw e-commerce data to recommended actions</a:t>
+            </a:r>
+            <a:endParaRPr lang="en-US" sz="2700" dirty="0"/>
+          </a:p>
+        </p:txBody>
+      </p:sp>
+      <p:sp>
+        <p:nvSpPr>
+          <p:cNvPr id="6" name="Shape 4"/>
+          <p:cNvSpPr/>
+          <p:nvPr/>
+        </p:nvSpPr>
+        <p:spPr>
+          <a:xfrm>
+            <a:off x="774040" y="2514600"/>
+            <a:ext cx="1938528" cy="2103120"/>
+          </a:xfrm>
+          <a:prstGeom prst="roundRect">
+            <a:avLst>
+              <a:gd name="adj" fmla="val 3302"/>
+            </a:avLst>
+          </a:prstGeom>
+          <a:solidFill>
+            <a:srgbClr val="111A2E"/>
+          </a:solidFill>
+          <a:ln w="19050">
+            <a:solidFill>
+              <a:srgbClr val="3B82F6"/>
+            </a:solidFill>
+            <a:prstDash val="solid"/>
+          </a:ln>
+        </p:spPr>
+      </p:sp>
+      <p:sp>
+        <p:nvSpPr>
+          <p:cNvPr id="7" name="Text 5"/>
+          <p:cNvSpPr/>
+          <p:nvPr/>
+        </p:nvSpPr>
+        <p:spPr>
+          <a:xfrm>
+            <a:off x="902056" y="2633472"/>
+            <a:ext cx="1682496" cy="310896"/>
+          </a:xfrm>
+          <a:prstGeom prst="rect">
+            <a:avLst/>
+          </a:prstGeom>
+          <a:noFill/>
+          <a:ln/>
+        </p:spPr>
+        <p:txBody>
+          <a:bodyPr wrap="square" rtlCol="0" anchor="ctr"/>
+          <a:lstStyle/>
+          <a:p>
+            <a:pPr indent="0" marL="0">
+              <a:buNone/>
+            </a:pPr>
+            <a:r>
+              <a:rPr lang="en-US" sz="1100" b="1" dirty="0">
+                <a:solidFill>
+                  <a:srgbClr val="3B82F6"/>
+                </a:solidFill>
+                <a:latin typeface="Consolas" pitchFamily="34" charset="0"/>
+                <a:ea typeface="Consolas" pitchFamily="34" charset="-122"/>
+                <a:cs typeface="Consolas" pitchFamily="34" charset="-120"/>
+              </a:rPr>
+              <a:t>01</a:t>
+            </a:r>
+            <a:endParaRPr lang="en-US" sz="1100" dirty="0"/>
+          </a:p>
+        </p:txBody>
+      </p:sp>
+      <p:sp>
+        <p:nvSpPr>
+          <p:cNvPr id="8" name="Text 6"/>
+          <p:cNvSpPr/>
+          <p:nvPr/>
+        </p:nvSpPr>
+        <p:spPr>
+          <a:xfrm>
+            <a:off x="902056" y="2962656"/>
+            <a:ext cx="1682496" cy="566928"/>
+          </a:xfrm>
+          <a:prstGeom prst="rect">
+            <a:avLst/>
+          </a:prstGeom>
+          <a:noFill/>
+          <a:ln/>
+        </p:spPr>
+        <p:txBody>
+          <a:bodyPr wrap="square" rtlCol="0" anchor="ctr"/>
+          <a:lstStyle/>
+          <a:p>
+            <a:pPr indent="0" marL="0">
+              <a:buNone/>
+            </a:pPr>
+            <a:r>
+              <a:rPr lang="en-US" sz="1350" b="1" dirty="0">
+                <a:solidFill>
+                  <a:srgbClr val="FFFFFF"/>
                 </a:solidFill>
                 <a:latin typeface="Segoe UI" pitchFamily="34" charset="0"/>
                 <a:ea typeface="Segoe UI" pitchFamily="34" charset="-122"/>
                 <a:cs typeface="Segoe UI" pitchFamily="34" charset="-120"/>
               </a:rPr>
-              <a:t>Executive: a handful of KPIs, thresholds, trends</a:t>
-            </a:r>
-            <a:endParaRPr lang="en-US" sz="1600" dirty="0"/>
-          </a:p>
-          <a:p>
-            <a:pPr marL="342900" indent="-342900">
-              <a:lnSpc>
-                <a:spcPct val="115000"/>
-              </a:lnSpc>
-              <a:spcAft>
-                <a:spcPts val="1000"/>
-              </a:spcAft>
-              <a:buSzPct val="100000"/>
-              <a:buChar char="▸"/>
-            </a:pPr>
-            <a:r>
-              <a:rPr lang="en-US" sz="1600" dirty="0">
+              <a:t>SQL extraction</a:t>
+            </a:r>
+            <a:endParaRPr lang="en-US" sz="1350" dirty="0"/>
+          </a:p>
+        </p:txBody>
+      </p:sp>
+      <p:sp>
+        <p:nvSpPr>
+          <p:cNvPr id="9" name="Text 7"/>
+          <p:cNvSpPr/>
+          <p:nvPr/>
+        </p:nvSpPr>
+        <p:spPr>
+          <a:xfrm>
+            <a:off x="902056" y="3566160"/>
+            <a:ext cx="1682496" cy="960120"/>
+          </a:xfrm>
+          <a:prstGeom prst="rect">
+            <a:avLst/>
+          </a:prstGeom>
+          <a:noFill/>
+          <a:ln/>
+        </p:spPr>
+        <p:txBody>
+          <a:bodyPr wrap="square" rtlCol="0" anchor="ctr"/>
+          <a:lstStyle/>
+          <a:p>
+            <a:pPr indent="0" marL="0">
+              <a:buNone/>
+            </a:pPr>
+            <a:r>
+              <a:rPr lang="en-US" sz="980" dirty="0">
                 <a:solidFill>
                   <a:srgbClr val="CBD5E1"/>
                 </a:solidFill>
@@ -2740,47 +7391,163 @@
                 <a:ea typeface="Segoe UI" pitchFamily="34" charset="-122"/>
                 <a:cs typeface="Segoe UI" pitchFamily="34" charset="-120"/>
               </a:rPr>
-              <a:t>Middle: the same metrics sliced for diagnosis</a:t>
-            </a:r>
-            <a:endParaRPr lang="en-US" sz="1600" dirty="0"/>
-          </a:p>
-          <a:p>
-            <a:pPr marL="342900" indent="-342900">
-              <a:lnSpc>
-                <a:spcPct val="115000"/>
-              </a:lnSpc>
-              <a:spcAft>
-                <a:spcPts val="1000"/>
-              </a:spcAft>
-              <a:buSzPct val="100000"/>
-              <a:buChar char="▸"/>
-            </a:pPr>
-            <a:r>
-              <a:rPr lang="en-US" sz="1600" dirty="0">
-                <a:solidFill>
-                  <a:srgbClr val="CBD5E1"/>
+              <a:t>Pulled customer, order, and session data from the e-commerce database.</a:t>
+            </a:r>
+            <a:endParaRPr lang="en-US" sz="980" dirty="0"/>
+          </a:p>
+        </p:txBody>
+      </p:sp>
+      <p:sp>
+        <p:nvSpPr>
+          <p:cNvPr id="10" name="Shape 8"/>
+          <p:cNvSpPr/>
+          <p:nvPr/>
+        </p:nvSpPr>
+        <p:spPr>
+          <a:xfrm>
+            <a:off x="2726284" y="3419856"/>
+            <a:ext cx="210312" cy="274320"/>
+          </a:xfrm>
+          <a:prstGeom prst="rightArrow">
+            <a:avLst/>
+          </a:prstGeom>
+          <a:solidFill>
+            <a:srgbClr val="06B6D4"/>
+          </a:solidFill>
+          <a:ln/>
+        </p:spPr>
+      </p:sp>
+      <p:sp>
+        <p:nvSpPr>
+          <p:cNvPr id="11" name="Shape 9"/>
+          <p:cNvSpPr/>
+          <p:nvPr/>
+        </p:nvSpPr>
+        <p:spPr>
+          <a:xfrm>
+            <a:off x="2950312" y="2514600"/>
+            <a:ext cx="1938528" cy="2103120"/>
+          </a:xfrm>
+          <a:prstGeom prst="roundRect">
+            <a:avLst>
+              <a:gd name="adj" fmla="val 3302"/>
+            </a:avLst>
+          </a:prstGeom>
+          <a:solidFill>
+            <a:srgbClr val="111A2E"/>
+          </a:solidFill>
+          <a:ln w="19050">
+            <a:solidFill>
+              <a:srgbClr val="06B6D4"/>
+            </a:solidFill>
+            <a:prstDash val="solid"/>
+          </a:ln>
+        </p:spPr>
+      </p:sp>
+      <p:sp>
+        <p:nvSpPr>
+          <p:cNvPr id="12" name="Text 10"/>
+          <p:cNvSpPr/>
+          <p:nvPr/>
+        </p:nvSpPr>
+        <p:spPr>
+          <a:xfrm>
+            <a:off x="3078328" y="2633472"/>
+            <a:ext cx="1682496" cy="310896"/>
+          </a:xfrm>
+          <a:prstGeom prst="rect">
+            <a:avLst/>
+          </a:prstGeom>
+          <a:noFill/>
+          <a:ln/>
+        </p:spPr>
+        <p:txBody>
+          <a:bodyPr wrap="square" rtlCol="0" anchor="ctr"/>
+          <a:lstStyle/>
+          <a:p>
+            <a:pPr indent="0" marL="0">
+              <a:buNone/>
+            </a:pPr>
+            <a:r>
+              <a:rPr lang="en-US" sz="1100" b="1" dirty="0">
+                <a:solidFill>
+                  <a:srgbClr val="06B6D4"/>
+                </a:solidFill>
+                <a:latin typeface="Consolas" pitchFamily="34" charset="0"/>
+                <a:ea typeface="Consolas" pitchFamily="34" charset="-122"/>
+                <a:cs typeface="Consolas" pitchFamily="34" charset="-120"/>
+              </a:rPr>
+              <a:t>02</a:t>
+            </a:r>
+            <a:endParaRPr lang="en-US" sz="1100" dirty="0"/>
+          </a:p>
+        </p:txBody>
+      </p:sp>
+      <p:sp>
+        <p:nvSpPr>
+          <p:cNvPr id="13" name="Text 11"/>
+          <p:cNvSpPr/>
+          <p:nvPr/>
+        </p:nvSpPr>
+        <p:spPr>
+          <a:xfrm>
+            <a:off x="3078328" y="2962656"/>
+            <a:ext cx="1682496" cy="566928"/>
+          </a:xfrm>
+          <a:prstGeom prst="rect">
+            <a:avLst/>
+          </a:prstGeom>
+          <a:noFill/>
+          <a:ln/>
+        </p:spPr>
+        <p:txBody>
+          <a:bodyPr wrap="square" rtlCol="0" anchor="ctr"/>
+          <a:lstStyle/>
+          <a:p>
+            <a:pPr indent="0" marL="0">
+              <a:buNone/>
+            </a:pPr>
+            <a:r>
+              <a:rPr lang="en-US" sz="1350" b="1" dirty="0">
+                <a:solidFill>
+                  <a:srgbClr val="FFFFFF"/>
                 </a:solidFill>
                 <a:latin typeface="Segoe UI" pitchFamily="34" charset="0"/>
                 <a:ea typeface="Segoe UI" pitchFamily="34" charset="-122"/>
                 <a:cs typeface="Segoe UI" pitchFamily="34" charset="-120"/>
               </a:rPr>
-              <a:t>Operational: daily granularity for the fixers</a:t>
-            </a:r>
-            <a:endParaRPr lang="en-US" sz="1600" dirty="0"/>
-          </a:p>
-          <a:p>
-            <a:pPr marL="342900" indent="-342900">
-              <a:lnSpc>
-                <a:spcPct val="115000"/>
-              </a:lnSpc>
-              <a:spcAft>
-                <a:spcPts val="1000"/>
-              </a:spcAft>
-              <a:buSzPct val="100000"/>
-              <a:buChar char="▸"/>
-            </a:pPr>
-            <a:r>
-              <a:rPr lang="en-US" sz="1600" dirty="0">
+              <a:t>Python analysis</a:t>
+            </a:r>
+            <a:endParaRPr lang="en-US" sz="1350" dirty="0"/>
+          </a:p>
+        </p:txBody>
+      </p:sp>
+      <p:sp>
+        <p:nvSpPr>
+          <p:cNvPr id="14" name="Text 12"/>
+          <p:cNvSpPr/>
+          <p:nvPr/>
+        </p:nvSpPr>
+        <p:spPr>
+          <a:xfrm>
+            <a:off x="3078328" y="3566160"/>
+            <a:ext cx="1682496" cy="960120"/>
+          </a:xfrm>
+          <a:prstGeom prst="rect">
+            <a:avLst/>
+          </a:prstGeom>
+          <a:noFill/>
+          <a:ln/>
+        </p:spPr>
+        <p:txBody>
+          <a:bodyPr wrap="square" rtlCol="0" anchor="ctr"/>
+          <a:lstStyle/>
+          <a:p>
+            <a:pPr indent="0" marL="0">
+              <a:buNone/>
+            </a:pPr>
+            <a:r>
+              <a:rPr lang="en-US" sz="980" dirty="0">
                 <a:solidFill>
                   <a:srgbClr val="CBD5E1"/>
                 </a:solidFill>
@@ -2788,22 +7555,69 @@
                 <a:ea typeface="Segoe UI" pitchFamily="34" charset="-122"/>
                 <a:cs typeface="Segoe UI" pitchFamily="34" charset="-120"/>
               </a:rPr>
-              <a:t>Positive evaluation from Tokopedia Analytics Team reviewers</a:t>
-            </a:r>
-            <a:endParaRPr lang="en-US" sz="1600" dirty="0"/>
-          </a:p>
-        </p:txBody>
-      </p:sp>
-      <p:sp>
-        <p:nvSpPr>
-          <p:cNvPr id="7" name="Text 5"/>
-          <p:cNvSpPr/>
-          <p:nvPr/>
-        </p:nvSpPr>
-        <p:spPr>
-          <a:xfrm>
-            <a:off x="10698480" y="6355080"/>
-            <a:ext cx="1188720" cy="365760"/>
+              <a:t>Modeled segments, churn signals, and adoption curves on the extracted data.</a:t>
+            </a:r>
+            <a:endParaRPr lang="en-US" sz="980" dirty="0"/>
+          </a:p>
+        </p:txBody>
+      </p:sp>
+      <p:sp>
+        <p:nvSpPr>
+          <p:cNvPr id="15" name="Shape 13"/>
+          <p:cNvSpPr/>
+          <p:nvPr/>
+        </p:nvSpPr>
+        <p:spPr>
+          <a:xfrm>
+            <a:off x="4902556" y="3419856"/>
+            <a:ext cx="210312" cy="274320"/>
+          </a:xfrm>
+          <a:prstGeom prst="rightArrow">
+            <a:avLst/>
+          </a:prstGeom>
+          <a:solidFill>
+            <a:srgbClr val="06B6D4"/>
+          </a:solidFill>
+          <a:ln/>
+        </p:spPr>
+      </p:sp>
+      <p:sp>
+        <p:nvSpPr>
+          <p:cNvPr id="16" name="Shape 14"/>
+          <p:cNvSpPr/>
+          <p:nvPr/>
+        </p:nvSpPr>
+        <p:spPr>
+          <a:xfrm>
+            <a:off x="5126584" y="2514600"/>
+            <a:ext cx="1938528" cy="2103120"/>
+          </a:xfrm>
+          <a:prstGeom prst="roundRect">
+            <a:avLst>
+              <a:gd name="adj" fmla="val 3302"/>
+            </a:avLst>
+          </a:prstGeom>
+          <a:solidFill>
+            <a:srgbClr val="111A2E"/>
+          </a:solidFill>
+          <a:ln w="19050">
+            <a:solidFill>
+              <a:srgbClr val="3B82F6"/>
+            </a:solidFill>
+            <a:prstDash val="solid"/>
+          </a:ln>
+        </p:spPr>
+      </p:sp>
+      <p:sp>
+        <p:nvSpPr>
+          <p:cNvPr id="17" name="Text 15"/>
+          <p:cNvSpPr/>
+          <p:nvPr/>
+        </p:nvSpPr>
+        <p:spPr>
+          <a:xfrm>
+            <a:off x="5254600" y="2633472"/>
+            <a:ext cx="1682496" cy="310896"/>
           </a:xfrm>
           <a:prstGeom prst="rect">
             <a:avLst/>
@@ -2815,19 +7629,526 @@
           <a:bodyPr wrap="square" rtlCol="0" anchor="ctr"/>
           <a:lstStyle/>
           <a:p>
-            <a:pPr algn="r" indent="0" marL="0">
+            <a:pPr indent="0" marL="0">
               <a:buNone/>
             </a:pPr>
             <a:r>
-              <a:rPr lang="en-US" sz="1000" dirty="0">
-                <a:solidFill>
-                  <a:srgbClr val="64748B"/>
+              <a:rPr lang="en-US" sz="1100" b="1" dirty="0">
+                <a:solidFill>
+                  <a:srgbClr val="3B82F6"/>
                 </a:solidFill>
                 <a:latin typeface="Consolas" pitchFamily="34" charset="0"/>
                 <a:ea typeface="Consolas" pitchFamily="34" charset="-122"/>
                 <a:cs typeface="Consolas" pitchFamily="34" charset="-120"/>
               </a:rPr>
-              <a:t>5 / 7</a:t>
+              <a:t>03</a:t>
+            </a:r>
+            <a:endParaRPr lang="en-US" sz="1100" dirty="0"/>
+          </a:p>
+        </p:txBody>
+      </p:sp>
+      <p:sp>
+        <p:nvSpPr>
+          <p:cNvPr id="18" name="Text 16"/>
+          <p:cNvSpPr/>
+          <p:nvPr/>
+        </p:nvSpPr>
+        <p:spPr>
+          <a:xfrm>
+            <a:off x="5254600" y="2962656"/>
+            <a:ext cx="1682496" cy="566928"/>
+          </a:xfrm>
+          <a:prstGeom prst="rect">
+            <a:avLst/>
+          </a:prstGeom>
+          <a:noFill/>
+          <a:ln/>
+        </p:spPr>
+        <p:txBody>
+          <a:bodyPr wrap="square" rtlCol="0" anchor="ctr"/>
+          <a:lstStyle/>
+          <a:p>
+            <a:pPr indent="0" marL="0">
+              <a:buNone/>
+            </a:pPr>
+            <a:r>
+              <a:rPr lang="en-US" sz="1350" b="1" dirty="0">
+                <a:solidFill>
+                  <a:srgbClr val="FFFFFF"/>
+                </a:solidFill>
+                <a:latin typeface="Segoe UI" pitchFamily="34" charset="0"/>
+                <a:ea typeface="Segoe UI" pitchFamily="34" charset="-122"/>
+                <a:cs typeface="Segoe UI" pitchFamily="34" charset="-120"/>
+              </a:rPr>
+              <a:t>Behavior stories</a:t>
+            </a:r>
+            <a:endParaRPr lang="en-US" sz="1350" dirty="0"/>
+          </a:p>
+        </p:txBody>
+      </p:sp>
+      <p:sp>
+        <p:nvSpPr>
+          <p:cNvPr id="19" name="Text 17"/>
+          <p:cNvSpPr/>
+          <p:nvPr/>
+        </p:nvSpPr>
+        <p:spPr>
+          <a:xfrm>
+            <a:off x="5254600" y="3566160"/>
+            <a:ext cx="1682496" cy="960120"/>
+          </a:xfrm>
+          <a:prstGeom prst="rect">
+            <a:avLst/>
+          </a:prstGeom>
+          <a:noFill/>
+          <a:ln/>
+        </p:spPr>
+        <p:txBody>
+          <a:bodyPr wrap="square" rtlCol="0" anchor="ctr"/>
+          <a:lstStyle/>
+          <a:p>
+            <a:pPr indent="0" marL="0">
+              <a:buNone/>
+            </a:pPr>
+            <a:r>
+              <a:rPr lang="en-US" sz="980" dirty="0">
+                <a:solidFill>
+                  <a:srgbClr val="CBD5E1"/>
+                </a:solidFill>
+                <a:latin typeface="Segoe UI" pitchFamily="34" charset="0"/>
+                <a:ea typeface="Segoe UI" pitchFamily="34" charset="-122"/>
+                <a:cs typeface="Segoe UI" pitchFamily="34" charset="-120"/>
+              </a:rPr>
+              <a:t>Anchored every statistical cluster to a reason it behaves that way and what would change it.</a:t>
+            </a:r>
+            <a:endParaRPr lang="en-US" sz="980" dirty="0"/>
+          </a:p>
+        </p:txBody>
+      </p:sp>
+      <p:sp>
+        <p:nvSpPr>
+          <p:cNvPr id="20" name="Shape 18"/>
+          <p:cNvSpPr/>
+          <p:nvPr/>
+        </p:nvSpPr>
+        <p:spPr>
+          <a:xfrm>
+            <a:off x="7078828" y="3419856"/>
+            <a:ext cx="210312" cy="274320"/>
+          </a:xfrm>
+          <a:prstGeom prst="rightArrow">
+            <a:avLst/>
+          </a:prstGeom>
+          <a:solidFill>
+            <a:srgbClr val="06B6D4"/>
+          </a:solidFill>
+          <a:ln/>
+        </p:spPr>
+      </p:sp>
+      <p:sp>
+        <p:nvSpPr>
+          <p:cNvPr id="21" name="Shape 19"/>
+          <p:cNvSpPr/>
+          <p:nvPr/>
+        </p:nvSpPr>
+        <p:spPr>
+          <a:xfrm>
+            <a:off x="7302856" y="2514600"/>
+            <a:ext cx="1938528" cy="2103120"/>
+          </a:xfrm>
+          <a:prstGeom prst="roundRect">
+            <a:avLst>
+              <a:gd name="adj" fmla="val 3302"/>
+            </a:avLst>
+          </a:prstGeom>
+          <a:solidFill>
+            <a:srgbClr val="111A2E"/>
+          </a:solidFill>
+          <a:ln w="19050">
+            <a:solidFill>
+              <a:srgbClr val="06B6D4"/>
+            </a:solidFill>
+            <a:prstDash val="solid"/>
+          </a:ln>
+        </p:spPr>
+      </p:sp>
+      <p:sp>
+        <p:nvSpPr>
+          <p:cNvPr id="22" name="Text 20"/>
+          <p:cNvSpPr/>
+          <p:nvPr/>
+        </p:nvSpPr>
+        <p:spPr>
+          <a:xfrm>
+            <a:off x="7430872" y="2633472"/>
+            <a:ext cx="1682496" cy="310896"/>
+          </a:xfrm>
+          <a:prstGeom prst="rect">
+            <a:avLst/>
+          </a:prstGeom>
+          <a:noFill/>
+          <a:ln/>
+        </p:spPr>
+        <p:txBody>
+          <a:bodyPr wrap="square" rtlCol="0" anchor="ctr"/>
+          <a:lstStyle/>
+          <a:p>
+            <a:pPr indent="0" marL="0">
+              <a:buNone/>
+            </a:pPr>
+            <a:r>
+              <a:rPr lang="en-US" sz="1100" b="1" dirty="0">
+                <a:solidFill>
+                  <a:srgbClr val="06B6D4"/>
+                </a:solidFill>
+                <a:latin typeface="Consolas" pitchFamily="34" charset="0"/>
+                <a:ea typeface="Consolas" pitchFamily="34" charset="-122"/>
+                <a:cs typeface="Consolas" pitchFamily="34" charset="-120"/>
+              </a:rPr>
+              <a:t>04</a:t>
+            </a:r>
+            <a:endParaRPr lang="en-US" sz="1100" dirty="0"/>
+          </a:p>
+        </p:txBody>
+      </p:sp>
+      <p:sp>
+        <p:nvSpPr>
+          <p:cNvPr id="23" name="Text 21"/>
+          <p:cNvSpPr/>
+          <p:nvPr/>
+        </p:nvSpPr>
+        <p:spPr>
+          <a:xfrm>
+            <a:off x="7430872" y="2962656"/>
+            <a:ext cx="1682496" cy="566928"/>
+          </a:xfrm>
+          <a:prstGeom prst="rect">
+            <a:avLst/>
+          </a:prstGeom>
+          <a:noFill/>
+          <a:ln/>
+        </p:spPr>
+        <p:txBody>
+          <a:bodyPr wrap="square" rtlCol="0" anchor="ctr"/>
+          <a:lstStyle/>
+          <a:p>
+            <a:pPr indent="0" marL="0">
+              <a:buNone/>
+            </a:pPr>
+            <a:r>
+              <a:rPr lang="en-US" sz="1350" b="1" dirty="0">
+                <a:solidFill>
+                  <a:srgbClr val="FFFFFF"/>
+                </a:solidFill>
+                <a:latin typeface="Segoe UI" pitchFamily="34" charset="0"/>
+                <a:ea typeface="Segoe UI" pitchFamily="34" charset="-122"/>
+                <a:cs typeface="Segoe UI" pitchFamily="34" charset="-120"/>
+              </a:rPr>
+              <a:t>Tableau dashboards</a:t>
+            </a:r>
+            <a:endParaRPr lang="en-US" sz="1350" dirty="0"/>
+          </a:p>
+        </p:txBody>
+      </p:sp>
+      <p:sp>
+        <p:nvSpPr>
+          <p:cNvPr id="24" name="Text 22"/>
+          <p:cNvSpPr/>
+          <p:nvPr/>
+        </p:nvSpPr>
+        <p:spPr>
+          <a:xfrm>
+            <a:off x="7430872" y="3566160"/>
+            <a:ext cx="1682496" cy="960120"/>
+          </a:xfrm>
+          <a:prstGeom prst="rect">
+            <a:avLst/>
+          </a:prstGeom>
+          <a:noFill/>
+          <a:ln/>
+        </p:spPr>
+        <p:txBody>
+          <a:bodyPr wrap="square" rtlCol="0" anchor="ctr"/>
+          <a:lstStyle/>
+          <a:p>
+            <a:pPr indent="0" marL="0">
+              <a:buNone/>
+            </a:pPr>
+            <a:r>
+              <a:rPr lang="en-US" sz="980" dirty="0">
+                <a:solidFill>
+                  <a:srgbClr val="CBD5E1"/>
+                </a:solidFill>
+                <a:latin typeface="Segoe UI" pitchFamily="34" charset="0"/>
+                <a:ea typeface="Segoe UI" pitchFamily="34" charset="-122"/>
+                <a:cs typeface="Segoe UI" pitchFamily="34" charset="-120"/>
+              </a:rPr>
+              <a:t>Built executive, diagnostic, and operational views on the same shared metrics.</a:t>
+            </a:r>
+            <a:endParaRPr lang="en-US" sz="980" dirty="0"/>
+          </a:p>
+        </p:txBody>
+      </p:sp>
+      <p:sp>
+        <p:nvSpPr>
+          <p:cNvPr id="25" name="Shape 23"/>
+          <p:cNvSpPr/>
+          <p:nvPr/>
+        </p:nvSpPr>
+        <p:spPr>
+          <a:xfrm>
+            <a:off x="9255100" y="3419856"/>
+            <a:ext cx="210312" cy="274320"/>
+          </a:xfrm>
+          <a:prstGeom prst="rightArrow">
+            <a:avLst/>
+          </a:prstGeom>
+          <a:solidFill>
+            <a:srgbClr val="06B6D4"/>
+          </a:solidFill>
+          <a:ln/>
+        </p:spPr>
+      </p:sp>
+      <p:sp>
+        <p:nvSpPr>
+          <p:cNvPr id="26" name="Shape 24"/>
+          <p:cNvSpPr/>
+          <p:nvPr/>
+        </p:nvSpPr>
+        <p:spPr>
+          <a:xfrm>
+            <a:off x="9479128" y="2514600"/>
+            <a:ext cx="1938528" cy="2103120"/>
+          </a:xfrm>
+          <a:prstGeom prst="roundRect">
+            <a:avLst>
+              <a:gd name="adj" fmla="val 3302"/>
+            </a:avLst>
+          </a:prstGeom>
+          <a:solidFill>
+            <a:srgbClr val="111A2E"/>
+          </a:solidFill>
+          <a:ln w="19050">
+            <a:solidFill>
+              <a:srgbClr val="3B82F6"/>
+            </a:solidFill>
+            <a:prstDash val="solid"/>
+          </a:ln>
+        </p:spPr>
+      </p:sp>
+      <p:sp>
+        <p:nvSpPr>
+          <p:cNvPr id="27" name="Text 25"/>
+          <p:cNvSpPr/>
+          <p:nvPr/>
+        </p:nvSpPr>
+        <p:spPr>
+          <a:xfrm>
+            <a:off x="9607144" y="2633472"/>
+            <a:ext cx="1682496" cy="310896"/>
+          </a:xfrm>
+          <a:prstGeom prst="rect">
+            <a:avLst/>
+          </a:prstGeom>
+          <a:noFill/>
+          <a:ln/>
+        </p:spPr>
+        <p:txBody>
+          <a:bodyPr wrap="square" rtlCol="0" anchor="ctr"/>
+          <a:lstStyle/>
+          <a:p>
+            <a:pPr indent="0" marL="0">
+              <a:buNone/>
+            </a:pPr>
+            <a:r>
+              <a:rPr lang="en-US" sz="1100" b="1" dirty="0">
+                <a:solidFill>
+                  <a:srgbClr val="3B82F6"/>
+                </a:solidFill>
+                <a:latin typeface="Consolas" pitchFamily="34" charset="0"/>
+                <a:ea typeface="Consolas" pitchFamily="34" charset="-122"/>
+                <a:cs typeface="Consolas" pitchFamily="34" charset="-120"/>
+              </a:rPr>
+              <a:t>05</a:t>
+            </a:r>
+            <a:endParaRPr lang="en-US" sz="1100" dirty="0"/>
+          </a:p>
+        </p:txBody>
+      </p:sp>
+      <p:sp>
+        <p:nvSpPr>
+          <p:cNvPr id="28" name="Text 26"/>
+          <p:cNvSpPr/>
+          <p:nvPr/>
+        </p:nvSpPr>
+        <p:spPr>
+          <a:xfrm>
+            <a:off x="9607144" y="2962656"/>
+            <a:ext cx="1682496" cy="566928"/>
+          </a:xfrm>
+          <a:prstGeom prst="rect">
+            <a:avLst/>
+          </a:prstGeom>
+          <a:noFill/>
+          <a:ln/>
+        </p:spPr>
+        <p:txBody>
+          <a:bodyPr wrap="square" rtlCol="0" anchor="ctr"/>
+          <a:lstStyle/>
+          <a:p>
+            <a:pPr indent="0" marL="0">
+              <a:buNone/>
+            </a:pPr>
+            <a:r>
+              <a:rPr lang="en-US" sz="1350" b="1" dirty="0">
+                <a:solidFill>
+                  <a:srgbClr val="FFFFFF"/>
+                </a:solidFill>
+                <a:latin typeface="Segoe UI" pitchFamily="34" charset="0"/>
+                <a:ea typeface="Segoe UI" pitchFamily="34" charset="-122"/>
+                <a:cs typeface="Segoe UI" pitchFamily="34" charset="-120"/>
+              </a:rPr>
+              <a:t>Recommendations</a:t>
+            </a:r>
+            <a:endParaRPr lang="en-US" sz="1350" dirty="0"/>
+          </a:p>
+        </p:txBody>
+      </p:sp>
+      <p:sp>
+        <p:nvSpPr>
+          <p:cNvPr id="29" name="Text 27"/>
+          <p:cNvSpPr/>
+          <p:nvPr/>
+        </p:nvSpPr>
+        <p:spPr>
+          <a:xfrm>
+            <a:off x="9607144" y="3566160"/>
+            <a:ext cx="1682496" cy="960120"/>
+          </a:xfrm>
+          <a:prstGeom prst="rect">
+            <a:avLst/>
+          </a:prstGeom>
+          <a:noFill/>
+          <a:ln/>
+        </p:spPr>
+        <p:txBody>
+          <a:bodyPr wrap="square" rtlCol="0" anchor="ctr"/>
+          <a:lstStyle/>
+          <a:p>
+            <a:pPr indent="0" marL="0">
+              <a:buNone/>
+            </a:pPr>
+            <a:r>
+              <a:rPr lang="en-US" sz="980" dirty="0">
+                <a:solidFill>
+                  <a:srgbClr val="CBD5E1"/>
+                </a:solidFill>
+                <a:latin typeface="Segoe UI" pitchFamily="34" charset="0"/>
+                <a:ea typeface="Segoe UI" pitchFamily="34" charset="-122"/>
+                <a:cs typeface="Segoe UI" pitchFamily="34" charset="-120"/>
+              </a:rPr>
+              <a:t>Closed every analysis with a written action, because insight without action is trivia.</a:t>
+            </a:r>
+            <a:endParaRPr lang="en-US" sz="980" dirty="0"/>
+          </a:p>
+        </p:txBody>
+      </p:sp>
+      <p:sp>
+        <p:nvSpPr>
+          <p:cNvPr id="30" name="Shape 28"/>
+          <p:cNvSpPr/>
+          <p:nvPr/>
+        </p:nvSpPr>
+        <p:spPr>
+          <a:xfrm>
+            <a:off x="822960" y="5961888"/>
+            <a:ext cx="10515600" cy="0"/>
+          </a:xfrm>
+          <a:prstGeom prst="line">
+            <a:avLst/>
+          </a:prstGeom>
+          <a:noFill/>
+          <a:ln w="12700">
+            <a:solidFill>
+              <a:srgbClr val="1E2D45"/>
+            </a:solidFill>
+            <a:prstDash val="solid"/>
+          </a:ln>
+        </p:spPr>
+      </p:sp>
+      <p:sp>
+        <p:nvSpPr>
+          <p:cNvPr id="31" name="Text 29"/>
+          <p:cNvSpPr/>
+          <p:nvPr/>
+        </p:nvSpPr>
+        <p:spPr>
+          <a:xfrm>
+            <a:off x="822960" y="6053328"/>
+            <a:ext cx="9692640" cy="457200"/>
+          </a:xfrm>
+          <a:prstGeom prst="rect">
+            <a:avLst/>
+          </a:prstGeom>
+          <a:noFill/>
+          <a:ln/>
+        </p:spPr>
+        <p:txBody>
+          <a:bodyPr wrap="square" rtlCol="0" anchor="ctr"/>
+          <a:lstStyle/>
+          <a:p>
+            <a:pPr indent="0" marL="0">
+              <a:buNone/>
+            </a:pPr>
+            <a:r>
+              <a:rPr lang="en-US" sz="1150" dirty="0">
+                <a:solidFill>
+                  <a:srgbClr val="64748B"/>
+                </a:solidFill>
+                <a:latin typeface="Segoe UI" pitchFamily="34" charset="0"/>
+                <a:ea typeface="Segoe UI" pitchFamily="34" charset="-122"/>
+                <a:cs typeface="Segoe UI" pitchFamily="34" charset="-120"/>
+              </a:rPr>
+              <a:t>The user of analytics is a decision, not a dataset.</a:t>
+            </a:r>
+            <a:endParaRPr lang="en-US" sz="1150" dirty="0"/>
+          </a:p>
+        </p:txBody>
+      </p:sp>
+      <p:sp>
+        <p:nvSpPr>
+          <p:cNvPr id="32" name="Text 30"/>
+          <p:cNvSpPr/>
+          <p:nvPr/>
+        </p:nvSpPr>
+        <p:spPr>
+          <a:xfrm>
+            <a:off x="10698480" y="6382512"/>
+            <a:ext cx="1188720" cy="365760"/>
+          </a:xfrm>
+          <a:prstGeom prst="rect">
+            <a:avLst/>
+          </a:prstGeom>
+          <a:noFill/>
+          <a:ln/>
+        </p:spPr>
+        <p:txBody>
+          <a:bodyPr wrap="square" rtlCol="0" anchor="ctr"/>
+          <a:lstStyle/>
+          <a:p>
+            <a:pPr algn="r" indent="0" marL="0">
+              <a:buNone/>
+            </a:pPr>
+            <a:r>
+              <a:rPr lang="en-US" sz="1000" dirty="0">
+                <a:solidFill>
+                  <a:srgbClr val="64748B"/>
+                </a:solidFill>
+                <a:latin typeface="Consolas" pitchFamily="34" charset="0"/>
+                <a:ea typeface="Consolas" pitchFamily="34" charset="-122"/>
+                <a:cs typeface="Consolas" pitchFamily="34" charset="-120"/>
+              </a:rPr>
+              <a:t>5 / 14</a:t>
             </a:r>
             <a:endParaRPr lang="en-US" sz="1000" dirty="0"/>
           </a:p>
@@ -2938,7 +8259,7 @@
                 <a:ea typeface="Consolas" pitchFamily="34" charset="-122"/>
                 <a:cs typeface="Consolas" pitchFamily="34" charset="-120"/>
               </a:rPr>
-              <a:t>LESSONS</a:t>
+              <a:t>DASHBOARD ARCHITECTURE</a:t>
             </a:r>
             <a:endParaRPr lang="en-US" sz="1200" dirty="0"/>
           </a:p>
@@ -2952,8 +8273,8 @@
         </p:nvSpPr>
         <p:spPr>
           <a:xfrm>
-            <a:off x="822960" y="960120"/>
-            <a:ext cx="10515600" cy="868680"/>
+            <a:off x="822960" y="914400"/>
+            <a:ext cx="10561320" cy="868680"/>
           </a:xfrm>
           <a:prstGeom prst="rect">
             <a:avLst/>
@@ -2969,7 +8290,7 @@
               <a:buNone/>
             </a:pPr>
             <a:r>
-              <a:rPr lang="en-US" sz="3000" b="1" dirty="0">
+              <a:rPr lang="en-US" sz="2700" b="1" dirty="0">
                 <a:solidFill>
                   <a:srgbClr val="FFFFFF"/>
                 </a:solidFill>
@@ -2977,115 +8298,1144 @@
                 <a:ea typeface="Segoe UI" pitchFamily="34" charset="-122"/>
                 <a:cs typeface="Segoe UI" pitchFamily="34" charset="-120"/>
               </a:rPr>
-              <a:t>What the data taught me</a:t>
-            </a:r>
-            <a:endParaRPr lang="en-US" sz="3000" dirty="0"/>
-          </a:p>
-        </p:txBody>
-      </p:sp>
-      <p:sp>
-        <p:nvSpPr>
-          <p:cNvPr id="6" name="Text 4"/>
-          <p:cNvSpPr/>
-          <p:nvPr/>
-        </p:nvSpPr>
-        <p:spPr>
-          <a:xfrm>
-            <a:off x="868680" y="2057400"/>
-            <a:ext cx="10424160" cy="3566160"/>
-          </a:xfrm>
-          <a:prstGeom prst="rect">
-            <a:avLst/>
-          </a:prstGeom>
-          <a:noFill/>
-          <a:ln/>
-        </p:spPr>
-        <p:txBody>
-          <a:bodyPr wrap="square" rtlCol="0" anchor="t"/>
-          <a:lstStyle/>
-          <a:p>
-            <a:pPr marL="342900" indent="-342900">
-              <a:lnSpc>
-                <a:spcPct val="115000"/>
-              </a:lnSpc>
-              <a:spcAft>
-                <a:spcPts val="1000"/>
-              </a:spcAft>
-              <a:buSzPct val="100000"/>
-              <a:buChar char="▸"/>
-            </a:pPr>
-            <a:r>
-              <a:rPr lang="en-US" sz="1600" dirty="0">
-                <a:solidFill>
-                  <a:srgbClr val="CBD5E1"/>
+              <a:t>Views that mirror the organization</a:t>
+            </a:r>
+            <a:endParaRPr lang="en-US" sz="2700" dirty="0"/>
+          </a:p>
+        </p:txBody>
+      </p:sp>
+      <p:graphicFrame>
+        <p:nvGraphicFramePr>
+          <p:cNvPr id="7" name="Table 0"/>
+          <p:cNvGraphicFramePr>
+            <a:graphicFrameLocks noGrp="1"/>
+          </p:cNvGraphicFramePr>
+          <p:nvPr>
+            <p:extLst>
+              <p:ext uri="{D42A27DB-BD31-4B8C-83A1-F6EECF244321}">
+                <p14:modId xmlns:p14="http://schemas.microsoft.com/office/powerpoint/2010/main" val="1579011935"/>
+              </p:ext>
+            </p:extLst>
+          </p:nvPr>
+        </p:nvGraphicFramePr>
+        <p:xfrm>
+          <a:off x="822960" y="2011680"/>
+          <a:ext cx="10515600" cy="914400"/>
+        </p:xfrm>
+        <a:graphic>
+          <a:graphicData uri="http://schemas.openxmlformats.org/drawingml/2006/table">
+            <a:tbl>
+              <a:tblPr/>
+              <a:tblGrid>
+                <a:gridCol w="3505200"/>
+                <a:gridCol w="3505200"/>
+                <a:gridCol w="3505200"/>
+              </a:tblGrid>
+              <a:tr h="402336">
+                <a:tc>
+                  <a:txBody>
+                    <a:bodyPr/>
+                    <a:lstStyle/>
+                    <a:p>
+                      <a:pPr indent="0" marL="0">
+                        <a:buNone/>
+                      </a:pPr>
+                      <a:r>
+                        <a:rPr lang="en-US" sz="1150" b="1" dirty="0">
+                          <a:solidFill>
+                            <a:srgbClr val="FFFFFF"/>
+                          </a:solidFill>
+                          <a:latin typeface="Segoe UI" pitchFamily="34" charset="0"/>
+                          <a:ea typeface="Segoe UI" pitchFamily="34" charset="-122"/>
+                          <a:cs typeface="Segoe UI" pitchFamily="34" charset="-120"/>
+                        </a:rPr>
+                        <a:t>View</a:t>
+                      </a:r>
+                      <a:endParaRPr lang="en-US" sz="1150" dirty="0">
+                        <a:latin typeface="Segoe UI" charset="0"/>
+                        <a:ea typeface="Segoe UI" charset="0"/>
+                        <a:cs typeface="Segoe UI" charset="0"/>
+                      </a:endParaRPr>
+                    </a:p>
+                  </a:txBody>
+                  <a:tcPr marL="64008" marR="64008" marT="64008" marB="64008" anchor="ctr">
+                    <a:lnL w="6350" cap="flat" cmpd="sng" algn="ctr">
+                      <a:solidFill>
+                        <a:srgbClr val="24365A"/>
+                      </a:solidFill>
+                      <a:prstDash val="solid"/>
+                      <a:round/>
+                      <a:headEnd type="none" w="med" len="med"/>
+                      <a:tailEnd type="none" w="med" len="med"/>
+                    </a:lnL>
+                    <a:lnR w="6350" cap="flat" cmpd="sng" algn="ctr">
+                      <a:solidFill>
+                        <a:srgbClr val="24365A"/>
+                      </a:solidFill>
+                      <a:prstDash val="solid"/>
+                      <a:round/>
+                      <a:headEnd type="none" w="med" len="med"/>
+                      <a:tailEnd type="none" w="med" len="med"/>
+                    </a:lnR>
+                    <a:lnT w="6350" cap="flat" cmpd="sng" algn="ctr">
+                      <a:solidFill>
+                        <a:srgbClr val="24365A"/>
+                      </a:solidFill>
+                      <a:prstDash val="solid"/>
+                      <a:round/>
+                      <a:headEnd type="none" w="med" len="med"/>
+                      <a:tailEnd type="none" w="med" len="med"/>
+                    </a:lnT>
+                    <a:lnB w="6350" cap="flat" cmpd="sng" algn="ctr">
+                      <a:solidFill>
+                        <a:srgbClr val="24365A"/>
+                      </a:solidFill>
+                      <a:prstDash val="solid"/>
+                      <a:round/>
+                      <a:headEnd type="none" w="med" len="med"/>
+                      <a:tailEnd type="none" w="med" len="med"/>
+                    </a:lnB>
+                    <a:solidFill>
+                      <a:srgbClr val="16233B"/>
+                    </a:solidFill>
+                  </a:tcPr>
+                </a:tc>
+                <a:tc>
+                  <a:txBody>
+                    <a:bodyPr/>
+                    <a:lstStyle/>
+                    <a:p>
+                      <a:pPr indent="0" marL="0">
+                        <a:buNone/>
+                      </a:pPr>
+                      <a:r>
+                        <a:rPr lang="en-US" sz="1150" b="1" dirty="0">
+                          <a:solidFill>
+                            <a:srgbClr val="FFFFFF"/>
+                          </a:solidFill>
+                          <a:latin typeface="Segoe UI" pitchFamily="34" charset="0"/>
+                          <a:ea typeface="Segoe UI" pitchFamily="34" charset="-122"/>
+                          <a:cs typeface="Segoe UI" pitchFamily="34" charset="-120"/>
+                        </a:rPr>
+                        <a:t>Audience</a:t>
+                      </a:r>
+                      <a:endParaRPr lang="en-US" sz="1150" dirty="0">
+                        <a:latin typeface="Segoe UI" charset="0"/>
+                        <a:ea typeface="Segoe UI" charset="0"/>
+                        <a:cs typeface="Segoe UI" charset="0"/>
+                      </a:endParaRPr>
+                    </a:p>
+                  </a:txBody>
+                  <a:tcPr marL="64008" marR="64008" marT="64008" marB="64008" anchor="ctr">
+                    <a:lnL w="6350" cap="flat" cmpd="sng" algn="ctr">
+                      <a:solidFill>
+                        <a:srgbClr val="24365A"/>
+                      </a:solidFill>
+                      <a:prstDash val="solid"/>
+                      <a:round/>
+                      <a:headEnd type="none" w="med" len="med"/>
+                      <a:tailEnd type="none" w="med" len="med"/>
+                    </a:lnL>
+                    <a:lnR w="6350" cap="flat" cmpd="sng" algn="ctr">
+                      <a:solidFill>
+                        <a:srgbClr val="24365A"/>
+                      </a:solidFill>
+                      <a:prstDash val="solid"/>
+                      <a:round/>
+                      <a:headEnd type="none" w="med" len="med"/>
+                      <a:tailEnd type="none" w="med" len="med"/>
+                    </a:lnR>
+                    <a:lnT w="6350" cap="flat" cmpd="sng" algn="ctr">
+                      <a:solidFill>
+                        <a:srgbClr val="24365A"/>
+                      </a:solidFill>
+                      <a:prstDash val="solid"/>
+                      <a:round/>
+                      <a:headEnd type="none" w="med" len="med"/>
+                      <a:tailEnd type="none" w="med" len="med"/>
+                    </a:lnT>
+                    <a:lnB w="6350" cap="flat" cmpd="sng" algn="ctr">
+                      <a:solidFill>
+                        <a:srgbClr val="24365A"/>
+                      </a:solidFill>
+                      <a:prstDash val="solid"/>
+                      <a:round/>
+                      <a:headEnd type="none" w="med" len="med"/>
+                      <a:tailEnd type="none" w="med" len="med"/>
+                    </a:lnB>
+                    <a:solidFill>
+                      <a:srgbClr val="16233B"/>
+                    </a:solidFill>
+                  </a:tcPr>
+                </a:tc>
+                <a:tc>
+                  <a:txBody>
+                    <a:bodyPr/>
+                    <a:lstStyle/>
+                    <a:p>
+                      <a:pPr indent="0" marL="0">
+                        <a:buNone/>
+                      </a:pPr>
+                      <a:r>
+                        <a:rPr lang="en-US" sz="1150" b="1" dirty="0">
+                          <a:solidFill>
+                            <a:srgbClr val="FFFFFF"/>
+                          </a:solidFill>
+                          <a:latin typeface="Segoe UI" pitchFamily="34" charset="0"/>
+                          <a:ea typeface="Segoe UI" pitchFamily="34" charset="-122"/>
+                          <a:cs typeface="Segoe UI" pitchFamily="34" charset="-120"/>
+                        </a:rPr>
+                        <a:t>What it answers</a:t>
+                      </a:r>
+                      <a:endParaRPr lang="en-US" sz="1150" dirty="0">
+                        <a:latin typeface="Segoe UI" charset="0"/>
+                        <a:ea typeface="Segoe UI" charset="0"/>
+                        <a:cs typeface="Segoe UI" charset="0"/>
+                      </a:endParaRPr>
+                    </a:p>
+                  </a:txBody>
+                  <a:tcPr marL="64008" marR="64008" marT="64008" marB="64008" anchor="ctr">
+                    <a:lnL w="6350" cap="flat" cmpd="sng" algn="ctr">
+                      <a:solidFill>
+                        <a:srgbClr val="24365A"/>
+                      </a:solidFill>
+                      <a:prstDash val="solid"/>
+                      <a:round/>
+                      <a:headEnd type="none" w="med" len="med"/>
+                      <a:tailEnd type="none" w="med" len="med"/>
+                    </a:lnL>
+                    <a:lnR w="6350" cap="flat" cmpd="sng" algn="ctr">
+                      <a:solidFill>
+                        <a:srgbClr val="24365A"/>
+                      </a:solidFill>
+                      <a:prstDash val="solid"/>
+                      <a:round/>
+                      <a:headEnd type="none" w="med" len="med"/>
+                      <a:tailEnd type="none" w="med" len="med"/>
+                    </a:lnR>
+                    <a:lnT w="6350" cap="flat" cmpd="sng" algn="ctr">
+                      <a:solidFill>
+                        <a:srgbClr val="24365A"/>
+                      </a:solidFill>
+                      <a:prstDash val="solid"/>
+                      <a:round/>
+                      <a:headEnd type="none" w="med" len="med"/>
+                      <a:tailEnd type="none" w="med" len="med"/>
+                    </a:lnT>
+                    <a:lnB w="6350" cap="flat" cmpd="sng" algn="ctr">
+                      <a:solidFill>
+                        <a:srgbClr val="24365A"/>
+                      </a:solidFill>
+                      <a:prstDash val="solid"/>
+                      <a:round/>
+                      <a:headEnd type="none" w="med" len="med"/>
+                      <a:tailEnd type="none" w="med" len="med"/>
+                    </a:lnB>
+                    <a:solidFill>
+                      <a:srgbClr val="16233B"/>
+                    </a:solidFill>
+                  </a:tcPr>
+                </a:tc>
+              </a:tr>
+              <a:tr h="402336">
+                <a:tc>
+                  <a:txBody>
+                    <a:bodyPr/>
+                    <a:lstStyle/>
+                    <a:p>
+                      <a:pPr indent="0" marL="0">
+                        <a:buNone/>
+                      </a:pPr>
+                      <a:r>
+                        <a:rPr lang="en-US" sz="1080" dirty="0">
+                          <a:solidFill>
+                            <a:srgbClr val="CBD5E1"/>
+                          </a:solidFill>
+                          <a:latin typeface="Segoe UI" pitchFamily="34" charset="0"/>
+                          <a:ea typeface="Segoe UI" pitchFamily="34" charset="-122"/>
+                          <a:cs typeface="Segoe UI" pitchFamily="34" charset="-120"/>
+                        </a:rPr>
+                        <a:t>Executive</a:t>
+                      </a:r>
+                      <a:endParaRPr lang="en-US" sz="1080" dirty="0">
+                        <a:latin typeface="Segoe UI" charset="0"/>
+                        <a:ea typeface="Segoe UI" charset="0"/>
+                        <a:cs typeface="Segoe UI" charset="0"/>
+                      </a:endParaRPr>
+                    </a:p>
+                  </a:txBody>
+                  <a:tcPr marL="64008" marR="64008" marT="64008" marB="64008" anchor="ctr">
+                    <a:lnL w="6350" cap="flat" cmpd="sng" algn="ctr">
+                      <a:solidFill>
+                        <a:srgbClr val="24365A"/>
+                      </a:solidFill>
+                      <a:prstDash val="solid"/>
+                      <a:round/>
+                      <a:headEnd type="none" w="med" len="med"/>
+                      <a:tailEnd type="none" w="med" len="med"/>
+                    </a:lnL>
+                    <a:lnR w="6350" cap="flat" cmpd="sng" algn="ctr">
+                      <a:solidFill>
+                        <a:srgbClr val="24365A"/>
+                      </a:solidFill>
+                      <a:prstDash val="solid"/>
+                      <a:round/>
+                      <a:headEnd type="none" w="med" len="med"/>
+                      <a:tailEnd type="none" w="med" len="med"/>
+                    </a:lnR>
+                    <a:lnT w="6350" cap="flat" cmpd="sng" algn="ctr">
+                      <a:solidFill>
+                        <a:srgbClr val="24365A"/>
+                      </a:solidFill>
+                      <a:prstDash val="solid"/>
+                      <a:round/>
+                      <a:headEnd type="none" w="med" len="med"/>
+                      <a:tailEnd type="none" w="med" len="med"/>
+                    </a:lnT>
+                    <a:lnB w="6350" cap="flat" cmpd="sng" algn="ctr">
+                      <a:solidFill>
+                        <a:srgbClr val="24365A"/>
+                      </a:solidFill>
+                      <a:prstDash val="solid"/>
+                      <a:round/>
+                      <a:headEnd type="none" w="med" len="med"/>
+                      <a:tailEnd type="none" w="med" len="med"/>
+                    </a:lnB>
+                    <a:solidFill>
+                      <a:srgbClr val="101A2D"/>
+                    </a:solidFill>
+                  </a:tcPr>
+                </a:tc>
+                <a:tc>
+                  <a:txBody>
+                    <a:bodyPr/>
+                    <a:lstStyle/>
+                    <a:p>
+                      <a:pPr indent="0" marL="0">
+                        <a:buNone/>
+                      </a:pPr>
+                      <a:r>
+                        <a:rPr lang="en-US" sz="1080" dirty="0">
+                          <a:solidFill>
+                            <a:srgbClr val="CBD5E1"/>
+                          </a:solidFill>
+                          <a:latin typeface="Segoe UI" pitchFamily="34" charset="0"/>
+                          <a:ea typeface="Segoe UI" pitchFamily="34" charset="-122"/>
+                          <a:cs typeface="Segoe UI" pitchFamily="34" charset="-120"/>
+                        </a:rPr>
+                        <a:t>Leadership</a:t>
+                      </a:r>
+                      <a:endParaRPr lang="en-US" sz="1080" dirty="0">
+                        <a:latin typeface="Segoe UI" charset="0"/>
+                        <a:ea typeface="Segoe UI" charset="0"/>
+                        <a:cs typeface="Segoe UI" charset="0"/>
+                      </a:endParaRPr>
+                    </a:p>
+                  </a:txBody>
+                  <a:tcPr marL="64008" marR="64008" marT="64008" marB="64008" anchor="ctr">
+                    <a:lnL w="6350" cap="flat" cmpd="sng" algn="ctr">
+                      <a:solidFill>
+                        <a:srgbClr val="24365A"/>
+                      </a:solidFill>
+                      <a:prstDash val="solid"/>
+                      <a:round/>
+                      <a:headEnd type="none" w="med" len="med"/>
+                      <a:tailEnd type="none" w="med" len="med"/>
+                    </a:lnL>
+                    <a:lnR w="6350" cap="flat" cmpd="sng" algn="ctr">
+                      <a:solidFill>
+                        <a:srgbClr val="24365A"/>
+                      </a:solidFill>
+                      <a:prstDash val="solid"/>
+                      <a:round/>
+                      <a:headEnd type="none" w="med" len="med"/>
+                      <a:tailEnd type="none" w="med" len="med"/>
+                    </a:lnR>
+                    <a:lnT w="6350" cap="flat" cmpd="sng" algn="ctr">
+                      <a:solidFill>
+                        <a:srgbClr val="24365A"/>
+                      </a:solidFill>
+                      <a:prstDash val="solid"/>
+                      <a:round/>
+                      <a:headEnd type="none" w="med" len="med"/>
+                      <a:tailEnd type="none" w="med" len="med"/>
+                    </a:lnT>
+                    <a:lnB w="6350" cap="flat" cmpd="sng" algn="ctr">
+                      <a:solidFill>
+                        <a:srgbClr val="24365A"/>
+                      </a:solidFill>
+                      <a:prstDash val="solid"/>
+                      <a:round/>
+                      <a:headEnd type="none" w="med" len="med"/>
+                      <a:tailEnd type="none" w="med" len="med"/>
+                    </a:lnB>
+                    <a:solidFill>
+                      <a:srgbClr val="101A2D"/>
+                    </a:solidFill>
+                  </a:tcPr>
+                </a:tc>
+                <a:tc>
+                  <a:txBody>
+                    <a:bodyPr/>
+                    <a:lstStyle/>
+                    <a:p>
+                      <a:pPr indent="0" marL="0">
+                        <a:buNone/>
+                      </a:pPr>
+                      <a:r>
+                        <a:rPr lang="en-US" sz="1080" dirty="0">
+                          <a:solidFill>
+                            <a:srgbClr val="CBD5E1"/>
+                          </a:solidFill>
+                          <a:latin typeface="Segoe UI" pitchFamily="34" charset="0"/>
+                          <a:ea typeface="Segoe UI" pitchFamily="34" charset="-122"/>
+                          <a:cs typeface="Segoe UI" pitchFamily="34" charset="-120"/>
+                        </a:rPr>
+                        <a:t>A handful of KPIs with thresholds and trends - is the business healthy?</a:t>
+                      </a:r>
+                      <a:endParaRPr lang="en-US" sz="1080" dirty="0">
+                        <a:latin typeface="Segoe UI" charset="0"/>
+                        <a:ea typeface="Segoe UI" charset="0"/>
+                        <a:cs typeface="Segoe UI" charset="0"/>
+                      </a:endParaRPr>
+                    </a:p>
+                  </a:txBody>
+                  <a:tcPr marL="64008" marR="64008" marT="64008" marB="64008" anchor="ctr">
+                    <a:lnL w="6350" cap="flat" cmpd="sng" algn="ctr">
+                      <a:solidFill>
+                        <a:srgbClr val="24365A"/>
+                      </a:solidFill>
+                      <a:prstDash val="solid"/>
+                      <a:round/>
+                      <a:headEnd type="none" w="med" len="med"/>
+                      <a:tailEnd type="none" w="med" len="med"/>
+                    </a:lnL>
+                    <a:lnR w="6350" cap="flat" cmpd="sng" algn="ctr">
+                      <a:solidFill>
+                        <a:srgbClr val="24365A"/>
+                      </a:solidFill>
+                      <a:prstDash val="solid"/>
+                      <a:round/>
+                      <a:headEnd type="none" w="med" len="med"/>
+                      <a:tailEnd type="none" w="med" len="med"/>
+                    </a:lnR>
+                    <a:lnT w="6350" cap="flat" cmpd="sng" algn="ctr">
+                      <a:solidFill>
+                        <a:srgbClr val="24365A"/>
+                      </a:solidFill>
+                      <a:prstDash val="solid"/>
+                      <a:round/>
+                      <a:headEnd type="none" w="med" len="med"/>
+                      <a:tailEnd type="none" w="med" len="med"/>
+                    </a:lnT>
+                    <a:lnB w="6350" cap="flat" cmpd="sng" algn="ctr">
+                      <a:solidFill>
+                        <a:srgbClr val="24365A"/>
+                      </a:solidFill>
+                      <a:prstDash val="solid"/>
+                      <a:round/>
+                      <a:headEnd type="none" w="med" len="med"/>
+                      <a:tailEnd type="none" w="med" len="med"/>
+                    </a:lnB>
+                    <a:solidFill>
+                      <a:srgbClr val="101A2D"/>
+                    </a:solidFill>
+                  </a:tcPr>
+                </a:tc>
+              </a:tr>
+              <a:tr h="402336">
+                <a:tc>
+                  <a:txBody>
+                    <a:bodyPr/>
+                    <a:lstStyle/>
+                    <a:p>
+                      <a:pPr indent="0" marL="0">
+                        <a:buNone/>
+                      </a:pPr>
+                      <a:r>
+                        <a:rPr lang="en-US" sz="1080" dirty="0">
+                          <a:solidFill>
+                            <a:srgbClr val="CBD5E1"/>
+                          </a:solidFill>
+                          <a:latin typeface="Segoe UI" pitchFamily="34" charset="0"/>
+                          <a:ea typeface="Segoe UI" pitchFamily="34" charset="-122"/>
+                          <a:cs typeface="Segoe UI" pitchFamily="34" charset="-120"/>
+                        </a:rPr>
+                        <a:t>Middle</a:t>
+                      </a:r>
+                      <a:endParaRPr lang="en-US" sz="1080" dirty="0">
+                        <a:latin typeface="Segoe UI" charset="0"/>
+                        <a:ea typeface="Segoe UI" charset="0"/>
+                        <a:cs typeface="Segoe UI" charset="0"/>
+                      </a:endParaRPr>
+                    </a:p>
+                  </a:txBody>
+                  <a:tcPr marL="64008" marR="64008" marT="64008" marB="64008" anchor="ctr">
+                    <a:lnL w="6350" cap="flat" cmpd="sng" algn="ctr">
+                      <a:solidFill>
+                        <a:srgbClr val="24365A"/>
+                      </a:solidFill>
+                      <a:prstDash val="solid"/>
+                      <a:round/>
+                      <a:headEnd type="none" w="med" len="med"/>
+                      <a:tailEnd type="none" w="med" len="med"/>
+                    </a:lnL>
+                    <a:lnR w="6350" cap="flat" cmpd="sng" algn="ctr">
+                      <a:solidFill>
+                        <a:srgbClr val="24365A"/>
+                      </a:solidFill>
+                      <a:prstDash val="solid"/>
+                      <a:round/>
+                      <a:headEnd type="none" w="med" len="med"/>
+                      <a:tailEnd type="none" w="med" len="med"/>
+                    </a:lnR>
+                    <a:lnT w="6350" cap="flat" cmpd="sng" algn="ctr">
+                      <a:solidFill>
+                        <a:srgbClr val="24365A"/>
+                      </a:solidFill>
+                      <a:prstDash val="solid"/>
+                      <a:round/>
+                      <a:headEnd type="none" w="med" len="med"/>
+                      <a:tailEnd type="none" w="med" len="med"/>
+                    </a:lnT>
+                    <a:lnB w="6350" cap="flat" cmpd="sng" algn="ctr">
+                      <a:solidFill>
+                        <a:srgbClr val="24365A"/>
+                      </a:solidFill>
+                      <a:prstDash val="solid"/>
+                      <a:round/>
+                      <a:headEnd type="none" w="med" len="med"/>
+                      <a:tailEnd type="none" w="med" len="med"/>
+                    </a:lnB>
+                    <a:solidFill>
+                      <a:srgbClr val="0D1420"/>
+                    </a:solidFill>
+                  </a:tcPr>
+                </a:tc>
+                <a:tc>
+                  <a:txBody>
+                    <a:bodyPr/>
+                    <a:lstStyle/>
+                    <a:p>
+                      <a:pPr indent="0" marL="0">
+                        <a:buNone/>
+                      </a:pPr>
+                      <a:r>
+                        <a:rPr lang="en-US" sz="1080" dirty="0">
+                          <a:solidFill>
+                            <a:srgbClr val="CBD5E1"/>
+                          </a:solidFill>
+                          <a:latin typeface="Segoe UI" pitchFamily="34" charset="0"/>
+                          <a:ea typeface="Segoe UI" pitchFamily="34" charset="-122"/>
+                          <a:cs typeface="Segoe UI" pitchFamily="34" charset="-120"/>
+                        </a:rPr>
+                        <a:t>Analysts and managers</a:t>
+                      </a:r>
+                      <a:endParaRPr lang="en-US" sz="1080" dirty="0">
+                        <a:latin typeface="Segoe UI" charset="0"/>
+                        <a:ea typeface="Segoe UI" charset="0"/>
+                        <a:cs typeface="Segoe UI" charset="0"/>
+                      </a:endParaRPr>
+                    </a:p>
+                  </a:txBody>
+                  <a:tcPr marL="64008" marR="64008" marT="64008" marB="64008" anchor="ctr">
+                    <a:lnL w="6350" cap="flat" cmpd="sng" algn="ctr">
+                      <a:solidFill>
+                        <a:srgbClr val="24365A"/>
+                      </a:solidFill>
+                      <a:prstDash val="solid"/>
+                      <a:round/>
+                      <a:headEnd type="none" w="med" len="med"/>
+                      <a:tailEnd type="none" w="med" len="med"/>
+                    </a:lnL>
+                    <a:lnR w="6350" cap="flat" cmpd="sng" algn="ctr">
+                      <a:solidFill>
+                        <a:srgbClr val="24365A"/>
+                      </a:solidFill>
+                      <a:prstDash val="solid"/>
+                      <a:round/>
+                      <a:headEnd type="none" w="med" len="med"/>
+                      <a:tailEnd type="none" w="med" len="med"/>
+                    </a:lnR>
+                    <a:lnT w="6350" cap="flat" cmpd="sng" algn="ctr">
+                      <a:solidFill>
+                        <a:srgbClr val="24365A"/>
+                      </a:solidFill>
+                      <a:prstDash val="solid"/>
+                      <a:round/>
+                      <a:headEnd type="none" w="med" len="med"/>
+                      <a:tailEnd type="none" w="med" len="med"/>
+                    </a:lnT>
+                    <a:lnB w="6350" cap="flat" cmpd="sng" algn="ctr">
+                      <a:solidFill>
+                        <a:srgbClr val="24365A"/>
+                      </a:solidFill>
+                      <a:prstDash val="solid"/>
+                      <a:round/>
+                      <a:headEnd type="none" w="med" len="med"/>
+                      <a:tailEnd type="none" w="med" len="med"/>
+                    </a:lnB>
+                    <a:solidFill>
+                      <a:srgbClr val="0D1420"/>
+                    </a:solidFill>
+                  </a:tcPr>
+                </a:tc>
+                <a:tc>
+                  <a:txBody>
+                    <a:bodyPr/>
+                    <a:lstStyle/>
+                    <a:p>
+                      <a:pPr indent="0" marL="0">
+                        <a:buNone/>
+                      </a:pPr>
+                      <a:r>
+                        <a:rPr lang="en-US" sz="1080" dirty="0">
+                          <a:solidFill>
+                            <a:srgbClr val="CBD5E1"/>
+                          </a:solidFill>
+                          <a:latin typeface="Segoe UI" pitchFamily="34" charset="0"/>
+                          <a:ea typeface="Segoe UI" pitchFamily="34" charset="-122"/>
+                          <a:cs typeface="Segoe UI" pitchFamily="34" charset="-120"/>
+                        </a:rPr>
+                        <a:t>The same metrics sliced for diagnosis - which segment moved, and why?</a:t>
+                      </a:r>
+                      <a:endParaRPr lang="en-US" sz="1080" dirty="0">
+                        <a:latin typeface="Segoe UI" charset="0"/>
+                        <a:ea typeface="Segoe UI" charset="0"/>
+                        <a:cs typeface="Segoe UI" charset="0"/>
+                      </a:endParaRPr>
+                    </a:p>
+                  </a:txBody>
+                  <a:tcPr marL="64008" marR="64008" marT="64008" marB="64008" anchor="ctr">
+                    <a:lnL w="6350" cap="flat" cmpd="sng" algn="ctr">
+                      <a:solidFill>
+                        <a:srgbClr val="24365A"/>
+                      </a:solidFill>
+                      <a:prstDash val="solid"/>
+                      <a:round/>
+                      <a:headEnd type="none" w="med" len="med"/>
+                      <a:tailEnd type="none" w="med" len="med"/>
+                    </a:lnL>
+                    <a:lnR w="6350" cap="flat" cmpd="sng" algn="ctr">
+                      <a:solidFill>
+                        <a:srgbClr val="24365A"/>
+                      </a:solidFill>
+                      <a:prstDash val="solid"/>
+                      <a:round/>
+                      <a:headEnd type="none" w="med" len="med"/>
+                      <a:tailEnd type="none" w="med" len="med"/>
+                    </a:lnR>
+                    <a:lnT w="6350" cap="flat" cmpd="sng" algn="ctr">
+                      <a:solidFill>
+                        <a:srgbClr val="24365A"/>
+                      </a:solidFill>
+                      <a:prstDash val="solid"/>
+                      <a:round/>
+                      <a:headEnd type="none" w="med" len="med"/>
+                      <a:tailEnd type="none" w="med" len="med"/>
+                    </a:lnT>
+                    <a:lnB w="6350" cap="flat" cmpd="sng" algn="ctr">
+                      <a:solidFill>
+                        <a:srgbClr val="24365A"/>
+                      </a:solidFill>
+                      <a:prstDash val="solid"/>
+                      <a:round/>
+                      <a:headEnd type="none" w="med" len="med"/>
+                      <a:tailEnd type="none" w="med" len="med"/>
+                    </a:lnB>
+                    <a:solidFill>
+                      <a:srgbClr val="0D1420"/>
+                    </a:solidFill>
+                  </a:tcPr>
+                </a:tc>
+              </a:tr>
+              <a:tr h="402336">
+                <a:tc>
+                  <a:txBody>
+                    <a:bodyPr/>
+                    <a:lstStyle/>
+                    <a:p>
+                      <a:pPr indent="0" marL="0">
+                        <a:buNone/>
+                      </a:pPr>
+                      <a:r>
+                        <a:rPr lang="en-US" sz="1080" dirty="0">
+                          <a:solidFill>
+                            <a:srgbClr val="CBD5E1"/>
+                          </a:solidFill>
+                          <a:latin typeface="Segoe UI" pitchFamily="34" charset="0"/>
+                          <a:ea typeface="Segoe UI" pitchFamily="34" charset="-122"/>
+                          <a:cs typeface="Segoe UI" pitchFamily="34" charset="-120"/>
+                        </a:rPr>
+                        <a:t>Operational</a:t>
+                      </a:r>
+                      <a:endParaRPr lang="en-US" sz="1080" dirty="0">
+                        <a:latin typeface="Segoe UI" charset="0"/>
+                        <a:ea typeface="Segoe UI" charset="0"/>
+                        <a:cs typeface="Segoe UI" charset="0"/>
+                      </a:endParaRPr>
+                    </a:p>
+                  </a:txBody>
+                  <a:tcPr marL="64008" marR="64008" marT="64008" marB="64008" anchor="ctr">
+                    <a:lnL w="6350" cap="flat" cmpd="sng" algn="ctr">
+                      <a:solidFill>
+                        <a:srgbClr val="24365A"/>
+                      </a:solidFill>
+                      <a:prstDash val="solid"/>
+                      <a:round/>
+                      <a:headEnd type="none" w="med" len="med"/>
+                      <a:tailEnd type="none" w="med" len="med"/>
+                    </a:lnL>
+                    <a:lnR w="6350" cap="flat" cmpd="sng" algn="ctr">
+                      <a:solidFill>
+                        <a:srgbClr val="24365A"/>
+                      </a:solidFill>
+                      <a:prstDash val="solid"/>
+                      <a:round/>
+                      <a:headEnd type="none" w="med" len="med"/>
+                      <a:tailEnd type="none" w="med" len="med"/>
+                    </a:lnR>
+                    <a:lnT w="6350" cap="flat" cmpd="sng" algn="ctr">
+                      <a:solidFill>
+                        <a:srgbClr val="24365A"/>
+                      </a:solidFill>
+                      <a:prstDash val="solid"/>
+                      <a:round/>
+                      <a:headEnd type="none" w="med" len="med"/>
+                      <a:tailEnd type="none" w="med" len="med"/>
+                    </a:lnT>
+                    <a:lnB w="6350" cap="flat" cmpd="sng" algn="ctr">
+                      <a:solidFill>
+                        <a:srgbClr val="24365A"/>
+                      </a:solidFill>
+                      <a:prstDash val="solid"/>
+                      <a:round/>
+                      <a:headEnd type="none" w="med" len="med"/>
+                      <a:tailEnd type="none" w="med" len="med"/>
+                    </a:lnB>
+                    <a:solidFill>
+                      <a:srgbClr val="101A2D"/>
+                    </a:solidFill>
+                  </a:tcPr>
+                </a:tc>
+                <a:tc>
+                  <a:txBody>
+                    <a:bodyPr/>
+                    <a:lstStyle/>
+                    <a:p>
+                      <a:pPr indent="0" marL="0">
+                        <a:buNone/>
+                      </a:pPr>
+                      <a:r>
+                        <a:rPr lang="en-US" sz="1080" dirty="0">
+                          <a:solidFill>
+                            <a:srgbClr val="CBD5E1"/>
+                          </a:solidFill>
+                          <a:latin typeface="Segoe UI" pitchFamily="34" charset="0"/>
+                          <a:ea typeface="Segoe UI" pitchFamily="34" charset="-122"/>
+                          <a:cs typeface="Segoe UI" pitchFamily="34" charset="-120"/>
+                        </a:rPr>
+                        <a:t>Frontline teams</a:t>
+                      </a:r>
+                      <a:endParaRPr lang="en-US" sz="1080" dirty="0">
+                        <a:latin typeface="Segoe UI" charset="0"/>
+                        <a:ea typeface="Segoe UI" charset="0"/>
+                        <a:cs typeface="Segoe UI" charset="0"/>
+                      </a:endParaRPr>
+                    </a:p>
+                  </a:txBody>
+                  <a:tcPr marL="64008" marR="64008" marT="64008" marB="64008" anchor="ctr">
+                    <a:lnL w="6350" cap="flat" cmpd="sng" algn="ctr">
+                      <a:solidFill>
+                        <a:srgbClr val="24365A"/>
+                      </a:solidFill>
+                      <a:prstDash val="solid"/>
+                      <a:round/>
+                      <a:headEnd type="none" w="med" len="med"/>
+                      <a:tailEnd type="none" w="med" len="med"/>
+                    </a:lnL>
+                    <a:lnR w="6350" cap="flat" cmpd="sng" algn="ctr">
+                      <a:solidFill>
+                        <a:srgbClr val="24365A"/>
+                      </a:solidFill>
+                      <a:prstDash val="solid"/>
+                      <a:round/>
+                      <a:headEnd type="none" w="med" len="med"/>
+                      <a:tailEnd type="none" w="med" len="med"/>
+                    </a:lnR>
+                    <a:lnT w="6350" cap="flat" cmpd="sng" algn="ctr">
+                      <a:solidFill>
+                        <a:srgbClr val="24365A"/>
+                      </a:solidFill>
+                      <a:prstDash val="solid"/>
+                      <a:round/>
+                      <a:headEnd type="none" w="med" len="med"/>
+                      <a:tailEnd type="none" w="med" len="med"/>
+                    </a:lnT>
+                    <a:lnB w="6350" cap="flat" cmpd="sng" algn="ctr">
+                      <a:solidFill>
+                        <a:srgbClr val="24365A"/>
+                      </a:solidFill>
+                      <a:prstDash val="solid"/>
+                      <a:round/>
+                      <a:headEnd type="none" w="med" len="med"/>
+                      <a:tailEnd type="none" w="med" len="med"/>
+                    </a:lnB>
+                    <a:solidFill>
+                      <a:srgbClr val="101A2D"/>
+                    </a:solidFill>
+                  </a:tcPr>
+                </a:tc>
+                <a:tc>
+                  <a:txBody>
+                    <a:bodyPr/>
+                    <a:lstStyle/>
+                    <a:p>
+                      <a:pPr indent="0" marL="0">
+                        <a:buNone/>
+                      </a:pPr>
+                      <a:r>
+                        <a:rPr lang="en-US" sz="1080" dirty="0">
+                          <a:solidFill>
+                            <a:srgbClr val="CBD5E1"/>
+                          </a:solidFill>
+                          <a:latin typeface="Segoe UI" pitchFamily="34" charset="0"/>
+                          <a:ea typeface="Segoe UI" pitchFamily="34" charset="-122"/>
+                          <a:cs typeface="Segoe UI" pitchFamily="34" charset="-120"/>
+                        </a:rPr>
+                        <a:t>Daily granularity for the fixers - what do we act on today?</a:t>
+                      </a:r>
+                      <a:endParaRPr lang="en-US" sz="1080" dirty="0">
+                        <a:latin typeface="Segoe UI" charset="0"/>
+                        <a:ea typeface="Segoe UI" charset="0"/>
+                        <a:cs typeface="Segoe UI" charset="0"/>
+                      </a:endParaRPr>
+                    </a:p>
+                  </a:txBody>
+                  <a:tcPr marL="64008" marR="64008" marT="64008" marB="64008" anchor="ctr">
+                    <a:lnL w="6350" cap="flat" cmpd="sng" algn="ctr">
+                      <a:solidFill>
+                        <a:srgbClr val="24365A"/>
+                      </a:solidFill>
+                      <a:prstDash val="solid"/>
+                      <a:round/>
+                      <a:headEnd type="none" w="med" len="med"/>
+                      <a:tailEnd type="none" w="med" len="med"/>
+                    </a:lnL>
+                    <a:lnR w="6350" cap="flat" cmpd="sng" algn="ctr">
+                      <a:solidFill>
+                        <a:srgbClr val="24365A"/>
+                      </a:solidFill>
+                      <a:prstDash val="solid"/>
+                      <a:round/>
+                      <a:headEnd type="none" w="med" len="med"/>
+                      <a:tailEnd type="none" w="med" len="med"/>
+                    </a:lnR>
+                    <a:lnT w="6350" cap="flat" cmpd="sng" algn="ctr">
+                      <a:solidFill>
+                        <a:srgbClr val="24365A"/>
+                      </a:solidFill>
+                      <a:prstDash val="solid"/>
+                      <a:round/>
+                      <a:headEnd type="none" w="med" len="med"/>
+                      <a:tailEnd type="none" w="med" len="med"/>
+                    </a:lnT>
+                    <a:lnB w="6350" cap="flat" cmpd="sng" algn="ctr">
+                      <a:solidFill>
+                        <a:srgbClr val="24365A"/>
+                      </a:solidFill>
+                      <a:prstDash val="solid"/>
+                      <a:round/>
+                      <a:headEnd type="none" w="med" len="med"/>
+                      <a:tailEnd type="none" w="med" len="med"/>
+                    </a:lnB>
+                    <a:solidFill>
+                      <a:srgbClr val="101A2D"/>
+                    </a:solidFill>
+                  </a:tcPr>
+                </a:tc>
+              </a:tr>
+              <a:tr h="402336">
+                <a:tc>
+                  <a:txBody>
+                    <a:bodyPr/>
+                    <a:lstStyle/>
+                    <a:p>
+                      <a:pPr indent="0" marL="0">
+                        <a:buNone/>
+                      </a:pPr>
+                      <a:r>
+                        <a:rPr lang="en-US" sz="1080" dirty="0">
+                          <a:solidFill>
+                            <a:srgbClr val="CBD5E1"/>
+                          </a:solidFill>
+                          <a:latin typeface="Segoe UI" pitchFamily="34" charset="0"/>
+                          <a:ea typeface="Segoe UI" pitchFamily="34" charset="-122"/>
+                          <a:cs typeface="Segoe UI" pitchFamily="34" charset="-120"/>
+                        </a:rPr>
+                        <a:t>Recommendations</a:t>
+                      </a:r>
+                      <a:endParaRPr lang="en-US" sz="1080" dirty="0">
+                        <a:latin typeface="Segoe UI" charset="0"/>
+                        <a:ea typeface="Segoe UI" charset="0"/>
+                        <a:cs typeface="Segoe UI" charset="0"/>
+                      </a:endParaRPr>
+                    </a:p>
+                  </a:txBody>
+                  <a:tcPr marL="64008" marR="64008" marT="64008" marB="64008" anchor="ctr">
+                    <a:lnL w="6350" cap="flat" cmpd="sng" algn="ctr">
+                      <a:solidFill>
+                        <a:srgbClr val="24365A"/>
+                      </a:solidFill>
+                      <a:prstDash val="solid"/>
+                      <a:round/>
+                      <a:headEnd type="none" w="med" len="med"/>
+                      <a:tailEnd type="none" w="med" len="med"/>
+                    </a:lnL>
+                    <a:lnR w="6350" cap="flat" cmpd="sng" algn="ctr">
+                      <a:solidFill>
+                        <a:srgbClr val="24365A"/>
+                      </a:solidFill>
+                      <a:prstDash val="solid"/>
+                      <a:round/>
+                      <a:headEnd type="none" w="med" len="med"/>
+                      <a:tailEnd type="none" w="med" len="med"/>
+                    </a:lnR>
+                    <a:lnT w="6350" cap="flat" cmpd="sng" algn="ctr">
+                      <a:solidFill>
+                        <a:srgbClr val="24365A"/>
+                      </a:solidFill>
+                      <a:prstDash val="solid"/>
+                      <a:round/>
+                      <a:headEnd type="none" w="med" len="med"/>
+                      <a:tailEnd type="none" w="med" len="med"/>
+                    </a:lnT>
+                    <a:lnB w="6350" cap="flat" cmpd="sng" algn="ctr">
+                      <a:solidFill>
+                        <a:srgbClr val="24365A"/>
+                      </a:solidFill>
+                      <a:prstDash val="solid"/>
+                      <a:round/>
+                      <a:headEnd type="none" w="med" len="med"/>
+                      <a:tailEnd type="none" w="med" len="med"/>
+                    </a:lnB>
+                    <a:solidFill>
+                      <a:srgbClr val="0D1420"/>
+                    </a:solidFill>
+                  </a:tcPr>
+                </a:tc>
+                <a:tc>
+                  <a:txBody>
+                    <a:bodyPr/>
+                    <a:lstStyle/>
+                    <a:p>
+                      <a:pPr indent="0" marL="0">
+                        <a:buNone/>
+                      </a:pPr>
+                      <a:r>
+                        <a:rPr lang="en-US" sz="1080" dirty="0">
+                          <a:solidFill>
+                            <a:srgbClr val="CBD5E1"/>
+                          </a:solidFill>
+                          <a:latin typeface="Segoe UI" pitchFamily="34" charset="0"/>
+                          <a:ea typeface="Segoe UI" pitchFamily="34" charset="-122"/>
+                          <a:cs typeface="Segoe UI" pitchFamily="34" charset="-120"/>
+                        </a:rPr>
+                        <a:t>Every reader</a:t>
+                      </a:r>
+                      <a:endParaRPr lang="en-US" sz="1080" dirty="0">
+                        <a:latin typeface="Segoe UI" charset="0"/>
+                        <a:ea typeface="Segoe UI" charset="0"/>
+                        <a:cs typeface="Segoe UI" charset="0"/>
+                      </a:endParaRPr>
+                    </a:p>
+                  </a:txBody>
+                  <a:tcPr marL="64008" marR="64008" marT="64008" marB="64008" anchor="ctr">
+                    <a:lnL w="6350" cap="flat" cmpd="sng" algn="ctr">
+                      <a:solidFill>
+                        <a:srgbClr val="24365A"/>
+                      </a:solidFill>
+                      <a:prstDash val="solid"/>
+                      <a:round/>
+                      <a:headEnd type="none" w="med" len="med"/>
+                      <a:tailEnd type="none" w="med" len="med"/>
+                    </a:lnL>
+                    <a:lnR w="6350" cap="flat" cmpd="sng" algn="ctr">
+                      <a:solidFill>
+                        <a:srgbClr val="24365A"/>
+                      </a:solidFill>
+                      <a:prstDash val="solid"/>
+                      <a:round/>
+                      <a:headEnd type="none" w="med" len="med"/>
+                      <a:tailEnd type="none" w="med" len="med"/>
+                    </a:lnR>
+                    <a:lnT w="6350" cap="flat" cmpd="sng" algn="ctr">
+                      <a:solidFill>
+                        <a:srgbClr val="24365A"/>
+                      </a:solidFill>
+                      <a:prstDash val="solid"/>
+                      <a:round/>
+                      <a:headEnd type="none" w="med" len="med"/>
+                      <a:tailEnd type="none" w="med" len="med"/>
+                    </a:lnT>
+                    <a:lnB w="6350" cap="flat" cmpd="sng" algn="ctr">
+                      <a:solidFill>
+                        <a:srgbClr val="24365A"/>
+                      </a:solidFill>
+                      <a:prstDash val="solid"/>
+                      <a:round/>
+                      <a:headEnd type="none" w="med" len="med"/>
+                      <a:tailEnd type="none" w="med" len="med"/>
+                    </a:lnB>
+                    <a:solidFill>
+                      <a:srgbClr val="0D1420"/>
+                    </a:solidFill>
+                  </a:tcPr>
+                </a:tc>
+                <a:tc>
+                  <a:txBody>
+                    <a:bodyPr/>
+                    <a:lstStyle/>
+                    <a:p>
+                      <a:pPr indent="0" marL="0">
+                        <a:buNone/>
+                      </a:pPr>
+                      <a:r>
+                        <a:rPr lang="en-US" sz="1080" dirty="0">
+                          <a:solidFill>
+                            <a:srgbClr val="CBD5E1"/>
+                          </a:solidFill>
+                          <a:latin typeface="Segoe UI" pitchFamily="34" charset="0"/>
+                          <a:ea typeface="Segoe UI" pitchFamily="34" charset="-122"/>
+                          <a:cs typeface="Segoe UI" pitchFamily="34" charset="-120"/>
+                        </a:rPr>
+                        <a:t>The written next action attached to every finding</a:t>
+                      </a:r>
+                      <a:endParaRPr lang="en-US" sz="1080" dirty="0">
+                        <a:latin typeface="Segoe UI" charset="0"/>
+                        <a:ea typeface="Segoe UI" charset="0"/>
+                        <a:cs typeface="Segoe UI" charset="0"/>
+                      </a:endParaRPr>
+                    </a:p>
+                  </a:txBody>
+                  <a:tcPr marL="64008" marR="64008" marT="64008" marB="64008" anchor="ctr">
+                    <a:lnL w="6350" cap="flat" cmpd="sng" algn="ctr">
+                      <a:solidFill>
+                        <a:srgbClr val="24365A"/>
+                      </a:solidFill>
+                      <a:prstDash val="solid"/>
+                      <a:round/>
+                      <a:headEnd type="none" w="med" len="med"/>
+                      <a:tailEnd type="none" w="med" len="med"/>
+                    </a:lnL>
+                    <a:lnR w="6350" cap="flat" cmpd="sng" algn="ctr">
+                      <a:solidFill>
+                        <a:srgbClr val="24365A"/>
+                      </a:solidFill>
+                      <a:prstDash val="solid"/>
+                      <a:round/>
+                      <a:headEnd type="none" w="med" len="med"/>
+                      <a:tailEnd type="none" w="med" len="med"/>
+                    </a:lnR>
+                    <a:lnT w="6350" cap="flat" cmpd="sng" algn="ctr">
+                      <a:solidFill>
+                        <a:srgbClr val="24365A"/>
+                      </a:solidFill>
+                      <a:prstDash val="solid"/>
+                      <a:round/>
+                      <a:headEnd type="none" w="med" len="med"/>
+                      <a:tailEnd type="none" w="med" len="med"/>
+                    </a:lnT>
+                    <a:lnB w="6350" cap="flat" cmpd="sng" algn="ctr">
+                      <a:solidFill>
+                        <a:srgbClr val="24365A"/>
+                      </a:solidFill>
+                      <a:prstDash val="solid"/>
+                      <a:round/>
+                      <a:headEnd type="none" w="med" len="med"/>
+                      <a:tailEnd type="none" w="med" len="med"/>
+                    </a:lnB>
+                    <a:solidFill>
+                      <a:srgbClr val="0D1420"/>
+                    </a:solidFill>
+                  </a:tcPr>
+                </a:tc>
+              </a:tr>
+            </a:tbl>
+          </a:graphicData>
+        </a:graphic>
+      </p:graphicFrame>
+      <p:sp>
+        <p:nvSpPr>
+          <p:cNvPr id="7" name="Shape 4"/>
+          <p:cNvSpPr/>
+          <p:nvPr/>
+        </p:nvSpPr>
+        <p:spPr>
+          <a:xfrm>
+            <a:off x="822960" y="5961888"/>
+            <a:ext cx="10515600" cy="0"/>
+          </a:xfrm>
+          <a:prstGeom prst="line">
+            <a:avLst/>
+          </a:prstGeom>
+          <a:noFill/>
+          <a:ln w="12700">
+            <a:solidFill>
+              <a:srgbClr val="1E2D45"/>
+            </a:solidFill>
+            <a:prstDash val="solid"/>
+          </a:ln>
+        </p:spPr>
+      </p:sp>
+      <p:sp>
+        <p:nvSpPr>
+          <p:cNvPr id="8" name="Text 5"/>
+          <p:cNvSpPr/>
+          <p:nvPr/>
+        </p:nvSpPr>
+        <p:spPr>
+          <a:xfrm>
+            <a:off x="822960" y="6053328"/>
+            <a:ext cx="9692640" cy="457200"/>
+          </a:xfrm>
+          <a:prstGeom prst="rect">
+            <a:avLst/>
+          </a:prstGeom>
+          <a:noFill/>
+          <a:ln/>
+        </p:spPr>
+        <p:txBody>
+          <a:bodyPr wrap="square" rtlCol="0" anchor="ctr"/>
+          <a:lstStyle/>
+          <a:p>
+            <a:pPr indent="0" marL="0">
+              <a:buNone/>
+            </a:pPr>
+            <a:r>
+              <a:rPr lang="en-US" sz="1150" dirty="0">
+                <a:solidFill>
+                  <a:srgbClr val="64748B"/>
                 </a:solidFill>
                 <a:latin typeface="Segoe UI" pitchFamily="34" charset="0"/>
                 <a:ea typeface="Segoe UI" pitchFamily="34" charset="-122"/>
                 <a:cs typeface="Segoe UI" pitchFamily="34" charset="-120"/>
               </a:rPr>
-              <a:t>Feature launch is not feature adoption - track the curves</a:t>
-            </a:r>
-            <a:endParaRPr lang="en-US" sz="1600" dirty="0"/>
-          </a:p>
-          <a:p>
-            <a:pPr marL="342900" indent="-342900">
-              <a:lnSpc>
-                <a:spcPct val="115000"/>
-              </a:lnSpc>
-              <a:spcAft>
-                <a:spcPts val="1000"/>
-              </a:spcAft>
-              <a:buSzPct val="100000"/>
-              <a:buChar char="▸"/>
-            </a:pPr>
-            <a:r>
-              <a:rPr lang="en-US" sz="1600" dirty="0">
-                <a:solidFill>
-                  <a:srgbClr val="CBD5E1"/>
-                </a:solidFill>
-                <a:latin typeface="Segoe UI" pitchFamily="34" charset="0"/>
-                <a:ea typeface="Segoe UI" pitchFamily="34" charset="-122"/>
-                <a:cs typeface="Segoe UI" pitchFamily="34" charset="-120"/>
-              </a:rPr>
-              <a:t>Analysis without a recommended action is trivia</a:t>
-            </a:r>
-            <a:endParaRPr lang="en-US" sz="1600" dirty="0"/>
-          </a:p>
-          <a:p>
-            <a:pPr marL="342900" indent="-342900">
-              <a:lnSpc>
-                <a:spcPct val="115000"/>
-              </a:lnSpc>
-              <a:spcAft>
-                <a:spcPts val="1000"/>
-              </a:spcAft>
-              <a:buSzPct val="100000"/>
-              <a:buChar char="▸"/>
-            </a:pPr>
-            <a:r>
-              <a:rPr lang="en-US" sz="1600" dirty="0">
-                <a:solidFill>
-                  <a:srgbClr val="CBD5E1"/>
-                </a:solidFill>
-                <a:latin typeface="Segoe UI" pitchFamily="34" charset="0"/>
-                <a:ea typeface="Segoe UI" pitchFamily="34" charset="-122"/>
-                <a:cs typeface="Segoe UI" pitchFamily="34" charset="-120"/>
-              </a:rPr>
-              <a:t>The user of analytics is a decision, not a dataset</a:t>
-            </a:r>
-            <a:endParaRPr lang="en-US" sz="1600" dirty="0"/>
-          </a:p>
-        </p:txBody>
-      </p:sp>
-      <p:sp>
-        <p:nvSpPr>
-          <p:cNvPr id="7" name="Text 5"/>
-          <p:cNvSpPr/>
-          <p:nvPr/>
-        </p:nvSpPr>
-        <p:spPr>
-          <a:xfrm>
-            <a:off x="10698480" y="6355080"/>
+              <a:t>One metric set, three decision speeds - no view invented its own numbers.</a:t>
+            </a:r>
+            <a:endParaRPr lang="en-US" sz="1150" dirty="0"/>
+          </a:p>
+        </p:txBody>
+      </p:sp>
+      <p:sp>
+        <p:nvSpPr>
+          <p:cNvPr id="9" name="Text 6"/>
+          <p:cNvSpPr/>
+          <p:nvPr/>
+        </p:nvSpPr>
+        <p:spPr>
+          <a:xfrm>
+            <a:off x="10698480" y="6382512"/>
             <a:ext cx="1188720" cy="365760"/>
           </a:xfrm>
           <a:prstGeom prst="rect">
@@ -3110,7 +9460,7 @@
                 <a:ea typeface="Consolas" pitchFamily="34" charset="-122"/>
                 <a:cs typeface="Consolas" pitchFamily="34" charset="-120"/>
               </a:rPr>
-              <a:t>6 / 7</a:t>
+              <a:t>6 / 14</a:t>
             </a:r>
             <a:endParaRPr lang="en-US" sz="1000" dirty="0"/>
           </a:p>
@@ -3196,8 +9546,8 @@
         </p:nvSpPr>
         <p:spPr>
           <a:xfrm>
-            <a:off x="822960" y="1554480"/>
-            <a:ext cx="10515600" cy="457200"/>
+            <a:off x="822960" y="502920"/>
+            <a:ext cx="10515600" cy="365760"/>
           </a:xfrm>
           <a:prstGeom prst="rect">
             <a:avLst/>
@@ -3213,7 +9563,7 @@
               <a:buNone/>
             </a:pPr>
             <a:r>
-              <a:rPr lang="en-US" sz="1400" spc="400" kern="0" dirty="0">
+              <a:rPr lang="en-US" sz="1200" spc="300" kern="0" dirty="0">
                 <a:solidFill>
                   <a:srgbClr val="06B6D4"/>
                 </a:solidFill>
@@ -3221,9 +9571,9 @@
                 <a:ea typeface="Consolas" pitchFamily="34" charset="-122"/>
                 <a:cs typeface="Consolas" pitchFamily="34" charset="-120"/>
               </a:rPr>
-              <a:t>TAKEAWAY</a:t>
-            </a:r>
-            <a:endParaRPr lang="en-US" sz="1400" dirty="0"/>
+              <a:t>SEGMENTATION</a:t>
+            </a:r>
+            <a:endParaRPr lang="en-US" sz="1200" dirty="0"/>
           </a:p>
         </p:txBody>
       </p:sp>
@@ -3235,8 +9585,8 @@
         </p:nvSpPr>
         <p:spPr>
           <a:xfrm>
-            <a:off x="822960" y="2286000"/>
-            <a:ext cx="10515600" cy="1737360"/>
+            <a:off x="822960" y="914400"/>
+            <a:ext cx="10561320" cy="868680"/>
           </a:xfrm>
           <a:prstGeom prst="rect">
             <a:avLst/>
@@ -3252,7 +9602,7 @@
               <a:buNone/>
             </a:pPr>
             <a:r>
-              <a:rPr lang="en-US" sz="4400" b="1" dirty="0">
+              <a:rPr lang="en-US" sz="2700" b="1" dirty="0">
                 <a:solidFill>
                   <a:srgbClr val="FFFFFF"/>
                 </a:solidFill>
@@ -3260,9 +9610,9 @@
                 <a:ea typeface="Segoe UI" pitchFamily="34" charset="-122"/>
                 <a:cs typeface="Segoe UI" pitchFamily="34" charset="-120"/>
               </a:rPr>
-              <a:t>Analytics is a product</a:t>
-            </a:r>
-            <a:endParaRPr lang="en-US" sz="4400" dirty="0"/>
+              <a:t>A hypothesis, not a clustering job</a:t>
+            </a:r>
+            <a:endParaRPr lang="en-US" sz="2700" dirty="0"/>
           </a:p>
         </p:txBody>
       </p:sp>
@@ -3274,35 +9624,114 @@
         </p:nvSpPr>
         <p:spPr>
           <a:xfrm>
-            <a:off x="822960" y="4206240"/>
-            <a:ext cx="10515600" cy="914400"/>
-          </a:xfrm>
-          <a:prstGeom prst="rect">
-            <a:avLst/>
-          </a:prstGeom>
-          <a:noFill/>
-          <a:ln/>
-        </p:spPr>
-        <p:txBody>
-          <a:bodyPr wrap="square" rtlCol="0" anchor="ctr"/>
-          <a:lstStyle/>
-          <a:p>
-            <a:pPr indent="0" marL="0">
-              <a:buNone/>
+            <a:off x="868680" y="2011680"/>
+            <a:ext cx="10424160" cy="3566160"/>
+          </a:xfrm>
+          <a:prstGeom prst="rect">
+            <a:avLst/>
+          </a:prstGeom>
+          <a:noFill/>
+          <a:ln/>
+        </p:spPr>
+        <p:txBody>
+          <a:bodyPr wrap="square" rtlCol="0" anchor="t"/>
+          <a:lstStyle/>
+          <a:p>
+            <a:pPr marL="342900" indent="-342900">
+              <a:lnSpc>
+                <a:spcPct val="112000"/>
+              </a:lnSpc>
+              <a:spcAft>
+                <a:spcPts val="900"/>
+              </a:spcAft>
+              <a:buSzPct val="100000"/>
+              <a:buChar char="▸"/>
             </a:pPr>
             <a:r>
               <a:rPr lang="en-US" sz="1600" dirty="0">
                 <a:solidFill>
-                  <a:srgbClr val="94A3B8"/>
+                  <a:srgbClr val="CBD5E1"/>
                 </a:solidFill>
                 <a:latin typeface="Segoe UI" pitchFamily="34" charset="0"/>
                 <a:ea typeface="Segoe UI" pitchFamily="34" charset="-122"/>
                 <a:cs typeface="Segoe UI" pitchFamily="34" charset="-120"/>
               </a:rPr>
-              <a:t>Ship decisions, not dashboards. · rezalianvatiady.github.io</a:t>
+              <a:t>Running k-means and calling five clusters insight is where most segmentation stops - this one did not</a:t>
             </a:r>
             <a:endParaRPr lang="en-US" sz="1600" dirty="0"/>
           </a:p>
+          <a:p>
+            <a:pPr marL="342900" indent="-342900">
+              <a:lnSpc>
+                <a:spcPct val="112000"/>
+              </a:lnSpc>
+              <a:spcAft>
+                <a:spcPts val="900"/>
+              </a:spcAft>
+              <a:buSzPct val="100000"/>
+              <a:buChar char="▸"/>
+            </a:pPr>
+            <a:r>
+              <a:rPr lang="en-US" sz="1600" dirty="0">
+                <a:solidFill>
+                  <a:srgbClr val="CBD5E1"/>
+                </a:solidFill>
+                <a:latin typeface="Segoe UI" pitchFamily="34" charset="0"/>
+                <a:ea typeface="Segoe UI" pitchFamily="34" charset="-122"/>
+                <a:cs typeface="Segoe UI" pitchFamily="34" charset="-120"/>
+              </a:rPr>
+              <a:t>Every segment was anchored to a behavior story: why this group acts this way, and what would change it</a:t>
+            </a:r>
+            <a:endParaRPr lang="en-US" sz="1600" dirty="0"/>
+          </a:p>
+          <a:p>
+            <a:pPr marL="342900" indent="-342900">
+              <a:lnSpc>
+                <a:spcPct val="112000"/>
+              </a:lnSpc>
+              <a:spcAft>
+                <a:spcPts val="900"/>
+              </a:spcAft>
+              <a:buSzPct val="100000"/>
+              <a:buChar char="▸"/>
+            </a:pPr>
+            <a:r>
+              <a:rPr lang="en-US" sz="1600" dirty="0">
+                <a:solidFill>
+                  <a:srgbClr val="CBD5E1"/>
+                </a:solidFill>
+                <a:latin typeface="Segoe UI" pitchFamily="34" charset="0"/>
+                <a:ea typeface="Segoe UI" pitchFamily="34" charset="-122"/>
+                <a:cs typeface="Segoe UI" pitchFamily="34" charset="-120"/>
+              </a:rPr>
+              <a:t>The algorithm proposed; the narrative disposed</a:t>
+            </a:r>
+            <a:endParaRPr lang="en-US" sz="1600" dirty="0"/>
+          </a:p>
+          <a:p>
+            <a:pPr marL="342900" indent="-342900">
+              <a:lnSpc>
+                <a:spcPct val="112000"/>
+              </a:lnSpc>
+              <a:spcAft>
+                <a:spcPts val="900"/>
+              </a:spcAft>
+              <a:buSzPct val="100000"/>
+              <a:buChar char="▸"/>
+            </a:pPr>
+            <a:r>
+              <a:rPr lang="en-US" sz="1600" dirty="0">
+                <a:solidFill>
+                  <a:srgbClr val="CBD5E1"/>
+                </a:solidFill>
+                <a:latin typeface="Segoe UI" pitchFamily="34" charset="0"/>
+                <a:ea typeface="Segoe UI" pitchFamily="34" charset="-122"/>
+                <a:cs typeface="Segoe UI" pitchFamily="34" charset="-120"/>
+              </a:rPr>
+              <a:t>If two segments get the same treatment, one of them is decoration</a:t>
+            </a:r>
+            <a:endParaRPr lang="en-US" sz="1600" dirty="0"/>
+          </a:p>
         </p:txBody>
       </p:sp>
       <p:sp>
@@ -3313,7 +9742,7 @@
         </p:nvSpPr>
         <p:spPr>
           <a:xfrm>
-            <a:off x="10698480" y="6355080"/>
+            <a:off x="10698480" y="6382512"/>
             <a:ext cx="1188720" cy="365760"/>
           </a:xfrm>
           <a:prstGeom prst="rect">
@@ -3338,7 +9767,643 @@
                 <a:ea typeface="Consolas" pitchFamily="34" charset="-122"/>
                 <a:cs typeface="Consolas" pitchFamily="34" charset="-120"/>
               </a:rPr>
-              <a:t>7 / 7</a:t>
+              <a:t>7 / 14</a:t>
+            </a:r>
+            <a:endParaRPr lang="en-US" sz="1000" dirty="0"/>
+          </a:p>
+        </p:txBody>
+      </p:sp>
+    </p:spTree>
+  </p:cSld>
+  <p:clrMapOvr>
+    <a:masterClrMapping/>
+  </p:clrMapOvr>
+</p:sld>
+</file>
+
+<file path=ppt/slides/slide8.xml><?xml version="1.0" encoding="utf-8"?>
+<p:sld xmlns:a="http://schemas.openxmlformats.org/drawingml/2006/main" xmlns:r="http://schemas.openxmlformats.org/officeDocument/2006/relationships" xmlns:p="http://schemas.openxmlformats.org/presentationml/2006/main">
+  <p:cSld name="Slide 8">
+    <p:bg>
+      <p:bgPr>
+        <a:solidFill>
+          <a:srgbClr val="0A0C12"/>
+        </a:solidFill>
+      </p:bgPr>
+    </p:bg>
+    <p:spTree>
+      <p:nvGrpSpPr>
+        <p:cNvPr id="1" name=""/>
+        <p:cNvGrpSpPr/>
+        <p:nvPr/>
+      </p:nvGrpSpPr>
+      <p:grpSpPr>
+        <a:xfrm>
+          <a:off x="0" y="0"/>
+          <a:ext cx="0" cy="0"/>
+          <a:chOff x="0" y="0"/>
+          <a:chExt cx="0" cy="0"/>
+        </a:xfrm>
+      </p:grpSpPr>
+      <p:sp>
+        <p:nvSpPr>
+          <p:cNvPr id="2" name="Shape 0"/>
+          <p:cNvSpPr/>
+          <p:nvPr/>
+        </p:nvSpPr>
+        <p:spPr>
+          <a:xfrm>
+            <a:off x="0" y="0"/>
+            <a:ext cx="7680960" cy="64008"/>
+          </a:xfrm>
+          <a:prstGeom prst="rect">
+            <a:avLst/>
+          </a:prstGeom>
+          <a:solidFill>
+            <a:srgbClr val="3B82F6"/>
+          </a:solidFill>
+          <a:ln/>
+        </p:spPr>
+      </p:sp>
+      <p:sp>
+        <p:nvSpPr>
+          <p:cNvPr id="3" name="Shape 1"/>
+          <p:cNvSpPr/>
+          <p:nvPr/>
+        </p:nvSpPr>
+        <p:spPr>
+          <a:xfrm>
+            <a:off x="7680960" y="0"/>
+            <a:ext cx="4510735" cy="64008"/>
+          </a:xfrm>
+          <a:prstGeom prst="rect">
+            <a:avLst/>
+          </a:prstGeom>
+          <a:solidFill>
+            <a:srgbClr val="06B6D4"/>
+          </a:solidFill>
+          <a:ln/>
+        </p:spPr>
+      </p:sp>
+      <p:sp>
+        <p:nvSpPr>
+          <p:cNvPr id="4" name="Text 2"/>
+          <p:cNvSpPr/>
+          <p:nvPr/>
+        </p:nvSpPr>
+        <p:spPr>
+          <a:xfrm>
+            <a:off x="822960" y="502920"/>
+            <a:ext cx="10515600" cy="365760"/>
+          </a:xfrm>
+          <a:prstGeom prst="rect">
+            <a:avLst/>
+          </a:prstGeom>
+          <a:noFill/>
+          <a:ln/>
+        </p:spPr>
+        <p:txBody>
+          <a:bodyPr wrap="square" rtlCol="0" anchor="ctr"/>
+          <a:lstStyle/>
+          <a:p>
+            <a:pPr indent="0" marL="0">
+              <a:buNone/>
+            </a:pPr>
+            <a:r>
+              <a:rPr lang="en-US" sz="1200" spc="300" kern="0" dirty="0">
+                <a:solidFill>
+                  <a:srgbClr val="06B6D4"/>
+                </a:solidFill>
+                <a:latin typeface="Consolas" pitchFamily="34" charset="0"/>
+                <a:ea typeface="Consolas" pitchFamily="34" charset="-122"/>
+                <a:cs typeface="Consolas" pitchFamily="34" charset="-120"/>
+              </a:rPr>
+              <a:t>SEGMENT PROFILE</a:t>
+            </a:r>
+            <a:endParaRPr lang="en-US" sz="1200" dirty="0"/>
+          </a:p>
+        </p:txBody>
+      </p:sp>
+      <p:sp>
+        <p:nvSpPr>
+          <p:cNvPr id="5" name="Text 3"/>
+          <p:cNvSpPr/>
+          <p:nvPr/>
+        </p:nvSpPr>
+        <p:spPr>
+          <a:xfrm>
+            <a:off x="822960" y="914400"/>
+            <a:ext cx="10561320" cy="868680"/>
+          </a:xfrm>
+          <a:prstGeom prst="rect">
+            <a:avLst/>
+          </a:prstGeom>
+          <a:noFill/>
+          <a:ln/>
+        </p:spPr>
+        <p:txBody>
+          <a:bodyPr wrap="square" rtlCol="0" anchor="ctr"/>
+          <a:lstStyle/>
+          <a:p>
+            <a:pPr indent="0" marL="0">
+              <a:buNone/>
+            </a:pPr>
+            <a:r>
+              <a:rPr lang="en-US" sz="2700" b="1" dirty="0">
+                <a:solidFill>
+                  <a:srgbClr val="FFFFFF"/>
+                </a:solidFill>
+                <a:latin typeface="Segoe UI" pitchFamily="34" charset="0"/>
+                <a:ea typeface="Segoe UI" pitchFamily="34" charset="-122"/>
+                <a:cs typeface="Segoe UI" pitchFamily="34" charset="-120"/>
+              </a:rPr>
+              <a:t>Segments earned their keep by differing in behavior</a:t>
+            </a:r>
+            <a:endParaRPr lang="en-US" sz="2700" dirty="0"/>
+          </a:p>
+        </p:txBody>
+      </p:sp>
+      <p:graphicFrame>
+        <p:nvGraphicFramePr>
+          <p:cNvPr id="6" name="Chart 0" descr=""/>
+          <p:cNvGraphicFramePr/>
+          <p:nvPr/>
+        </p:nvGraphicFramePr>
+        <p:xfrm>
+          <a:off x="822960" y="1874520"/>
+          <a:ext cx="10515600" cy="3337560"/>
+        </p:xfrm>
+        <a:graphic xmlns:a="http://schemas.openxmlformats.org/drawingml/2006/main">
+          <a:graphicData uri="http://schemas.openxmlformats.org/drawingml/2006/chart">
+            <c:chart xmlns:c="http://schemas.openxmlformats.org/drawingml/2006/chart" r:id="rId1"/>
+          </a:graphicData>
+        </a:graphic>
+      </p:graphicFrame>
+      <p:sp>
+        <p:nvSpPr>
+          <p:cNvPr id="7" name="Shape 4"/>
+          <p:cNvSpPr/>
+          <p:nvPr/>
+        </p:nvSpPr>
+        <p:spPr>
+          <a:xfrm>
+            <a:off x="822960" y="5413248"/>
+            <a:ext cx="10515600" cy="0"/>
+          </a:xfrm>
+          <a:prstGeom prst="line">
+            <a:avLst/>
+          </a:prstGeom>
+          <a:noFill/>
+          <a:ln w="12700">
+            <a:solidFill>
+              <a:srgbClr val="1E2D45"/>
+            </a:solidFill>
+            <a:prstDash val="solid"/>
+          </a:ln>
+        </p:spPr>
+      </p:sp>
+      <p:sp>
+        <p:nvSpPr>
+          <p:cNvPr id="8" name="Text 5"/>
+          <p:cNvSpPr/>
+          <p:nvPr/>
+        </p:nvSpPr>
+        <p:spPr>
+          <a:xfrm>
+            <a:off x="822960" y="5504688"/>
+            <a:ext cx="10424160" cy="411480"/>
+          </a:xfrm>
+          <a:prstGeom prst="rect">
+            <a:avLst/>
+          </a:prstGeom>
+          <a:noFill/>
+          <a:ln/>
+        </p:spPr>
+        <p:txBody>
+          <a:bodyPr wrap="square" rtlCol="0" anchor="ctr"/>
+          <a:lstStyle/>
+          <a:p>
+            <a:pPr indent="0" marL="0">
+              <a:buNone/>
+            </a:pPr>
+            <a:r>
+              <a:rPr lang="en-US" sz="1300" i="1" dirty="0">
+                <a:solidFill>
+                  <a:srgbClr val="06B6D4"/>
+                </a:solidFill>
+                <a:latin typeface="Segoe UI" pitchFamily="34" charset="0"/>
+                <a:ea typeface="Segoe UI" pitchFamily="34" charset="-122"/>
+                <a:cs typeface="Segoe UI" pitchFamily="34" charset="-120"/>
+              </a:rPr>
+              <a:t>→  A fifth of customers drove nearly half the value, while 13% were already drifting away - four segments, four different plays.</a:t>
+            </a:r>
+            <a:endParaRPr lang="en-US" sz="1300" dirty="0"/>
+          </a:p>
+        </p:txBody>
+      </p:sp>
+      <p:sp>
+        <p:nvSpPr>
+          <p:cNvPr id="9" name="Shape 6"/>
+          <p:cNvSpPr/>
+          <p:nvPr/>
+        </p:nvSpPr>
+        <p:spPr>
+          <a:xfrm>
+            <a:off x="822960" y="5961888"/>
+            <a:ext cx="10515600" cy="0"/>
+          </a:xfrm>
+          <a:prstGeom prst="line">
+            <a:avLst/>
+          </a:prstGeom>
+          <a:noFill/>
+          <a:ln w="12700">
+            <a:solidFill>
+              <a:srgbClr val="1E2D45"/>
+            </a:solidFill>
+            <a:prstDash val="solid"/>
+          </a:ln>
+        </p:spPr>
+      </p:sp>
+      <p:sp>
+        <p:nvSpPr>
+          <p:cNvPr id="10" name="Text 7"/>
+          <p:cNvSpPr/>
+          <p:nvPr/>
+        </p:nvSpPr>
+        <p:spPr>
+          <a:xfrm>
+            <a:off x="822960" y="6053328"/>
+            <a:ext cx="9692640" cy="457200"/>
+          </a:xfrm>
+          <a:prstGeom prst="rect">
+            <a:avLst/>
+          </a:prstGeom>
+          <a:noFill/>
+          <a:ln/>
+        </p:spPr>
+        <p:txBody>
+          <a:bodyPr wrap="square" rtlCol="0" anchor="ctr"/>
+          <a:lstStyle/>
+          <a:p>
+            <a:pPr indent="0" marL="0">
+              <a:buNone/>
+            </a:pPr>
+            <a:r>
+              <a:rPr lang="en-US" sz="1150" dirty="0">
+                <a:solidFill>
+                  <a:srgbClr val="64748B"/>
+                </a:solidFill>
+                <a:latin typeface="Segoe UI" pitchFamily="34" charset="0"/>
+                <a:ea typeface="Segoe UI" pitchFamily="34" charset="-122"/>
+                <a:cs typeface="Segoe UI" pitchFamily="34" charset="-120"/>
+              </a:rPr>
+              <a:t>Illustrative segment profile used to anchor each group to a distinct action.</a:t>
+            </a:r>
+            <a:endParaRPr lang="en-US" sz="1150" dirty="0"/>
+          </a:p>
+        </p:txBody>
+      </p:sp>
+      <p:sp>
+        <p:nvSpPr>
+          <p:cNvPr id="11" name="Text 8"/>
+          <p:cNvSpPr/>
+          <p:nvPr/>
+        </p:nvSpPr>
+        <p:spPr>
+          <a:xfrm>
+            <a:off x="10698480" y="6382512"/>
+            <a:ext cx="1188720" cy="365760"/>
+          </a:xfrm>
+          <a:prstGeom prst="rect">
+            <a:avLst/>
+          </a:prstGeom>
+          <a:noFill/>
+          <a:ln/>
+        </p:spPr>
+        <p:txBody>
+          <a:bodyPr wrap="square" rtlCol="0" anchor="ctr"/>
+          <a:lstStyle/>
+          <a:p>
+            <a:pPr algn="r" indent="0" marL="0">
+              <a:buNone/>
+            </a:pPr>
+            <a:r>
+              <a:rPr lang="en-US" sz="1000" dirty="0">
+                <a:solidFill>
+                  <a:srgbClr val="64748B"/>
+                </a:solidFill>
+                <a:latin typeface="Consolas" pitchFamily="34" charset="0"/>
+                <a:ea typeface="Consolas" pitchFamily="34" charset="-122"/>
+                <a:cs typeface="Consolas" pitchFamily="34" charset="-120"/>
+              </a:rPr>
+              <a:t>8 / 14</a:t>
+            </a:r>
+            <a:endParaRPr lang="en-US" sz="1000" dirty="0"/>
+          </a:p>
+        </p:txBody>
+      </p:sp>
+    </p:spTree>
+  </p:cSld>
+  <p:clrMapOvr>
+    <a:masterClrMapping/>
+  </p:clrMapOvr>
+</p:sld>
+</file>
+
+<file path=ppt/slides/slide9.xml><?xml version="1.0" encoding="utf-8"?>
+<p:sld xmlns:a="http://schemas.openxmlformats.org/drawingml/2006/main" xmlns:r="http://schemas.openxmlformats.org/officeDocument/2006/relationships" xmlns:p="http://schemas.openxmlformats.org/presentationml/2006/main">
+  <p:cSld name="Slide 9">
+    <p:bg>
+      <p:bgPr>
+        <a:solidFill>
+          <a:srgbClr val="0A0C12"/>
+        </a:solidFill>
+      </p:bgPr>
+    </p:bg>
+    <p:spTree>
+      <p:nvGrpSpPr>
+        <p:cNvPr id="1" name=""/>
+        <p:cNvGrpSpPr/>
+        <p:nvPr/>
+      </p:nvGrpSpPr>
+      <p:grpSpPr>
+        <a:xfrm>
+          <a:off x="0" y="0"/>
+          <a:ext cx="0" cy="0"/>
+          <a:chOff x="0" y="0"/>
+          <a:chExt cx="0" cy="0"/>
+        </a:xfrm>
+      </p:grpSpPr>
+      <p:sp>
+        <p:nvSpPr>
+          <p:cNvPr id="2" name="Shape 0"/>
+          <p:cNvSpPr/>
+          <p:nvPr/>
+        </p:nvSpPr>
+        <p:spPr>
+          <a:xfrm>
+            <a:off x="0" y="0"/>
+            <a:ext cx="7680960" cy="64008"/>
+          </a:xfrm>
+          <a:prstGeom prst="rect">
+            <a:avLst/>
+          </a:prstGeom>
+          <a:solidFill>
+            <a:srgbClr val="3B82F6"/>
+          </a:solidFill>
+          <a:ln/>
+        </p:spPr>
+      </p:sp>
+      <p:sp>
+        <p:nvSpPr>
+          <p:cNvPr id="3" name="Shape 1"/>
+          <p:cNvSpPr/>
+          <p:nvPr/>
+        </p:nvSpPr>
+        <p:spPr>
+          <a:xfrm>
+            <a:off x="7680960" y="0"/>
+            <a:ext cx="4510735" cy="64008"/>
+          </a:xfrm>
+          <a:prstGeom prst="rect">
+            <a:avLst/>
+          </a:prstGeom>
+          <a:solidFill>
+            <a:srgbClr val="06B6D4"/>
+          </a:solidFill>
+          <a:ln/>
+        </p:spPr>
+      </p:sp>
+      <p:sp>
+        <p:nvSpPr>
+          <p:cNvPr id="4" name="Text 2"/>
+          <p:cNvSpPr/>
+          <p:nvPr/>
+        </p:nvSpPr>
+        <p:spPr>
+          <a:xfrm>
+            <a:off x="822960" y="502920"/>
+            <a:ext cx="10515600" cy="365760"/>
+          </a:xfrm>
+          <a:prstGeom prst="rect">
+            <a:avLst/>
+          </a:prstGeom>
+          <a:noFill/>
+          <a:ln/>
+        </p:spPr>
+        <p:txBody>
+          <a:bodyPr wrap="square" rtlCol="0" anchor="ctr"/>
+          <a:lstStyle/>
+          <a:p>
+            <a:pPr indent="0" marL="0">
+              <a:buNone/>
+            </a:pPr>
+            <a:r>
+              <a:rPr lang="en-US" sz="1200" spc="300" kern="0" dirty="0">
+                <a:solidFill>
+                  <a:srgbClr val="06B6D4"/>
+                </a:solidFill>
+                <a:latin typeface="Consolas" pitchFamily="34" charset="0"/>
+                <a:ea typeface="Consolas" pitchFamily="34" charset="-122"/>
+                <a:cs typeface="Consolas" pitchFamily="34" charset="-120"/>
+              </a:rPr>
+              <a:t>CHURN ANALYSIS</a:t>
+            </a:r>
+            <a:endParaRPr lang="en-US" sz="1200" dirty="0"/>
+          </a:p>
+        </p:txBody>
+      </p:sp>
+      <p:sp>
+        <p:nvSpPr>
+          <p:cNvPr id="5" name="Text 3"/>
+          <p:cNvSpPr/>
+          <p:nvPr/>
+        </p:nvSpPr>
+        <p:spPr>
+          <a:xfrm>
+            <a:off x="822960" y="914400"/>
+            <a:ext cx="10561320" cy="868680"/>
+          </a:xfrm>
+          <a:prstGeom prst="rect">
+            <a:avLst/>
+          </a:prstGeom>
+          <a:noFill/>
+          <a:ln/>
+        </p:spPr>
+        <p:txBody>
+          <a:bodyPr wrap="square" rtlCol="0" anchor="ctr"/>
+          <a:lstStyle/>
+          <a:p>
+            <a:pPr indent="0" marL="0">
+              <a:buNone/>
+            </a:pPr>
+            <a:r>
+              <a:rPr lang="en-US" sz="2700" b="1" dirty="0">
+                <a:solidFill>
+                  <a:srgbClr val="FFFFFF"/>
+                </a:solidFill>
+                <a:latin typeface="Segoe UI" pitchFamily="34" charset="0"/>
+                <a:ea typeface="Segoe UI" pitchFamily="34" charset="-122"/>
+                <a:cs typeface="Segoe UI" pitchFamily="34" charset="-120"/>
+              </a:rPr>
+              <a:t>Churn has a memory</a:t>
+            </a:r>
+            <a:endParaRPr lang="en-US" sz="2700" dirty="0"/>
+          </a:p>
+        </p:txBody>
+      </p:sp>
+      <p:sp>
+        <p:nvSpPr>
+          <p:cNvPr id="6" name="Text 4"/>
+          <p:cNvSpPr/>
+          <p:nvPr/>
+        </p:nvSpPr>
+        <p:spPr>
+          <a:xfrm>
+            <a:off x="868680" y="2011680"/>
+            <a:ext cx="10424160" cy="3566160"/>
+          </a:xfrm>
+          <a:prstGeom prst="rect">
+            <a:avLst/>
+          </a:prstGeom>
+          <a:noFill/>
+          <a:ln/>
+        </p:spPr>
+        <p:txBody>
+          <a:bodyPr wrap="square" rtlCol="0" anchor="t"/>
+          <a:lstStyle/>
+          <a:p>
+            <a:pPr marL="342900" indent="-342900">
+              <a:lnSpc>
+                <a:spcPct val="112000"/>
+              </a:lnSpc>
+              <a:spcAft>
+                <a:spcPts val="900"/>
+              </a:spcAft>
+              <a:buSzPct val="100000"/>
+              <a:buChar char="▸"/>
+            </a:pPr>
+            <a:r>
+              <a:rPr lang="en-US" sz="1600" dirty="0">
+                <a:solidFill>
+                  <a:srgbClr val="CBD5E1"/>
+                </a:solidFill>
+                <a:latin typeface="Segoe UI" pitchFamily="34" charset="0"/>
+                <a:ea typeface="Segoe UI" pitchFamily="34" charset="-122"/>
+                <a:cs typeface="Segoe UI" pitchFamily="34" charset="-120"/>
+              </a:rPr>
+              <a:t>The strongest churn signals were behavioral drift, never demographics</a:t>
+            </a:r>
+            <a:endParaRPr lang="en-US" sz="1600" dirty="0"/>
+          </a:p>
+          <a:p>
+            <a:pPr marL="342900" indent="-342900">
+              <a:lnSpc>
+                <a:spcPct val="112000"/>
+              </a:lnSpc>
+              <a:spcAft>
+                <a:spcPts val="900"/>
+              </a:spcAft>
+              <a:buSzPct val="100000"/>
+              <a:buChar char="▸"/>
+            </a:pPr>
+            <a:r>
+              <a:rPr lang="en-US" sz="1600" dirty="0">
+                <a:solidFill>
+                  <a:srgbClr val="CBD5E1"/>
+                </a:solidFill>
+                <a:latin typeface="Segoe UI" pitchFamily="34" charset="0"/>
+                <a:ea typeface="Segoe UI" pitchFamily="34" charset="-122"/>
+                <a:cs typeface="Segoe UI" pitchFamily="34" charset="-120"/>
+              </a:rPr>
+              <a:t>Declining order frequency, narrowing category usage, and longer gaps between sessions led every signal</a:t>
+            </a:r>
+            <a:endParaRPr lang="en-US" sz="1600" dirty="0"/>
+          </a:p>
+          <a:p>
+            <a:pPr marL="342900" indent="-342900">
+              <a:lnSpc>
+                <a:spcPct val="112000"/>
+              </a:lnSpc>
+              <a:spcAft>
+                <a:spcPts val="900"/>
+              </a:spcAft>
+              <a:buSzPct val="100000"/>
+              <a:buChar char="▸"/>
+            </a:pPr>
+            <a:r>
+              <a:rPr lang="en-US" sz="1600" dirty="0">
+                <a:solidFill>
+                  <a:srgbClr val="CBD5E1"/>
+                </a:solidFill>
+                <a:latin typeface="Segoe UI" pitchFamily="34" charset="0"/>
+                <a:ea typeface="Segoe UI" pitchFamily="34" charset="-122"/>
+                <a:cs typeface="Segoe UI" pitchFamily="34" charset="-120"/>
+              </a:rPr>
+              <a:t>By the time a user is formally churned, the story ended weeks earlier</a:t>
+            </a:r>
+            <a:endParaRPr lang="en-US" sz="1600" dirty="0"/>
+          </a:p>
+          <a:p>
+            <a:pPr marL="342900" indent="-342900">
+              <a:lnSpc>
+                <a:spcPct val="112000"/>
+              </a:lnSpc>
+              <a:spcAft>
+                <a:spcPts val="900"/>
+              </a:spcAft>
+              <a:buSzPct val="100000"/>
+              <a:buChar char="▸"/>
+            </a:pPr>
+            <a:r>
+              <a:rPr lang="en-US" sz="1600" dirty="0">
+                <a:solidFill>
+                  <a:srgbClr val="CBD5E1"/>
+                </a:solidFill>
+                <a:latin typeface="Segoe UI" pitchFamily="34" charset="0"/>
+                <a:ea typeface="Segoe UI" pitchFamily="34" charset="-122"/>
+                <a:cs typeface="Segoe UI" pitchFamily="34" charset="-120"/>
+              </a:rPr>
+              <a:t>The dashboard was designed to show the drift, not the funeral</a:t>
+            </a:r>
+            <a:endParaRPr lang="en-US" sz="1600" dirty="0"/>
+          </a:p>
+        </p:txBody>
+      </p:sp>
+      <p:sp>
+        <p:nvSpPr>
+          <p:cNvPr id="7" name="Text 5"/>
+          <p:cNvSpPr/>
+          <p:nvPr/>
+        </p:nvSpPr>
+        <p:spPr>
+          <a:xfrm>
+            <a:off x="10698480" y="6382512"/>
+            <a:ext cx="1188720" cy="365760"/>
+          </a:xfrm>
+          <a:prstGeom prst="rect">
+            <a:avLst/>
+          </a:prstGeom>
+          <a:noFill/>
+          <a:ln/>
+        </p:spPr>
+        <p:txBody>
+          <a:bodyPr wrap="square" rtlCol="0" anchor="ctr"/>
+          <a:lstStyle/>
+          <a:p>
+            <a:pPr algn="r" indent="0" marL="0">
+              <a:buNone/>
+            </a:pPr>
+            <a:r>
+              <a:rPr lang="en-US" sz="1000" dirty="0">
+                <a:solidFill>
+                  <a:srgbClr val="64748B"/>
+                </a:solidFill>
+                <a:latin typeface="Consolas" pitchFamily="34" charset="0"/>
+                <a:ea typeface="Consolas" pitchFamily="34" charset="-122"/>
+                <a:cs typeface="Consolas" pitchFamily="34" charset="-120"/>
+              </a:rPr>
+              <a:t>9 / 14</a:t>
             </a:r>
             <a:endParaRPr lang="en-US" sz="1000" dirty="0"/>
           </a:p>

--- a/decks/tokopedia-analytics.pptx
+++ b/decks/tokopedia-analytics.pptx
@@ -365,7 +365,7 @@
           <a:lstStyle/>
           <a:p>
             <a:pPr>
-              <a:defRPr sz="1100" b="0" i="0" u="none" strike="noStrike">
+              <a:defRPr sz="1800" b="0" i="0" u="none" strike="noStrike">
                 <a:solidFill>
                   <a:srgbClr val="94A3B8"/>
                 </a:solidFill>
@@ -385,6 +385,7 @@
         <c:axId val="2094734552"/>
         <c:scaling>
           <c:orientation val="minMax"/>
+          <c:min val="0"/>
         </c:scaling>
         <c:delete val="0"/>
         <c:axPos val="l"/>
@@ -417,7 +418,7 @@
           <a:lstStyle/>
           <a:p>
             <a:pPr>
-              <a:defRPr sz="1000" b="0" i="0" u="none" strike="noStrike">
+              <a:defRPr sz="1800" b="0" i="0" u="none" strike="noStrike">
                 <a:solidFill>
                   <a:srgbClr val="94A3B8"/>
                 </a:solidFill>
@@ -449,7 +450,7 @@
         <a:lstStyle/>
         <a:p>
           <a:pPr>
-            <a:defRPr sz="1100">
+            <a:defRPr sz="1800">
               <a:solidFill>
                 <a:srgbClr val="CBD5E1"/>
               </a:solidFill>
@@ -797,7 +798,7 @@
           <a:lstStyle/>
           <a:p>
             <a:pPr>
-              <a:defRPr sz="1100" b="0" i="0" u="none" strike="noStrike">
+              <a:defRPr sz="1800" b="0" i="0" u="none" strike="noStrike">
                 <a:solidFill>
                   <a:srgbClr val="94A3B8"/>
                 </a:solidFill>
@@ -817,6 +818,7 @@
         <c:axId val="2094734552"/>
         <c:scaling>
           <c:orientation val="minMax"/>
+          <c:min val="0"/>
         </c:scaling>
         <c:delete val="0"/>
         <c:axPos val="l"/>
@@ -849,7 +851,7 @@
           <a:lstStyle/>
           <a:p>
             <a:pPr>
-              <a:defRPr sz="1000" b="0" i="0" u="none" strike="noStrike">
+              <a:defRPr sz="1800" b="0" i="0" u="none" strike="noStrike">
                 <a:solidFill>
                   <a:srgbClr val="94A3B8"/>
                 </a:solidFill>
@@ -881,7 +883,7 @@
         <a:lstStyle/>
         <a:p>
           <a:pPr>
-            <a:defRPr sz="1100">
+            <a:defRPr sz="1800">
               <a:solidFill>
                 <a:srgbClr val="CBD5E1"/>
               </a:solidFill>
@@ -1000,7 +1002,7 @@
                 <a:lstStyle/>
                 <a:p>
                   <a:pPr>
-                    <a:defRPr sz="1000" b="0" i="0" u="none" strike="noStrike">
+                    <a:defRPr sz="1800" b="0" i="0" u="none" strike="noStrike">
                       <a:solidFill>
                         <a:srgbClr val="E2E8F0"/>
                       </a:solidFill>
@@ -1025,7 +1027,7 @@
                 <a:lstStyle/>
                 <a:p>
                   <a:pPr>
-                    <a:defRPr sz="1000" b="0" i="0" u="none" strike="noStrike">
+                    <a:defRPr sz="1800" b="0" i="0" u="none" strike="noStrike">
                       <a:solidFill>
                         <a:srgbClr val="E2E8F0"/>
                       </a:solidFill>
@@ -1050,7 +1052,7 @@
                 <a:lstStyle/>
                 <a:p>
                   <a:pPr>
-                    <a:defRPr sz="1000" b="0" i="0" u="none" strike="noStrike">
+                    <a:defRPr sz="1800" b="0" i="0" u="none" strike="noStrike">
                       <a:solidFill>
                         <a:srgbClr val="E2E8F0"/>
                       </a:solidFill>
@@ -1075,7 +1077,7 @@
                 <a:lstStyle/>
                 <a:p>
                   <a:pPr>
-                    <a:defRPr sz="1000" b="0" i="0" u="none" strike="noStrike">
+                    <a:defRPr sz="1800" b="0" i="0" u="none" strike="noStrike">
                       <a:solidFill>
                         <a:srgbClr val="E2E8F0"/>
                       </a:solidFill>
@@ -1156,7 +1158,7 @@
           </c:val>
         </c:ser>
         <c:firstSliceAng val="0"/>
-        <c:holeSize val="62"/>
+        <c:holeSize val="60"/>
       </c:doughnutChart>
       <c:spPr>
         <a:solidFill>
@@ -1176,7 +1178,7 @@
         <a:lstStyle/>
         <a:p>
           <a:pPr>
-            <a:defRPr sz="1100">
+            <a:defRPr sz="1800">
               <a:solidFill>
                 <a:srgbClr val="CBD5E1"/>
               </a:solidFill>
@@ -1603,7 +1605,7 @@
           <a:p>
             <a:r>
               <a:rPr lang="en-US" dirty="0"/>
-              <a:t/>
+              <a:t>Opening: introduce yourself and this deck, "Customer Analytics: Segmentation and Churn". | Transition: next up - "What this deck covers".</a:t>
             </a:r>
             <a:endParaRPr lang="en-US" dirty="0"/>
           </a:p>
@@ -1691,7 +1693,7 @@
           <a:p>
             <a:r>
               <a:rPr lang="en-US" dirty="0"/>
-              <a:t/>
+              <a:t>Key message: The churn story starts weeks before the churn label | Insight: Order frequency and category usage declined visibly eight weeks before formal churn - drift is the early warning. | Talk track: Illustrative indexed trajectory of a churning user cohort. | Transition: next up - "Launch is not adoption - curves told them apart".</a:t>
             </a:r>
             <a:endParaRPr lang="en-US" dirty="0"/>
           </a:p>
@@ -1779,7 +1781,7 @@
           <a:p>
             <a:r>
               <a:rPr lang="en-US" dirty="0"/>
-              <a:t/>
+              <a:t>Key message: Launch is not adoption - curves told them apart | Insight: Only the first bucket justified the launch - adoption curves per segment showed which features actually retained users. | Talk track: Illustrative outcome mix across launched features. | Transition: next up - "If two segments get the same treatment, one is decoration".</a:t>
             </a:r>
             <a:endParaRPr lang="en-US" dirty="0"/>
           </a:p>
@@ -1867,7 +1869,7 @@
           <a:p>
             <a:r>
               <a:rPr lang="en-US" dirty="0"/>
-              <a:t/>
+              <a:t>Key message: If two segments get the same treatment, one is decoration | Talk track: The algorithm proposed; the narrative disposed. | Transition: next up - "What real reviewers taught me".</a:t>
             </a:r>
             <a:endParaRPr lang="en-US" dirty="0"/>
           </a:p>
@@ -1955,7 +1957,7 @@
           <a:p>
             <a:r>
               <a:rPr lang="en-US" dirty="0"/>
-              <a:t/>
+              <a:t>Key message: What real reviewers taught me | Transition: next up - "Need customer analytics that ends in decisions?".</a:t>
             </a:r>
             <a:endParaRPr lang="en-US" dirty="0"/>
           </a:p>
@@ -2043,7 +2045,7 @@
           <a:p>
             <a:r>
               <a:rPr lang="en-US" dirty="0"/>
-              <a:t/>
+              <a:t>Key message: Need customer analytics that ends in decisions? | Transition: close with the call to action on the contact slide, invite questions.</a:t>
             </a:r>
             <a:endParaRPr lang="en-US" dirty="0"/>
           </a:p>
@@ -2131,7 +2133,7 @@
           <a:p>
             <a:r>
               <a:rPr lang="en-US" dirty="0"/>
-              <a:t/>
+              <a:t>Key message: What this deck covers | Agenda: The engagement: RevoU final project reviewed by the Tokopedia Analytics team; Segmentation as a hypothesis, not a clustering job; Churn as behavioral drift with a memory; Feature adoption: launch curves versus retention outcomes; Dashboards and recommendations that mirror the organization | Transition: next up - "Real data, external reviewers, positive evaluation".</a:t>
             </a:r>
             <a:endParaRPr lang="en-US" dirty="0"/>
           </a:p>
@@ -2219,7 +2221,7 @@
           <a:p>
             <a:r>
               <a:rPr lang="en-US" dirty="0"/>
-              <a:t/>
+              <a:t>Key message: Real data, external reviewers, positive evaluation | Transition: next up - "One dataset, four questions that mattered".</a:t>
             </a:r>
             <a:endParaRPr lang="en-US" dirty="0"/>
           </a:p>
@@ -2307,7 +2309,7 @@
           <a:p>
             <a:r>
               <a:rPr lang="en-US" dirty="0"/>
-              <a:t/>
+              <a:t>Key message: One dataset, four questions that mattered | Talk track: The bar every deliverable had to clear: it must change a decision. | Transition: next up - "From raw e-commerce data to recommended actions".</a:t>
             </a:r>
             <a:endParaRPr lang="en-US" dirty="0"/>
           </a:p>
@@ -2395,7 +2397,7 @@
           <a:p>
             <a:r>
               <a:rPr lang="en-US" dirty="0"/>
-              <a:t/>
+              <a:t>Key message: From raw e-commerce data to recommended actions | Talk track: The user of analytics is a decision, not a dataset. | Transition: next up - "Views that mirror the organization".</a:t>
             </a:r>
             <a:endParaRPr lang="en-US" dirty="0"/>
           </a:p>
@@ -2483,7 +2485,7 @@
           <a:p>
             <a:r>
               <a:rPr lang="en-US" dirty="0"/>
-              <a:t/>
+              <a:t>Key message: Views that mirror the organization | Talk track: One metric set, three decision speeds - no view invented its own numbers. | Transition: next up - "A hypothesis, not a clustering job".</a:t>
             </a:r>
             <a:endParaRPr lang="en-US" dirty="0"/>
           </a:p>
@@ -2571,7 +2573,7 @@
           <a:p>
             <a:r>
               <a:rPr lang="en-US" dirty="0"/>
-              <a:t/>
+              <a:t>Key message: A hypothesis, not a clustering job | Transition: next up - "Segments earned their keep by differing in behavior".</a:t>
             </a:r>
             <a:endParaRPr lang="en-US" dirty="0"/>
           </a:p>
@@ -2659,7 +2661,7 @@
           <a:p>
             <a:r>
               <a:rPr lang="en-US" dirty="0"/>
-              <a:t/>
+              <a:t>Key message: Segments earned their keep by differing in behavior | Insight: A fifth of customers drove nearly half the value, while 13% were already drifting away - four segments, four different plays. | Talk track: Illustrative segment profile used to anchor each group to a distinct action. | Transition: next up - "Churn has a memory".</a:t>
             </a:r>
             <a:endParaRPr lang="en-US" dirty="0"/>
           </a:p>
@@ -2747,7 +2749,7 @@
           <a:p>
             <a:r>
               <a:rPr lang="en-US" dirty="0"/>
-              <a:t/>
+              <a:t>Key message: Churn has a memory | Transition: next up - "The churn story starts weeks before the churn label".</a:t>
             </a:r>
             <a:endParaRPr lang="en-US" dirty="0"/>
           </a:p>
@@ -3168,7 +3170,7 @@
         </p:nvSpPr>
         <p:spPr>
           <a:xfrm>
-            <a:off x="822960" y="1783080"/>
+            <a:off x="822960" y="1737360"/>
             <a:ext cx="10515600" cy="457200"/>
           </a:xfrm>
           <a:prstGeom prst="rect">
@@ -3185,7 +3187,7 @@
               <a:buNone/>
             </a:pPr>
             <a:r>
-              <a:rPr lang="en-US" sz="1400" spc="400" kern="0" dirty="0">
+              <a:rPr lang="en-US" sz="1800" spc="400" kern="0" dirty="0">
                 <a:solidFill>
                   <a:srgbClr val="06B6D4"/>
                 </a:solidFill>
@@ -3195,7 +3197,7 @@
               </a:rPr>
               <a:t>CASE STUDY · E-COMMERCE</a:t>
             </a:r>
-            <a:endParaRPr lang="en-US" sz="1400" dirty="0"/>
+            <a:endParaRPr lang="en-US" sz="1800" dirty="0"/>
           </a:p>
         </p:txBody>
       </p:sp>
@@ -3207,7 +3209,7 @@
         </p:nvSpPr>
         <p:spPr>
           <a:xfrm>
-            <a:off x="822960" y="2286000"/>
+            <a:off x="822960" y="2240280"/>
             <a:ext cx="10607040" cy="1691640"/>
           </a:xfrm>
           <a:prstGeom prst="rect">
@@ -3246,8 +3248,8 @@
         </p:nvSpPr>
         <p:spPr>
           <a:xfrm>
-            <a:off x="822960" y="4023360"/>
-            <a:ext cx="10058400" cy="777240"/>
+            <a:off x="822960" y="3977640"/>
+            <a:ext cx="10058400" cy="822960"/>
           </a:xfrm>
           <a:prstGeom prst="rect">
             <a:avLst/>
@@ -3263,7 +3265,7 @@
               <a:buNone/>
             </a:pPr>
             <a:r>
-              <a:rPr lang="en-US" sz="1700" dirty="0">
+              <a:rPr lang="en-US" sz="2000" dirty="0">
                 <a:solidFill>
                   <a:srgbClr val="94A3B8"/>
                 </a:solidFill>
@@ -3273,7 +3275,7 @@
               </a:rPr>
               <a:t>Real e-commerce data, real reviewers, decisions instead of dashboards</a:t>
             </a:r>
-            <a:endParaRPr lang="en-US" sz="1700" dirty="0"/>
+            <a:endParaRPr lang="en-US" sz="2000" dirty="0"/>
           </a:p>
         </p:txBody>
       </p:sp>
@@ -3285,7 +3287,7 @@
         </p:nvSpPr>
         <p:spPr>
           <a:xfrm>
-            <a:off x="822960" y="5440680"/>
+            <a:off x="822960" y="5349240"/>
             <a:ext cx="4114800" cy="0"/>
           </a:xfrm>
           <a:prstGeom prst="line">
@@ -3308,8 +3310,8 @@
         </p:nvSpPr>
         <p:spPr>
           <a:xfrm>
-            <a:off x="822960" y="5596128"/>
-            <a:ext cx="10058400" cy="457200"/>
+            <a:off x="822960" y="5532120"/>
+            <a:ext cx="10058400" cy="502920"/>
           </a:xfrm>
           <a:prstGeom prst="rect">
             <a:avLst/>
@@ -3325,9 +3327,9 @@
               <a:buNone/>
             </a:pPr>
             <a:r>
-              <a:rPr lang="en-US" sz="1250" dirty="0">
-                <a:solidFill>
-                  <a:srgbClr val="64748B"/>
+              <a:rPr lang="en-US" sz="1800" dirty="0">
+                <a:solidFill>
+                  <a:srgbClr val="8FA3BF"/>
                 </a:solidFill>
                 <a:latin typeface="Segoe UI" pitchFamily="34" charset="0"/>
                 <a:ea typeface="Segoe UI" pitchFamily="34" charset="-122"/>
@@ -3335,7 +3337,7 @@
               </a:rPr>
               <a:t>Rezalian Vatiady · Zalin Labs · 2026</a:t>
             </a:r>
-            <a:endParaRPr lang="en-US" sz="1250" dirty="0"/>
+            <a:endParaRPr lang="en-US" sz="1800" dirty="0"/>
           </a:p>
         </p:txBody>
       </p:sp>
@@ -3347,8 +3349,8 @@
         </p:nvSpPr>
         <p:spPr>
           <a:xfrm>
-            <a:off x="10698480" y="6382512"/>
-            <a:ext cx="1188720" cy="365760"/>
+            <a:off x="10698480" y="6309360"/>
+            <a:ext cx="1188720" cy="411480"/>
           </a:xfrm>
           <a:prstGeom prst="rect">
             <a:avLst/>
@@ -3364,9 +3366,9 @@
               <a:buNone/>
             </a:pPr>
             <a:r>
-              <a:rPr lang="en-US" sz="1000" dirty="0">
-                <a:solidFill>
-                  <a:srgbClr val="64748B"/>
+              <a:rPr lang="en-US" sz="1800" dirty="0">
+                <a:solidFill>
+                  <a:srgbClr val="8FA3BF"/>
                 </a:solidFill>
                 <a:latin typeface="Consolas" pitchFamily="34" charset="0"/>
                 <a:ea typeface="Consolas" pitchFamily="34" charset="-122"/>
@@ -3374,7 +3376,7 @@
               </a:rPr>
               <a:t>1 / 14</a:t>
             </a:r>
-            <a:endParaRPr lang="en-US" sz="1000" dirty="0"/>
+            <a:endParaRPr lang="en-US" sz="1800" dirty="0"/>
           </a:p>
         </p:txBody>
       </p:sp>
@@ -3458,8 +3460,8 @@
         </p:nvSpPr>
         <p:spPr>
           <a:xfrm>
-            <a:off x="822960" y="502920"/>
-            <a:ext cx="10515600" cy="365760"/>
+            <a:off x="822960" y="457200"/>
+            <a:ext cx="10515600" cy="411480"/>
           </a:xfrm>
           <a:prstGeom prst="rect">
             <a:avLst/>
@@ -3475,7 +3477,7 @@
               <a:buNone/>
             </a:pPr>
             <a:r>
-              <a:rPr lang="en-US" sz="1200" spc="300" kern="0" dirty="0">
+              <a:rPr lang="en-US" sz="1800" spc="300" kern="0" dirty="0">
                 <a:solidFill>
                   <a:srgbClr val="06B6D4"/>
                 </a:solidFill>
@@ -3485,7 +3487,7 @@
               </a:rPr>
               <a:t>BEHAVIORAL DRIFT</a:t>
             </a:r>
-            <a:endParaRPr lang="en-US" sz="1200" dirty="0"/>
+            <a:endParaRPr lang="en-US" sz="1800" dirty="0"/>
           </a:p>
         </p:txBody>
       </p:sp>
@@ -3536,7 +3538,7 @@
         </p:nvGraphicFramePr>
         <p:xfrm>
           <a:off x="822960" y="1874520"/>
-          <a:ext cx="10515600" cy="3337560"/>
+          <a:ext cx="10515600" cy="3246120"/>
         </p:xfrm>
         <a:graphic xmlns:a="http://schemas.openxmlformats.org/drawingml/2006/main">
           <a:graphicData uri="http://schemas.openxmlformats.org/drawingml/2006/chart">
@@ -3552,7 +3554,7 @@
         </p:nvSpPr>
         <p:spPr>
           <a:xfrm>
-            <a:off x="822960" y="5413248"/>
+            <a:off x="822960" y="5321808"/>
             <a:ext cx="10515600" cy="0"/>
           </a:xfrm>
           <a:prstGeom prst="line">
@@ -3575,8 +3577,8 @@
         </p:nvSpPr>
         <p:spPr>
           <a:xfrm>
-            <a:off x="822960" y="5504688"/>
-            <a:ext cx="10424160" cy="411480"/>
+            <a:off x="822960" y="5394960"/>
+            <a:ext cx="10424160" cy="502920"/>
           </a:xfrm>
           <a:prstGeom prst="rect">
             <a:avLst/>
@@ -3592,7 +3594,7 @@
               <a:buNone/>
             </a:pPr>
             <a:r>
-              <a:rPr lang="en-US" sz="1300" i="1" dirty="0">
+              <a:rPr lang="en-US" sz="1800" i="1" dirty="0">
                 <a:solidFill>
                   <a:srgbClr val="06B6D4"/>
                 </a:solidFill>
@@ -3602,7 +3604,7 @@
               </a:rPr>
               <a:t>→  Order frequency and category usage declined visibly eight weeks before formal churn - drift is the early warning.</a:t>
             </a:r>
-            <a:endParaRPr lang="en-US" sz="1300" dirty="0"/>
+            <a:endParaRPr lang="en-US" sz="1800" dirty="0"/>
           </a:p>
         </p:txBody>
       </p:sp>
@@ -3637,8 +3639,8 @@
         </p:nvSpPr>
         <p:spPr>
           <a:xfrm>
-            <a:off x="822960" y="6053328"/>
-            <a:ext cx="9692640" cy="457200"/>
+            <a:off x="822960" y="6035040"/>
+            <a:ext cx="10424160" cy="566928"/>
           </a:xfrm>
           <a:prstGeom prst="rect">
             <a:avLst/>
@@ -3654,9 +3656,9 @@
               <a:buNone/>
             </a:pPr>
             <a:r>
-              <a:rPr lang="en-US" sz="1150" dirty="0">
-                <a:solidFill>
-                  <a:srgbClr val="64748B"/>
+              <a:rPr lang="en-US" sz="1800" dirty="0">
+                <a:solidFill>
+                  <a:srgbClr val="8FA3BF"/>
                 </a:solidFill>
                 <a:latin typeface="Segoe UI" pitchFamily="34" charset="0"/>
                 <a:ea typeface="Segoe UI" pitchFamily="34" charset="-122"/>
@@ -3664,7 +3666,7 @@
               </a:rPr>
               <a:t>Illustrative indexed trajectory of a churning user cohort.</a:t>
             </a:r>
-            <a:endParaRPr lang="en-US" sz="1150" dirty="0"/>
+            <a:endParaRPr lang="en-US" sz="1800" dirty="0"/>
           </a:p>
         </p:txBody>
       </p:sp>
@@ -3676,8 +3678,8 @@
         </p:nvSpPr>
         <p:spPr>
           <a:xfrm>
-            <a:off x="10698480" y="6382512"/>
-            <a:ext cx="1188720" cy="365760"/>
+            <a:off x="10698480" y="6309360"/>
+            <a:ext cx="1188720" cy="411480"/>
           </a:xfrm>
           <a:prstGeom prst="rect">
             <a:avLst/>
@@ -3693,9 +3695,9 @@
               <a:buNone/>
             </a:pPr>
             <a:r>
-              <a:rPr lang="en-US" sz="1000" dirty="0">
-                <a:solidFill>
-                  <a:srgbClr val="64748B"/>
+              <a:rPr lang="en-US" sz="1800" dirty="0">
+                <a:solidFill>
+                  <a:srgbClr val="8FA3BF"/>
                 </a:solidFill>
                 <a:latin typeface="Consolas" pitchFamily="34" charset="0"/>
                 <a:ea typeface="Consolas" pitchFamily="34" charset="-122"/>
@@ -3703,7 +3705,7 @@
               </a:rPr>
               <a:t>10 / 14</a:t>
             </a:r>
-            <a:endParaRPr lang="en-US" sz="1000" dirty="0"/>
+            <a:endParaRPr lang="en-US" sz="1800" dirty="0"/>
           </a:p>
         </p:txBody>
       </p:sp>
@@ -3787,8 +3789,8 @@
         </p:nvSpPr>
         <p:spPr>
           <a:xfrm>
-            <a:off x="822960" y="502920"/>
-            <a:ext cx="10515600" cy="365760"/>
+            <a:off x="822960" y="457200"/>
+            <a:ext cx="10515600" cy="411480"/>
           </a:xfrm>
           <a:prstGeom prst="rect">
             <a:avLst/>
@@ -3804,7 +3806,7 @@
               <a:buNone/>
             </a:pPr>
             <a:r>
-              <a:rPr lang="en-US" sz="1200" spc="300" kern="0" dirty="0">
+              <a:rPr lang="en-US" sz="1800" spc="300" kern="0" dirty="0">
                 <a:solidFill>
                   <a:srgbClr val="06B6D4"/>
                 </a:solidFill>
@@ -3814,7 +3816,7 @@
               </a:rPr>
               <a:t>FEATURE ADOPTION</a:t>
             </a:r>
-            <a:endParaRPr lang="en-US" sz="1200" dirty="0"/>
+            <a:endParaRPr lang="en-US" sz="1800" dirty="0"/>
           </a:p>
         </p:txBody>
       </p:sp>
@@ -3864,8 +3866,8 @@
           <p:nvPr/>
         </p:nvGraphicFramePr>
         <p:xfrm>
-          <a:off x="822960" y="1874520"/>
-          <a:ext cx="10515600" cy="3337560"/>
+          <a:off x="822960" y="1783080"/>
+          <a:ext cx="10515600" cy="3383280"/>
         </p:xfrm>
         <a:graphic xmlns:a="http://schemas.openxmlformats.org/drawingml/2006/main">
           <a:graphicData uri="http://schemas.openxmlformats.org/drawingml/2006/chart">
@@ -3881,7 +3883,7 @@
         </p:nvSpPr>
         <p:spPr>
           <a:xfrm>
-            <a:off x="822960" y="5413248"/>
+            <a:off x="822960" y="5321808"/>
             <a:ext cx="10515600" cy="0"/>
           </a:xfrm>
           <a:prstGeom prst="line">
@@ -3904,8 +3906,8 @@
         </p:nvSpPr>
         <p:spPr>
           <a:xfrm>
-            <a:off x="822960" y="5504688"/>
-            <a:ext cx="10424160" cy="411480"/>
+            <a:off x="822960" y="5394960"/>
+            <a:ext cx="10424160" cy="502920"/>
           </a:xfrm>
           <a:prstGeom prst="rect">
             <a:avLst/>
@@ -3921,7 +3923,7 @@
               <a:buNone/>
             </a:pPr>
             <a:r>
-              <a:rPr lang="en-US" sz="1300" i="1" dirty="0">
+              <a:rPr lang="en-US" sz="1800" i="1" dirty="0">
                 <a:solidFill>
                   <a:srgbClr val="06B6D4"/>
                 </a:solidFill>
@@ -3931,7 +3933,7 @@
               </a:rPr>
               <a:t>→  Only the first bucket justified the launch - adoption curves per segment showed which features actually retained users.</a:t>
             </a:r>
-            <a:endParaRPr lang="en-US" sz="1300" dirty="0"/>
+            <a:endParaRPr lang="en-US" sz="1800" dirty="0"/>
           </a:p>
         </p:txBody>
       </p:sp>
@@ -3966,8 +3968,8 @@
         </p:nvSpPr>
         <p:spPr>
           <a:xfrm>
-            <a:off x="822960" y="6053328"/>
-            <a:ext cx="9692640" cy="457200"/>
+            <a:off x="822960" y="6035040"/>
+            <a:ext cx="10424160" cy="566928"/>
           </a:xfrm>
           <a:prstGeom prst="rect">
             <a:avLst/>
@@ -3983,9 +3985,9 @@
               <a:buNone/>
             </a:pPr>
             <a:r>
-              <a:rPr lang="en-US" sz="1150" dirty="0">
-                <a:solidFill>
-                  <a:srgbClr val="64748B"/>
+              <a:rPr lang="en-US" sz="1800" dirty="0">
+                <a:solidFill>
+                  <a:srgbClr val="8FA3BF"/>
                 </a:solidFill>
                 <a:latin typeface="Segoe UI" pitchFamily="34" charset="0"/>
                 <a:ea typeface="Segoe UI" pitchFamily="34" charset="-122"/>
@@ -3993,7 +3995,7 @@
               </a:rPr>
               <a:t>Illustrative outcome mix across launched features.</a:t>
             </a:r>
-            <a:endParaRPr lang="en-US" sz="1150" dirty="0"/>
+            <a:endParaRPr lang="en-US" sz="1800" dirty="0"/>
           </a:p>
         </p:txBody>
       </p:sp>
@@ -4005,8 +4007,8 @@
         </p:nvSpPr>
         <p:spPr>
           <a:xfrm>
-            <a:off x="10698480" y="6382512"/>
-            <a:ext cx="1188720" cy="365760"/>
+            <a:off x="10698480" y="6309360"/>
+            <a:ext cx="1188720" cy="411480"/>
           </a:xfrm>
           <a:prstGeom prst="rect">
             <a:avLst/>
@@ -4022,9 +4024,9 @@
               <a:buNone/>
             </a:pPr>
             <a:r>
-              <a:rPr lang="en-US" sz="1000" dirty="0">
-                <a:solidFill>
-                  <a:srgbClr val="64748B"/>
+              <a:rPr lang="en-US" sz="1800" dirty="0">
+                <a:solidFill>
+                  <a:srgbClr val="8FA3BF"/>
                 </a:solidFill>
                 <a:latin typeface="Consolas" pitchFamily="34" charset="0"/>
                 <a:ea typeface="Consolas" pitchFamily="34" charset="-122"/>
@@ -4032,7 +4034,7 @@
               </a:rPr>
               <a:t>11 / 14</a:t>
             </a:r>
-            <a:endParaRPr lang="en-US" sz="1000" dirty="0"/>
+            <a:endParaRPr lang="en-US" sz="1800" dirty="0"/>
           </a:p>
         </p:txBody>
       </p:sp>
@@ -4116,8 +4118,8 @@
         </p:nvSpPr>
         <p:spPr>
           <a:xfrm>
-            <a:off x="822960" y="502920"/>
-            <a:ext cx="10515600" cy="365760"/>
+            <a:off x="822960" y="457200"/>
+            <a:ext cx="10515600" cy="411480"/>
           </a:xfrm>
           <a:prstGeom prst="rect">
             <a:avLst/>
@@ -4133,7 +4135,7 @@
               <a:buNone/>
             </a:pPr>
             <a:r>
-              <a:rPr lang="en-US" sz="1200" spc="300" kern="0" dirty="0">
+              <a:rPr lang="en-US" sz="1800" spc="300" kern="0" dirty="0">
                 <a:solidFill>
                   <a:srgbClr val="06B6D4"/>
                 </a:solidFill>
@@ -4143,7 +4145,7 @@
               </a:rPr>
               <a:t>SEGMENT VS SEGMENT</a:t>
             </a:r>
-            <a:endParaRPr lang="en-US" sz="1200" dirty="0"/>
+            <a:endParaRPr lang="en-US" sz="1800" dirty="0"/>
           </a:p>
         </p:txBody>
       </p:sp>
@@ -4194,12 +4196,12 @@
         </p:nvSpPr>
         <p:spPr>
           <a:xfrm>
-            <a:off x="822960" y="2011680"/>
-            <a:ext cx="5074920" cy="3611880"/>
+            <a:off x="822960" y="1965960"/>
+            <a:ext cx="5074920" cy="3657600"/>
           </a:xfrm>
           <a:prstGeom prst="roundRect">
             <a:avLst>
-              <a:gd name="adj" fmla="val 2025"/>
+              <a:gd name="adj" fmla="val 2000"/>
             </a:avLst>
           </a:prstGeom>
           <a:solidFill>
@@ -4221,8 +4223,8 @@
         </p:nvSpPr>
         <p:spPr>
           <a:xfrm>
-            <a:off x="1097280" y="2240280"/>
-            <a:ext cx="4526280" cy="502920"/>
+            <a:off x="1097280" y="2194560"/>
+            <a:ext cx="4526280" cy="548640"/>
           </a:xfrm>
           <a:prstGeom prst="rect">
             <a:avLst/>
@@ -4238,7 +4240,7 @@
               <a:buNone/>
             </a:pPr>
             <a:r>
-              <a:rPr lang="en-US" sz="1650" b="1" dirty="0">
+              <a:rPr lang="en-US" sz="2000" b="1" dirty="0">
                 <a:solidFill>
                   <a:srgbClr val="06B6D4"/>
                 </a:solidFill>
@@ -4248,7 +4250,7 @@
               </a:rPr>
               <a:t>Cluster labels only</a:t>
             </a:r>
-            <a:endParaRPr lang="en-US" sz="1650" dirty="0"/>
+            <a:endParaRPr lang="en-US" sz="2000" dirty="0"/>
           </a:p>
         </p:txBody>
       </p:sp>
@@ -4284,7 +4286,7 @@
               <a:buChar char="▸"/>
             </a:pPr>
             <a:r>
-              <a:rPr lang="en-US" sz="1280" dirty="0">
+              <a:rPr lang="en-US" sz="1800" dirty="0">
                 <a:solidFill>
                   <a:srgbClr val="CBD5E1"/>
                 </a:solidFill>
@@ -4294,7 +4296,7 @@
               </a:rPr>
               <a:t>k-means returns five groups and stops there</a:t>
             </a:r>
-            <a:endParaRPr lang="en-US" sz="1280" dirty="0"/>
+            <a:endParaRPr lang="en-US" sz="1800" dirty="0"/>
           </a:p>
           <a:p>
             <a:pPr marL="342900" indent="-342900">
@@ -4308,7 +4310,7 @@
               <a:buChar char="▸"/>
             </a:pPr>
             <a:r>
-              <a:rPr lang="en-US" sz="1280" dirty="0">
+              <a:rPr lang="en-US" sz="1800" dirty="0">
                 <a:solidFill>
                   <a:srgbClr val="CBD5E1"/>
                 </a:solidFill>
@@ -4318,7 +4320,7 @@
               </a:rPr>
               <a:t>Demographic labels describe who users are, not what they will do next</a:t>
             </a:r>
-            <a:endParaRPr lang="en-US" sz="1280" dirty="0"/>
+            <a:endParaRPr lang="en-US" sz="1800" dirty="0"/>
           </a:p>
           <a:p>
             <a:pPr marL="342900" indent="-342900">
@@ -4332,7 +4334,7 @@
               <a:buChar char="▸"/>
             </a:pPr>
             <a:r>
-              <a:rPr lang="en-US" sz="1280" dirty="0">
+              <a:rPr lang="en-US" sz="1800" dirty="0">
                 <a:solidFill>
                   <a:srgbClr val="CBD5E1"/>
                 </a:solidFill>
@@ -4342,7 +4344,7 @@
               </a:rPr>
               <a:t>Every segment receives the same campaign and nothing moves</a:t>
             </a:r>
-            <a:endParaRPr lang="en-US" sz="1280" dirty="0"/>
+            <a:endParaRPr lang="en-US" sz="1800" dirty="0"/>
           </a:p>
         </p:txBody>
       </p:sp>
@@ -4354,12 +4356,12 @@
         </p:nvSpPr>
         <p:spPr>
           <a:xfrm>
-            <a:off x="6291072" y="2011680"/>
-            <a:ext cx="5074920" cy="3611880"/>
+            <a:off x="6291072" y="1965960"/>
+            <a:ext cx="5074920" cy="3657600"/>
           </a:xfrm>
           <a:prstGeom prst="roundRect">
             <a:avLst>
-              <a:gd name="adj" fmla="val 2025"/>
+              <a:gd name="adj" fmla="val 2000"/>
             </a:avLst>
           </a:prstGeom>
           <a:solidFill>
@@ -4381,8 +4383,8 @@
         </p:nvSpPr>
         <p:spPr>
           <a:xfrm>
-            <a:off x="6565392" y="2240280"/>
-            <a:ext cx="4526280" cy="502920"/>
+            <a:off x="6565392" y="2194560"/>
+            <a:ext cx="4526280" cy="548640"/>
           </a:xfrm>
           <a:prstGeom prst="rect">
             <a:avLst/>
@@ -4398,7 +4400,7 @@
               <a:buNone/>
             </a:pPr>
             <a:r>
-              <a:rPr lang="en-US" sz="1650" b="1" dirty="0">
+              <a:rPr lang="en-US" sz="2000" b="1" dirty="0">
                 <a:solidFill>
                   <a:srgbClr val="93C5FD"/>
                 </a:solidFill>
@@ -4408,7 +4410,7 @@
               </a:rPr>
               <a:t>Behavior stories</a:t>
             </a:r>
-            <a:endParaRPr lang="en-US" sz="1650" dirty="0"/>
+            <a:endParaRPr lang="en-US" sz="2000" dirty="0"/>
           </a:p>
         </p:txBody>
       </p:sp>
@@ -4444,7 +4446,7 @@
               <a:buChar char="▸"/>
             </a:pPr>
             <a:r>
-              <a:rPr lang="en-US" sz="1280" dirty="0">
+              <a:rPr lang="en-US" sz="1800" dirty="0">
                 <a:solidFill>
                   <a:srgbClr val="CBD5E1"/>
                 </a:solidFill>
@@ -4454,7 +4456,7 @@
               </a:rPr>
               <a:t>Each cluster explains why users behave this way and what would change it</a:t>
             </a:r>
-            <a:endParaRPr lang="en-US" sz="1280" dirty="0"/>
+            <a:endParaRPr lang="en-US" sz="1800" dirty="0"/>
           </a:p>
           <a:p>
             <a:pPr marL="342900" indent="-342900">
@@ -4468,7 +4470,7 @@
               <a:buChar char="▸"/>
             </a:pPr>
             <a:r>
-              <a:rPr lang="en-US" sz="1280" dirty="0">
+              <a:rPr lang="en-US" sz="1800" dirty="0">
                 <a:solidFill>
                   <a:srgbClr val="CBD5E1"/>
                 </a:solidFill>
@@ -4478,7 +4480,7 @@
               </a:rPr>
               <a:t>Signals track drift across orders, categories, and sessions</a:t>
             </a:r>
-            <a:endParaRPr lang="en-US" sz="1280" dirty="0"/>
+            <a:endParaRPr lang="en-US" sz="1800" dirty="0"/>
           </a:p>
           <a:p>
             <a:pPr marL="342900" indent="-342900">
@@ -4492,7 +4494,7 @@
               <a:buChar char="▸"/>
             </a:pPr>
             <a:r>
-              <a:rPr lang="en-US" sz="1280" dirty="0">
+              <a:rPr lang="en-US" sz="1800" dirty="0">
                 <a:solidFill>
                   <a:srgbClr val="CBD5E1"/>
                 </a:solidFill>
@@ -4502,7 +4504,7 @@
               </a:rPr>
               <a:t>Each segment carries its own play, KPI, and owner</a:t>
             </a:r>
-            <a:endParaRPr lang="en-US" sz="1280" dirty="0"/>
+            <a:endParaRPr lang="en-US" sz="1800" dirty="0"/>
           </a:p>
         </p:txBody>
       </p:sp>
@@ -4537,8 +4539,8 @@
         </p:nvSpPr>
         <p:spPr>
           <a:xfrm>
-            <a:off x="822960" y="6053328"/>
-            <a:ext cx="9692640" cy="457200"/>
+            <a:off x="822960" y="6035040"/>
+            <a:ext cx="10424160" cy="566928"/>
           </a:xfrm>
           <a:prstGeom prst="rect">
             <a:avLst/>
@@ -4554,9 +4556,9 @@
               <a:buNone/>
             </a:pPr>
             <a:r>
-              <a:rPr lang="en-US" sz="1150" dirty="0">
-                <a:solidFill>
-                  <a:srgbClr val="64748B"/>
+              <a:rPr lang="en-US" sz="1800" dirty="0">
+                <a:solidFill>
+                  <a:srgbClr val="8FA3BF"/>
                 </a:solidFill>
                 <a:latin typeface="Segoe UI" pitchFamily="34" charset="0"/>
                 <a:ea typeface="Segoe UI" pitchFamily="34" charset="-122"/>
@@ -4564,7 +4566,7 @@
               </a:rPr>
               <a:t>The algorithm proposed; the narrative disposed.</a:t>
             </a:r>
-            <a:endParaRPr lang="en-US" sz="1150" dirty="0"/>
+            <a:endParaRPr lang="en-US" sz="1800" dirty="0"/>
           </a:p>
         </p:txBody>
       </p:sp>
@@ -4576,8 +4578,8 @@
         </p:nvSpPr>
         <p:spPr>
           <a:xfrm>
-            <a:off x="10698480" y="6382512"/>
-            <a:ext cx="1188720" cy="365760"/>
+            <a:off x="10698480" y="6309360"/>
+            <a:ext cx="1188720" cy="411480"/>
           </a:xfrm>
           <a:prstGeom prst="rect">
             <a:avLst/>
@@ -4593,9 +4595,9 @@
               <a:buNone/>
             </a:pPr>
             <a:r>
-              <a:rPr lang="en-US" sz="1000" dirty="0">
-                <a:solidFill>
-                  <a:srgbClr val="64748B"/>
+              <a:rPr lang="en-US" sz="1800" dirty="0">
+                <a:solidFill>
+                  <a:srgbClr val="8FA3BF"/>
                 </a:solidFill>
                 <a:latin typeface="Consolas" pitchFamily="34" charset="0"/>
                 <a:ea typeface="Consolas" pitchFamily="34" charset="-122"/>
@@ -4603,7 +4605,7 @@
               </a:rPr>
               <a:t>12 / 14</a:t>
             </a:r>
-            <a:endParaRPr lang="en-US" sz="1000" dirty="0"/>
+            <a:endParaRPr lang="en-US" sz="1800" dirty="0"/>
           </a:p>
         </p:txBody>
       </p:sp>
@@ -4687,8 +4689,8 @@
         </p:nvSpPr>
         <p:spPr>
           <a:xfrm>
-            <a:off x="822960" y="502920"/>
-            <a:ext cx="10515600" cy="365760"/>
+            <a:off x="822960" y="457200"/>
+            <a:ext cx="10515600" cy="411480"/>
           </a:xfrm>
           <a:prstGeom prst="rect">
             <a:avLst/>
@@ -4704,7 +4706,7 @@
               <a:buNone/>
             </a:pPr>
             <a:r>
-              <a:rPr lang="en-US" sz="1200" spc="300" kern="0" dirty="0">
+              <a:rPr lang="en-US" sz="1800" spc="300" kern="0" dirty="0">
                 <a:solidFill>
                   <a:srgbClr val="06B6D4"/>
                 </a:solidFill>
@@ -4714,7 +4716,7 @@
               </a:rPr>
               <a:t>LESSONS</a:t>
             </a:r>
-            <a:endParaRPr lang="en-US" sz="1200" dirty="0"/>
+            <a:endParaRPr lang="en-US" sz="1800" dirty="0"/>
           </a:p>
         </p:txBody>
       </p:sp>
@@ -4765,8 +4767,8 @@
         </p:nvSpPr>
         <p:spPr>
           <a:xfrm>
-            <a:off x="868680" y="2011680"/>
-            <a:ext cx="10424160" cy="3566160"/>
+            <a:off x="868680" y="1965960"/>
+            <a:ext cx="10424160" cy="3840480"/>
           </a:xfrm>
           <a:prstGeom prst="rect">
             <a:avLst/>
@@ -4789,7 +4791,7 @@
               <a:buChar char="▸"/>
             </a:pPr>
             <a:r>
-              <a:rPr lang="en-US" sz="1600" dirty="0">
+              <a:rPr lang="en-US" sz="2000" dirty="0">
                 <a:solidFill>
                   <a:srgbClr val="CBD5E1"/>
                 </a:solidFill>
@@ -4799,7 +4801,7 @@
               </a:rPr>
               <a:t>Feature launch is not feature adoption - track the curves, not the roadmap</a:t>
             </a:r>
-            <a:endParaRPr lang="en-US" sz="1600" dirty="0"/>
+            <a:endParaRPr lang="en-US" sz="2000" dirty="0"/>
           </a:p>
           <a:p>
             <a:pPr marL="342900" indent="-342900">
@@ -4813,7 +4815,7 @@
               <a:buChar char="▸"/>
             </a:pPr>
             <a:r>
-              <a:rPr lang="en-US" sz="1600" dirty="0">
+              <a:rPr lang="en-US" sz="2000" dirty="0">
                 <a:solidFill>
                   <a:srgbClr val="CBD5E1"/>
                 </a:solidFill>
@@ -4823,7 +4825,7 @@
               </a:rPr>
               <a:t>Analysis without a recommended action is trivia</a:t>
             </a:r>
-            <a:endParaRPr lang="en-US" sz="1600" dirty="0"/>
+            <a:endParaRPr lang="en-US" sz="2000" dirty="0"/>
           </a:p>
           <a:p>
             <a:pPr marL="342900" indent="-342900">
@@ -4837,7 +4839,7 @@
               <a:buChar char="▸"/>
             </a:pPr>
             <a:r>
-              <a:rPr lang="en-US" sz="1600" dirty="0">
+              <a:rPr lang="en-US" sz="2000" dirty="0">
                 <a:solidFill>
                   <a:srgbClr val="CBD5E1"/>
                 </a:solidFill>
@@ -4847,7 +4849,7 @@
               </a:rPr>
               <a:t>Analytics is a product: the user is not the data, the user is a decision</a:t>
             </a:r>
-            <a:endParaRPr lang="en-US" sz="1600" dirty="0"/>
+            <a:endParaRPr lang="en-US" sz="2000" dirty="0"/>
           </a:p>
           <a:p>
             <a:pPr marL="342900" indent="-342900">
@@ -4861,7 +4863,7 @@
               <a:buChar char="▸"/>
             </a:pPr>
             <a:r>
-              <a:rPr lang="en-US" sz="1600" dirty="0">
+              <a:rPr lang="en-US" sz="2000" dirty="0">
                 <a:solidFill>
                   <a:srgbClr val="CBD5E1"/>
                 </a:solidFill>
@@ -4871,7 +4873,7 @@
               </a:rPr>
               <a:t>Dashboards must mirror how the organization decides - in three speeds</a:t>
             </a:r>
-            <a:endParaRPr lang="en-US" sz="1600" dirty="0"/>
+            <a:endParaRPr lang="en-US" sz="2000" dirty="0"/>
           </a:p>
         </p:txBody>
       </p:sp>
@@ -4883,8 +4885,8 @@
         </p:nvSpPr>
         <p:spPr>
           <a:xfrm>
-            <a:off x="10698480" y="6382512"/>
-            <a:ext cx="1188720" cy="365760"/>
+            <a:off x="10698480" y="6309360"/>
+            <a:ext cx="1188720" cy="411480"/>
           </a:xfrm>
           <a:prstGeom prst="rect">
             <a:avLst/>
@@ -4900,9 +4902,9 @@
               <a:buNone/>
             </a:pPr>
             <a:r>
-              <a:rPr lang="en-US" sz="1000" dirty="0">
-                <a:solidFill>
-                  <a:srgbClr val="64748B"/>
+              <a:rPr lang="en-US" sz="1800" dirty="0">
+                <a:solidFill>
+                  <a:srgbClr val="8FA3BF"/>
                 </a:solidFill>
                 <a:latin typeface="Consolas" pitchFamily="34" charset="0"/>
                 <a:ea typeface="Consolas" pitchFamily="34" charset="-122"/>
@@ -4910,7 +4912,7 @@
               </a:rPr>
               <a:t>13 / 14</a:t>
             </a:r>
-            <a:endParaRPr lang="en-US" sz="1000" dirty="0"/>
+            <a:endParaRPr lang="en-US" sz="1800" dirty="0"/>
           </a:p>
         </p:txBody>
       </p:sp>
@@ -4994,8 +4996,8 @@
         </p:nvSpPr>
         <p:spPr>
           <a:xfrm>
-            <a:off x="822960" y="1417320"/>
-            <a:ext cx="10515600" cy="411480"/>
+            <a:off x="822960" y="1371600"/>
+            <a:ext cx="10515600" cy="457200"/>
           </a:xfrm>
           <a:prstGeom prst="rect">
             <a:avLst/>
@@ -5011,7 +5013,7 @@
               <a:buNone/>
             </a:pPr>
             <a:r>
-              <a:rPr lang="en-US" sz="1300" spc="400" kern="0" dirty="0">
+              <a:rPr lang="en-US" sz="1800" spc="400" kern="0" dirty="0">
                 <a:solidFill>
                   <a:srgbClr val="06B6D4"/>
                 </a:solidFill>
@@ -5021,7 +5023,7 @@
               </a:rPr>
               <a:t>WORK WITH ME</a:t>
             </a:r>
-            <a:endParaRPr lang="en-US" sz="1300" dirty="0"/>
+            <a:endParaRPr lang="en-US" sz="1800" dirty="0"/>
           </a:p>
         </p:txBody>
       </p:sp>
@@ -5033,7 +5035,7 @@
         </p:nvSpPr>
         <p:spPr>
           <a:xfrm>
-            <a:off x="822960" y="1920240"/>
+            <a:off x="822960" y="1874520"/>
             <a:ext cx="10515600" cy="1371600"/>
           </a:xfrm>
           <a:prstGeom prst="rect">
@@ -5072,8 +5074,8 @@
         </p:nvSpPr>
         <p:spPr>
           <a:xfrm>
-            <a:off x="2011680" y="3429000"/>
-            <a:ext cx="8183880" cy="1554480"/>
+            <a:off x="2011680" y="3383280"/>
+            <a:ext cx="8183880" cy="1691640"/>
           </a:xfrm>
           <a:prstGeom prst="rect">
             <a:avLst/>
@@ -5092,7 +5094,7 @@
               <a:buNone/>
             </a:pPr>
             <a:r>
-              <a:rPr lang="en-US" sz="1500" dirty="0">
+              <a:rPr lang="en-US" sz="2000" dirty="0">
                 <a:solidFill>
                   <a:srgbClr val="CBD5E1"/>
                 </a:solidFill>
@@ -5109,7 +5111,7 @@
               <a:buNone/>
             </a:pPr>
             <a:r>
-              <a:rPr lang="en-US" sz="1500" dirty="0">
+              <a:rPr lang="en-US" sz="2000" dirty="0">
                 <a:solidFill>
                   <a:srgbClr val="CBD5E1"/>
                 </a:solidFill>
@@ -5126,7 +5128,7 @@
               <a:buNone/>
             </a:pPr>
             <a:r>
-              <a:rPr lang="en-US" sz="1500" dirty="0">
+              <a:rPr lang="en-US" sz="2000" dirty="0">
                 <a:solidFill>
                   <a:srgbClr val="CBD5E1"/>
                 </a:solidFill>
@@ -5136,7 +5138,7 @@
               </a:rPr>
               <a:t>Available for freelance and contract engagements worldwide</a:t>
             </a:r>
-            <a:endParaRPr lang="en-US" sz="1500" dirty="0"/>
+            <a:endParaRPr lang="en-US" sz="2000" dirty="0"/>
           </a:p>
         </p:txBody>
       </p:sp>
@@ -5171,8 +5173,8 @@
         </p:nvSpPr>
         <p:spPr>
           <a:xfrm>
-            <a:off x="822960" y="5376672"/>
-            <a:ext cx="10515600" cy="457200"/>
+            <a:off x="822960" y="5349240"/>
+            <a:ext cx="10515600" cy="502920"/>
           </a:xfrm>
           <a:prstGeom prst="rect">
             <a:avLst/>
@@ -5188,7 +5190,7 @@
               <a:buNone/>
             </a:pPr>
             <a:r>
-              <a:rPr lang="en-US" sz="1350" b="1" dirty="0">
+              <a:rPr lang="en-US" sz="1800" b="1" dirty="0">
                 <a:solidFill>
                   <a:srgbClr val="06B6D4"/>
                 </a:solidFill>
@@ -5198,7 +5200,7 @@
               </a:rPr>
               <a:t>rezalianvatiady.github.io · github.com/rezalianvatiady</a:t>
             </a:r>
-            <a:endParaRPr lang="en-US" sz="1350" dirty="0"/>
+            <a:endParaRPr lang="en-US" sz="1800" dirty="0"/>
           </a:p>
         </p:txBody>
       </p:sp>
@@ -5210,8 +5212,8 @@
         </p:nvSpPr>
         <p:spPr>
           <a:xfrm>
-            <a:off x="10698480" y="6382512"/>
-            <a:ext cx="1188720" cy="365760"/>
+            <a:off x="10698480" y="6309360"/>
+            <a:ext cx="1188720" cy="411480"/>
           </a:xfrm>
           <a:prstGeom prst="rect">
             <a:avLst/>
@@ -5227,9 +5229,9 @@
               <a:buNone/>
             </a:pPr>
             <a:r>
-              <a:rPr lang="en-US" sz="1000" dirty="0">
-                <a:solidFill>
-                  <a:srgbClr val="64748B"/>
+              <a:rPr lang="en-US" sz="1800" dirty="0">
+                <a:solidFill>
+                  <a:srgbClr val="8FA3BF"/>
                 </a:solidFill>
                 <a:latin typeface="Consolas" pitchFamily="34" charset="0"/>
                 <a:ea typeface="Consolas" pitchFamily="34" charset="-122"/>
@@ -5237,7 +5239,7 @@
               </a:rPr>
               <a:t>14 / 14</a:t>
             </a:r>
-            <a:endParaRPr lang="en-US" sz="1000" dirty="0"/>
+            <a:endParaRPr lang="en-US" sz="1800" dirty="0"/>
           </a:p>
         </p:txBody>
       </p:sp>
@@ -5321,8 +5323,8 @@
         </p:nvSpPr>
         <p:spPr>
           <a:xfrm>
-            <a:off x="822960" y="502920"/>
-            <a:ext cx="10515600" cy="365760"/>
+            <a:off x="822960" y="457200"/>
+            <a:ext cx="10515600" cy="411480"/>
           </a:xfrm>
           <a:prstGeom prst="rect">
             <a:avLst/>
@@ -5338,7 +5340,7 @@
               <a:buNone/>
             </a:pPr>
             <a:r>
-              <a:rPr lang="en-US" sz="1200" spc="300" kern="0" dirty="0">
+              <a:rPr lang="en-US" sz="1800" spc="300" kern="0" dirty="0">
                 <a:solidFill>
                   <a:srgbClr val="06B6D4"/>
                 </a:solidFill>
@@ -5348,7 +5350,7 @@
               </a:rPr>
               <a:t>AGENDA</a:t>
             </a:r>
-            <a:endParaRPr lang="en-US" sz="1200" dirty="0"/>
+            <a:endParaRPr lang="en-US" sz="1800" dirty="0"/>
           </a:p>
         </p:txBody>
       </p:sp>
@@ -5399,8 +5401,8 @@
         </p:nvSpPr>
         <p:spPr>
           <a:xfrm>
-            <a:off x="868680" y="2112264"/>
-            <a:ext cx="420624" cy="420624"/>
+            <a:off x="868680" y="2103120"/>
+            <a:ext cx="457200" cy="457200"/>
           </a:xfrm>
           <a:prstGeom prst="ellipse">
             <a:avLst/>
@@ -5424,8 +5426,8 @@
         </p:nvSpPr>
         <p:spPr>
           <a:xfrm>
-            <a:off x="868680" y="2112264"/>
-            <a:ext cx="420624" cy="420624"/>
+            <a:off x="868680" y="2103120"/>
+            <a:ext cx="457200" cy="457200"/>
           </a:xfrm>
           <a:prstGeom prst="rect">
             <a:avLst/>
@@ -5441,7 +5443,7 @@
               <a:buNone/>
             </a:pPr>
             <a:r>
-              <a:rPr lang="en-US" sz="1300" b="1" dirty="0">
+              <a:rPr lang="en-US" sz="1800" b="1" dirty="0">
                 <a:solidFill>
                   <a:srgbClr val="3B82F6"/>
                 </a:solidFill>
@@ -5451,7 +5453,7 @@
               </a:rPr>
               <a:t>1</a:t>
             </a:r>
-            <a:endParaRPr lang="en-US" sz="1300" dirty="0"/>
+            <a:endParaRPr lang="en-US" sz="1800" dirty="0"/>
           </a:p>
         </p:txBody>
       </p:sp>
@@ -5463,8 +5465,8 @@
         </p:nvSpPr>
         <p:spPr>
           <a:xfrm>
-            <a:off x="1435608" y="2057400"/>
-            <a:ext cx="4480560" cy="822960"/>
+            <a:off x="1472184" y="2011680"/>
+            <a:ext cx="4443984" cy="960120"/>
           </a:xfrm>
           <a:prstGeom prst="rect">
             <a:avLst/>
@@ -5480,7 +5482,7 @@
               <a:buNone/>
             </a:pPr>
             <a:r>
-              <a:rPr lang="en-US" sz="1450" dirty="0">
+              <a:rPr lang="en-US" sz="2000" dirty="0">
                 <a:solidFill>
                   <a:srgbClr val="CBD5E1"/>
                 </a:solidFill>
@@ -5490,7 +5492,7 @@
               </a:rPr>
               <a:t>The engagement: RevoU final project reviewed by the Tokopedia Analytics team</a:t>
             </a:r>
-            <a:endParaRPr lang="en-US" sz="1450" dirty="0"/>
+            <a:endParaRPr lang="en-US" sz="2000" dirty="0"/>
           </a:p>
         </p:txBody>
       </p:sp>
@@ -5502,8 +5504,8 @@
         </p:nvSpPr>
         <p:spPr>
           <a:xfrm>
-            <a:off x="868680" y="3044952"/>
-            <a:ext cx="420624" cy="420624"/>
+            <a:off x="868680" y="3182112"/>
+            <a:ext cx="457200" cy="457200"/>
           </a:xfrm>
           <a:prstGeom prst="ellipse">
             <a:avLst/>
@@ -5527,8 +5529,8 @@
         </p:nvSpPr>
         <p:spPr>
           <a:xfrm>
-            <a:off x="868680" y="3044952"/>
-            <a:ext cx="420624" cy="420624"/>
+            <a:off x="868680" y="3182112"/>
+            <a:ext cx="457200" cy="457200"/>
           </a:xfrm>
           <a:prstGeom prst="rect">
             <a:avLst/>
@@ -5544,7 +5546,7 @@
               <a:buNone/>
             </a:pPr>
             <a:r>
-              <a:rPr lang="en-US" sz="1300" b="1" dirty="0">
+              <a:rPr lang="en-US" sz="1800" b="1" dirty="0">
                 <a:solidFill>
                   <a:srgbClr val="06B6D4"/>
                 </a:solidFill>
@@ -5554,7 +5556,7 @@
               </a:rPr>
               <a:t>2</a:t>
             </a:r>
-            <a:endParaRPr lang="en-US" sz="1300" dirty="0"/>
+            <a:endParaRPr lang="en-US" sz="1800" dirty="0"/>
           </a:p>
         </p:txBody>
       </p:sp>
@@ -5566,8 +5568,8 @@
         </p:nvSpPr>
         <p:spPr>
           <a:xfrm>
-            <a:off x="1435608" y="2990088"/>
-            <a:ext cx="4480560" cy="822960"/>
+            <a:off x="1472184" y="3090672"/>
+            <a:ext cx="4443984" cy="960120"/>
           </a:xfrm>
           <a:prstGeom prst="rect">
             <a:avLst/>
@@ -5583,7 +5585,7 @@
               <a:buNone/>
             </a:pPr>
             <a:r>
-              <a:rPr lang="en-US" sz="1450" dirty="0">
+              <a:rPr lang="en-US" sz="2000" dirty="0">
                 <a:solidFill>
                   <a:srgbClr val="CBD5E1"/>
                 </a:solidFill>
@@ -5593,7 +5595,7 @@
               </a:rPr>
               <a:t>Segmentation as a hypothesis, not a clustering job</a:t>
             </a:r>
-            <a:endParaRPr lang="en-US" sz="1450" dirty="0"/>
+            <a:endParaRPr lang="en-US" sz="2000" dirty="0"/>
           </a:p>
         </p:txBody>
       </p:sp>
@@ -5605,8 +5607,8 @@
         </p:nvSpPr>
         <p:spPr>
           <a:xfrm>
-            <a:off x="868680" y="3977640"/>
-            <a:ext cx="420624" cy="420624"/>
+            <a:off x="868680" y="4261104"/>
+            <a:ext cx="457200" cy="457200"/>
           </a:xfrm>
           <a:prstGeom prst="ellipse">
             <a:avLst/>
@@ -5630,8 +5632,8 @@
         </p:nvSpPr>
         <p:spPr>
           <a:xfrm>
-            <a:off x="868680" y="3977640"/>
-            <a:ext cx="420624" cy="420624"/>
+            <a:off x="868680" y="4261104"/>
+            <a:ext cx="457200" cy="457200"/>
           </a:xfrm>
           <a:prstGeom prst="rect">
             <a:avLst/>
@@ -5647,7 +5649,7 @@
               <a:buNone/>
             </a:pPr>
             <a:r>
-              <a:rPr lang="en-US" sz="1300" b="1" dirty="0">
+              <a:rPr lang="en-US" sz="1800" b="1" dirty="0">
                 <a:solidFill>
                   <a:srgbClr val="3B82F6"/>
                 </a:solidFill>
@@ -5657,7 +5659,7 @@
               </a:rPr>
               <a:t>3</a:t>
             </a:r>
-            <a:endParaRPr lang="en-US" sz="1300" dirty="0"/>
+            <a:endParaRPr lang="en-US" sz="1800" dirty="0"/>
           </a:p>
         </p:txBody>
       </p:sp>
@@ -5669,8 +5671,8 @@
         </p:nvSpPr>
         <p:spPr>
           <a:xfrm>
-            <a:off x="1435608" y="3922776"/>
-            <a:ext cx="4480560" cy="822960"/>
+            <a:off x="1472184" y="4169664"/>
+            <a:ext cx="4443984" cy="960120"/>
           </a:xfrm>
           <a:prstGeom prst="rect">
             <a:avLst/>
@@ -5686,7 +5688,7 @@
               <a:buNone/>
             </a:pPr>
             <a:r>
-              <a:rPr lang="en-US" sz="1450" dirty="0">
+              <a:rPr lang="en-US" sz="2000" dirty="0">
                 <a:solidFill>
                   <a:srgbClr val="CBD5E1"/>
                 </a:solidFill>
@@ -5696,7 +5698,7 @@
               </a:rPr>
               <a:t>Churn as behavioral drift with a memory</a:t>
             </a:r>
-            <a:endParaRPr lang="en-US" sz="1450" dirty="0"/>
+            <a:endParaRPr lang="en-US" sz="2000" dirty="0"/>
           </a:p>
         </p:txBody>
       </p:sp>
@@ -5708,8 +5710,8 @@
         </p:nvSpPr>
         <p:spPr>
           <a:xfrm>
-            <a:off x="6355080" y="2112264"/>
-            <a:ext cx="420624" cy="420624"/>
+            <a:off x="6355080" y="2103120"/>
+            <a:ext cx="457200" cy="457200"/>
           </a:xfrm>
           <a:prstGeom prst="ellipse">
             <a:avLst/>
@@ -5733,8 +5735,8 @@
         </p:nvSpPr>
         <p:spPr>
           <a:xfrm>
-            <a:off x="6355080" y="2112264"/>
-            <a:ext cx="420624" cy="420624"/>
+            <a:off x="6355080" y="2103120"/>
+            <a:ext cx="457200" cy="457200"/>
           </a:xfrm>
           <a:prstGeom prst="rect">
             <a:avLst/>
@@ -5750,7 +5752,7 @@
               <a:buNone/>
             </a:pPr>
             <a:r>
-              <a:rPr lang="en-US" sz="1300" b="1" dirty="0">
+              <a:rPr lang="en-US" sz="1800" b="1" dirty="0">
                 <a:solidFill>
                   <a:srgbClr val="06B6D4"/>
                 </a:solidFill>
@@ -5760,7 +5762,7 @@
               </a:rPr>
               <a:t>4</a:t>
             </a:r>
-            <a:endParaRPr lang="en-US" sz="1300" dirty="0"/>
+            <a:endParaRPr lang="en-US" sz="1800" dirty="0"/>
           </a:p>
         </p:txBody>
       </p:sp>
@@ -5772,8 +5774,8 @@
         </p:nvSpPr>
         <p:spPr>
           <a:xfrm>
-            <a:off x="6922008" y="2057400"/>
-            <a:ext cx="4480560" cy="822960"/>
+            <a:off x="6958584" y="2011680"/>
+            <a:ext cx="4443984" cy="960120"/>
           </a:xfrm>
           <a:prstGeom prst="rect">
             <a:avLst/>
@@ -5789,7 +5791,7 @@
               <a:buNone/>
             </a:pPr>
             <a:r>
-              <a:rPr lang="en-US" sz="1450" dirty="0">
+              <a:rPr lang="en-US" sz="2000" dirty="0">
                 <a:solidFill>
                   <a:srgbClr val="CBD5E1"/>
                 </a:solidFill>
@@ -5799,7 +5801,7 @@
               </a:rPr>
               <a:t>Feature adoption: launch curves versus retention outcomes</a:t>
             </a:r>
-            <a:endParaRPr lang="en-US" sz="1450" dirty="0"/>
+            <a:endParaRPr lang="en-US" sz="2000" dirty="0"/>
           </a:p>
         </p:txBody>
       </p:sp>
@@ -5811,8 +5813,8 @@
         </p:nvSpPr>
         <p:spPr>
           <a:xfrm>
-            <a:off x="6355080" y="3044952"/>
-            <a:ext cx="420624" cy="420624"/>
+            <a:off x="6355080" y="3182112"/>
+            <a:ext cx="457200" cy="457200"/>
           </a:xfrm>
           <a:prstGeom prst="ellipse">
             <a:avLst/>
@@ -5836,8 +5838,8 @@
         </p:nvSpPr>
         <p:spPr>
           <a:xfrm>
-            <a:off x="6355080" y="3044952"/>
-            <a:ext cx="420624" cy="420624"/>
+            <a:off x="6355080" y="3182112"/>
+            <a:ext cx="457200" cy="457200"/>
           </a:xfrm>
           <a:prstGeom prst="rect">
             <a:avLst/>
@@ -5853,7 +5855,7 @@
               <a:buNone/>
             </a:pPr>
             <a:r>
-              <a:rPr lang="en-US" sz="1300" b="1" dirty="0">
+              <a:rPr lang="en-US" sz="1800" b="1" dirty="0">
                 <a:solidFill>
                   <a:srgbClr val="3B82F6"/>
                 </a:solidFill>
@@ -5863,7 +5865,7 @@
               </a:rPr>
               <a:t>5</a:t>
             </a:r>
-            <a:endParaRPr lang="en-US" sz="1300" dirty="0"/>
+            <a:endParaRPr lang="en-US" sz="1800" dirty="0"/>
           </a:p>
         </p:txBody>
       </p:sp>
@@ -5875,8 +5877,8 @@
         </p:nvSpPr>
         <p:spPr>
           <a:xfrm>
-            <a:off x="6922008" y="2990088"/>
-            <a:ext cx="4480560" cy="822960"/>
+            <a:off x="6958584" y="3090672"/>
+            <a:ext cx="4443984" cy="960120"/>
           </a:xfrm>
           <a:prstGeom prst="rect">
             <a:avLst/>
@@ -5892,7 +5894,7 @@
               <a:buNone/>
             </a:pPr>
             <a:r>
-              <a:rPr lang="en-US" sz="1450" dirty="0">
+              <a:rPr lang="en-US" sz="2000" dirty="0">
                 <a:solidFill>
                   <a:srgbClr val="CBD5E1"/>
                 </a:solidFill>
@@ -5902,7 +5904,7 @@
               </a:rPr>
               <a:t>Dashboards and recommendations that mirror the organization</a:t>
             </a:r>
-            <a:endParaRPr lang="en-US" sz="1450" dirty="0"/>
+            <a:endParaRPr lang="en-US" sz="2000" dirty="0"/>
           </a:p>
         </p:txBody>
       </p:sp>
@@ -5914,8 +5916,8 @@
         </p:nvSpPr>
         <p:spPr>
           <a:xfrm>
-            <a:off x="10698480" y="6382512"/>
-            <a:ext cx="1188720" cy="365760"/>
+            <a:off x="10698480" y="6309360"/>
+            <a:ext cx="1188720" cy="411480"/>
           </a:xfrm>
           <a:prstGeom prst="rect">
             <a:avLst/>
@@ -5931,9 +5933,9 @@
               <a:buNone/>
             </a:pPr>
             <a:r>
-              <a:rPr lang="en-US" sz="1000" dirty="0">
-                <a:solidFill>
-                  <a:srgbClr val="64748B"/>
+              <a:rPr lang="en-US" sz="1800" dirty="0">
+                <a:solidFill>
+                  <a:srgbClr val="8FA3BF"/>
                 </a:solidFill>
                 <a:latin typeface="Consolas" pitchFamily="34" charset="0"/>
                 <a:ea typeface="Consolas" pitchFamily="34" charset="-122"/>
@@ -5941,7 +5943,7 @@
               </a:rPr>
               <a:t>2 / 14</a:t>
             </a:r>
-            <a:endParaRPr lang="en-US" sz="1000" dirty="0"/>
+            <a:endParaRPr lang="en-US" sz="1800" dirty="0"/>
           </a:p>
         </p:txBody>
       </p:sp>
@@ -6025,8 +6027,8 @@
         </p:nvSpPr>
         <p:spPr>
           <a:xfrm>
-            <a:off x="822960" y="502920"/>
-            <a:ext cx="10515600" cy="365760"/>
+            <a:off x="822960" y="457200"/>
+            <a:ext cx="10515600" cy="411480"/>
           </a:xfrm>
           <a:prstGeom prst="rect">
             <a:avLst/>
@@ -6042,7 +6044,7 @@
               <a:buNone/>
             </a:pPr>
             <a:r>
-              <a:rPr lang="en-US" sz="1200" spc="300" kern="0" dirty="0">
+              <a:rPr lang="en-US" sz="1800" spc="300" kern="0" dirty="0">
                 <a:solidFill>
                   <a:srgbClr val="06B6D4"/>
                 </a:solidFill>
@@ -6052,7 +6054,7 @@
               </a:rPr>
               <a:t>THE ENGAGEMENT</a:t>
             </a:r>
-            <a:endParaRPr lang="en-US" sz="1200" dirty="0"/>
+            <a:endParaRPr lang="en-US" sz="1800" dirty="0"/>
           </a:p>
         </p:txBody>
       </p:sp>
@@ -6103,8 +6105,8 @@
         </p:nvSpPr>
         <p:spPr>
           <a:xfrm>
-            <a:off x="868680" y="2011680"/>
-            <a:ext cx="10424160" cy="3566160"/>
+            <a:off x="868680" y="1965960"/>
+            <a:ext cx="10424160" cy="3840480"/>
           </a:xfrm>
           <a:prstGeom prst="rect">
             <a:avLst/>
@@ -6127,7 +6129,7 @@
               <a:buChar char="▸"/>
             </a:pPr>
             <a:r>
-              <a:rPr lang="en-US" sz="1600" dirty="0">
+              <a:rPr lang="en-US" sz="2000" dirty="0">
                 <a:solidFill>
                   <a:srgbClr val="CBD5E1"/>
                 </a:solidFill>
@@ -6137,7 +6139,7 @@
               </a:rPr>
               <a:t>Freelance data analytics engagement with RevoU, Aug 2022 - Sep 2022</a:t>
             </a:r>
-            <a:endParaRPr lang="en-US" sz="1600" dirty="0"/>
+            <a:endParaRPr lang="en-US" sz="2000" dirty="0"/>
           </a:p>
           <a:p>
             <a:pPr marL="342900" indent="-342900">
@@ -6151,7 +6153,7 @@
               <a:buChar char="▸"/>
             </a:pPr>
             <a:r>
-              <a:rPr lang="en-US" sz="1600" dirty="0">
+              <a:rPr lang="en-US" sz="2000" dirty="0">
                 <a:solidFill>
                   <a:srgbClr val="CBD5E1"/>
                 </a:solidFill>
@@ -6161,7 +6163,7 @@
               </a:rPr>
               <a:t>Final project on real e-commerce business data, evaluated by the Tokopedia Analytics team</a:t>
             </a:r>
-            <a:endParaRPr lang="en-US" sz="1600" dirty="0"/>
+            <a:endParaRPr lang="en-US" sz="2000" dirty="0"/>
           </a:p>
           <a:p>
             <a:pPr marL="342900" indent="-342900">
@@ -6175,7 +6177,7 @@
               <a:buChar char="▸"/>
             </a:pPr>
             <a:r>
-              <a:rPr lang="en-US" sz="1600" dirty="0">
+              <a:rPr lang="en-US" sz="2000" dirty="0">
                 <a:solidFill>
                   <a:srgbClr val="CBD5E1"/>
                 </a:solidFill>
@@ -6185,7 +6187,7 @@
               </a:rPr>
               <a:t>Delivered with a positive evaluation from Tokopedia Analytics reviewers</a:t>
             </a:r>
-            <a:endParaRPr lang="en-US" sz="1600" dirty="0"/>
+            <a:endParaRPr lang="en-US" sz="2000" dirty="0"/>
           </a:p>
           <a:p>
             <a:pPr marL="342900" indent="-342900">
@@ -6199,7 +6201,7 @@
               <a:buChar char="▸"/>
             </a:pPr>
             <a:r>
-              <a:rPr lang="en-US" sz="1600" dirty="0">
+              <a:rPr lang="en-US" sz="2000" dirty="0">
                 <a:solidFill>
                   <a:srgbClr val="CBD5E1"/>
                 </a:solidFill>
@@ -6209,7 +6211,7 @@
               </a:rPr>
               <a:t>Toolkit: Python for analysis, SQL for extraction, Tableau for delivery</a:t>
             </a:r>
-            <a:endParaRPr lang="en-US" sz="1600" dirty="0"/>
+            <a:endParaRPr lang="en-US" sz="2000" dirty="0"/>
           </a:p>
           <a:p>
             <a:pPr marL="342900" indent="-342900">
@@ -6223,7 +6225,7 @@
               <a:buChar char="▸"/>
             </a:pPr>
             <a:r>
-              <a:rPr lang="en-US" sz="1600" dirty="0">
+              <a:rPr lang="en-US" sz="2000" dirty="0">
                 <a:solidFill>
                   <a:srgbClr val="CBD5E1"/>
                 </a:solidFill>
@@ -6233,7 +6235,7 @@
               </a:rPr>
               <a:t>Scope: segmentation, churn analysis, feature adoption, and KPI dashboards</a:t>
             </a:r>
-            <a:endParaRPr lang="en-US" sz="1600" dirty="0"/>
+            <a:endParaRPr lang="en-US" sz="2000" dirty="0"/>
           </a:p>
         </p:txBody>
       </p:sp>
@@ -6245,8 +6247,8 @@
         </p:nvSpPr>
         <p:spPr>
           <a:xfrm>
-            <a:off x="10698480" y="6382512"/>
-            <a:ext cx="1188720" cy="365760"/>
+            <a:off x="10698480" y="6309360"/>
+            <a:ext cx="1188720" cy="411480"/>
           </a:xfrm>
           <a:prstGeom prst="rect">
             <a:avLst/>
@@ -6262,9 +6264,9 @@
               <a:buNone/>
             </a:pPr>
             <a:r>
-              <a:rPr lang="en-US" sz="1000" dirty="0">
-                <a:solidFill>
-                  <a:srgbClr val="64748B"/>
+              <a:rPr lang="en-US" sz="1800" dirty="0">
+                <a:solidFill>
+                  <a:srgbClr val="8FA3BF"/>
                 </a:solidFill>
                 <a:latin typeface="Consolas" pitchFamily="34" charset="0"/>
                 <a:ea typeface="Consolas" pitchFamily="34" charset="-122"/>
@@ -6272,7 +6274,7 @@
               </a:rPr>
               <a:t>3 / 14</a:t>
             </a:r>
-            <a:endParaRPr lang="en-US" sz="1000" dirty="0"/>
+            <a:endParaRPr lang="en-US" sz="1800" dirty="0"/>
           </a:p>
         </p:txBody>
       </p:sp>
@@ -6356,8 +6358,8 @@
         </p:nvSpPr>
         <p:spPr>
           <a:xfrm>
-            <a:off x="822960" y="502920"/>
-            <a:ext cx="10515600" cy="365760"/>
+            <a:off x="822960" y="457200"/>
+            <a:ext cx="10515600" cy="411480"/>
           </a:xfrm>
           <a:prstGeom prst="rect">
             <a:avLst/>
@@ -6373,7 +6375,7 @@
               <a:buNone/>
             </a:pPr>
             <a:r>
-              <a:rPr lang="en-US" sz="1200" spc="300" kern="0" dirty="0">
+              <a:rPr lang="en-US" sz="1800" spc="300" kern="0" dirty="0">
                 <a:solidFill>
                   <a:srgbClr val="06B6D4"/>
                 </a:solidFill>
@@ -6383,7 +6385,7 @@
               </a:rPr>
               <a:t>THE BRIEF</a:t>
             </a:r>
-            <a:endParaRPr lang="en-US" sz="1200" dirty="0"/>
+            <a:endParaRPr lang="en-US" sz="1800" dirty="0"/>
           </a:p>
         </p:txBody>
       </p:sp>
@@ -6434,8 +6436,8 @@
         </p:nvSpPr>
         <p:spPr>
           <a:xfrm>
-            <a:off x="822960" y="2194560"/>
-            <a:ext cx="2423160" cy="2697480"/>
+            <a:off x="822960" y="1965960"/>
+            <a:ext cx="2423160" cy="3154680"/>
           </a:xfrm>
           <a:prstGeom prst="roundRect">
             <a:avLst>
@@ -6461,7 +6463,7 @@
         </p:nvSpPr>
         <p:spPr>
           <a:xfrm>
-            <a:off x="960120" y="2514600"/>
+            <a:off x="960120" y="2194560"/>
             <a:ext cx="2148840" cy="914400"/>
           </a:xfrm>
           <a:prstGeom prst="rect">
@@ -6500,8 +6502,8 @@
         </p:nvSpPr>
         <p:spPr>
           <a:xfrm>
-            <a:off x="960120" y="3520440"/>
-            <a:ext cx="2148840" cy="502920"/>
+            <a:off x="960120" y="3200400"/>
+            <a:ext cx="2148840" cy="868680"/>
           </a:xfrm>
           <a:prstGeom prst="rect">
             <a:avLst/>
@@ -6517,7 +6519,7 @@
               <a:buNone/>
             </a:pPr>
             <a:r>
-              <a:rPr lang="en-US" sz="1450" b="1" dirty="0">
+              <a:rPr lang="en-US" sz="1800" b="1" dirty="0">
                 <a:solidFill>
                   <a:srgbClr val="FFFFFF"/>
                 </a:solidFill>
@@ -6527,7 +6529,7 @@
               </a:rPr>
               <a:t>Analytics workstreams</a:t>
             </a:r>
-            <a:endParaRPr lang="en-US" sz="1450" dirty="0"/>
+            <a:endParaRPr lang="en-US" sz="1800" dirty="0"/>
           </a:p>
         </p:txBody>
       </p:sp>
@@ -6539,8 +6541,8 @@
         </p:nvSpPr>
         <p:spPr>
           <a:xfrm>
-            <a:off x="1005840" y="4069080"/>
-            <a:ext cx="2057400" cy="685800"/>
+            <a:off x="1005840" y="4114800"/>
+            <a:ext cx="2057400" cy="914400"/>
           </a:xfrm>
           <a:prstGeom prst="rect">
             <a:avLst/>
@@ -6556,7 +6558,7 @@
               <a:buNone/>
             </a:pPr>
             <a:r>
-              <a:rPr lang="en-US" sz="1050" dirty="0">
+              <a:rPr lang="en-US" sz="1800" dirty="0">
                 <a:solidFill>
                   <a:srgbClr val="94A3B8"/>
                 </a:solidFill>
@@ -6566,7 +6568,7 @@
               </a:rPr>
               <a:t>Segmentation, churn, feature adoption, and KPI dashboards on one dataset</a:t>
             </a:r>
-            <a:endParaRPr lang="en-US" sz="1050" dirty="0"/>
+            <a:endParaRPr lang="en-US" sz="1800" dirty="0"/>
           </a:p>
         </p:txBody>
       </p:sp>
@@ -6578,8 +6580,8 @@
         </p:nvSpPr>
         <p:spPr>
           <a:xfrm>
-            <a:off x="3520440" y="2194560"/>
-            <a:ext cx="2423160" cy="2697480"/>
+            <a:off x="3520440" y="1965960"/>
+            <a:ext cx="2423160" cy="3154680"/>
           </a:xfrm>
           <a:prstGeom prst="roundRect">
             <a:avLst>
@@ -6605,7 +6607,7 @@
         </p:nvSpPr>
         <p:spPr>
           <a:xfrm>
-            <a:off x="3657600" y="2514600"/>
+            <a:off x="3657600" y="2194560"/>
             <a:ext cx="2148840" cy="914400"/>
           </a:xfrm>
           <a:prstGeom prst="rect">
@@ -6644,8 +6646,8 @@
         </p:nvSpPr>
         <p:spPr>
           <a:xfrm>
-            <a:off x="3657600" y="3520440"/>
-            <a:ext cx="2148840" cy="502920"/>
+            <a:off x="3657600" y="3200400"/>
+            <a:ext cx="2148840" cy="868680"/>
           </a:xfrm>
           <a:prstGeom prst="rect">
             <a:avLst/>
@@ -6661,7 +6663,7 @@
               <a:buNone/>
             </a:pPr>
             <a:r>
-              <a:rPr lang="en-US" sz="1450" b="1" dirty="0">
+              <a:rPr lang="en-US" sz="1800" b="1" dirty="0">
                 <a:solidFill>
                   <a:srgbClr val="FFFFFF"/>
                 </a:solidFill>
@@ -6671,7 +6673,7 @@
               </a:rPr>
               <a:t>Core tools</a:t>
             </a:r>
-            <a:endParaRPr lang="en-US" sz="1450" dirty="0"/>
+            <a:endParaRPr lang="en-US" sz="1800" dirty="0"/>
           </a:p>
         </p:txBody>
       </p:sp>
@@ -6683,8 +6685,8 @@
         </p:nvSpPr>
         <p:spPr>
           <a:xfrm>
-            <a:off x="3703320" y="4069080"/>
-            <a:ext cx="2057400" cy="685800"/>
+            <a:off x="3703320" y="4114800"/>
+            <a:ext cx="2057400" cy="914400"/>
           </a:xfrm>
           <a:prstGeom prst="rect">
             <a:avLst/>
@@ -6700,7 +6702,7 @@
               <a:buNone/>
             </a:pPr>
             <a:r>
-              <a:rPr lang="en-US" sz="1050" dirty="0">
+              <a:rPr lang="en-US" sz="1800" dirty="0">
                 <a:solidFill>
                   <a:srgbClr val="94A3B8"/>
                 </a:solidFill>
@@ -6710,7 +6712,7 @@
               </a:rPr>
               <a:t>Python, SQL, and Tableau covered the path from extraction to executive views</a:t>
             </a:r>
-            <a:endParaRPr lang="en-US" sz="1050" dirty="0"/>
+            <a:endParaRPr lang="en-US" sz="1800" dirty="0"/>
           </a:p>
         </p:txBody>
       </p:sp>
@@ -6722,8 +6724,8 @@
         </p:nvSpPr>
         <p:spPr>
           <a:xfrm>
-            <a:off x="6217920" y="2194560"/>
-            <a:ext cx="2423160" cy="2697480"/>
+            <a:off x="6217920" y="1965960"/>
+            <a:ext cx="2423160" cy="3154680"/>
           </a:xfrm>
           <a:prstGeom prst="roundRect">
             <a:avLst>
@@ -6749,7 +6751,7 @@
         </p:nvSpPr>
         <p:spPr>
           <a:xfrm>
-            <a:off x="6355080" y="2514600"/>
+            <a:off x="6355080" y="2194560"/>
             <a:ext cx="2148840" cy="914400"/>
           </a:xfrm>
           <a:prstGeom prst="rect">
@@ -6788,8 +6790,8 @@
         </p:nvSpPr>
         <p:spPr>
           <a:xfrm>
-            <a:off x="6355080" y="3520440"/>
-            <a:ext cx="2148840" cy="502920"/>
+            <a:off x="6355080" y="3200400"/>
+            <a:ext cx="2148840" cy="868680"/>
           </a:xfrm>
           <a:prstGeom prst="rect">
             <a:avLst/>
@@ -6805,7 +6807,7 @@
               <a:buNone/>
             </a:pPr>
             <a:r>
-              <a:rPr lang="en-US" sz="1450" b="1" dirty="0">
+              <a:rPr lang="en-US" sz="1800" b="1" dirty="0">
                 <a:solidFill>
                   <a:srgbClr val="FFFFFF"/>
                 </a:solidFill>
@@ -6815,7 +6817,7 @@
               </a:rPr>
               <a:t>Dashboard layers</a:t>
             </a:r>
-            <a:endParaRPr lang="en-US" sz="1450" dirty="0"/>
+            <a:endParaRPr lang="en-US" sz="1800" dirty="0"/>
           </a:p>
         </p:txBody>
       </p:sp>
@@ -6827,8 +6829,8 @@
         </p:nvSpPr>
         <p:spPr>
           <a:xfrm>
-            <a:off x="6400800" y="4069080"/>
-            <a:ext cx="2057400" cy="685800"/>
+            <a:off x="6400800" y="4114800"/>
+            <a:ext cx="2057400" cy="914400"/>
           </a:xfrm>
           <a:prstGeom prst="rect">
             <a:avLst/>
@@ -6844,7 +6846,7 @@
               <a:buNone/>
             </a:pPr>
             <a:r>
-              <a:rPr lang="en-US" sz="1050" dirty="0">
+              <a:rPr lang="en-US" sz="1800" dirty="0">
                 <a:solidFill>
                   <a:srgbClr val="94A3B8"/>
                 </a:solidFill>
@@ -6854,7 +6856,7 @@
               </a:rPr>
               <a:t>Executive, middle, and operational views mirrored how the organization decides</a:t>
             </a:r>
-            <a:endParaRPr lang="en-US" sz="1050" dirty="0"/>
+            <a:endParaRPr lang="en-US" sz="1800" dirty="0"/>
           </a:p>
         </p:txBody>
       </p:sp>
@@ -6866,8 +6868,8 @@
         </p:nvSpPr>
         <p:spPr>
           <a:xfrm>
-            <a:off x="8915400" y="2194560"/>
-            <a:ext cx="2423160" cy="2697480"/>
+            <a:off x="8915400" y="1965960"/>
+            <a:ext cx="2423160" cy="3154680"/>
           </a:xfrm>
           <a:prstGeom prst="roundRect">
             <a:avLst>
@@ -6893,7 +6895,7 @@
         </p:nvSpPr>
         <p:spPr>
           <a:xfrm>
-            <a:off x="9052560" y="2514600"/>
+            <a:off x="9052560" y="2194560"/>
             <a:ext cx="2148840" cy="914400"/>
           </a:xfrm>
           <a:prstGeom prst="rect">
@@ -6932,8 +6934,8 @@
         </p:nvSpPr>
         <p:spPr>
           <a:xfrm>
-            <a:off x="9052560" y="3520440"/>
-            <a:ext cx="2148840" cy="502920"/>
+            <a:off x="9052560" y="3200400"/>
+            <a:ext cx="2148840" cy="868680"/>
           </a:xfrm>
           <a:prstGeom prst="rect">
             <a:avLst/>
@@ -6949,7 +6951,7 @@
               <a:buNone/>
             </a:pPr>
             <a:r>
-              <a:rPr lang="en-US" sz="1450" b="1" dirty="0">
+              <a:rPr lang="en-US" sz="1800" b="1" dirty="0">
                 <a:solidFill>
                   <a:srgbClr val="FFFFFF"/>
                 </a:solidFill>
@@ -6959,7 +6961,7 @@
               </a:rPr>
               <a:t>Segments actionable</a:t>
             </a:r>
-            <a:endParaRPr lang="en-US" sz="1450" dirty="0"/>
+            <a:endParaRPr lang="en-US" sz="1800" dirty="0"/>
           </a:p>
         </p:txBody>
       </p:sp>
@@ -6971,8 +6973,8 @@
         </p:nvSpPr>
         <p:spPr>
           <a:xfrm>
-            <a:off x="9098280" y="4069080"/>
-            <a:ext cx="2057400" cy="685800"/>
+            <a:off x="9098280" y="4114800"/>
+            <a:ext cx="2057400" cy="914400"/>
           </a:xfrm>
           <a:prstGeom prst="rect">
             <a:avLst/>
@@ -6988,7 +6990,7 @@
               <a:buNone/>
             </a:pPr>
             <a:r>
-              <a:rPr lang="en-US" sz="1050" dirty="0">
+              <a:rPr lang="en-US" sz="1800" dirty="0">
                 <a:solidFill>
                   <a:srgbClr val="94A3B8"/>
                 </a:solidFill>
@@ -6998,7 +7000,7 @@
               </a:rPr>
               <a:t>Every segment carried a behavior story and a recommended action</a:t>
             </a:r>
-            <a:endParaRPr lang="en-US" sz="1050" dirty="0"/>
+            <a:endParaRPr lang="en-US" sz="1800" dirty="0"/>
           </a:p>
         </p:txBody>
       </p:sp>
@@ -7010,7 +7012,7 @@
         </p:nvSpPr>
         <p:spPr>
           <a:xfrm>
-            <a:off x="822960" y="5413248"/>
+            <a:off x="822960" y="5321808"/>
             <a:ext cx="10515600" cy="0"/>
           </a:xfrm>
           <a:prstGeom prst="line">
@@ -7033,8 +7035,8 @@
         </p:nvSpPr>
         <p:spPr>
           <a:xfrm>
-            <a:off x="822960" y="5504688"/>
-            <a:ext cx="10424160" cy="411480"/>
+            <a:off x="822960" y="5394960"/>
+            <a:ext cx="10424160" cy="502920"/>
           </a:xfrm>
           <a:prstGeom prst="rect">
             <a:avLst/>
@@ -7050,7 +7052,7 @@
               <a:buNone/>
             </a:pPr>
             <a:r>
-              <a:rPr lang="en-US" sz="1300" i="1" dirty="0">
+              <a:rPr lang="en-US" sz="1800" i="1" dirty="0">
                 <a:solidFill>
                   <a:srgbClr val="06B6D4"/>
                 </a:solidFill>
@@ -7060,7 +7062,7 @@
               </a:rPr>
               <a:t>→  The bar every deliverable had to clear: it must change a decision.</a:t>
             </a:r>
-            <a:endParaRPr lang="en-US" sz="1300" dirty="0"/>
+            <a:endParaRPr lang="en-US" sz="1800" dirty="0"/>
           </a:p>
         </p:txBody>
       </p:sp>
@@ -7072,8 +7074,8 @@
         </p:nvSpPr>
         <p:spPr>
           <a:xfrm>
-            <a:off x="10698480" y="6382512"/>
-            <a:ext cx="1188720" cy="365760"/>
+            <a:off x="10698480" y="6309360"/>
+            <a:ext cx="1188720" cy="411480"/>
           </a:xfrm>
           <a:prstGeom prst="rect">
             <a:avLst/>
@@ -7089,9 +7091,9 @@
               <a:buNone/>
             </a:pPr>
             <a:r>
-              <a:rPr lang="en-US" sz="1000" dirty="0">
-                <a:solidFill>
-                  <a:srgbClr val="64748B"/>
+              <a:rPr lang="en-US" sz="1800" dirty="0">
+                <a:solidFill>
+                  <a:srgbClr val="8FA3BF"/>
                 </a:solidFill>
                 <a:latin typeface="Consolas" pitchFamily="34" charset="0"/>
                 <a:ea typeface="Consolas" pitchFamily="34" charset="-122"/>
@@ -7099,7 +7101,7 @@
               </a:rPr>
               <a:t>4 / 14</a:t>
             </a:r>
-            <a:endParaRPr lang="en-US" sz="1000" dirty="0"/>
+            <a:endParaRPr lang="en-US" sz="1800" dirty="0"/>
           </a:p>
         </p:txBody>
       </p:sp>
@@ -7183,8 +7185,8 @@
         </p:nvSpPr>
         <p:spPr>
           <a:xfrm>
-            <a:off x="822960" y="502920"/>
-            <a:ext cx="10515600" cy="365760"/>
+            <a:off x="822960" y="457200"/>
+            <a:ext cx="10515600" cy="411480"/>
           </a:xfrm>
           <a:prstGeom prst="rect">
             <a:avLst/>
@@ -7200,7 +7202,7 @@
               <a:buNone/>
             </a:pPr>
             <a:r>
-              <a:rPr lang="en-US" sz="1200" spc="300" kern="0" dirty="0">
+              <a:rPr lang="en-US" sz="1800" spc="300" kern="0" dirty="0">
                 <a:solidFill>
                   <a:srgbClr val="06B6D4"/>
                 </a:solidFill>
@@ -7210,7 +7212,7 @@
               </a:rPr>
               <a:t>ANALYTICS PIPELINE</a:t>
             </a:r>
-            <a:endParaRPr lang="en-US" sz="1200" dirty="0"/>
+            <a:endParaRPr lang="en-US" sz="1800" dirty="0"/>
           </a:p>
         </p:txBody>
       </p:sp>
@@ -7261,8 +7263,8 @@
         </p:nvSpPr>
         <p:spPr>
           <a:xfrm>
-            <a:off x="774040" y="2514600"/>
-            <a:ext cx="1938528" cy="2103120"/>
+            <a:off x="774040" y="2331720"/>
+            <a:ext cx="1938528" cy="2697480"/>
           </a:xfrm>
           <a:prstGeom prst="roundRect">
             <a:avLst>
@@ -7288,8 +7290,8 @@
         </p:nvSpPr>
         <p:spPr>
           <a:xfrm>
-            <a:off x="902056" y="2633472"/>
-            <a:ext cx="1682496" cy="310896"/>
+            <a:off x="902056" y="2450592"/>
+            <a:ext cx="1682496" cy="365760"/>
           </a:xfrm>
           <a:prstGeom prst="rect">
             <a:avLst/>
@@ -7305,7 +7307,7 @@
               <a:buNone/>
             </a:pPr>
             <a:r>
-              <a:rPr lang="en-US" sz="1100" b="1" dirty="0">
+              <a:rPr lang="en-US" sz="1800" b="1" dirty="0">
                 <a:solidFill>
                   <a:srgbClr val="3B82F6"/>
                 </a:solidFill>
@@ -7315,7 +7317,7 @@
               </a:rPr>
               <a:t>01</a:t>
             </a:r>
-            <a:endParaRPr lang="en-US" sz="1100" dirty="0"/>
+            <a:endParaRPr lang="en-US" sz="1800" dirty="0"/>
           </a:p>
         </p:txBody>
       </p:sp>
@@ -7327,8 +7329,8 @@
         </p:nvSpPr>
         <p:spPr>
           <a:xfrm>
-            <a:off x="902056" y="2962656"/>
-            <a:ext cx="1682496" cy="566928"/>
+            <a:off x="902056" y="2834640"/>
+            <a:ext cx="1682496" cy="713232"/>
           </a:xfrm>
           <a:prstGeom prst="rect">
             <a:avLst/>
@@ -7344,7 +7346,7 @@
               <a:buNone/>
             </a:pPr>
             <a:r>
-              <a:rPr lang="en-US" sz="1350" b="1" dirty="0">
+              <a:rPr lang="en-US" sz="1800" b="1" dirty="0">
                 <a:solidFill>
                   <a:srgbClr val="FFFFFF"/>
                 </a:solidFill>
@@ -7354,7 +7356,7 @@
               </a:rPr>
               <a:t>SQL extraction</a:t>
             </a:r>
-            <a:endParaRPr lang="en-US" sz="1350" dirty="0"/>
+            <a:endParaRPr lang="en-US" sz="1800" dirty="0"/>
           </a:p>
         </p:txBody>
       </p:sp>
@@ -7366,8 +7368,8 @@
         </p:nvSpPr>
         <p:spPr>
           <a:xfrm>
-            <a:off x="902056" y="3566160"/>
-            <a:ext cx="1682496" cy="960120"/>
+            <a:off x="902056" y="3584448"/>
+            <a:ext cx="1682496" cy="1371600"/>
           </a:xfrm>
           <a:prstGeom prst="rect">
             <a:avLst/>
@@ -7383,7 +7385,7 @@
               <a:buNone/>
             </a:pPr>
             <a:r>
-              <a:rPr lang="en-US" sz="980" dirty="0">
+              <a:rPr lang="en-US" sz="1800" dirty="0">
                 <a:solidFill>
                   <a:srgbClr val="CBD5E1"/>
                 </a:solidFill>
@@ -7393,7 +7395,7 @@
               </a:rPr>
               <a:t>Pulled customer, order, and session data from the e-commerce database.</a:t>
             </a:r>
-            <a:endParaRPr lang="en-US" sz="980" dirty="0"/>
+            <a:endParaRPr lang="en-US" sz="1800" dirty="0"/>
           </a:p>
         </p:txBody>
       </p:sp>
@@ -7405,7 +7407,7 @@
         </p:nvSpPr>
         <p:spPr>
           <a:xfrm>
-            <a:off x="2726284" y="3419856"/>
+            <a:off x="2726284" y="3566160"/>
             <a:ext cx="210312" cy="274320"/>
           </a:xfrm>
           <a:prstGeom prst="rightArrow">
@@ -7425,8 +7427,8 @@
         </p:nvSpPr>
         <p:spPr>
           <a:xfrm>
-            <a:off x="2950312" y="2514600"/>
-            <a:ext cx="1938528" cy="2103120"/>
+            <a:off x="2950312" y="2331720"/>
+            <a:ext cx="1938528" cy="2697480"/>
           </a:xfrm>
           <a:prstGeom prst="roundRect">
             <a:avLst>
@@ -7452,8 +7454,8 @@
         </p:nvSpPr>
         <p:spPr>
           <a:xfrm>
-            <a:off x="3078328" y="2633472"/>
-            <a:ext cx="1682496" cy="310896"/>
+            <a:off x="3078328" y="2450592"/>
+            <a:ext cx="1682496" cy="365760"/>
           </a:xfrm>
           <a:prstGeom prst="rect">
             <a:avLst/>
@@ -7469,7 +7471,7 @@
               <a:buNone/>
             </a:pPr>
             <a:r>
-              <a:rPr lang="en-US" sz="1100" b="1" dirty="0">
+              <a:rPr lang="en-US" sz="1800" b="1" dirty="0">
                 <a:solidFill>
                   <a:srgbClr val="06B6D4"/>
                 </a:solidFill>
@@ -7479,7 +7481,7 @@
               </a:rPr>
               <a:t>02</a:t>
             </a:r>
-            <a:endParaRPr lang="en-US" sz="1100" dirty="0"/>
+            <a:endParaRPr lang="en-US" sz="1800" dirty="0"/>
           </a:p>
         </p:txBody>
       </p:sp>
@@ -7491,8 +7493,8 @@
         </p:nvSpPr>
         <p:spPr>
           <a:xfrm>
-            <a:off x="3078328" y="2962656"/>
-            <a:ext cx="1682496" cy="566928"/>
+            <a:off x="3078328" y="2834640"/>
+            <a:ext cx="1682496" cy="713232"/>
           </a:xfrm>
           <a:prstGeom prst="rect">
             <a:avLst/>
@@ -7508,7 +7510,7 @@
               <a:buNone/>
             </a:pPr>
             <a:r>
-              <a:rPr lang="en-US" sz="1350" b="1" dirty="0">
+              <a:rPr lang="en-US" sz="1800" b="1" dirty="0">
                 <a:solidFill>
                   <a:srgbClr val="FFFFFF"/>
                 </a:solidFill>
@@ -7518,7 +7520,7 @@
               </a:rPr>
               <a:t>Python analysis</a:t>
             </a:r>
-            <a:endParaRPr lang="en-US" sz="1350" dirty="0"/>
+            <a:endParaRPr lang="en-US" sz="1800" dirty="0"/>
           </a:p>
         </p:txBody>
       </p:sp>
@@ -7530,8 +7532,8 @@
         </p:nvSpPr>
         <p:spPr>
           <a:xfrm>
-            <a:off x="3078328" y="3566160"/>
-            <a:ext cx="1682496" cy="960120"/>
+            <a:off x="3078328" y="3584448"/>
+            <a:ext cx="1682496" cy="1371600"/>
           </a:xfrm>
           <a:prstGeom prst="rect">
             <a:avLst/>
@@ -7547,7 +7549,7 @@
               <a:buNone/>
             </a:pPr>
             <a:r>
-              <a:rPr lang="en-US" sz="980" dirty="0">
+              <a:rPr lang="en-US" sz="1800" dirty="0">
                 <a:solidFill>
                   <a:srgbClr val="CBD5E1"/>
                 </a:solidFill>
@@ -7557,7 +7559,7 @@
               </a:rPr>
               <a:t>Modeled segments, churn signals, and adoption curves on the extracted data.</a:t>
             </a:r>
-            <a:endParaRPr lang="en-US" sz="980" dirty="0"/>
+            <a:endParaRPr lang="en-US" sz="1800" dirty="0"/>
           </a:p>
         </p:txBody>
       </p:sp>
@@ -7569,7 +7571,7 @@
         </p:nvSpPr>
         <p:spPr>
           <a:xfrm>
-            <a:off x="4902556" y="3419856"/>
+            <a:off x="4902556" y="3566160"/>
             <a:ext cx="210312" cy="274320"/>
           </a:xfrm>
           <a:prstGeom prst="rightArrow">
@@ -7589,8 +7591,8 @@
         </p:nvSpPr>
         <p:spPr>
           <a:xfrm>
-            <a:off x="5126584" y="2514600"/>
-            <a:ext cx="1938528" cy="2103120"/>
+            <a:off x="5126584" y="2331720"/>
+            <a:ext cx="1938528" cy="2697480"/>
           </a:xfrm>
           <a:prstGeom prst="roundRect">
             <a:avLst>
@@ -7616,8 +7618,8 @@
         </p:nvSpPr>
         <p:spPr>
           <a:xfrm>
-            <a:off x="5254600" y="2633472"/>
-            <a:ext cx="1682496" cy="310896"/>
+            <a:off x="5254600" y="2450592"/>
+            <a:ext cx="1682496" cy="365760"/>
           </a:xfrm>
           <a:prstGeom prst="rect">
             <a:avLst/>
@@ -7633,7 +7635,7 @@
               <a:buNone/>
             </a:pPr>
             <a:r>
-              <a:rPr lang="en-US" sz="1100" b="1" dirty="0">
+              <a:rPr lang="en-US" sz="1800" b="1" dirty="0">
                 <a:solidFill>
                   <a:srgbClr val="3B82F6"/>
                 </a:solidFill>
@@ -7643,7 +7645,7 @@
               </a:rPr>
               <a:t>03</a:t>
             </a:r>
-            <a:endParaRPr lang="en-US" sz="1100" dirty="0"/>
+            <a:endParaRPr lang="en-US" sz="1800" dirty="0"/>
           </a:p>
         </p:txBody>
       </p:sp>
@@ -7655,8 +7657,8 @@
         </p:nvSpPr>
         <p:spPr>
           <a:xfrm>
-            <a:off x="5254600" y="2962656"/>
-            <a:ext cx="1682496" cy="566928"/>
+            <a:off x="5254600" y="2834640"/>
+            <a:ext cx="1682496" cy="713232"/>
           </a:xfrm>
           <a:prstGeom prst="rect">
             <a:avLst/>
@@ -7672,7 +7674,7 @@
               <a:buNone/>
             </a:pPr>
             <a:r>
-              <a:rPr lang="en-US" sz="1350" b="1" dirty="0">
+              <a:rPr lang="en-US" sz="1800" b="1" dirty="0">
                 <a:solidFill>
                   <a:srgbClr val="FFFFFF"/>
                 </a:solidFill>
@@ -7682,7 +7684,7 @@
               </a:rPr>
               <a:t>Behavior stories</a:t>
             </a:r>
-            <a:endParaRPr lang="en-US" sz="1350" dirty="0"/>
+            <a:endParaRPr lang="en-US" sz="1800" dirty="0"/>
           </a:p>
         </p:txBody>
       </p:sp>
@@ -7694,8 +7696,8 @@
         </p:nvSpPr>
         <p:spPr>
           <a:xfrm>
-            <a:off x="5254600" y="3566160"/>
-            <a:ext cx="1682496" cy="960120"/>
+            <a:off x="5254600" y="3584448"/>
+            <a:ext cx="1682496" cy="1371600"/>
           </a:xfrm>
           <a:prstGeom prst="rect">
             <a:avLst/>
@@ -7711,7 +7713,7 @@
               <a:buNone/>
             </a:pPr>
             <a:r>
-              <a:rPr lang="en-US" sz="980" dirty="0">
+              <a:rPr lang="en-US" sz="1800" dirty="0">
                 <a:solidFill>
                   <a:srgbClr val="CBD5E1"/>
                 </a:solidFill>
@@ -7721,7 +7723,7 @@
               </a:rPr>
               <a:t>Anchored every statistical cluster to a reason it behaves that way and what would change it.</a:t>
             </a:r>
-            <a:endParaRPr lang="en-US" sz="980" dirty="0"/>
+            <a:endParaRPr lang="en-US" sz="1800" dirty="0"/>
           </a:p>
         </p:txBody>
       </p:sp>
@@ -7733,7 +7735,7 @@
         </p:nvSpPr>
         <p:spPr>
           <a:xfrm>
-            <a:off x="7078828" y="3419856"/>
+            <a:off x="7078828" y="3566160"/>
             <a:ext cx="210312" cy="274320"/>
           </a:xfrm>
           <a:prstGeom prst="rightArrow">
@@ -7753,8 +7755,8 @@
         </p:nvSpPr>
         <p:spPr>
           <a:xfrm>
-            <a:off x="7302856" y="2514600"/>
-            <a:ext cx="1938528" cy="2103120"/>
+            <a:off x="7302856" y="2331720"/>
+            <a:ext cx="1938528" cy="2697480"/>
           </a:xfrm>
           <a:prstGeom prst="roundRect">
             <a:avLst>
@@ -7780,8 +7782,8 @@
         </p:nvSpPr>
         <p:spPr>
           <a:xfrm>
-            <a:off x="7430872" y="2633472"/>
-            <a:ext cx="1682496" cy="310896"/>
+            <a:off x="7430872" y="2450592"/>
+            <a:ext cx="1682496" cy="365760"/>
           </a:xfrm>
           <a:prstGeom prst="rect">
             <a:avLst/>
@@ -7797,7 +7799,7 @@
               <a:buNone/>
             </a:pPr>
             <a:r>
-              <a:rPr lang="en-US" sz="1100" b="1" dirty="0">
+              <a:rPr lang="en-US" sz="1800" b="1" dirty="0">
                 <a:solidFill>
                   <a:srgbClr val="06B6D4"/>
                 </a:solidFill>
@@ -7807,7 +7809,7 @@
               </a:rPr>
               <a:t>04</a:t>
             </a:r>
-            <a:endParaRPr lang="en-US" sz="1100" dirty="0"/>
+            <a:endParaRPr lang="en-US" sz="1800" dirty="0"/>
           </a:p>
         </p:txBody>
       </p:sp>
@@ -7819,8 +7821,8 @@
         </p:nvSpPr>
         <p:spPr>
           <a:xfrm>
-            <a:off x="7430872" y="2962656"/>
-            <a:ext cx="1682496" cy="566928"/>
+            <a:off x="7430872" y="2834640"/>
+            <a:ext cx="1682496" cy="713232"/>
           </a:xfrm>
           <a:prstGeom prst="rect">
             <a:avLst/>
@@ -7836,7 +7838,7 @@
               <a:buNone/>
             </a:pPr>
             <a:r>
-              <a:rPr lang="en-US" sz="1350" b="1" dirty="0">
+              <a:rPr lang="en-US" sz="1800" b="1" dirty="0">
                 <a:solidFill>
                   <a:srgbClr val="FFFFFF"/>
                 </a:solidFill>
@@ -7846,7 +7848,7 @@
               </a:rPr>
               <a:t>Tableau dashboards</a:t>
             </a:r>
-            <a:endParaRPr lang="en-US" sz="1350" dirty="0"/>
+            <a:endParaRPr lang="en-US" sz="1800" dirty="0"/>
           </a:p>
         </p:txBody>
       </p:sp>
@@ -7858,8 +7860,8 @@
         </p:nvSpPr>
         <p:spPr>
           <a:xfrm>
-            <a:off x="7430872" y="3566160"/>
-            <a:ext cx="1682496" cy="960120"/>
+            <a:off x="7430872" y="3584448"/>
+            <a:ext cx="1682496" cy="1371600"/>
           </a:xfrm>
           <a:prstGeom prst="rect">
             <a:avLst/>
@@ -7875,7 +7877,7 @@
               <a:buNone/>
             </a:pPr>
             <a:r>
-              <a:rPr lang="en-US" sz="980" dirty="0">
+              <a:rPr lang="en-US" sz="1800" dirty="0">
                 <a:solidFill>
                   <a:srgbClr val="CBD5E1"/>
                 </a:solidFill>
@@ -7885,7 +7887,7 @@
               </a:rPr>
               <a:t>Built executive, diagnostic, and operational views on the same shared metrics.</a:t>
             </a:r>
-            <a:endParaRPr lang="en-US" sz="980" dirty="0"/>
+            <a:endParaRPr lang="en-US" sz="1800" dirty="0"/>
           </a:p>
         </p:txBody>
       </p:sp>
@@ -7897,7 +7899,7 @@
         </p:nvSpPr>
         <p:spPr>
           <a:xfrm>
-            <a:off x="9255100" y="3419856"/>
+            <a:off x="9255100" y="3566160"/>
             <a:ext cx="210312" cy="274320"/>
           </a:xfrm>
           <a:prstGeom prst="rightArrow">
@@ -7917,8 +7919,8 @@
         </p:nvSpPr>
         <p:spPr>
           <a:xfrm>
-            <a:off x="9479128" y="2514600"/>
-            <a:ext cx="1938528" cy="2103120"/>
+            <a:off x="9479128" y="2331720"/>
+            <a:ext cx="1938528" cy="2697480"/>
           </a:xfrm>
           <a:prstGeom prst="roundRect">
             <a:avLst>
@@ -7944,8 +7946,8 @@
         </p:nvSpPr>
         <p:spPr>
           <a:xfrm>
-            <a:off x="9607144" y="2633472"/>
-            <a:ext cx="1682496" cy="310896"/>
+            <a:off x="9607144" y="2450592"/>
+            <a:ext cx="1682496" cy="365760"/>
           </a:xfrm>
           <a:prstGeom prst="rect">
             <a:avLst/>
@@ -7961,7 +7963,7 @@
               <a:buNone/>
             </a:pPr>
             <a:r>
-              <a:rPr lang="en-US" sz="1100" b="1" dirty="0">
+              <a:rPr lang="en-US" sz="1800" b="1" dirty="0">
                 <a:solidFill>
                   <a:srgbClr val="3B82F6"/>
                 </a:solidFill>
@@ -7971,7 +7973,7 @@
               </a:rPr>
               <a:t>05</a:t>
             </a:r>
-            <a:endParaRPr lang="en-US" sz="1100" dirty="0"/>
+            <a:endParaRPr lang="en-US" sz="1800" dirty="0"/>
           </a:p>
         </p:txBody>
       </p:sp>
@@ -7983,8 +7985,8 @@
         </p:nvSpPr>
         <p:spPr>
           <a:xfrm>
-            <a:off x="9607144" y="2962656"/>
-            <a:ext cx="1682496" cy="566928"/>
+            <a:off x="9607144" y="2834640"/>
+            <a:ext cx="1682496" cy="713232"/>
           </a:xfrm>
           <a:prstGeom prst="rect">
             <a:avLst/>
@@ -8000,7 +8002,7 @@
               <a:buNone/>
             </a:pPr>
             <a:r>
-              <a:rPr lang="en-US" sz="1350" b="1" dirty="0">
+              <a:rPr lang="en-US" sz="1800" b="1" dirty="0">
                 <a:solidFill>
                   <a:srgbClr val="FFFFFF"/>
                 </a:solidFill>
@@ -8010,7 +8012,7 @@
               </a:rPr>
               <a:t>Recommendations</a:t>
             </a:r>
-            <a:endParaRPr lang="en-US" sz="1350" dirty="0"/>
+            <a:endParaRPr lang="en-US" sz="1800" dirty="0"/>
           </a:p>
         </p:txBody>
       </p:sp>
@@ -8022,8 +8024,8 @@
         </p:nvSpPr>
         <p:spPr>
           <a:xfrm>
-            <a:off x="9607144" y="3566160"/>
-            <a:ext cx="1682496" cy="960120"/>
+            <a:off x="9607144" y="3584448"/>
+            <a:ext cx="1682496" cy="1371600"/>
           </a:xfrm>
           <a:prstGeom prst="rect">
             <a:avLst/>
@@ -8039,7 +8041,7 @@
               <a:buNone/>
             </a:pPr>
             <a:r>
-              <a:rPr lang="en-US" sz="980" dirty="0">
+              <a:rPr lang="en-US" sz="1800" dirty="0">
                 <a:solidFill>
                   <a:srgbClr val="CBD5E1"/>
                 </a:solidFill>
@@ -8049,7 +8051,7 @@
               </a:rPr>
               <a:t>Closed every analysis with a written action, because insight without action is trivia.</a:t>
             </a:r>
-            <a:endParaRPr lang="en-US" sz="980" dirty="0"/>
+            <a:endParaRPr lang="en-US" sz="1800" dirty="0"/>
           </a:p>
         </p:txBody>
       </p:sp>
@@ -8084,8 +8086,8 @@
         </p:nvSpPr>
         <p:spPr>
           <a:xfrm>
-            <a:off x="822960" y="6053328"/>
-            <a:ext cx="9692640" cy="457200"/>
+            <a:off x="822960" y="6035040"/>
+            <a:ext cx="10424160" cy="566928"/>
           </a:xfrm>
           <a:prstGeom prst="rect">
             <a:avLst/>
@@ -8101,9 +8103,9 @@
               <a:buNone/>
             </a:pPr>
             <a:r>
-              <a:rPr lang="en-US" sz="1150" dirty="0">
-                <a:solidFill>
-                  <a:srgbClr val="64748B"/>
+              <a:rPr lang="en-US" sz="1800" dirty="0">
+                <a:solidFill>
+                  <a:srgbClr val="8FA3BF"/>
                 </a:solidFill>
                 <a:latin typeface="Segoe UI" pitchFamily="34" charset="0"/>
                 <a:ea typeface="Segoe UI" pitchFamily="34" charset="-122"/>
@@ -8111,7 +8113,7 @@
               </a:rPr>
               <a:t>The user of analytics is a decision, not a dataset.</a:t>
             </a:r>
-            <a:endParaRPr lang="en-US" sz="1150" dirty="0"/>
+            <a:endParaRPr lang="en-US" sz="1800" dirty="0"/>
           </a:p>
         </p:txBody>
       </p:sp>
@@ -8123,8 +8125,8 @@
         </p:nvSpPr>
         <p:spPr>
           <a:xfrm>
-            <a:off x="10698480" y="6382512"/>
-            <a:ext cx="1188720" cy="365760"/>
+            <a:off x="10698480" y="6309360"/>
+            <a:ext cx="1188720" cy="411480"/>
           </a:xfrm>
           <a:prstGeom prst="rect">
             <a:avLst/>
@@ -8140,9 +8142,9 @@
               <a:buNone/>
             </a:pPr>
             <a:r>
-              <a:rPr lang="en-US" sz="1000" dirty="0">
-                <a:solidFill>
-                  <a:srgbClr val="64748B"/>
+              <a:rPr lang="en-US" sz="1800" dirty="0">
+                <a:solidFill>
+                  <a:srgbClr val="8FA3BF"/>
                 </a:solidFill>
                 <a:latin typeface="Consolas" pitchFamily="34" charset="0"/>
                 <a:ea typeface="Consolas" pitchFamily="34" charset="-122"/>
@@ -8150,7 +8152,7 @@
               </a:rPr>
               <a:t>5 / 14</a:t>
             </a:r>
-            <a:endParaRPr lang="en-US" sz="1000" dirty="0"/>
+            <a:endParaRPr lang="en-US" sz="1800" dirty="0"/>
           </a:p>
         </p:txBody>
       </p:sp>
@@ -8234,8 +8236,8 @@
         </p:nvSpPr>
         <p:spPr>
           <a:xfrm>
-            <a:off x="822960" y="502920"/>
-            <a:ext cx="10515600" cy="365760"/>
+            <a:off x="822960" y="457200"/>
+            <a:ext cx="10515600" cy="411480"/>
           </a:xfrm>
           <a:prstGeom prst="rect">
             <a:avLst/>
@@ -8251,7 +8253,7 @@
               <a:buNone/>
             </a:pPr>
             <a:r>
-              <a:rPr lang="en-US" sz="1200" spc="300" kern="0" dirty="0">
+              <a:rPr lang="en-US" sz="1800" spc="300" kern="0" dirty="0">
                 <a:solidFill>
                   <a:srgbClr val="06B6D4"/>
                 </a:solidFill>
@@ -8261,7 +8263,7 @@
               </a:rPr>
               <a:t>DASHBOARD ARCHITECTURE</a:t>
             </a:r>
-            <a:endParaRPr lang="en-US" sz="1200" dirty="0"/>
+            <a:endParaRPr lang="en-US" sz="1800" dirty="0"/>
           </a:p>
         </p:txBody>
       </p:sp>
@@ -8319,7 +8321,7 @@
           </p:nvPr>
         </p:nvGraphicFramePr>
         <p:xfrm>
-          <a:off x="822960" y="2011680"/>
+          <a:off x="822960" y="1828800"/>
           <a:ext cx="10515600" cy="914400"/>
         </p:xfrm>
         <a:graphic>
@@ -8331,7 +8333,7 @@
                 <a:gridCol w="3505200"/>
                 <a:gridCol w="3505200"/>
               </a:tblGrid>
-              <a:tr h="402336">
+              <a:tr h="457200">
                 <a:tc>
                   <a:txBody>
                     <a:bodyPr/>
@@ -8341,7 +8343,7 @@
                         <a:buNone/>
                       </a:pPr>
                       <a:r>
-                        <a:rPr lang="en-US" sz="1150" b="1" dirty="0">
+                        <a:rPr lang="en-US" sz="1800" b="1" dirty="0">
                           <a:solidFill>
                             <a:srgbClr val="FFFFFF"/>
                           </a:solidFill>
@@ -8351,14 +8353,14 @@
                         </a:rPr>
                         <a:t>View</a:t>
                       </a:r>
-                      <a:endParaRPr lang="en-US" sz="1150" dirty="0">
+                      <a:endParaRPr lang="en-US" sz="1800" dirty="0">
                         <a:latin typeface="Segoe UI" charset="0"/>
                         <a:ea typeface="Segoe UI" charset="0"/>
                         <a:cs typeface="Segoe UI" charset="0"/>
                       </a:endParaRPr>
                     </a:p>
                   </a:txBody>
-                  <a:tcPr marL="64008" marR="64008" marT="64008" marB="64008" anchor="ctr">
+                  <a:tcPr marL="36576" marR="36576" marT="36576" marB="36576" anchor="ctr">
                     <a:lnL w="6350" cap="flat" cmpd="sng" algn="ctr">
                       <a:solidFill>
                         <a:srgbClr val="24365A"/>
@@ -8409,7 +8411,7 @@
                         <a:buNone/>
                       </a:pPr>
                       <a:r>
-                        <a:rPr lang="en-US" sz="1150" b="1" dirty="0">
+                        <a:rPr lang="en-US" sz="1800" b="1" dirty="0">
                           <a:solidFill>
                             <a:srgbClr val="FFFFFF"/>
                           </a:solidFill>
@@ -8419,14 +8421,14 @@
                         </a:rPr>
                         <a:t>Audience</a:t>
                       </a:r>
-                      <a:endParaRPr lang="en-US" sz="1150" dirty="0">
+                      <a:endParaRPr lang="en-US" sz="1800" dirty="0">
                         <a:latin typeface="Segoe UI" charset="0"/>
                         <a:ea typeface="Segoe UI" charset="0"/>
                         <a:cs typeface="Segoe UI" charset="0"/>
                       </a:endParaRPr>
                     </a:p>
                   </a:txBody>
-                  <a:tcPr marL="64008" marR="64008" marT="64008" marB="64008" anchor="ctr">
+                  <a:tcPr marL="36576" marR="36576" marT="36576" marB="36576" anchor="ctr">
                     <a:lnL w="6350" cap="flat" cmpd="sng" algn="ctr">
                       <a:solidFill>
                         <a:srgbClr val="24365A"/>
@@ -8477,7 +8479,7 @@
                         <a:buNone/>
                       </a:pPr>
                       <a:r>
-                        <a:rPr lang="en-US" sz="1150" b="1" dirty="0">
+                        <a:rPr lang="en-US" sz="1800" b="1" dirty="0">
                           <a:solidFill>
                             <a:srgbClr val="FFFFFF"/>
                           </a:solidFill>
@@ -8487,14 +8489,14 @@
                         </a:rPr>
                         <a:t>What it answers</a:t>
                       </a:r>
-                      <a:endParaRPr lang="en-US" sz="1150" dirty="0">
+                      <a:endParaRPr lang="en-US" sz="1800" dirty="0">
                         <a:latin typeface="Segoe UI" charset="0"/>
                         <a:ea typeface="Segoe UI" charset="0"/>
                         <a:cs typeface="Segoe UI" charset="0"/>
                       </a:endParaRPr>
                     </a:p>
                   </a:txBody>
-                  <a:tcPr marL="64008" marR="64008" marT="64008" marB="64008" anchor="ctr">
+                  <a:tcPr marL="36576" marR="36576" marT="36576" marB="36576" anchor="ctr">
                     <a:lnL w="6350" cap="flat" cmpd="sng" algn="ctr">
                       <a:solidFill>
                         <a:srgbClr val="24365A"/>
@@ -8537,7 +8539,7 @@
                   </a:tcPr>
                 </a:tc>
               </a:tr>
-              <a:tr h="402336">
+              <a:tr h="457200">
                 <a:tc>
                   <a:txBody>
                     <a:bodyPr/>
@@ -8547,7 +8549,7 @@
                         <a:buNone/>
                       </a:pPr>
                       <a:r>
-                        <a:rPr lang="en-US" sz="1080" dirty="0">
+                        <a:rPr lang="en-US" sz="1800" dirty="0">
                           <a:solidFill>
                             <a:srgbClr val="CBD5E1"/>
                           </a:solidFill>
@@ -8557,14 +8559,14 @@
                         </a:rPr>
                         <a:t>Executive</a:t>
                       </a:r>
-                      <a:endParaRPr lang="en-US" sz="1080" dirty="0">
+                      <a:endParaRPr lang="en-US" sz="1800" dirty="0">
                         <a:latin typeface="Segoe UI" charset="0"/>
                         <a:ea typeface="Segoe UI" charset="0"/>
                         <a:cs typeface="Segoe UI" charset="0"/>
                       </a:endParaRPr>
                     </a:p>
                   </a:txBody>
-                  <a:tcPr marL="64008" marR="64008" marT="64008" marB="64008" anchor="ctr">
+                  <a:tcPr marL="36576" marR="36576" marT="36576" marB="36576" anchor="ctr">
                     <a:lnL w="6350" cap="flat" cmpd="sng" algn="ctr">
                       <a:solidFill>
                         <a:srgbClr val="24365A"/>
@@ -8615,7 +8617,7 @@
                         <a:buNone/>
                       </a:pPr>
                       <a:r>
-                        <a:rPr lang="en-US" sz="1080" dirty="0">
+                        <a:rPr lang="en-US" sz="1800" dirty="0">
                           <a:solidFill>
                             <a:srgbClr val="CBD5E1"/>
                           </a:solidFill>
@@ -8625,14 +8627,14 @@
                         </a:rPr>
                         <a:t>Leadership</a:t>
                       </a:r>
-                      <a:endParaRPr lang="en-US" sz="1080" dirty="0">
+                      <a:endParaRPr lang="en-US" sz="1800" dirty="0">
                         <a:latin typeface="Segoe UI" charset="0"/>
                         <a:ea typeface="Segoe UI" charset="0"/>
                         <a:cs typeface="Segoe UI" charset="0"/>
                       </a:endParaRPr>
                     </a:p>
                   </a:txBody>
-                  <a:tcPr marL="64008" marR="64008" marT="64008" marB="64008" anchor="ctr">
+                  <a:tcPr marL="36576" marR="36576" marT="36576" marB="36576" anchor="ctr">
                     <a:lnL w="6350" cap="flat" cmpd="sng" algn="ctr">
                       <a:solidFill>
                         <a:srgbClr val="24365A"/>
@@ -8683,7 +8685,7 @@
                         <a:buNone/>
                       </a:pPr>
                       <a:r>
-                        <a:rPr lang="en-US" sz="1080" dirty="0">
+                        <a:rPr lang="en-US" sz="1800" dirty="0">
                           <a:solidFill>
                             <a:srgbClr val="CBD5E1"/>
                           </a:solidFill>
@@ -8693,14 +8695,14 @@
                         </a:rPr>
                         <a:t>A handful of KPIs with thresholds and trends - is the business healthy?</a:t>
                       </a:r>
-                      <a:endParaRPr lang="en-US" sz="1080" dirty="0">
+                      <a:endParaRPr lang="en-US" sz="1800" dirty="0">
                         <a:latin typeface="Segoe UI" charset="0"/>
                         <a:ea typeface="Segoe UI" charset="0"/>
                         <a:cs typeface="Segoe UI" charset="0"/>
                       </a:endParaRPr>
                     </a:p>
                   </a:txBody>
-                  <a:tcPr marL="64008" marR="64008" marT="64008" marB="64008" anchor="ctr">
+                  <a:tcPr marL="36576" marR="36576" marT="36576" marB="36576" anchor="ctr">
                     <a:lnL w="6350" cap="flat" cmpd="sng" algn="ctr">
                       <a:solidFill>
                         <a:srgbClr val="24365A"/>
@@ -8743,7 +8745,7 @@
                   </a:tcPr>
                 </a:tc>
               </a:tr>
-              <a:tr h="402336">
+              <a:tr h="457200">
                 <a:tc>
                   <a:txBody>
                     <a:bodyPr/>
@@ -8753,7 +8755,7 @@
                         <a:buNone/>
                       </a:pPr>
                       <a:r>
-                        <a:rPr lang="en-US" sz="1080" dirty="0">
+                        <a:rPr lang="en-US" sz="1800" dirty="0">
                           <a:solidFill>
                             <a:srgbClr val="CBD5E1"/>
                           </a:solidFill>
@@ -8763,14 +8765,14 @@
                         </a:rPr>
                         <a:t>Middle</a:t>
                       </a:r>
-                      <a:endParaRPr lang="en-US" sz="1080" dirty="0">
+                      <a:endParaRPr lang="en-US" sz="1800" dirty="0">
                         <a:latin typeface="Segoe UI" charset="0"/>
                         <a:ea typeface="Segoe UI" charset="0"/>
                         <a:cs typeface="Segoe UI" charset="0"/>
                       </a:endParaRPr>
                     </a:p>
                   </a:txBody>
-                  <a:tcPr marL="64008" marR="64008" marT="64008" marB="64008" anchor="ctr">
+                  <a:tcPr marL="36576" marR="36576" marT="36576" marB="36576" anchor="ctr">
                     <a:lnL w="6350" cap="flat" cmpd="sng" algn="ctr">
                       <a:solidFill>
                         <a:srgbClr val="24365A"/>
@@ -8821,7 +8823,7 @@
                         <a:buNone/>
                       </a:pPr>
                       <a:r>
-                        <a:rPr lang="en-US" sz="1080" dirty="0">
+                        <a:rPr lang="en-US" sz="1800" dirty="0">
                           <a:solidFill>
                             <a:srgbClr val="CBD5E1"/>
                           </a:solidFill>
@@ -8831,14 +8833,14 @@
                         </a:rPr>
                         <a:t>Analysts and managers</a:t>
                       </a:r>
-                      <a:endParaRPr lang="en-US" sz="1080" dirty="0">
+                      <a:endParaRPr lang="en-US" sz="1800" dirty="0">
                         <a:latin typeface="Segoe UI" charset="0"/>
                         <a:ea typeface="Segoe UI" charset="0"/>
                         <a:cs typeface="Segoe UI" charset="0"/>
                       </a:endParaRPr>
                     </a:p>
                   </a:txBody>
-                  <a:tcPr marL="64008" marR="64008" marT="64008" marB="64008" anchor="ctr">
+                  <a:tcPr marL="36576" marR="36576" marT="36576" marB="36576" anchor="ctr">
                     <a:lnL w="6350" cap="flat" cmpd="sng" algn="ctr">
                       <a:solidFill>
                         <a:srgbClr val="24365A"/>
@@ -8889,7 +8891,7 @@
                         <a:buNone/>
                       </a:pPr>
                       <a:r>
-                        <a:rPr lang="en-US" sz="1080" dirty="0">
+                        <a:rPr lang="en-US" sz="1800" dirty="0">
                           <a:solidFill>
                             <a:srgbClr val="CBD5E1"/>
                           </a:solidFill>
@@ -8899,14 +8901,14 @@
                         </a:rPr>
                         <a:t>The same metrics sliced for diagnosis - which segment moved, and why?</a:t>
                       </a:r>
-                      <a:endParaRPr lang="en-US" sz="1080" dirty="0">
+                      <a:endParaRPr lang="en-US" sz="1800" dirty="0">
                         <a:latin typeface="Segoe UI" charset="0"/>
                         <a:ea typeface="Segoe UI" charset="0"/>
                         <a:cs typeface="Segoe UI" charset="0"/>
                       </a:endParaRPr>
                     </a:p>
                   </a:txBody>
-                  <a:tcPr marL="64008" marR="64008" marT="64008" marB="64008" anchor="ctr">
+                  <a:tcPr marL="36576" marR="36576" marT="36576" marB="36576" anchor="ctr">
                     <a:lnL w="6350" cap="flat" cmpd="sng" algn="ctr">
                       <a:solidFill>
                         <a:srgbClr val="24365A"/>
@@ -8949,7 +8951,7 @@
                   </a:tcPr>
                 </a:tc>
               </a:tr>
-              <a:tr h="402336">
+              <a:tr h="457200">
                 <a:tc>
                   <a:txBody>
                     <a:bodyPr/>
@@ -8959,7 +8961,7 @@
                         <a:buNone/>
                       </a:pPr>
                       <a:r>
-                        <a:rPr lang="en-US" sz="1080" dirty="0">
+                        <a:rPr lang="en-US" sz="1800" dirty="0">
                           <a:solidFill>
                             <a:srgbClr val="CBD5E1"/>
                           </a:solidFill>
@@ -8969,14 +8971,14 @@
                         </a:rPr>
                         <a:t>Operational</a:t>
                       </a:r>
-                      <a:endParaRPr lang="en-US" sz="1080" dirty="0">
+                      <a:endParaRPr lang="en-US" sz="1800" dirty="0">
                         <a:latin typeface="Segoe UI" charset="0"/>
                         <a:ea typeface="Segoe UI" charset="0"/>
                         <a:cs typeface="Segoe UI" charset="0"/>
                       </a:endParaRPr>
                     </a:p>
                   </a:txBody>
-                  <a:tcPr marL="64008" marR="64008" marT="64008" marB="64008" anchor="ctr">
+                  <a:tcPr marL="36576" marR="36576" marT="36576" marB="36576" anchor="ctr">
                     <a:lnL w="6350" cap="flat" cmpd="sng" algn="ctr">
                       <a:solidFill>
                         <a:srgbClr val="24365A"/>
@@ -9027,7 +9029,7 @@
                         <a:buNone/>
                       </a:pPr>
                       <a:r>
-                        <a:rPr lang="en-US" sz="1080" dirty="0">
+                        <a:rPr lang="en-US" sz="1800" dirty="0">
                           <a:solidFill>
                             <a:srgbClr val="CBD5E1"/>
                           </a:solidFill>
@@ -9037,14 +9039,14 @@
                         </a:rPr>
                         <a:t>Frontline teams</a:t>
                       </a:r>
-                      <a:endParaRPr lang="en-US" sz="1080" dirty="0">
+                      <a:endParaRPr lang="en-US" sz="1800" dirty="0">
                         <a:latin typeface="Segoe UI" charset="0"/>
                         <a:ea typeface="Segoe UI" charset="0"/>
                         <a:cs typeface="Segoe UI" charset="0"/>
                       </a:endParaRPr>
                     </a:p>
                   </a:txBody>
-                  <a:tcPr marL="64008" marR="64008" marT="64008" marB="64008" anchor="ctr">
+                  <a:tcPr marL="36576" marR="36576" marT="36576" marB="36576" anchor="ctr">
                     <a:lnL w="6350" cap="flat" cmpd="sng" algn="ctr">
                       <a:solidFill>
                         <a:srgbClr val="24365A"/>
@@ -9095,7 +9097,7 @@
                         <a:buNone/>
                       </a:pPr>
                       <a:r>
-                        <a:rPr lang="en-US" sz="1080" dirty="0">
+                        <a:rPr lang="en-US" sz="1800" dirty="0">
                           <a:solidFill>
                             <a:srgbClr val="CBD5E1"/>
                           </a:solidFill>
@@ -9105,14 +9107,14 @@
                         </a:rPr>
                         <a:t>Daily granularity for the fixers - what do we act on today?</a:t>
                       </a:r>
-                      <a:endParaRPr lang="en-US" sz="1080" dirty="0">
+                      <a:endParaRPr lang="en-US" sz="1800" dirty="0">
                         <a:latin typeface="Segoe UI" charset="0"/>
                         <a:ea typeface="Segoe UI" charset="0"/>
                         <a:cs typeface="Segoe UI" charset="0"/>
                       </a:endParaRPr>
                     </a:p>
                   </a:txBody>
-                  <a:tcPr marL="64008" marR="64008" marT="64008" marB="64008" anchor="ctr">
+                  <a:tcPr marL="36576" marR="36576" marT="36576" marB="36576" anchor="ctr">
                     <a:lnL w="6350" cap="flat" cmpd="sng" algn="ctr">
                       <a:solidFill>
                         <a:srgbClr val="24365A"/>
@@ -9155,7 +9157,7 @@
                   </a:tcPr>
                 </a:tc>
               </a:tr>
-              <a:tr h="402336">
+              <a:tr h="457200">
                 <a:tc>
                   <a:txBody>
                     <a:bodyPr/>
@@ -9165,7 +9167,7 @@
                         <a:buNone/>
                       </a:pPr>
                       <a:r>
-                        <a:rPr lang="en-US" sz="1080" dirty="0">
+                        <a:rPr lang="en-US" sz="1800" dirty="0">
                           <a:solidFill>
                             <a:srgbClr val="CBD5E1"/>
                           </a:solidFill>
@@ -9175,14 +9177,14 @@
                         </a:rPr>
                         <a:t>Recommendations</a:t>
                       </a:r>
-                      <a:endParaRPr lang="en-US" sz="1080" dirty="0">
+                      <a:endParaRPr lang="en-US" sz="1800" dirty="0">
                         <a:latin typeface="Segoe UI" charset="0"/>
                         <a:ea typeface="Segoe UI" charset="0"/>
                         <a:cs typeface="Segoe UI" charset="0"/>
                       </a:endParaRPr>
                     </a:p>
                   </a:txBody>
-                  <a:tcPr marL="64008" marR="64008" marT="64008" marB="64008" anchor="ctr">
+                  <a:tcPr marL="36576" marR="36576" marT="36576" marB="36576" anchor="ctr">
                     <a:lnL w="6350" cap="flat" cmpd="sng" algn="ctr">
                       <a:solidFill>
                         <a:srgbClr val="24365A"/>
@@ -9233,7 +9235,7 @@
                         <a:buNone/>
                       </a:pPr>
                       <a:r>
-                        <a:rPr lang="en-US" sz="1080" dirty="0">
+                        <a:rPr lang="en-US" sz="1800" dirty="0">
                           <a:solidFill>
                             <a:srgbClr val="CBD5E1"/>
                           </a:solidFill>
@@ -9243,14 +9245,14 @@
                         </a:rPr>
                         <a:t>Every reader</a:t>
                       </a:r>
-                      <a:endParaRPr lang="en-US" sz="1080" dirty="0">
+                      <a:endParaRPr lang="en-US" sz="1800" dirty="0">
                         <a:latin typeface="Segoe UI" charset="0"/>
                         <a:ea typeface="Segoe UI" charset="0"/>
                         <a:cs typeface="Segoe UI" charset="0"/>
                       </a:endParaRPr>
                     </a:p>
                   </a:txBody>
-                  <a:tcPr marL="64008" marR="64008" marT="64008" marB="64008" anchor="ctr">
+                  <a:tcPr marL="36576" marR="36576" marT="36576" marB="36576" anchor="ctr">
                     <a:lnL w="6350" cap="flat" cmpd="sng" algn="ctr">
                       <a:solidFill>
                         <a:srgbClr val="24365A"/>
@@ -9301,7 +9303,7 @@
                         <a:buNone/>
                       </a:pPr>
                       <a:r>
-                        <a:rPr lang="en-US" sz="1080" dirty="0">
+                        <a:rPr lang="en-US" sz="1800" dirty="0">
                           <a:solidFill>
                             <a:srgbClr val="CBD5E1"/>
                           </a:solidFill>
@@ -9311,14 +9313,14 @@
                         </a:rPr>
                         <a:t>The written next action attached to every finding</a:t>
                       </a:r>
-                      <a:endParaRPr lang="en-US" sz="1080" dirty="0">
+                      <a:endParaRPr lang="en-US" sz="1800" dirty="0">
                         <a:latin typeface="Segoe UI" charset="0"/>
                         <a:ea typeface="Segoe UI" charset="0"/>
                         <a:cs typeface="Segoe UI" charset="0"/>
                       </a:endParaRPr>
                     </a:p>
                   </a:txBody>
-                  <a:tcPr marL="64008" marR="64008" marT="64008" marB="64008" anchor="ctr">
+                  <a:tcPr marL="36576" marR="36576" marT="36576" marB="36576" anchor="ctr">
                     <a:lnL w="6350" cap="flat" cmpd="sng" algn="ctr">
                       <a:solidFill>
                         <a:srgbClr val="24365A"/>
@@ -9396,8 +9398,8 @@
         </p:nvSpPr>
         <p:spPr>
           <a:xfrm>
-            <a:off x="822960" y="6053328"/>
-            <a:ext cx="9692640" cy="457200"/>
+            <a:off x="822960" y="6035040"/>
+            <a:ext cx="10424160" cy="566928"/>
           </a:xfrm>
           <a:prstGeom prst="rect">
             <a:avLst/>
@@ -9413,9 +9415,9 @@
               <a:buNone/>
             </a:pPr>
             <a:r>
-              <a:rPr lang="en-US" sz="1150" dirty="0">
-                <a:solidFill>
-                  <a:srgbClr val="64748B"/>
+              <a:rPr lang="en-US" sz="1800" dirty="0">
+                <a:solidFill>
+                  <a:srgbClr val="8FA3BF"/>
                 </a:solidFill>
                 <a:latin typeface="Segoe UI" pitchFamily="34" charset="0"/>
                 <a:ea typeface="Segoe UI" pitchFamily="34" charset="-122"/>
@@ -9423,7 +9425,7 @@
               </a:rPr>
               <a:t>One metric set, three decision speeds - no view invented its own numbers.</a:t>
             </a:r>
-            <a:endParaRPr lang="en-US" sz="1150" dirty="0"/>
+            <a:endParaRPr lang="en-US" sz="1800" dirty="0"/>
           </a:p>
         </p:txBody>
       </p:sp>
@@ -9435,8 +9437,8 @@
         </p:nvSpPr>
         <p:spPr>
           <a:xfrm>
-            <a:off x="10698480" y="6382512"/>
-            <a:ext cx="1188720" cy="365760"/>
+            <a:off x="10698480" y="6309360"/>
+            <a:ext cx="1188720" cy="411480"/>
           </a:xfrm>
           <a:prstGeom prst="rect">
             <a:avLst/>
@@ -9452,9 +9454,9 @@
               <a:buNone/>
             </a:pPr>
             <a:r>
-              <a:rPr lang="en-US" sz="1000" dirty="0">
-                <a:solidFill>
-                  <a:srgbClr val="64748B"/>
+              <a:rPr lang="en-US" sz="1800" dirty="0">
+                <a:solidFill>
+                  <a:srgbClr val="8FA3BF"/>
                 </a:solidFill>
                 <a:latin typeface="Consolas" pitchFamily="34" charset="0"/>
                 <a:ea typeface="Consolas" pitchFamily="34" charset="-122"/>
@@ -9462,7 +9464,7 @@
               </a:rPr>
               <a:t>6 / 14</a:t>
             </a:r>
-            <a:endParaRPr lang="en-US" sz="1000" dirty="0"/>
+            <a:endParaRPr lang="en-US" sz="1800" dirty="0"/>
           </a:p>
         </p:txBody>
       </p:sp>
@@ -9546,8 +9548,8 @@
         </p:nvSpPr>
         <p:spPr>
           <a:xfrm>
-            <a:off x="822960" y="502920"/>
-            <a:ext cx="10515600" cy="365760"/>
+            <a:off x="822960" y="457200"/>
+            <a:ext cx="10515600" cy="411480"/>
           </a:xfrm>
           <a:prstGeom prst="rect">
             <a:avLst/>
@@ -9563,7 +9565,7 @@
               <a:buNone/>
             </a:pPr>
             <a:r>
-              <a:rPr lang="en-US" sz="1200" spc="300" kern="0" dirty="0">
+              <a:rPr lang="en-US" sz="1800" spc="300" kern="0" dirty="0">
                 <a:solidFill>
                   <a:srgbClr val="06B6D4"/>
                 </a:solidFill>
@@ -9573,7 +9575,7 @@
               </a:rPr>
               <a:t>SEGMENTATION</a:t>
             </a:r>
-            <a:endParaRPr lang="en-US" sz="1200" dirty="0"/>
+            <a:endParaRPr lang="en-US" sz="1800" dirty="0"/>
           </a:p>
         </p:txBody>
       </p:sp>
@@ -9624,8 +9626,8 @@
         </p:nvSpPr>
         <p:spPr>
           <a:xfrm>
-            <a:off x="868680" y="2011680"/>
-            <a:ext cx="10424160" cy="3566160"/>
+            <a:off x="868680" y="1965960"/>
+            <a:ext cx="10424160" cy="3840480"/>
           </a:xfrm>
           <a:prstGeom prst="rect">
             <a:avLst/>
@@ -9648,7 +9650,7 @@
               <a:buChar char="▸"/>
             </a:pPr>
             <a:r>
-              <a:rPr lang="en-US" sz="1600" dirty="0">
+              <a:rPr lang="en-US" sz="2000" dirty="0">
                 <a:solidFill>
                   <a:srgbClr val="CBD5E1"/>
                 </a:solidFill>
@@ -9658,7 +9660,7 @@
               </a:rPr>
               <a:t>Running k-means and calling five clusters insight is where most segmentation stops - this one did not</a:t>
             </a:r>
-            <a:endParaRPr lang="en-US" sz="1600" dirty="0"/>
+            <a:endParaRPr lang="en-US" sz="2000" dirty="0"/>
           </a:p>
           <a:p>
             <a:pPr marL="342900" indent="-342900">
@@ -9672,7 +9674,7 @@
               <a:buChar char="▸"/>
             </a:pPr>
             <a:r>
-              <a:rPr lang="en-US" sz="1600" dirty="0">
+              <a:rPr lang="en-US" sz="2000" dirty="0">
                 <a:solidFill>
                   <a:srgbClr val="CBD5E1"/>
                 </a:solidFill>
@@ -9682,7 +9684,7 @@
               </a:rPr>
               <a:t>Every segment was anchored to a behavior story: why this group acts this way, and what would change it</a:t>
             </a:r>
-            <a:endParaRPr lang="en-US" sz="1600" dirty="0"/>
+            <a:endParaRPr lang="en-US" sz="2000" dirty="0"/>
           </a:p>
           <a:p>
             <a:pPr marL="342900" indent="-342900">
@@ -9696,7 +9698,7 @@
               <a:buChar char="▸"/>
             </a:pPr>
             <a:r>
-              <a:rPr lang="en-US" sz="1600" dirty="0">
+              <a:rPr lang="en-US" sz="2000" dirty="0">
                 <a:solidFill>
                   <a:srgbClr val="CBD5E1"/>
                 </a:solidFill>
@@ -9706,7 +9708,7 @@
               </a:rPr>
               <a:t>The algorithm proposed; the narrative disposed</a:t>
             </a:r>
-            <a:endParaRPr lang="en-US" sz="1600" dirty="0"/>
+            <a:endParaRPr lang="en-US" sz="2000" dirty="0"/>
           </a:p>
           <a:p>
             <a:pPr marL="342900" indent="-342900">
@@ -9720,7 +9722,7 @@
               <a:buChar char="▸"/>
             </a:pPr>
             <a:r>
-              <a:rPr lang="en-US" sz="1600" dirty="0">
+              <a:rPr lang="en-US" sz="2000" dirty="0">
                 <a:solidFill>
                   <a:srgbClr val="CBD5E1"/>
                 </a:solidFill>
@@ -9730,7 +9732,7 @@
               </a:rPr>
               <a:t>If two segments get the same treatment, one of them is decoration</a:t>
             </a:r>
-            <a:endParaRPr lang="en-US" sz="1600" dirty="0"/>
+            <a:endParaRPr lang="en-US" sz="2000" dirty="0"/>
           </a:p>
         </p:txBody>
       </p:sp>
@@ -9742,8 +9744,8 @@
         </p:nvSpPr>
         <p:spPr>
           <a:xfrm>
-            <a:off x="10698480" y="6382512"/>
-            <a:ext cx="1188720" cy="365760"/>
+            <a:off x="10698480" y="6309360"/>
+            <a:ext cx="1188720" cy="411480"/>
           </a:xfrm>
           <a:prstGeom prst="rect">
             <a:avLst/>
@@ -9759,9 +9761,9 @@
               <a:buNone/>
             </a:pPr>
             <a:r>
-              <a:rPr lang="en-US" sz="1000" dirty="0">
-                <a:solidFill>
-                  <a:srgbClr val="64748B"/>
+              <a:rPr lang="en-US" sz="1800" dirty="0">
+                <a:solidFill>
+                  <a:srgbClr val="8FA3BF"/>
                 </a:solidFill>
                 <a:latin typeface="Consolas" pitchFamily="34" charset="0"/>
                 <a:ea typeface="Consolas" pitchFamily="34" charset="-122"/>
@@ -9769,7 +9771,7 @@
               </a:rPr>
               <a:t>7 / 14</a:t>
             </a:r>
-            <a:endParaRPr lang="en-US" sz="1000" dirty="0"/>
+            <a:endParaRPr lang="en-US" sz="1800" dirty="0"/>
           </a:p>
         </p:txBody>
       </p:sp>
@@ -9853,8 +9855,8 @@
         </p:nvSpPr>
         <p:spPr>
           <a:xfrm>
-            <a:off x="822960" y="502920"/>
-            <a:ext cx="10515600" cy="365760"/>
+            <a:off x="822960" y="457200"/>
+            <a:ext cx="10515600" cy="411480"/>
           </a:xfrm>
           <a:prstGeom prst="rect">
             <a:avLst/>
@@ -9870,7 +9872,7 @@
               <a:buNone/>
             </a:pPr>
             <a:r>
-              <a:rPr lang="en-US" sz="1200" spc="300" kern="0" dirty="0">
+              <a:rPr lang="en-US" sz="1800" spc="300" kern="0" dirty="0">
                 <a:solidFill>
                   <a:srgbClr val="06B6D4"/>
                 </a:solidFill>
@@ -9880,7 +9882,7 @@
               </a:rPr>
               <a:t>SEGMENT PROFILE</a:t>
             </a:r>
-            <a:endParaRPr lang="en-US" sz="1200" dirty="0"/>
+            <a:endParaRPr lang="en-US" sz="1800" dirty="0"/>
           </a:p>
         </p:txBody>
       </p:sp>
@@ -9931,7 +9933,7 @@
         </p:nvGraphicFramePr>
         <p:xfrm>
           <a:off x="822960" y="1874520"/>
-          <a:ext cx="10515600" cy="3337560"/>
+          <a:ext cx="10515600" cy="3246120"/>
         </p:xfrm>
         <a:graphic xmlns:a="http://schemas.openxmlformats.org/drawingml/2006/main">
           <a:graphicData uri="http://schemas.openxmlformats.org/drawingml/2006/chart">
@@ -9947,7 +9949,7 @@
         </p:nvSpPr>
         <p:spPr>
           <a:xfrm>
-            <a:off x="822960" y="5413248"/>
+            <a:off x="822960" y="5321808"/>
             <a:ext cx="10515600" cy="0"/>
           </a:xfrm>
           <a:prstGeom prst="line">
@@ -9970,8 +9972,8 @@
         </p:nvSpPr>
         <p:spPr>
           <a:xfrm>
-            <a:off x="822960" y="5504688"/>
-            <a:ext cx="10424160" cy="411480"/>
+            <a:off x="822960" y="5394960"/>
+            <a:ext cx="10424160" cy="502920"/>
           </a:xfrm>
           <a:prstGeom prst="rect">
             <a:avLst/>
@@ -9987,7 +9989,7 @@
               <a:buNone/>
             </a:pPr>
             <a:r>
-              <a:rPr lang="en-US" sz="1300" i="1" dirty="0">
+              <a:rPr lang="en-US" sz="1800" i="1" dirty="0">
                 <a:solidFill>
                   <a:srgbClr val="06B6D4"/>
                 </a:solidFill>
@@ -9997,7 +9999,7 @@
               </a:rPr>
               <a:t>→  A fifth of customers drove nearly half the value, while 13% were already drifting away - four segments, four different plays.</a:t>
             </a:r>
-            <a:endParaRPr lang="en-US" sz="1300" dirty="0"/>
+            <a:endParaRPr lang="en-US" sz="1800" dirty="0"/>
           </a:p>
         </p:txBody>
       </p:sp>
@@ -10032,8 +10034,8 @@
         </p:nvSpPr>
         <p:spPr>
           <a:xfrm>
-            <a:off x="822960" y="6053328"/>
-            <a:ext cx="9692640" cy="457200"/>
+            <a:off x="822960" y="6035040"/>
+            <a:ext cx="10424160" cy="566928"/>
           </a:xfrm>
           <a:prstGeom prst="rect">
             <a:avLst/>
@@ -10049,9 +10051,9 @@
               <a:buNone/>
             </a:pPr>
             <a:r>
-              <a:rPr lang="en-US" sz="1150" dirty="0">
-                <a:solidFill>
-                  <a:srgbClr val="64748B"/>
+              <a:rPr lang="en-US" sz="1800" dirty="0">
+                <a:solidFill>
+                  <a:srgbClr val="8FA3BF"/>
                 </a:solidFill>
                 <a:latin typeface="Segoe UI" pitchFamily="34" charset="0"/>
                 <a:ea typeface="Segoe UI" pitchFamily="34" charset="-122"/>
@@ -10059,7 +10061,7 @@
               </a:rPr>
               <a:t>Illustrative segment profile used to anchor each group to a distinct action.</a:t>
             </a:r>
-            <a:endParaRPr lang="en-US" sz="1150" dirty="0"/>
+            <a:endParaRPr lang="en-US" sz="1800" dirty="0"/>
           </a:p>
         </p:txBody>
       </p:sp>
@@ -10071,8 +10073,8 @@
         </p:nvSpPr>
         <p:spPr>
           <a:xfrm>
-            <a:off x="10698480" y="6382512"/>
-            <a:ext cx="1188720" cy="365760"/>
+            <a:off x="10698480" y="6309360"/>
+            <a:ext cx="1188720" cy="411480"/>
           </a:xfrm>
           <a:prstGeom prst="rect">
             <a:avLst/>
@@ -10088,9 +10090,9 @@
               <a:buNone/>
             </a:pPr>
             <a:r>
-              <a:rPr lang="en-US" sz="1000" dirty="0">
-                <a:solidFill>
-                  <a:srgbClr val="64748B"/>
+              <a:rPr lang="en-US" sz="1800" dirty="0">
+                <a:solidFill>
+                  <a:srgbClr val="8FA3BF"/>
                 </a:solidFill>
                 <a:latin typeface="Consolas" pitchFamily="34" charset="0"/>
                 <a:ea typeface="Consolas" pitchFamily="34" charset="-122"/>
@@ -10098,7 +10100,7 @@
               </a:rPr>
               <a:t>8 / 14</a:t>
             </a:r>
-            <a:endParaRPr lang="en-US" sz="1000" dirty="0"/>
+            <a:endParaRPr lang="en-US" sz="1800" dirty="0"/>
           </a:p>
         </p:txBody>
       </p:sp>
@@ -10182,8 +10184,8 @@
         </p:nvSpPr>
         <p:spPr>
           <a:xfrm>
-            <a:off x="822960" y="502920"/>
-            <a:ext cx="10515600" cy="365760"/>
+            <a:off x="822960" y="457200"/>
+            <a:ext cx="10515600" cy="411480"/>
           </a:xfrm>
           <a:prstGeom prst="rect">
             <a:avLst/>
@@ -10199,7 +10201,7 @@
               <a:buNone/>
             </a:pPr>
             <a:r>
-              <a:rPr lang="en-US" sz="1200" spc="300" kern="0" dirty="0">
+              <a:rPr lang="en-US" sz="1800" spc="300" kern="0" dirty="0">
                 <a:solidFill>
                   <a:srgbClr val="06B6D4"/>
                 </a:solidFill>
@@ -10209,7 +10211,7 @@
               </a:rPr>
               <a:t>CHURN ANALYSIS</a:t>
             </a:r>
-            <a:endParaRPr lang="en-US" sz="1200" dirty="0"/>
+            <a:endParaRPr lang="en-US" sz="1800" dirty="0"/>
           </a:p>
         </p:txBody>
       </p:sp>
@@ -10260,8 +10262,8 @@
         </p:nvSpPr>
         <p:spPr>
           <a:xfrm>
-            <a:off x="868680" y="2011680"/>
-            <a:ext cx="10424160" cy="3566160"/>
+            <a:off x="868680" y="1965960"/>
+            <a:ext cx="10424160" cy="3840480"/>
           </a:xfrm>
           <a:prstGeom prst="rect">
             <a:avLst/>
@@ -10284,7 +10286,7 @@
               <a:buChar char="▸"/>
             </a:pPr>
             <a:r>
-              <a:rPr lang="en-US" sz="1600" dirty="0">
+              <a:rPr lang="en-US" sz="2000" dirty="0">
                 <a:solidFill>
                   <a:srgbClr val="CBD5E1"/>
                 </a:solidFill>
@@ -10294,7 +10296,7 @@
               </a:rPr>
               <a:t>The strongest churn signals were behavioral drift, never demographics</a:t>
             </a:r>
-            <a:endParaRPr lang="en-US" sz="1600" dirty="0"/>
+            <a:endParaRPr lang="en-US" sz="2000" dirty="0"/>
           </a:p>
           <a:p>
             <a:pPr marL="342900" indent="-342900">
@@ -10308,7 +10310,7 @@
               <a:buChar char="▸"/>
             </a:pPr>
             <a:r>
-              <a:rPr lang="en-US" sz="1600" dirty="0">
+              <a:rPr lang="en-US" sz="2000" dirty="0">
                 <a:solidFill>
                   <a:srgbClr val="CBD5E1"/>
                 </a:solidFill>
@@ -10318,7 +10320,7 @@
               </a:rPr>
               <a:t>Declining order frequency, narrowing category usage, and longer gaps between sessions led every signal</a:t>
             </a:r>
-            <a:endParaRPr lang="en-US" sz="1600" dirty="0"/>
+            <a:endParaRPr lang="en-US" sz="2000" dirty="0"/>
           </a:p>
           <a:p>
             <a:pPr marL="342900" indent="-342900">
@@ -10332,7 +10334,7 @@
               <a:buChar char="▸"/>
             </a:pPr>
             <a:r>
-              <a:rPr lang="en-US" sz="1600" dirty="0">
+              <a:rPr lang="en-US" sz="2000" dirty="0">
                 <a:solidFill>
                   <a:srgbClr val="CBD5E1"/>
                 </a:solidFill>
@@ -10342,7 +10344,7 @@
               </a:rPr>
               <a:t>By the time a user is formally churned, the story ended weeks earlier</a:t>
             </a:r>
-            <a:endParaRPr lang="en-US" sz="1600" dirty="0"/>
+            <a:endParaRPr lang="en-US" sz="2000" dirty="0"/>
           </a:p>
           <a:p>
             <a:pPr marL="342900" indent="-342900">
@@ -10356,7 +10358,7 @@
               <a:buChar char="▸"/>
             </a:pPr>
             <a:r>
-              <a:rPr lang="en-US" sz="1600" dirty="0">
+              <a:rPr lang="en-US" sz="2000" dirty="0">
                 <a:solidFill>
                   <a:srgbClr val="CBD5E1"/>
                 </a:solidFill>
@@ -10366,7 +10368,7 @@
               </a:rPr>
               <a:t>The dashboard was designed to show the drift, not the funeral</a:t>
             </a:r>
-            <a:endParaRPr lang="en-US" sz="1600" dirty="0"/>
+            <a:endParaRPr lang="en-US" sz="2000" dirty="0"/>
           </a:p>
         </p:txBody>
       </p:sp>
@@ -10378,8 +10380,8 @@
         </p:nvSpPr>
         <p:spPr>
           <a:xfrm>
-            <a:off x="10698480" y="6382512"/>
-            <a:ext cx="1188720" cy="365760"/>
+            <a:off x="10698480" y="6309360"/>
+            <a:ext cx="1188720" cy="411480"/>
           </a:xfrm>
           <a:prstGeom prst="rect">
             <a:avLst/>
@@ -10395,9 +10397,9 @@
               <a:buNone/>
             </a:pPr>
             <a:r>
-              <a:rPr lang="en-US" sz="1000" dirty="0">
-                <a:solidFill>
-                  <a:srgbClr val="64748B"/>
+              <a:rPr lang="en-US" sz="1800" dirty="0">
+                <a:solidFill>
+                  <a:srgbClr val="8FA3BF"/>
                 </a:solidFill>
                 <a:latin typeface="Consolas" pitchFamily="34" charset="0"/>
                 <a:ea typeface="Consolas" pitchFamily="34" charset="-122"/>
@@ -10405,7 +10407,7 @@
               </a:rPr>
               <a:t>9 / 14</a:t>
             </a:r>
-            <a:endParaRPr lang="en-US" sz="1000" dirty="0"/>
+            <a:endParaRPr lang="en-US" sz="1800" dirty="0"/>
           </a:p>
         </p:txBody>
       </p:sp>

--- a/decks/tokopedia-analytics.pptx
+++ b/decks/tokopedia-analytics.pptx
@@ -9682,7 +9682,7 @@
                 <a:ea typeface="Segoe UI" pitchFamily="34" charset="-122"/>
                 <a:cs typeface="Segoe UI" pitchFamily="34" charset="-120"/>
               </a:rPr>
-              <a:t>Every segment was anchored to a behavior story: why this group acts this way, and what would change it</a:t>
+              <a:t>Each segment anchored to a behavior story: why this group acts this way, and what would change it.</a:t>
             </a:r>
             <a:endParaRPr lang="en-US" sz="2000" dirty="0"/>
           </a:p>
